--- a/docs/ECC-Harness-Guide.de.pptx
+++ b/docs/ECC-Harness-Guide.de.pptx
@@ -3263,7 +3263,7 @@
                 </a:solidFill>
                 <a:latin typeface="Calibri"/>
               </a:rPr>
-              <a:t>Global aktiv in ~/.claude · ECC 2.0.0-rc.1 (core) + RPI-Workflow · RTK-sicher</a:t>
+              <a:t>Global aktiv in ~/.claude · ECC 2.0.0-rc.1 (core, führend) · RTK-sicher</a:t>
             </a:r>
           </a:p>
           <a:p>
@@ -4928,7 +4928,7 @@
                 </a:solidFill>
                 <a:latin typeface="Calibri"/>
               </a:rPr>
-              <a:t>1. In Phasen: Research → /plan (oder /rpi) → /feature-dev+TDD → /code-review → Verify.</a:t>
+              <a:t>1. In Phasen: Research → /plan → /feature-dev+TDD → /code-review → Verify.</a:t>
             </a:r>
           </a:p>
           <a:p>
@@ -5143,7 +5143,7 @@
                 </a:solidFill>
                 <a:latin typeface="Calibri"/>
               </a:rPr>
-              <a:t>BestPractice-Extras — RPI-Workflow, /adopt-project, state/-Pattern, Karpathy-Prinzipien.</a:t>
+              <a:t>BestPractice-Extras — /ecc-onboard (One-Shot-Setup), state/-Pattern, Karpathy-Prinzipien.</a:t>
             </a:r>
           </a:p>
           <a:p>
@@ -5334,7 +5334,7 @@
                 </a:solidFill>
                 <a:latin typeface="Calibri"/>
               </a:rPr>
-              <a:t>Namespace-sicher (rules/ecc, skills/ecc) · RTK-Hook unangetastet · settings.json byte-identisch.</a:t>
+              <a:t>Namespace-sicher (rules/ecc, skills/ecc) · RTK-Hook unangetastet · Installer additiv.</a:t>
             </a:r>
           </a:p>
           <a:p>
@@ -5567,7 +5567,7 @@
                           </a:solidFill>
                           <a:latin typeface="Calibri"/>
                         </a:rPr>
-                        <a:t>EINE Memory-Quelle je Projekt</a:t>
+                        <a:t>primäre Memory-Quelle, auto-injiziert</a:t>
                       </a:r>
                     </a:p>
                   </a:txBody>
@@ -5659,7 +5659,7 @@
                           </a:solidFill>
                           <a:latin typeface="Calibri"/>
                         </a:rPr>
-                        <a:t>context-mode</a:t>
+                        <a:t>codex / superpowers</a:t>
                       </a:r>
                     </a:p>
                   </a:txBody>
@@ -5681,7 +5681,7 @@
                           </a:solidFill>
                           <a:latin typeface="Calibri"/>
                         </a:rPr>
-                        <a:t>—</a:t>
+                        <a:t>diverse Skills</a:t>
                       </a:r>
                     </a:p>
                   </a:txBody>
@@ -5703,7 +5703,7 @@
                           </a:solidFill>
                           <a:latin typeface="Calibri"/>
                         </a:rPr>
-                        <a:t>bleibt dein Recherche-Tool</a:t>
+                        <a:t>eigenständig; bleiben aktiv</a:t>
                       </a:r>
                     </a:p>
                   </a:txBody>
@@ -6587,7 +6587,7 @@
                 </a:solidFill>
                 <a:latin typeface="Consolas"/>
               </a:rPr>
-              <a:t>RESEARCH   →  Explore-Agent / context-mode      →  research.md</a:t>
+              <a:t>RESEARCH   →  Explore-Agent / claude-mem         →  research.md</a:t>
             </a:r>
           </a:p>
           <a:p>
@@ -6786,7 +6786,7 @@
                 </a:solidFill>
                 <a:latin typeface="Calibri"/>
               </a:rPr>
-              <a:t>5 · RPI-Workflow (BestPractice-Extra)</a:t>
+              <a:t>5 · Projekt-Onboarding mit /ecc-onboard</a:t>
             </a:r>
           </a:p>
         </p:txBody>
@@ -6801,7 +6801,7 @@
         </p:nvGraphicFramePr>
         <p:xfrm>
           <a:off x="640080" y="1371600"/>
-          <a:ext cx="10972800" cy="2743200"/>
+          <a:ext cx="10972800" cy="3108960"/>
         </p:xfrm>
         <a:graphic>
           <a:graphicData uri="http://schemas.openxmlformats.org/drawingml/2006/table">
@@ -6810,24 +6810,24 @@
                 <a:tableStyleId>{5C22544A-7EE6-4342-B048-85BDC9FD1C3A}</a:tableStyleId>
               </a:tblPr>
               <a:tblGrid>
-                <a:gridCol w="2926080"/>
-                <a:gridCol w="2743200"/>
-                <a:gridCol w="5303520"/>
+                <a:gridCol w="2011680"/>
+                <a:gridCol w="5120640"/>
+                <a:gridCol w="3840480"/>
               </a:tblGrid>
-              <a:tr h="548640">
-                <a:tc>
-                  <a:txBody>
-                    <a:bodyPr wrap="square"/>
-                    <a:lstStyle/>
-                    <a:p>
-                      <a:r>
-                        <a:rPr sz="1300" b="1">
+              <a:tr h="518160">
+                <a:tc>
+                  <a:txBody>
+                    <a:bodyPr wrap="square"/>
+                    <a:lstStyle/>
+                    <a:p>
+                      <a:r>
+                        <a:rPr sz="1200" b="1">
                           <a:solidFill>
                             <a:srgbClr val="FFFFFF"/>
                           </a:solidFill>
                           <a:latin typeface="Calibri"/>
                         </a:rPr>
-                        <a:t>Command</a:t>
+                        <a:t>Schritt</a:t>
                       </a:r>
                     </a:p>
                   </a:txBody>
@@ -6843,13 +6843,13 @@
                     <a:lstStyle/>
                     <a:p>
                       <a:r>
-                        <a:rPr sz="1300" b="1">
+                        <a:rPr sz="1200" b="1">
                           <a:solidFill>
                             <a:srgbClr val="FFFFFF"/>
                           </a:solidFill>
                           <a:latin typeface="Calibri"/>
                         </a:rPr>
-                        <a:t>Phase</a:t>
+                        <a:t>Was passiert</a:t>
                       </a:r>
                     </a:p>
                   </a:txBody>
@@ -6865,13 +6865,13 @@
                     <a:lstStyle/>
                     <a:p>
                       <a:r>
-                        <a:rPr sz="1300" b="1">
+                        <a:rPr sz="1200" b="1">
                           <a:solidFill>
                             <a:srgbClr val="FFFFFF"/>
                           </a:solidFill>
                           <a:latin typeface="Calibri"/>
                         </a:rPr>
-                        <a:t>Liefert</a:t>
+                        <a:t>Ergebnis</a:t>
                       </a:r>
                     </a:p>
                   </a:txBody>
@@ -6882,20 +6882,20 @@
                   </a:tcPr>
                 </a:tc>
               </a:tr>
-              <a:tr h="548640">
-                <a:tc>
-                  <a:txBody>
-                    <a:bodyPr wrap="square"/>
-                    <a:lstStyle/>
-                    <a:p>
-                      <a:r>
-                        <a:rPr sz="1300">
-                          <a:solidFill>
-                            <a:srgbClr val="1F2937"/>
-                          </a:solidFill>
-                          <a:latin typeface="Calibri"/>
-                        </a:rPr>
-                        <a:t>/rpi:research &lt;f&gt;</a:t>
+              <a:tr h="518160">
+                <a:tc>
+                  <a:txBody>
+                    <a:bodyPr wrap="square"/>
+                    <a:lstStyle/>
+                    <a:p>
+                      <a:r>
+                        <a:rPr sz="1200">
+                          <a:solidFill>
+                            <a:srgbClr val="1F2937"/>
+                          </a:solidFill>
+                          <a:latin typeface="Calibri"/>
+                        </a:rPr>
+                        <a:t>1 · Detect</a:t>
                       </a:r>
                     </a:p>
                   </a:txBody>
@@ -6911,13 +6911,13 @@
                     <a:lstStyle/>
                     <a:p>
                       <a:r>
-                        <a:rPr sz="1300">
-                          <a:solidFill>
-                            <a:srgbClr val="1F2937"/>
-                          </a:solidFill>
-                          <a:latin typeface="Calibri"/>
-                        </a:rPr>
-                        <a:t>Viability-Gate</a:t>
+                        <a:rPr sz="1200">
+                          <a:solidFill>
+                            <a:srgbClr val="1F2937"/>
+                          </a:solidFill>
+                          <a:latin typeface="Calibri"/>
+                        </a:rPr>
+                        <a:t>Stack erkennen (package.json, go.mod …)</a:t>
                       </a:r>
                     </a:p>
                   </a:txBody>
@@ -6933,13 +6933,13 @@
                     <a:lstStyle/>
                     <a:p>
                       <a:r>
-                        <a:rPr sz="1300">
-                          <a:solidFill>
-                            <a:srgbClr val="1F2937"/>
-                          </a:solidFill>
-                          <a:latin typeface="Calibri"/>
-                        </a:rPr>
-                        <a:t>GO/NO-GO mit Begründung</a:t>
+                        <a:rPr sz="1200">
+                          <a:solidFill>
+                            <a:srgbClr val="1F2937"/>
+                          </a:solidFill>
+                          <a:latin typeface="Calibri"/>
+                        </a:rPr>
+                        <a:t>Profil + Sprach-Packs</a:t>
                       </a:r>
                     </a:p>
                   </a:txBody>
@@ -6950,20 +6950,20 @@
                   </a:tcPr>
                 </a:tc>
               </a:tr>
-              <a:tr h="548640">
-                <a:tc>
-                  <a:txBody>
-                    <a:bodyPr wrap="square"/>
-                    <a:lstStyle/>
-                    <a:p>
-                      <a:r>
-                        <a:rPr sz="1300">
-                          <a:solidFill>
-                            <a:srgbClr val="1F2937"/>
-                          </a:solidFill>
-                          <a:latin typeface="Calibri"/>
-                        </a:rPr>
-                        <a:t>/rpi:plan &lt;f&gt;</a:t>
+              <a:tr h="518160">
+                <a:tc>
+                  <a:txBody>
+                    <a:bodyPr wrap="square"/>
+                    <a:lstStyle/>
+                    <a:p>
+                      <a:r>
+                        <a:rPr sz="1200">
+                          <a:solidFill>
+                            <a:srgbClr val="1F2937"/>
+                          </a:solidFill>
+                          <a:latin typeface="Calibri"/>
+                        </a:rPr>
+                        <a:t>2 · Dry-Run</a:t>
                       </a:r>
                     </a:p>
                   </a:txBody>
@@ -6979,13 +6979,13 @@
                     <a:lstStyle/>
                     <a:p>
                       <a:r>
-                        <a:rPr sz="1300">
-                          <a:solidFill>
-                            <a:srgbClr val="1F2937"/>
-                          </a:solidFill>
-                          <a:latin typeface="Calibri"/>
-                        </a:rPr>
-                        <a:t>Planung</a:t>
+                        <a:rPr sz="1200">
+                          <a:solidFill>
+                            <a:srgbClr val="1F2937"/>
+                          </a:solidFill>
+                          <a:latin typeface="Calibri"/>
+                        </a:rPr>
+                        <a:t>install-apply --target claude-project --dry-run</a:t>
                       </a:r>
                     </a:p>
                   </a:txBody>
@@ -7001,13 +7001,13 @@
                     <a:lstStyle/>
                     <a:p>
                       <a:r>
-                        <a:rPr sz="1300">
-                          <a:solidFill>
-                            <a:srgbClr val="1F2937"/>
-                          </a:solidFill>
-                          <a:latin typeface="Calibri"/>
-                        </a:rPr>
-                        <a:t>umfassende Planungs-Doku</a:t>
+                        <a:rPr sz="1200">
+                          <a:solidFill>
+                            <a:srgbClr val="1F2937"/>
+                          </a:solidFill>
+                          <a:latin typeface="Calibri"/>
+                        </a:rPr>
+                        <a:t>Plan ohne Schreiben</a:t>
                       </a:r>
                     </a:p>
                   </a:txBody>
@@ -7018,20 +7018,20 @@
                   </a:tcPr>
                 </a:tc>
               </a:tr>
-              <a:tr h="548640">
-                <a:tc>
-                  <a:txBody>
-                    <a:bodyPr wrap="square"/>
-                    <a:lstStyle/>
-                    <a:p>
-                      <a:r>
-                        <a:rPr sz="1300">
-                          <a:solidFill>
-                            <a:srgbClr val="1F2937"/>
-                          </a:solidFill>
-                          <a:latin typeface="Calibri"/>
-                        </a:rPr>
-                        <a:t>/rpi:implement &lt;f&gt;</a:t>
+              <a:tr h="518160">
+                <a:tc>
+                  <a:txBody>
+                    <a:bodyPr wrap="square"/>
+                    <a:lstStyle/>
+                    <a:p>
+                      <a:r>
+                        <a:rPr sz="1200">
+                          <a:solidFill>
+                            <a:srgbClr val="1F2937"/>
+                          </a:solidFill>
+                          <a:latin typeface="Calibri"/>
+                        </a:rPr>
+                        <a:t>3 · OK</a:t>
                       </a:r>
                     </a:p>
                   </a:txBody>
@@ -7047,13 +7047,13 @@
                     <a:lstStyle/>
                     <a:p>
                       <a:r>
-                        <a:rPr sz="1300">
-                          <a:solidFill>
-                            <a:srgbClr val="1F2937"/>
-                          </a:solidFill>
-                          <a:latin typeface="Calibri"/>
-                        </a:rPr>
-                        <a:t>Umsetzung</a:t>
+                        <a:rPr sz="1200">
+                          <a:solidFill>
+                            <a:srgbClr val="1F2937"/>
+                          </a:solidFill>
+                          <a:latin typeface="Calibri"/>
+                        </a:rPr>
+                        <a:t>1× Bestätigung des Users</a:t>
                       </a:r>
                     </a:p>
                   </a:txBody>
@@ -7069,13 +7069,13 @@
                     <a:lstStyle/>
                     <a:p>
                       <a:r>
-                        <a:rPr sz="1300">
-                          <a:solidFill>
-                            <a:srgbClr val="1F2937"/>
-                          </a:solidFill>
-                          <a:latin typeface="Calibri"/>
-                        </a:rPr>
-                        <a:t>phasiert, mit Validation-Gates</a:t>
+                        <a:rPr sz="1200">
+                          <a:solidFill>
+                            <a:srgbClr val="1F2937"/>
+                          </a:solidFill>
+                          <a:latin typeface="Calibri"/>
+                        </a:rPr>
+                        <a:t>Freigabe</a:t>
                       </a:r>
                     </a:p>
                   </a:txBody>
@@ -7086,20 +7086,20 @@
                   </a:tcPr>
                 </a:tc>
               </a:tr>
-              <a:tr h="548640">
-                <a:tc>
-                  <a:txBody>
-                    <a:bodyPr wrap="square"/>
-                    <a:lstStyle/>
-                    <a:p>
-                      <a:r>
-                        <a:rPr sz="1300">
-                          <a:solidFill>
-                            <a:srgbClr val="1F2937"/>
-                          </a:solidFill>
-                          <a:latin typeface="Calibri"/>
-                        </a:rPr>
-                        <a:t>/adopt-project</a:t>
+              <a:tr h="518160">
+                <a:tc>
+                  <a:txBody>
+                    <a:bodyPr wrap="square"/>
+                    <a:lstStyle/>
+                    <a:p>
+                      <a:r>
+                        <a:rPr sz="1200">
+                          <a:solidFill>
+                            <a:srgbClr val="1F2937"/>
+                          </a:solidFill>
+                          <a:latin typeface="Calibri"/>
+                        </a:rPr>
+                        <a:t>4 · Install</a:t>
                       </a:r>
                     </a:p>
                   </a:txBody>
@@ -7115,13 +7115,13 @@
                     <a:lstStyle/>
                     <a:p>
                       <a:r>
-                        <a:rPr sz="1300">
-                          <a:solidFill>
-                            <a:srgbClr val="1F2937"/>
-                          </a:solidFill>
-                          <a:latin typeface="Calibri"/>
-                        </a:rPr>
-                        <a:t>Onboarding</a:t>
+                        <a:rPr sz="1200">
+                          <a:solidFill>
+                            <a:srgbClr val="1F2937"/>
+                          </a:solidFill>
+                          <a:latin typeface="Calibri"/>
+                        </a:rPr>
+                        <a:t>install-apply --target claude-project</a:t>
                       </a:r>
                     </a:p>
                   </a:txBody>
@@ -7137,19 +7137,87 @@
                     <a:lstStyle/>
                     <a:p>
                       <a:r>
-                        <a:rPr sz="1300">
-                          <a:solidFill>
-                            <a:srgbClr val="1F2937"/>
-                          </a:solidFill>
-                          <a:latin typeface="Calibri"/>
-                        </a:rPr>
-                        <a:t>liest Codebase, füllt state/</a:t>
+                        <a:rPr sz="1200">
+                          <a:solidFill>
+                            <a:srgbClr val="1F2937"/>
+                          </a:solidFill>
+                          <a:latin typeface="Calibri"/>
+                        </a:rPr>
+                        <a:t>.claude/rules/ecc + skills/ecc</a:t>
                       </a:r>
                     </a:p>
                   </a:txBody>
                   <a:tcPr marT="18288" marB="18288">
                     <a:solidFill>
                       <a:srgbClr val="FFFFFF"/>
+                    </a:solidFill>
+                  </a:tcPr>
+                </a:tc>
+              </a:tr>
+              <a:tr h="518160">
+                <a:tc>
+                  <a:txBody>
+                    <a:bodyPr wrap="square"/>
+                    <a:lstStyle/>
+                    <a:p>
+                      <a:r>
+                        <a:rPr sz="1200">
+                          <a:solidFill>
+                            <a:srgbClr val="1F2937"/>
+                          </a:solidFill>
+                          <a:latin typeface="Calibri"/>
+                        </a:rPr>
+                        <a:t>5 · Kontext</a:t>
+                      </a:r>
+                    </a:p>
+                  </a:txBody>
+                  <a:tcPr marT="18288" marB="18288">
+                    <a:solidFill>
+                      <a:srgbClr val="F3F4F6"/>
+                    </a:solidFill>
+                  </a:tcPr>
+                </a:tc>
+                <a:tc>
+                  <a:txBody>
+                    <a:bodyPr wrap="square"/>
+                    <a:lstStyle/>
+                    <a:p>
+                      <a:r>
+                        <a:rPr sz="1200">
+                          <a:solidFill>
+                            <a:srgbClr val="1F2937"/>
+                          </a:solidFill>
+                          <a:latin typeface="Calibri"/>
+                        </a:rPr>
+                        <a:t>Templates mit echten Werten füllen</a:t>
+                      </a:r>
+                    </a:p>
+                  </a:txBody>
+                  <a:tcPr marT="18288" marB="18288">
+                    <a:solidFill>
+                      <a:srgbClr val="F3F4F6"/>
+                    </a:solidFill>
+                  </a:tcPr>
+                </a:tc>
+                <a:tc>
+                  <a:txBody>
+                    <a:bodyPr wrap="square"/>
+                    <a:lstStyle/>
+                    <a:p>
+                      <a:r>
+                        <a:rPr sz="1200">
+                          <a:solidFill>
+                            <a:srgbClr val="1F2937"/>
+                          </a:solidFill>
+                          <a:latin typeface="Calibri"/>
+                        </a:rPr>
+                        <a:t>PROJECT_RULES.md + state/</a:t>
+                      </a:r>
+                    </a:p>
+                  </a:txBody>
+                  <a:tcPr marT="18288" marB="18288">
+                    <a:solidFill>
+                      <a:srgbClr val="F3F4F6"/>
                     </a:solidFill>
                   </a:tcPr>
                 </a:tc>
@@ -7166,7 +7234,7 @@
         </p:nvSpPr>
         <p:spPr>
           <a:xfrm>
-            <a:off x="640080" y="4389120"/>
+            <a:off x="640080" y="4754880"/>
             <a:ext cx="10972800" cy="1463040"/>
           </a:xfrm>
           <a:prstGeom prst="rect">
@@ -7188,7 +7256,7 @@
                 </a:solidFill>
                 <a:latin typeface="Calibri"/>
               </a:rPr>
-              <a:t>Wann RPI? Größere, riskante Features mit nötigem Viability-Gate.</a:t>
+              <a:t>Aus dem Zielprojekt ausführen — Install landet im aktuellen cwd.</a:t>
             </a:r>
           </a:p>
           <a:p>
@@ -7200,7 +7268,7 @@
                 </a:solidFill>
                 <a:latin typeface="Calibri"/>
               </a:rPr>
-              <a:t>Wann /plan? Schneller, normaler Plan-dann-Code-Flow.</a:t>
+              <a:t>Idempotent: erneut ausführen merged, überschreibt nichts blind.</a:t>
             </a:r>
           </a:p>
         </p:txBody>
@@ -7427,7 +7495,7 @@
                           </a:solidFill>
                           <a:latin typeface="Calibri"/>
                         </a:rPr>
-                        <a:t>/plan  oder  /rpi:research → /rpi:plan</a:t>
+                        <a:t>/plan</a:t>
                       </a:r>
                     </a:p>
                   </a:txBody>
@@ -7495,7 +7563,7 @@
                           </a:solidFill>
                           <a:latin typeface="Calibri"/>
                         </a:rPr>
-                        <a:t>/feature-dev  ·  /rpi:implement</a:t>
+                        <a:t>/feature-dev</a:t>
                       </a:r>
                     </a:p>
                   </a:txBody>
@@ -7541,7 +7609,7 @@
                           </a:solidFill>
                           <a:latin typeface="Calibri"/>
                         </a:rPr>
-                        <a:t>Bestehendes Projekt adoptieren</a:t>
+                        <a:t>Projekt ECC-ready machen</a:t>
                       </a:r>
                     </a:p>
                   </a:txBody>
@@ -7563,7 +7631,7 @@
                           </a:solidFill>
                           <a:latin typeface="Calibri"/>
                         </a:rPr>
-                        <a:t>/adopt-project</a:t>
+                        <a:t>/ecc-onboard</a:t>
                       </a:r>
                     </a:p>
                   </a:txBody>
@@ -7585,7 +7653,7 @@
                           </a:solidFill>
                           <a:latin typeface="Calibri"/>
                         </a:rPr>
-                        <a:t>liest Codebase, füllt state/ &amp; Regeln (BP-Extra)</a:t>
+                        <a:t>Stack erkennen → 1× OK → Rules/Skills + PROJECT_RULES.md + state/</a:t>
                       </a:r>
                     </a:p>
                   </a:txBody>
@@ -9318,7 +9386,7 @@
                           </a:solidFill>
                           <a:latin typeface="Calibri"/>
                         </a:rPr>
-                        <a:t>Recherche/Analyse (Sandbox)</a:t>
+                        <a:t>Frühere Arbeit / „schon gelöst?"</a:t>
                       </a:r>
                     </a:p>
                   </a:txBody>
@@ -9340,7 +9408,7 @@
                           </a:solidFill>
                           <a:latin typeface="Calibri"/>
                         </a:rPr>
-                        <a:t>context-mode (ctx_*)</a:t>
+                        <a:t>claude-mem (/mem-search)</a:t>
                       </a:r>
                     </a:p>
                   </a:txBody>
@@ -9362,7 +9430,7 @@
                           </a:solidFill>
                           <a:latin typeface="Calibri"/>
                         </a:rPr>
-                        <a:t>dein bestehendes Tool, bleibt primär</a:t>
+                        <a:t>cross-session Memory, injiziert Kontext automatisch</a:t>
                       </a:r>
                     </a:p>
                   </a:txBody>

--- a/docs/ECC-Harness-Guide.de.pptx
+++ b/docs/ECC-Harness-Guide.de.pptx
@@ -18,6 +18,7 @@
     <p:sldId id="266" r:id="rId17"/>
     <p:sldId id="267" r:id="rId18"/>
     <p:sldId id="268" r:id="rId19"/>
+    <p:sldId id="269" r:id="rId20"/>
   </p:sldIdLst>
   <p:sldSz cx="12191695" cy="6858000" type="screen4x3"/>
   <p:notesSz cx="6858000" cy="9144000"/>
@@ -3371,22 +3372,57 @@
                 </a:solidFill>
                 <a:latin typeface="Calibri"/>
               </a:rPr>
-              <a:t>8 · Token-Ökonomie &amp; Modellstrategie</a:t>
+              <a:t>7 · Wann welcher MCP</a:t>
+            </a:r>
+          </a:p>
+        </p:txBody>
+      </p:sp>
+      <p:sp>
+        <p:nvSpPr>
+          <p:cNvPr id="4" name="TextBox 3"/>
+          <p:cNvSpPr txBox="1"/>
+          <p:nvPr/>
+        </p:nvSpPr>
+        <p:spPr>
+          <a:xfrm>
+            <a:off x="640080" y="1188720"/>
+            <a:ext cx="10972800" cy="548640"/>
+          </a:xfrm>
+          <a:prstGeom prst="rect">
+            <a:avLst/>
+          </a:prstGeom>
+          <a:noFill/>
+        </p:spPr>
+        <p:txBody>
+          <a:bodyPr wrap="square">
+            <a:spAutoFit/>
+          </a:bodyPr>
+          <a:lstStyle/>
+          <a:p>
+            <a:pPr algn="l"/>
+            <a:r>
+              <a:rPr sz="1400" b="1">
+                <a:solidFill>
+                  <a:srgbClr val="F59E0B"/>
+                </a:solidFill>
+                <a:latin typeface="Calibri"/>
+              </a:rPr>
+              <a:t>Faustregel: 20–30 konfiguriert, &lt; 10 aktiv / &lt; 80 Tools. Ungenutztes mit /mcp deaktivieren.</a:t>
             </a:r>
           </a:p>
         </p:txBody>
       </p:sp>
       <p:graphicFrame>
         <p:nvGraphicFramePr>
-          <p:cNvPr id="4" name="Table 3"/>
+          <p:cNvPr id="5" name="Table 4"/>
           <p:cNvGraphicFramePr>
             <a:graphicFrameLocks noGrp="1"/>
           </p:cNvGraphicFramePr>
           <p:nvPr/>
         </p:nvGraphicFramePr>
         <p:xfrm>
-          <a:off x="548640" y="1371600"/>
-          <a:ext cx="11155680" cy="3840480"/>
+          <a:off x="548640" y="1783080"/>
+          <a:ext cx="11155680" cy="4480560"/>
         </p:xfrm>
         <a:graphic>
           <a:graphicData uri="http://schemas.openxmlformats.org/drawingml/2006/table">
@@ -3395,18 +3431,18 @@
                 <a:tableStyleId>{5C22544A-7EE6-4342-B048-85BDC9FD1C3A}</a:tableStyleId>
               </a:tblPr>
               <a:tblGrid>
-                <a:gridCol w="3474720"/>
-                <a:gridCol w="1645920"/>
-                <a:gridCol w="6035040"/>
+                <a:gridCol w="3291840"/>
+                <a:gridCol w="2560320"/>
+                <a:gridCol w="5303520"/>
               </a:tblGrid>
-              <a:tr h="426720">
-                <a:tc>
-                  <a:txBody>
-                    <a:bodyPr wrap="square"/>
-                    <a:lstStyle/>
-                    <a:p>
-                      <a:r>
-                        <a:rPr sz="1200" b="1">
+              <a:tr h="448056">
+                <a:tc>
+                  <a:txBody>
+                    <a:bodyPr wrap="square"/>
+                    <a:lstStyle/>
+                    <a:p>
+                      <a:r>
+                        <a:rPr sz="1100" b="1">
                           <a:solidFill>
                             <a:srgbClr val="FFFFFF"/>
                           </a:solidFill>
@@ -3428,13 +3464,13 @@
                     <a:lstStyle/>
                     <a:p>
                       <a:r>
-                        <a:rPr sz="1200" b="1">
+                        <a:rPr sz="1100" b="1">
                           <a:solidFill>
                             <a:srgbClr val="FFFFFF"/>
                           </a:solidFill>
                           <a:latin typeface="Calibri"/>
                         </a:rPr>
-                        <a:t>Modell</a:t>
+                        <a:t>MCP / Tool</a:t>
                       </a:r>
                     </a:p>
                   </a:txBody>
@@ -3450,13 +3486,13 @@
                     <a:lstStyle/>
                     <a:p>
                       <a:r>
-                        <a:rPr sz="1200" b="1">
+                        <a:rPr sz="1100" b="1">
                           <a:solidFill>
                             <a:srgbClr val="FFFFFF"/>
                           </a:solidFill>
                           <a:latin typeface="Calibri"/>
                         </a:rPr>
-                        <a:t>Warum</a:t>
+                        <a:t>Hinweis</a:t>
                       </a:r>
                     </a:p>
                   </a:txBody>
@@ -3467,20 +3503,20 @@
                   </a:tcPr>
                 </a:tc>
               </a:tr>
-              <a:tr h="426720">
-                <a:tc>
-                  <a:txBody>
-                    <a:bodyPr wrap="square"/>
-                    <a:lstStyle/>
-                    <a:p>
-                      <a:r>
-                        <a:rPr sz="1200">
-                          <a:solidFill>
-                            <a:srgbClr val="1F2937"/>
-                          </a:solidFill>
-                          <a:latin typeface="Calibri"/>
-                        </a:rPr>
-                        <a:t>Exploration / Suche</a:t>
+              <a:tr h="448056">
+                <a:tc>
+                  <a:txBody>
+                    <a:bodyPr wrap="square"/>
+                    <a:lstStyle/>
+                    <a:p>
+                      <a:r>
+                        <a:rPr sz="1100">
+                          <a:solidFill>
+                            <a:srgbClr val="1F2937"/>
+                          </a:solidFill>
+                          <a:latin typeface="Calibri"/>
+                        </a:rPr>
+                        <a:t>Aktuelle Library-/API-Doku</a:t>
                       </a:r>
                     </a:p>
                   </a:txBody>
@@ -3496,13 +3532,13 @@
                     <a:lstStyle/>
                     <a:p>
                       <a:r>
-                        <a:rPr sz="1200">
-                          <a:solidFill>
-                            <a:srgbClr val="1F2937"/>
-                          </a:solidFill>
-                          <a:latin typeface="Calibri"/>
-                        </a:rPr>
-                        <a:t>Haiku</a:t>
+                        <a:rPr sz="1100">
+                          <a:solidFill>
+                            <a:srgbClr val="1F2937"/>
+                          </a:solidFill>
+                          <a:latin typeface="Calibri"/>
+                        </a:rPr>
+                        <a:t>context7</a:t>
                       </a:r>
                     </a:p>
                   </a:txBody>
@@ -3518,13 +3554,13 @@
                     <a:lstStyle/>
                     <a:p>
                       <a:r>
-                        <a:rPr sz="1200">
-                          <a:solidFill>
-                            <a:srgbClr val="1F2937"/>
-                          </a:solidFill>
-                          <a:latin typeface="Calibri"/>
-                        </a:rPr>
-                        <a:t>schnell, billig, reicht zum Finden</a:t>
+                        <a:rPr sz="1100">
+                          <a:solidFill>
+                            <a:srgbClr val="1F2937"/>
+                          </a:solidFill>
+                          <a:latin typeface="Calibri"/>
+                        </a:rPr>
+                        <a:t>React, Prisma, Next.js … statt veraltetem Wissen</a:t>
                       </a:r>
                     </a:p>
                   </a:txBody>
@@ -3535,20 +3571,20 @@
                   </a:tcPr>
                 </a:tc>
               </a:tr>
-              <a:tr h="426720">
-                <a:tc>
-                  <a:txBody>
-                    <a:bodyPr wrap="square"/>
-                    <a:lstStyle/>
-                    <a:p>
-                      <a:r>
-                        <a:rPr sz="1200">
-                          <a:solidFill>
-                            <a:srgbClr val="1F2937"/>
-                          </a:solidFill>
-                          <a:latin typeface="Calibri"/>
-                        </a:rPr>
-                        <a:t>Einfache Einzeldatei-Edits</a:t>
+              <a:tr h="448056">
+                <a:tc>
+                  <a:txBody>
+                    <a:bodyPr wrap="square"/>
+                    <a:lstStyle/>
+                    <a:p>
+                      <a:r>
+                        <a:rPr sz="1100">
+                          <a:solidFill>
+                            <a:srgbClr val="1F2937"/>
+                          </a:solidFill>
+                          <a:latin typeface="Calibri"/>
+                        </a:rPr>
+                        <a:t>Web-Recherche / Discovery</a:t>
                       </a:r>
                     </a:p>
                   </a:txBody>
@@ -3564,13 +3600,13 @@
                     <a:lstStyle/>
                     <a:p>
                       <a:r>
-                        <a:rPr sz="1200">
-                          <a:solidFill>
-                            <a:srgbClr val="1F2937"/>
-                          </a:solidFill>
-                          <a:latin typeface="Calibri"/>
-                        </a:rPr>
-                        <a:t>Haiku</a:t>
+                        <a:rPr sz="1100">
+                          <a:solidFill>
+                            <a:srgbClr val="1F2937"/>
+                          </a:solidFill>
+                          <a:latin typeface="Calibri"/>
+                        </a:rPr>
+                        <a:t>exa</a:t>
                       </a:r>
                     </a:p>
                   </a:txBody>
@@ -3586,13 +3622,13 @@
                     <a:lstStyle/>
                     <a:p>
                       <a:r>
-                        <a:rPr sz="1200">
-                          <a:solidFill>
-                            <a:srgbClr val="1F2937"/>
-                          </a:solidFill>
-                          <a:latin typeface="Calibri"/>
-                        </a:rPr>
-                        <a:t>klar umrissen</a:t>
+                        <a:rPr sz="1100">
+                          <a:solidFill>
+                            <a:srgbClr val="1F2937"/>
+                          </a:solidFill>
+                          <a:latin typeface="Calibri"/>
+                        </a:rPr>
+                        <a:t>breite Suche, wenn GitHub+Docs nicht reichen</a:t>
                       </a:r>
                     </a:p>
                   </a:txBody>
@@ -3603,20 +3639,20 @@
                   </a:tcPr>
                 </a:tc>
               </a:tr>
-              <a:tr h="426720">
-                <a:tc>
-                  <a:txBody>
-                    <a:bodyPr wrap="square"/>
-                    <a:lstStyle/>
-                    <a:p>
-                      <a:r>
-                        <a:rPr sz="1200">
-                          <a:solidFill>
-                            <a:srgbClr val="1F2937"/>
-                          </a:solidFill>
-                          <a:latin typeface="Calibri"/>
-                        </a:rPr>
-                        <a:t>Multi-File-Implementierung</a:t>
+              <a:tr h="448056">
+                <a:tc>
+                  <a:txBody>
+                    <a:bodyPr wrap="square"/>
+                    <a:lstStyle/>
+                    <a:p>
+                      <a:r>
+                        <a:rPr sz="1100">
+                          <a:solidFill>
+                            <a:srgbClr val="1F2937"/>
+                          </a:solidFill>
+                          <a:latin typeface="Calibri"/>
+                        </a:rPr>
+                        <a:t>GitHub (PRs, Issues, Code-Suche)</a:t>
                       </a:r>
                     </a:p>
                   </a:txBody>
@@ -3632,13 +3668,13 @@
                     <a:lstStyle/>
                     <a:p>
                       <a:r>
-                        <a:rPr sz="1200">
-                          <a:solidFill>
-                            <a:srgbClr val="1F2937"/>
-                          </a:solidFill>
-                          <a:latin typeface="Calibri"/>
-                        </a:rPr>
-                        <a:t>Sonnet</a:t>
+                        <a:rPr sz="1100">
+                          <a:solidFill>
+                            <a:srgbClr val="1F2937"/>
+                          </a:solidFill>
+                          <a:latin typeface="Calibri"/>
+                        </a:rPr>
+                        <a:t>github</a:t>
                       </a:r>
                     </a:p>
                   </a:txBody>
@@ -3654,13 +3690,13 @@
                     <a:lstStyle/>
                     <a:p>
                       <a:r>
-                        <a:rPr sz="1200">
-                          <a:solidFill>
-                            <a:srgbClr val="1F2937"/>
-                          </a:solidFill>
-                          <a:latin typeface="Calibri"/>
-                        </a:rPr>
-                        <a:t>bester Coding-Kompromiss</a:t>
+                        <a:rPr sz="1100">
+                          <a:solidFill>
+                            <a:srgbClr val="1F2937"/>
+                          </a:solidFill>
+                          <a:latin typeface="Calibri"/>
+                        </a:rPr>
+                        <a:t>Code-Search FIRST vor Neuschreiben</a:t>
                       </a:r>
                     </a:p>
                   </a:txBody>
@@ -3671,20 +3707,20 @@
                   </a:tcPr>
                 </a:tc>
               </a:tr>
-              <a:tr h="426720">
-                <a:tc>
-                  <a:txBody>
-                    <a:bodyPr wrap="square"/>
-                    <a:lstStyle/>
-                    <a:p>
-                      <a:r>
-                        <a:rPr sz="1200">
-                          <a:solidFill>
-                            <a:srgbClr val="1F2937"/>
-                          </a:solidFill>
-                          <a:latin typeface="Calibri"/>
-                        </a:rPr>
-                        <a:t>Komplexe Architektur</a:t>
+              <a:tr h="448056">
+                <a:tc>
+                  <a:txBody>
+                    <a:bodyPr wrap="square"/>
+                    <a:lstStyle/>
+                    <a:p>
+                      <a:r>
+                        <a:rPr sz="1100">
+                          <a:solidFill>
+                            <a:srgbClr val="1F2937"/>
+                          </a:solidFill>
+                          <a:latin typeface="Calibri"/>
+                        </a:rPr>
+                        <a:t>Browser / E2E / Screenshots</a:t>
                       </a:r>
                     </a:p>
                   </a:txBody>
@@ -3700,13 +3736,13 @@
                     <a:lstStyle/>
                     <a:p>
                       <a:r>
-                        <a:rPr sz="1200">
-                          <a:solidFill>
-                            <a:srgbClr val="1F2937"/>
-                          </a:solidFill>
-                          <a:latin typeface="Calibri"/>
-                        </a:rPr>
-                        <a:t>Opus</a:t>
+                        <a:rPr sz="1100">
+                          <a:solidFill>
+                            <a:srgbClr val="1F2937"/>
+                          </a:solidFill>
+                          <a:latin typeface="Calibri"/>
+                        </a:rPr>
+                        <a:t>playwright</a:t>
                       </a:r>
                     </a:p>
                   </a:txBody>
@@ -3722,13 +3758,13 @@
                     <a:lstStyle/>
                     <a:p>
                       <a:r>
-                        <a:rPr sz="1200">
-                          <a:solidFill>
-                            <a:srgbClr val="1F2937"/>
-                          </a:solidFill>
-                          <a:latin typeface="Calibri"/>
-                        </a:rPr>
-                        <a:t>tiefes Reasoning</a:t>
+                        <a:rPr sz="1100">
+                          <a:solidFill>
+                            <a:srgbClr val="1F2937"/>
+                          </a:solidFill>
+                          <a:latin typeface="Calibri"/>
+                        </a:rPr>
+                        <a:t>headless Automation, visuelle Tests</a:t>
                       </a:r>
                     </a:p>
                   </a:txBody>
@@ -3739,20 +3775,20 @@
                   </a:tcPr>
                 </a:tc>
               </a:tr>
-              <a:tr h="426720">
-                <a:tc>
-                  <a:txBody>
-                    <a:bodyPr wrap="square"/>
-                    <a:lstStyle/>
-                    <a:p>
-                      <a:r>
-                        <a:rPr sz="1200">
-                          <a:solidFill>
-                            <a:srgbClr val="1F2937"/>
-                          </a:solidFill>
-                          <a:latin typeface="Calibri"/>
-                        </a:rPr>
-                        <a:t>PR-Review</a:t>
+              <a:tr h="448056">
+                <a:tc>
+                  <a:txBody>
+                    <a:bodyPr wrap="square"/>
+                    <a:lstStyle/>
+                    <a:p>
+                      <a:r>
+                        <a:rPr sz="1100">
+                          <a:solidFill>
+                            <a:srgbClr val="1F2937"/>
+                          </a:solidFill>
+                          <a:latin typeface="Calibri"/>
+                        </a:rPr>
+                        <a:t>PDF / Word / Excel lesen</a:t>
                       </a:r>
                     </a:p>
                   </a:txBody>
@@ -3768,13 +3804,13 @@
                     <a:lstStyle/>
                     <a:p>
                       <a:r>
-                        <a:rPr sz="1200">
-                          <a:solidFill>
-                            <a:srgbClr val="1F2937"/>
-                          </a:solidFill>
-                          <a:latin typeface="Calibri"/>
-                        </a:rPr>
-                        <a:t>Sonnet</a:t>
+                        <a:rPr sz="1100">
+                          <a:solidFill>
+                            <a:srgbClr val="1F2937"/>
+                          </a:solidFill>
+                          <a:latin typeface="Calibri"/>
+                        </a:rPr>
+                        <a:t>markitdown</a:t>
                       </a:r>
                     </a:p>
                   </a:txBody>
@@ -3790,13 +3826,13 @@
                     <a:lstStyle/>
                     <a:p>
                       <a:r>
-                        <a:rPr sz="1200">
-                          <a:solidFill>
-                            <a:srgbClr val="1F2937"/>
-                          </a:solidFill>
-                          <a:latin typeface="Calibri"/>
-                        </a:rPr>
-                        <a:t>versteht Kontext, fängt Nuancen</a:t>
+                        <a:rPr sz="1100">
+                          <a:solidFill>
+                            <a:srgbClr val="1F2937"/>
+                          </a:solidFill>
+                          <a:latin typeface="Calibri"/>
+                        </a:rPr>
+                        <a:t>Dokumente → Markdown (global aktiv)</a:t>
                       </a:r>
                     </a:p>
                   </a:txBody>
@@ -3807,20 +3843,20 @@
                   </a:tcPr>
                 </a:tc>
               </a:tr>
-              <a:tr h="426720">
-                <a:tc>
-                  <a:txBody>
-                    <a:bodyPr wrap="square"/>
-                    <a:lstStyle/>
-                    <a:p>
-                      <a:r>
-                        <a:rPr sz="1200">
-                          <a:solidFill>
-                            <a:srgbClr val="1F2937"/>
-                          </a:solidFill>
-                          <a:latin typeface="Calibri"/>
-                        </a:rPr>
-                        <a:t>Security-Analyse</a:t>
+              <a:tr h="448056">
+                <a:tc>
+                  <a:txBody>
+                    <a:bodyPr wrap="square"/>
+                    <a:lstStyle/>
+                    <a:p>
+                      <a:r>
+                        <a:rPr sz="1100">
+                          <a:solidFill>
+                            <a:srgbClr val="1F2937"/>
+                          </a:solidFill>
+                          <a:latin typeface="Calibri"/>
+                        </a:rPr>
+                        <a:t>Strukturierter Wissensgraph</a:t>
                       </a:r>
                     </a:p>
                   </a:txBody>
@@ -3836,13 +3872,13 @@
                     <a:lstStyle/>
                     <a:p>
                       <a:r>
-                        <a:rPr sz="1200">
-                          <a:solidFill>
-                            <a:srgbClr val="1F2937"/>
-                          </a:solidFill>
-                          <a:latin typeface="Calibri"/>
-                        </a:rPr>
-                        <a:t>Opus</a:t>
+                        <a:rPr sz="1100">
+                          <a:solidFill>
+                            <a:srgbClr val="1F2937"/>
+                          </a:solidFill>
+                          <a:latin typeface="Calibri"/>
+                        </a:rPr>
+                        <a:t>memory</a:t>
                       </a:r>
                     </a:p>
                   </a:txBody>
@@ -3858,13 +3894,13 @@
                     <a:lstStyle/>
                     <a:p>
                       <a:r>
-                        <a:rPr sz="1200">
-                          <a:solidFill>
-                            <a:srgbClr val="1F2937"/>
-                          </a:solidFill>
-                          <a:latin typeface="Calibri"/>
-                        </a:rPr>
-                        <a:t>darf nichts übersehen</a:t>
+                        <a:rPr sz="1100">
+                          <a:solidFill>
+                            <a:srgbClr val="1F2937"/>
+                          </a:solidFill>
+                          <a:latin typeface="Calibri"/>
+                        </a:rPr>
+                        <a:t>Laufzeit-Memory (mit claude-mem abstimmen)</a:t>
                       </a:r>
                     </a:p>
                   </a:txBody>
@@ -3875,20 +3911,20 @@
                   </a:tcPr>
                 </a:tc>
               </a:tr>
-              <a:tr h="426720">
-                <a:tc>
-                  <a:txBody>
-                    <a:bodyPr wrap="square"/>
-                    <a:lstStyle/>
-                    <a:p>
-                      <a:r>
-                        <a:rPr sz="1200">
-                          <a:solidFill>
-                            <a:srgbClr val="1F2937"/>
-                          </a:solidFill>
-                          <a:latin typeface="Calibri"/>
-                        </a:rPr>
-                        <a:t>Doku schreiben</a:t>
+              <a:tr h="448056">
+                <a:tc>
+                  <a:txBody>
+                    <a:bodyPr wrap="square"/>
+                    <a:lstStyle/>
+                    <a:p>
+                      <a:r>
+                        <a:rPr sz="1100">
+                          <a:solidFill>
+                            <a:srgbClr val="1F2937"/>
+                          </a:solidFill>
+                          <a:latin typeface="Calibri"/>
+                        </a:rPr>
+                        <a:t>Schrittweises Reasoning</a:t>
                       </a:r>
                     </a:p>
                   </a:txBody>
@@ -3904,13 +3940,13 @@
                     <a:lstStyle/>
                     <a:p>
                       <a:r>
-                        <a:rPr sz="1200">
-                          <a:solidFill>
-                            <a:srgbClr val="1F2937"/>
-                          </a:solidFill>
-                          <a:latin typeface="Calibri"/>
-                        </a:rPr>
-                        <a:t>Haiku</a:t>
+                        <a:rPr sz="1100">
+                          <a:solidFill>
+                            <a:srgbClr val="1F2937"/>
+                          </a:solidFill>
+                          <a:latin typeface="Calibri"/>
+                        </a:rPr>
+                        <a:t>sequential-thinking</a:t>
                       </a:r>
                     </a:p>
                   </a:txBody>
@@ -3926,13 +3962,13 @@
                     <a:lstStyle/>
                     <a:p>
                       <a:r>
-                        <a:rPr sz="1200">
-                          <a:solidFill>
-                            <a:srgbClr val="1F2937"/>
-                          </a:solidFill>
-                          <a:latin typeface="Calibri"/>
-                        </a:rPr>
-                        <a:t>einfache Struktur</a:t>
+                        <a:rPr sz="1100">
+                          <a:solidFill>
+                            <a:srgbClr val="1F2937"/>
+                          </a:solidFill>
+                          <a:latin typeface="Calibri"/>
+                        </a:rPr>
+                        <a:t>komplexe Mehrschritt-Probleme</a:t>
                       </a:r>
                     </a:p>
                   </a:txBody>
@@ -3943,20 +3979,20 @@
                   </a:tcPr>
                 </a:tc>
               </a:tr>
-              <a:tr h="426720">
-                <a:tc>
-                  <a:txBody>
-                    <a:bodyPr wrap="square"/>
-                    <a:lstStyle/>
-                    <a:p>
-                      <a:r>
-                        <a:rPr sz="1200">
-                          <a:solidFill>
-                            <a:srgbClr val="1F2937"/>
-                          </a:solidFill>
-                          <a:latin typeface="Calibri"/>
-                        </a:rPr>
-                        <a:t>Komplexe Bugs</a:t>
+              <a:tr h="448056">
+                <a:tc>
+                  <a:txBody>
+                    <a:bodyPr wrap="square"/>
+                    <a:lstStyle/>
+                    <a:p>
+                      <a:r>
+                        <a:rPr sz="1100">
+                          <a:solidFill>
+                            <a:srgbClr val="1F2937"/>
+                          </a:solidFill>
+                          <a:latin typeface="Calibri"/>
+                        </a:rPr>
+                        <a:t>Bash-Token sparen (lokal)</a:t>
                       </a:r>
                     </a:p>
                   </a:txBody>
@@ -3972,13 +4008,13 @@
                     <a:lstStyle/>
                     <a:p>
                       <a:r>
-                        <a:rPr sz="1200">
-                          <a:solidFill>
-                            <a:srgbClr val="1F2937"/>
-                          </a:solidFill>
-                          <a:latin typeface="Calibri"/>
-                        </a:rPr>
-                        <a:t>Opus</a:t>
+                        <a:rPr sz="1100">
+                          <a:solidFill>
+                            <a:srgbClr val="1F2937"/>
+                          </a:solidFill>
+                          <a:latin typeface="Calibri"/>
+                        </a:rPr>
+                        <a:t>RTK-Hook</a:t>
                       </a:r>
                     </a:p>
                   </a:txBody>
@@ -3994,19 +4030,87 @@
                     <a:lstStyle/>
                     <a:p>
                       <a:r>
-                        <a:rPr sz="1200">
-                          <a:solidFill>
-                            <a:srgbClr val="1F2937"/>
-                          </a:solidFill>
-                          <a:latin typeface="Calibri"/>
-                        </a:rPr>
-                        <a:t>ganzes System im Kopf halten</a:t>
+                        <a:rPr sz="1100">
+                          <a:solidFill>
+                            <a:srgbClr val="1F2937"/>
+                          </a:solidFill>
+                          <a:latin typeface="Calibri"/>
+                        </a:rPr>
+                        <a:t>60–90 % Ersparnis, läuft transparent global</a:t>
                       </a:r>
                     </a:p>
                   </a:txBody>
                   <a:tcPr marT="18288" marB="18288">
                     <a:solidFill>
                       <a:srgbClr val="FFFFFF"/>
+                    </a:solidFill>
+                  </a:tcPr>
+                </a:tc>
+              </a:tr>
+              <a:tr h="448056">
+                <a:tc>
+                  <a:txBody>
+                    <a:bodyPr wrap="square"/>
+                    <a:lstStyle/>
+                    <a:p>
+                      <a:r>
+                        <a:rPr sz="1100">
+                          <a:solidFill>
+                            <a:srgbClr val="1F2937"/>
+                          </a:solidFill>
+                          <a:latin typeface="Calibri"/>
+                        </a:rPr>
+                        <a:t>Frühere Arbeit / „schon gelöst?"</a:t>
+                      </a:r>
+                    </a:p>
+                  </a:txBody>
+                  <a:tcPr marT="18288" marB="18288">
+                    <a:solidFill>
+                      <a:srgbClr val="F3F4F6"/>
+                    </a:solidFill>
+                  </a:tcPr>
+                </a:tc>
+                <a:tc>
+                  <a:txBody>
+                    <a:bodyPr wrap="square"/>
+                    <a:lstStyle/>
+                    <a:p>
+                      <a:r>
+                        <a:rPr sz="1100">
+                          <a:solidFill>
+                            <a:srgbClr val="1F2937"/>
+                          </a:solidFill>
+                          <a:latin typeface="Calibri"/>
+                        </a:rPr>
+                        <a:t>claude-mem (/mem-search)</a:t>
+                      </a:r>
+                    </a:p>
+                  </a:txBody>
+                  <a:tcPr marT="18288" marB="18288">
+                    <a:solidFill>
+                      <a:srgbClr val="F3F4F6"/>
+                    </a:solidFill>
+                  </a:tcPr>
+                </a:tc>
+                <a:tc>
+                  <a:txBody>
+                    <a:bodyPr wrap="square"/>
+                    <a:lstStyle/>
+                    <a:p>
+                      <a:r>
+                        <a:rPr sz="1100">
+                          <a:solidFill>
+                            <a:srgbClr val="1F2937"/>
+                          </a:solidFill>
+                          <a:latin typeface="Calibri"/>
+                        </a:rPr>
+                        <a:t>cross-session Memory, injiziert Kontext automatisch</a:t>
+                      </a:r>
+                    </a:p>
+                  </a:txBody>
+                  <a:tcPr marT="18288" marB="18288">
+                    <a:solidFill>
+                      <a:srgbClr val="F3F4F6"/>
                     </a:solidFill>
                   </a:tcPr>
                 </a:tc>
@@ -4015,53 +4119,6 @@
           </a:graphicData>
         </a:graphic>
       </p:graphicFrame>
-      <p:sp>
-        <p:nvSpPr>
-          <p:cNvPr id="5" name="TextBox 4"/>
-          <p:cNvSpPr txBox="1"/>
-          <p:nvPr/>
-        </p:nvSpPr>
-        <p:spPr>
-          <a:xfrm>
-            <a:off x="640080" y="5394960"/>
-            <a:ext cx="10972800" cy="1097280"/>
-          </a:xfrm>
-          <a:prstGeom prst="rect">
-            <a:avLst/>
-          </a:prstGeom>
-          <a:noFill/>
-        </p:spPr>
-        <p:txBody>
-          <a:bodyPr wrap="none">
-            <a:spAutoFit/>
-          </a:bodyPr>
-          <a:lstStyle/>
-          <a:p>
-            <a:pPr/>
-            <a:r>
-              <a:rPr sz="1500" b="1">
-                <a:solidFill>
-                  <a:srgbClr val="312E81"/>
-                </a:solidFill>
-                <a:latin typeface="Calibri"/>
-              </a:rPr>
-              <a:t>Default = Sonnet (~90 %). Opus bei: 1. Versuch gescheitert · ≥5 Dateien · Architektur · Security.</a:t>
-            </a:r>
-          </a:p>
-          <a:p>
-            <a:pPr/>
-            <a:r>
-              <a:rPr sz="1400" b="0">
-                <a:solidFill>
-                  <a:srgbClr val="C7D2FE"/>
-                </a:solidFill>
-                <a:latin typeface="Calibri"/>
-              </a:rPr>
-              <a:t>Hilfe: /model-route, /cost-report. Auto-Compact aus, manuell /compact mit Hint.</a:t>
-            </a:r>
-          </a:p>
-        </p:txBody>
-      </p:sp>
     </p:spTree>
   </p:cSld>
   <p:clrMapOvr>
@@ -4153,7 +4210,7 @@
                 </a:solidFill>
                 <a:latin typeface="Calibri"/>
               </a:rPr>
-              <a:t>9–10 · Memory, Sessions &amp; Continuous Learning</a:t>
+              <a:t>8 · Token-Ökonomie &amp; Modellstrategie</a:t>
             </a:r>
           </a:p>
         </p:txBody>
@@ -4167,8 +4224,8 @@
           <p:nvPr/>
         </p:nvGraphicFramePr>
         <p:xfrm>
-          <a:off x="640080" y="1371600"/>
-          <a:ext cx="10972800" cy="2560320"/>
+          <a:off x="548640" y="1371600"/>
+          <a:ext cx="11155680" cy="3840480"/>
         </p:xfrm>
         <a:graphic>
           <a:graphicData uri="http://schemas.openxmlformats.org/drawingml/2006/table">
@@ -4177,23 +4234,24 @@
                 <a:tableStyleId>{5C22544A-7EE6-4342-B048-85BDC9FD1C3A}</a:tableStyleId>
               </a:tblPr>
               <a:tblGrid>
-                <a:gridCol w="4754880"/>
-                <a:gridCol w="6217920"/>
+                <a:gridCol w="3474720"/>
+                <a:gridCol w="1645920"/>
+                <a:gridCol w="6035040"/>
               </a:tblGrid>
-              <a:tr h="512064">
-                <a:tc>
-                  <a:txBody>
-                    <a:bodyPr wrap="square"/>
-                    <a:lstStyle/>
-                    <a:p>
-                      <a:r>
-                        <a:rPr sz="1300" b="1">
+              <a:tr h="426720">
+                <a:tc>
+                  <a:txBody>
+                    <a:bodyPr wrap="square"/>
+                    <a:lstStyle/>
+                    <a:p>
+                      <a:r>
+                        <a:rPr sz="1200" b="1">
                           <a:solidFill>
                             <a:srgbClr val="FFFFFF"/>
                           </a:solidFill>
                           <a:latin typeface="Calibri"/>
                         </a:rPr>
-                        <a:t>Command</a:t>
+                        <a:t>Aufgabe</a:t>
                       </a:r>
                     </a:p>
                   </a:txBody>
@@ -4209,13 +4267,13 @@
                     <a:lstStyle/>
                     <a:p>
                       <a:r>
-                        <a:rPr sz="1300" b="1">
+                        <a:rPr sz="1200" b="1">
                           <a:solidFill>
                             <a:srgbClr val="FFFFFF"/>
                           </a:solidFill>
                           <a:latin typeface="Calibri"/>
                         </a:rPr>
-                        <a:t>Zweck</a:t>
+                        <a:t>Modell</a:t>
                       </a:r>
                     </a:p>
                   </a:txBody>
@@ -4225,21 +4283,43 @@
                     </a:solidFill>
                   </a:tcPr>
                 </a:tc>
+                <a:tc>
+                  <a:txBody>
+                    <a:bodyPr wrap="square"/>
+                    <a:lstStyle/>
+                    <a:p>
+                      <a:r>
+                        <a:rPr sz="1200" b="1">
+                          <a:solidFill>
+                            <a:srgbClr val="FFFFFF"/>
+                          </a:solidFill>
+                          <a:latin typeface="Calibri"/>
+                        </a:rPr>
+                        <a:t>Warum</a:t>
+                      </a:r>
+                    </a:p>
+                  </a:txBody>
+                  <a:tcPr marT="18288" marB="18288">
+                    <a:solidFill>
+                      <a:srgbClr val="312E81"/>
+                    </a:solidFill>
+                  </a:tcPr>
+                </a:tc>
               </a:tr>
-              <a:tr h="512064">
-                <a:tc>
-                  <a:txBody>
-                    <a:bodyPr wrap="square"/>
-                    <a:lstStyle/>
-                    <a:p>
-                      <a:r>
-                        <a:rPr sz="1300">
-                          <a:solidFill>
-                            <a:srgbClr val="1F2937"/>
-                          </a:solidFill>
-                          <a:latin typeface="Calibri"/>
-                        </a:rPr>
-                        <a:t>/save-session · /resume-session</a:t>
+              <a:tr h="426720">
+                <a:tc>
+                  <a:txBody>
+                    <a:bodyPr wrap="square"/>
+                    <a:lstStyle/>
+                    <a:p>
+                      <a:r>
+                        <a:rPr sz="1200">
+                          <a:solidFill>
+                            <a:srgbClr val="1F2937"/>
+                          </a:solidFill>
+                          <a:latin typeface="Calibri"/>
+                        </a:rPr>
+                        <a:t>Exploration / Suche</a:t>
                       </a:r>
                     </a:p>
                   </a:txBody>
@@ -4255,13 +4335,13 @@
                     <a:lstStyle/>
                     <a:p>
                       <a:r>
-                        <a:rPr sz="1300">
-                          <a:solidFill>
-                            <a:srgbClr val="1F2937"/>
-                          </a:solidFill>
-                          <a:latin typeface="Calibri"/>
-                        </a:rPr>
-                        <a:t>Tag-zu-Tag-Fortschritt persistieren</a:t>
+                        <a:rPr sz="1200">
+                          <a:solidFill>
+                            <a:srgbClr val="1F2937"/>
+                          </a:solidFill>
+                          <a:latin typeface="Calibri"/>
+                        </a:rPr>
+                        <a:t>Haiku</a:t>
                       </a:r>
                     </a:p>
                   </a:txBody>
@@ -4271,21 +4351,43 @@
                     </a:solidFill>
                   </a:tcPr>
                 </a:tc>
+                <a:tc>
+                  <a:txBody>
+                    <a:bodyPr wrap="square"/>
+                    <a:lstStyle/>
+                    <a:p>
+                      <a:r>
+                        <a:rPr sz="1200">
+                          <a:solidFill>
+                            <a:srgbClr val="1F2937"/>
+                          </a:solidFill>
+                          <a:latin typeface="Calibri"/>
+                        </a:rPr>
+                        <a:t>schnell, billig, reicht zum Finden</a:t>
+                      </a:r>
+                    </a:p>
+                  </a:txBody>
+                  <a:tcPr marT="18288" marB="18288">
+                    <a:solidFill>
+                      <a:srgbClr val="F3F4F6"/>
+                    </a:solidFill>
+                  </a:tcPr>
+                </a:tc>
               </a:tr>
-              <a:tr h="512064">
-                <a:tc>
-                  <a:txBody>
-                    <a:bodyPr wrap="square"/>
-                    <a:lstStyle/>
-                    <a:p>
-                      <a:r>
-                        <a:rPr sz="1300">
-                          <a:solidFill>
-                            <a:srgbClr val="1F2937"/>
-                          </a:solidFill>
-                          <a:latin typeface="Calibri"/>
-                        </a:rPr>
-                        <a:t>/sessions · /checkpoint · /aside</a:t>
+              <a:tr h="426720">
+                <a:tc>
+                  <a:txBody>
+                    <a:bodyPr wrap="square"/>
+                    <a:lstStyle/>
+                    <a:p>
+                      <a:r>
+                        <a:rPr sz="1200">
+                          <a:solidFill>
+                            <a:srgbClr val="1F2937"/>
+                          </a:solidFill>
+                          <a:latin typeface="Calibri"/>
+                        </a:rPr>
+                        <a:t>Einfache Einzeldatei-Edits</a:t>
                       </a:r>
                     </a:p>
                   </a:txBody>
@@ -4301,13 +4403,13 @@
                     <a:lstStyle/>
                     <a:p>
                       <a:r>
-                        <a:rPr sz="1300">
-                          <a:solidFill>
-                            <a:srgbClr val="1F2937"/>
-                          </a:solidFill>
-                          <a:latin typeface="Calibri"/>
-                        </a:rPr>
-                        <a:t>Historie · Checkpoint · Nebenfrage</a:t>
+                        <a:rPr sz="1200">
+                          <a:solidFill>
+                            <a:srgbClr val="1F2937"/>
+                          </a:solidFill>
+                          <a:latin typeface="Calibri"/>
+                        </a:rPr>
+                        <a:t>Haiku</a:t>
                       </a:r>
                     </a:p>
                   </a:txBody>
@@ -4317,21 +4419,43 @@
                     </a:solidFill>
                   </a:tcPr>
                 </a:tc>
+                <a:tc>
+                  <a:txBody>
+                    <a:bodyPr wrap="square"/>
+                    <a:lstStyle/>
+                    <a:p>
+                      <a:r>
+                        <a:rPr sz="1200">
+                          <a:solidFill>
+                            <a:srgbClr val="1F2937"/>
+                          </a:solidFill>
+                          <a:latin typeface="Calibri"/>
+                        </a:rPr>
+                        <a:t>klar umrissen</a:t>
+                      </a:r>
+                    </a:p>
+                  </a:txBody>
+                  <a:tcPr marT="18288" marB="18288">
+                    <a:solidFill>
+                      <a:srgbClr val="FFFFFF"/>
+                    </a:solidFill>
+                  </a:tcPr>
+                </a:tc>
               </a:tr>
-              <a:tr h="512064">
-                <a:tc>
-                  <a:txBody>
-                    <a:bodyPr wrap="square"/>
-                    <a:lstStyle/>
-                    <a:p>
-                      <a:r>
-                        <a:rPr sz="1300">
-                          <a:solidFill>
-                            <a:srgbClr val="1F2937"/>
-                          </a:solidFill>
-                          <a:latin typeface="Calibri"/>
-                        </a:rPr>
-                        <a:t>/learn-eval → /evolve → /promote</a:t>
+              <a:tr h="426720">
+                <a:tc>
+                  <a:txBody>
+                    <a:bodyPr wrap="square"/>
+                    <a:lstStyle/>
+                    <a:p>
+                      <a:r>
+                        <a:rPr sz="1200">
+                          <a:solidFill>
+                            <a:srgbClr val="1F2937"/>
+                          </a:solidFill>
+                          <a:latin typeface="Calibri"/>
+                        </a:rPr>
+                        <a:t>Multi-File-Implementierung</a:t>
                       </a:r>
                     </a:p>
                   </a:txBody>
@@ -4347,13 +4471,13 @@
                     <a:lstStyle/>
                     <a:p>
                       <a:r>
-                        <a:rPr sz="1300">
-                          <a:solidFill>
-                            <a:srgbClr val="1F2937"/>
-                          </a:solidFill>
-                          <a:latin typeface="Calibri"/>
-                        </a:rPr>
-                        <a:t>Self-Improvement-Loop (Instincts)</a:t>
+                        <a:rPr sz="1200">
+                          <a:solidFill>
+                            <a:srgbClr val="1F2937"/>
+                          </a:solidFill>
+                          <a:latin typeface="Calibri"/>
+                        </a:rPr>
+                        <a:t>Sonnet</a:t>
                       </a:r>
                     </a:p>
                   </a:txBody>
@@ -4363,21 +4487,43 @@
                     </a:solidFill>
                   </a:tcPr>
                 </a:tc>
+                <a:tc>
+                  <a:txBody>
+                    <a:bodyPr wrap="square"/>
+                    <a:lstStyle/>
+                    <a:p>
+                      <a:r>
+                        <a:rPr sz="1200">
+                          <a:solidFill>
+                            <a:srgbClr val="1F2937"/>
+                          </a:solidFill>
+                          <a:latin typeface="Calibri"/>
+                        </a:rPr>
+                        <a:t>bester Coding-Kompromiss</a:t>
+                      </a:r>
+                    </a:p>
+                  </a:txBody>
+                  <a:tcPr marT="18288" marB="18288">
+                    <a:solidFill>
+                      <a:srgbClr val="F3F4F6"/>
+                    </a:solidFill>
+                  </a:tcPr>
+                </a:tc>
               </a:tr>
-              <a:tr h="512064">
-                <a:tc>
-                  <a:txBody>
-                    <a:bodyPr wrap="square"/>
-                    <a:lstStyle/>
-                    <a:p>
-                      <a:r>
-                        <a:rPr sz="1300">
-                          <a:solidFill>
-                            <a:srgbClr val="1F2937"/>
-                          </a:solidFill>
-                          <a:latin typeface="Calibri"/>
-                        </a:rPr>
-                        <a:t>/instinct-status · /skill-create</a:t>
+              <a:tr h="426720">
+                <a:tc>
+                  <a:txBody>
+                    <a:bodyPr wrap="square"/>
+                    <a:lstStyle/>
+                    <a:p>
+                      <a:r>
+                        <a:rPr sz="1200">
+                          <a:solidFill>
+                            <a:srgbClr val="1F2937"/>
+                          </a:solidFill>
+                          <a:latin typeface="Calibri"/>
+                        </a:rPr>
+                        <a:t>Komplexe Architektur</a:t>
                       </a:r>
                     </a:p>
                   </a:txBody>
@@ -4393,13 +4539,307 @@
                     <a:lstStyle/>
                     <a:p>
                       <a:r>
-                        <a:rPr sz="1300">
-                          <a:solidFill>
-                            <a:srgbClr val="1F2937"/>
-                          </a:solidFill>
-                          <a:latin typeface="Calibri"/>
-                        </a:rPr>
-                        <a:t>Instincts zeigen · Skill aus Git-History</a:t>
+                        <a:rPr sz="1200">
+                          <a:solidFill>
+                            <a:srgbClr val="1F2937"/>
+                          </a:solidFill>
+                          <a:latin typeface="Calibri"/>
+                        </a:rPr>
+                        <a:t>Opus</a:t>
+                      </a:r>
+                    </a:p>
+                  </a:txBody>
+                  <a:tcPr marT="18288" marB="18288">
+                    <a:solidFill>
+                      <a:srgbClr val="FFFFFF"/>
+                    </a:solidFill>
+                  </a:tcPr>
+                </a:tc>
+                <a:tc>
+                  <a:txBody>
+                    <a:bodyPr wrap="square"/>
+                    <a:lstStyle/>
+                    <a:p>
+                      <a:r>
+                        <a:rPr sz="1200">
+                          <a:solidFill>
+                            <a:srgbClr val="1F2937"/>
+                          </a:solidFill>
+                          <a:latin typeface="Calibri"/>
+                        </a:rPr>
+                        <a:t>tiefes Reasoning</a:t>
+                      </a:r>
+                    </a:p>
+                  </a:txBody>
+                  <a:tcPr marT="18288" marB="18288">
+                    <a:solidFill>
+                      <a:srgbClr val="FFFFFF"/>
+                    </a:solidFill>
+                  </a:tcPr>
+                </a:tc>
+              </a:tr>
+              <a:tr h="426720">
+                <a:tc>
+                  <a:txBody>
+                    <a:bodyPr wrap="square"/>
+                    <a:lstStyle/>
+                    <a:p>
+                      <a:r>
+                        <a:rPr sz="1200">
+                          <a:solidFill>
+                            <a:srgbClr val="1F2937"/>
+                          </a:solidFill>
+                          <a:latin typeface="Calibri"/>
+                        </a:rPr>
+                        <a:t>PR-Review</a:t>
+                      </a:r>
+                    </a:p>
+                  </a:txBody>
+                  <a:tcPr marT="18288" marB="18288">
+                    <a:solidFill>
+                      <a:srgbClr val="F3F4F6"/>
+                    </a:solidFill>
+                  </a:tcPr>
+                </a:tc>
+                <a:tc>
+                  <a:txBody>
+                    <a:bodyPr wrap="square"/>
+                    <a:lstStyle/>
+                    <a:p>
+                      <a:r>
+                        <a:rPr sz="1200">
+                          <a:solidFill>
+                            <a:srgbClr val="1F2937"/>
+                          </a:solidFill>
+                          <a:latin typeface="Calibri"/>
+                        </a:rPr>
+                        <a:t>Sonnet</a:t>
+                      </a:r>
+                    </a:p>
+                  </a:txBody>
+                  <a:tcPr marT="18288" marB="18288">
+                    <a:solidFill>
+                      <a:srgbClr val="F3F4F6"/>
+                    </a:solidFill>
+                  </a:tcPr>
+                </a:tc>
+                <a:tc>
+                  <a:txBody>
+                    <a:bodyPr wrap="square"/>
+                    <a:lstStyle/>
+                    <a:p>
+                      <a:r>
+                        <a:rPr sz="1200">
+                          <a:solidFill>
+                            <a:srgbClr val="1F2937"/>
+                          </a:solidFill>
+                          <a:latin typeface="Calibri"/>
+                        </a:rPr>
+                        <a:t>versteht Kontext, fängt Nuancen</a:t>
+                      </a:r>
+                    </a:p>
+                  </a:txBody>
+                  <a:tcPr marT="18288" marB="18288">
+                    <a:solidFill>
+                      <a:srgbClr val="F3F4F6"/>
+                    </a:solidFill>
+                  </a:tcPr>
+                </a:tc>
+              </a:tr>
+              <a:tr h="426720">
+                <a:tc>
+                  <a:txBody>
+                    <a:bodyPr wrap="square"/>
+                    <a:lstStyle/>
+                    <a:p>
+                      <a:r>
+                        <a:rPr sz="1200">
+                          <a:solidFill>
+                            <a:srgbClr val="1F2937"/>
+                          </a:solidFill>
+                          <a:latin typeface="Calibri"/>
+                        </a:rPr>
+                        <a:t>Security-Analyse</a:t>
+                      </a:r>
+                    </a:p>
+                  </a:txBody>
+                  <a:tcPr marT="18288" marB="18288">
+                    <a:solidFill>
+                      <a:srgbClr val="FFFFFF"/>
+                    </a:solidFill>
+                  </a:tcPr>
+                </a:tc>
+                <a:tc>
+                  <a:txBody>
+                    <a:bodyPr wrap="square"/>
+                    <a:lstStyle/>
+                    <a:p>
+                      <a:r>
+                        <a:rPr sz="1200">
+                          <a:solidFill>
+                            <a:srgbClr val="1F2937"/>
+                          </a:solidFill>
+                          <a:latin typeface="Calibri"/>
+                        </a:rPr>
+                        <a:t>Opus</a:t>
+                      </a:r>
+                    </a:p>
+                  </a:txBody>
+                  <a:tcPr marT="18288" marB="18288">
+                    <a:solidFill>
+                      <a:srgbClr val="FFFFFF"/>
+                    </a:solidFill>
+                  </a:tcPr>
+                </a:tc>
+                <a:tc>
+                  <a:txBody>
+                    <a:bodyPr wrap="square"/>
+                    <a:lstStyle/>
+                    <a:p>
+                      <a:r>
+                        <a:rPr sz="1200">
+                          <a:solidFill>
+                            <a:srgbClr val="1F2937"/>
+                          </a:solidFill>
+                          <a:latin typeface="Calibri"/>
+                        </a:rPr>
+                        <a:t>darf nichts übersehen</a:t>
+                      </a:r>
+                    </a:p>
+                  </a:txBody>
+                  <a:tcPr marT="18288" marB="18288">
+                    <a:solidFill>
+                      <a:srgbClr val="FFFFFF"/>
+                    </a:solidFill>
+                  </a:tcPr>
+                </a:tc>
+              </a:tr>
+              <a:tr h="426720">
+                <a:tc>
+                  <a:txBody>
+                    <a:bodyPr wrap="square"/>
+                    <a:lstStyle/>
+                    <a:p>
+                      <a:r>
+                        <a:rPr sz="1200">
+                          <a:solidFill>
+                            <a:srgbClr val="1F2937"/>
+                          </a:solidFill>
+                          <a:latin typeface="Calibri"/>
+                        </a:rPr>
+                        <a:t>Doku schreiben</a:t>
+                      </a:r>
+                    </a:p>
+                  </a:txBody>
+                  <a:tcPr marT="18288" marB="18288">
+                    <a:solidFill>
+                      <a:srgbClr val="F3F4F6"/>
+                    </a:solidFill>
+                  </a:tcPr>
+                </a:tc>
+                <a:tc>
+                  <a:txBody>
+                    <a:bodyPr wrap="square"/>
+                    <a:lstStyle/>
+                    <a:p>
+                      <a:r>
+                        <a:rPr sz="1200">
+                          <a:solidFill>
+                            <a:srgbClr val="1F2937"/>
+                          </a:solidFill>
+                          <a:latin typeface="Calibri"/>
+                        </a:rPr>
+                        <a:t>Haiku</a:t>
+                      </a:r>
+                    </a:p>
+                  </a:txBody>
+                  <a:tcPr marT="18288" marB="18288">
+                    <a:solidFill>
+                      <a:srgbClr val="F3F4F6"/>
+                    </a:solidFill>
+                  </a:tcPr>
+                </a:tc>
+                <a:tc>
+                  <a:txBody>
+                    <a:bodyPr wrap="square"/>
+                    <a:lstStyle/>
+                    <a:p>
+                      <a:r>
+                        <a:rPr sz="1200">
+                          <a:solidFill>
+                            <a:srgbClr val="1F2937"/>
+                          </a:solidFill>
+                          <a:latin typeface="Calibri"/>
+                        </a:rPr>
+                        <a:t>einfache Struktur</a:t>
+                      </a:r>
+                    </a:p>
+                  </a:txBody>
+                  <a:tcPr marT="18288" marB="18288">
+                    <a:solidFill>
+                      <a:srgbClr val="F3F4F6"/>
+                    </a:solidFill>
+                  </a:tcPr>
+                </a:tc>
+              </a:tr>
+              <a:tr h="426720">
+                <a:tc>
+                  <a:txBody>
+                    <a:bodyPr wrap="square"/>
+                    <a:lstStyle/>
+                    <a:p>
+                      <a:r>
+                        <a:rPr sz="1200">
+                          <a:solidFill>
+                            <a:srgbClr val="1F2937"/>
+                          </a:solidFill>
+                          <a:latin typeface="Calibri"/>
+                        </a:rPr>
+                        <a:t>Komplexe Bugs</a:t>
+                      </a:r>
+                    </a:p>
+                  </a:txBody>
+                  <a:tcPr marT="18288" marB="18288">
+                    <a:solidFill>
+                      <a:srgbClr val="FFFFFF"/>
+                    </a:solidFill>
+                  </a:tcPr>
+                </a:tc>
+                <a:tc>
+                  <a:txBody>
+                    <a:bodyPr wrap="square"/>
+                    <a:lstStyle/>
+                    <a:p>
+                      <a:r>
+                        <a:rPr sz="1200">
+                          <a:solidFill>
+                            <a:srgbClr val="1F2937"/>
+                          </a:solidFill>
+                          <a:latin typeface="Calibri"/>
+                        </a:rPr>
+                        <a:t>Opus</a:t>
+                      </a:r>
+                    </a:p>
+                  </a:txBody>
+                  <a:tcPr marT="18288" marB="18288">
+                    <a:solidFill>
+                      <a:srgbClr val="FFFFFF"/>
+                    </a:solidFill>
+                  </a:tcPr>
+                </a:tc>
+                <a:tc>
+                  <a:txBody>
+                    <a:bodyPr wrap="square"/>
+                    <a:lstStyle/>
+                    <a:p>
+                      <a:r>
+                        <a:rPr sz="1200">
+                          <a:solidFill>
+                            <a:srgbClr val="1F2937"/>
+                          </a:solidFill>
+                          <a:latin typeface="Calibri"/>
+                        </a:rPr>
+                        <a:t>ganzes System im Kopf halten</a:t>
                       </a:r>
                     </a:p>
                   </a:txBody>
@@ -4422,8 +4862,8 @@
         </p:nvSpPr>
         <p:spPr>
           <a:xfrm>
-            <a:off x="640080" y="4206240"/>
-            <a:ext cx="10972800" cy="1463040"/>
+            <a:off x="640080" y="5394960"/>
+            <a:ext cx="10972800" cy="1097280"/>
           </a:xfrm>
           <a:prstGeom prst="rect">
             <a:avLst/>
@@ -4440,23 +4880,23 @@
             <a:r>
               <a:rPr sz="1500" b="1">
                 <a:solidFill>
-                  <a:srgbClr val="F59E0B"/>
-                </a:solidFill>
-                <a:latin typeface="Calibri"/>
-              </a:rPr>
-              <a:t>EINE primäre Memory-Quelle je Projekt (claude-mem-Koexistenz). Keine Secrets in Memory.</a:t>
-            </a:r>
-          </a:p>
-          <a:p>
-            <a:pPr/>
-            <a:r>
-              <a:rPr sz="1500" b="0">
-                <a:solidFill>
                   <a:srgbClr val="312E81"/>
                 </a:solidFill>
                 <a:latin typeface="Calibri"/>
               </a:rPr>
-              <a:t>Routine: Session-Ende → /learn-eval → /evolve → /promote.</a:t>
+              <a:t>Default = Sonnet (~90 %). Opus bei: 1. Versuch gescheitert · ≥5 Dateien · Architektur · Security.</a:t>
+            </a:r>
+          </a:p>
+          <a:p>
+            <a:pPr/>
+            <a:r>
+              <a:rPr sz="1400" b="0">
+                <a:solidFill>
+                  <a:srgbClr val="C7D2FE"/>
+                </a:solidFill>
+                <a:latin typeface="Calibri"/>
+              </a:rPr>
+              <a:t>Hilfe: /model-route, /cost-report. Auto-Compact aus, manuell /compact mit Hint.</a:t>
             </a:r>
           </a:p>
         </p:txBody>
@@ -4552,21 +4992,277 @@
                 </a:solidFill>
                 <a:latin typeface="Calibri"/>
               </a:rPr>
-              <a:t>12 · Security im Alltag + VPS</a:t>
-            </a:r>
-          </a:p>
-        </p:txBody>
-      </p:sp>
-      <p:sp>
-        <p:nvSpPr>
-          <p:cNvPr id="4" name="TextBox 3"/>
+              <a:t>9–10 · Memory, Sessions &amp; Continuous Learning</a:t>
+            </a:r>
+          </a:p>
+        </p:txBody>
+      </p:sp>
+      <p:graphicFrame>
+        <p:nvGraphicFramePr>
+          <p:cNvPr id="4" name="Table 3"/>
+          <p:cNvGraphicFramePr>
+            <a:graphicFrameLocks noGrp="1"/>
+          </p:cNvGraphicFramePr>
+          <p:nvPr/>
+        </p:nvGraphicFramePr>
+        <p:xfrm>
+          <a:off x="640080" y="1371600"/>
+          <a:ext cx="10972800" cy="2560320"/>
+        </p:xfrm>
+        <a:graphic>
+          <a:graphicData uri="http://schemas.openxmlformats.org/drawingml/2006/table">
+            <a:tbl>
+              <a:tblPr firstRow="1" bandRow="1">
+                <a:tableStyleId>{5C22544A-7EE6-4342-B048-85BDC9FD1C3A}</a:tableStyleId>
+              </a:tblPr>
+              <a:tblGrid>
+                <a:gridCol w="4754880"/>
+                <a:gridCol w="6217920"/>
+              </a:tblGrid>
+              <a:tr h="512064">
+                <a:tc>
+                  <a:txBody>
+                    <a:bodyPr wrap="square"/>
+                    <a:lstStyle/>
+                    <a:p>
+                      <a:r>
+                        <a:rPr sz="1300" b="1">
+                          <a:solidFill>
+                            <a:srgbClr val="FFFFFF"/>
+                          </a:solidFill>
+                          <a:latin typeface="Calibri"/>
+                        </a:rPr>
+                        <a:t>Command</a:t>
+                      </a:r>
+                    </a:p>
+                  </a:txBody>
+                  <a:tcPr marT="18288" marB="18288">
+                    <a:solidFill>
+                      <a:srgbClr val="312E81"/>
+                    </a:solidFill>
+                  </a:tcPr>
+                </a:tc>
+                <a:tc>
+                  <a:txBody>
+                    <a:bodyPr wrap="square"/>
+                    <a:lstStyle/>
+                    <a:p>
+                      <a:r>
+                        <a:rPr sz="1300" b="1">
+                          <a:solidFill>
+                            <a:srgbClr val="FFFFFF"/>
+                          </a:solidFill>
+                          <a:latin typeface="Calibri"/>
+                        </a:rPr>
+                        <a:t>Zweck</a:t>
+                      </a:r>
+                    </a:p>
+                  </a:txBody>
+                  <a:tcPr marT="18288" marB="18288">
+                    <a:solidFill>
+                      <a:srgbClr val="312E81"/>
+                    </a:solidFill>
+                  </a:tcPr>
+                </a:tc>
+              </a:tr>
+              <a:tr h="512064">
+                <a:tc>
+                  <a:txBody>
+                    <a:bodyPr wrap="square"/>
+                    <a:lstStyle/>
+                    <a:p>
+                      <a:r>
+                        <a:rPr sz="1300">
+                          <a:solidFill>
+                            <a:srgbClr val="1F2937"/>
+                          </a:solidFill>
+                          <a:latin typeface="Calibri"/>
+                        </a:rPr>
+                        <a:t>/save-session · /resume-session</a:t>
+                      </a:r>
+                    </a:p>
+                  </a:txBody>
+                  <a:tcPr marT="18288" marB="18288">
+                    <a:solidFill>
+                      <a:srgbClr val="F3F4F6"/>
+                    </a:solidFill>
+                  </a:tcPr>
+                </a:tc>
+                <a:tc>
+                  <a:txBody>
+                    <a:bodyPr wrap="square"/>
+                    <a:lstStyle/>
+                    <a:p>
+                      <a:r>
+                        <a:rPr sz="1300">
+                          <a:solidFill>
+                            <a:srgbClr val="1F2937"/>
+                          </a:solidFill>
+                          <a:latin typeface="Calibri"/>
+                        </a:rPr>
+                        <a:t>Tag-zu-Tag-Fortschritt persistieren</a:t>
+                      </a:r>
+                    </a:p>
+                  </a:txBody>
+                  <a:tcPr marT="18288" marB="18288">
+                    <a:solidFill>
+                      <a:srgbClr val="F3F4F6"/>
+                    </a:solidFill>
+                  </a:tcPr>
+                </a:tc>
+              </a:tr>
+              <a:tr h="512064">
+                <a:tc>
+                  <a:txBody>
+                    <a:bodyPr wrap="square"/>
+                    <a:lstStyle/>
+                    <a:p>
+                      <a:r>
+                        <a:rPr sz="1300">
+                          <a:solidFill>
+                            <a:srgbClr val="1F2937"/>
+                          </a:solidFill>
+                          <a:latin typeface="Calibri"/>
+                        </a:rPr>
+                        <a:t>/sessions · /checkpoint · /aside</a:t>
+                      </a:r>
+                    </a:p>
+                  </a:txBody>
+                  <a:tcPr marT="18288" marB="18288">
+                    <a:solidFill>
+                      <a:srgbClr val="FFFFFF"/>
+                    </a:solidFill>
+                  </a:tcPr>
+                </a:tc>
+                <a:tc>
+                  <a:txBody>
+                    <a:bodyPr wrap="square"/>
+                    <a:lstStyle/>
+                    <a:p>
+                      <a:r>
+                        <a:rPr sz="1300">
+                          <a:solidFill>
+                            <a:srgbClr val="1F2937"/>
+                          </a:solidFill>
+                          <a:latin typeface="Calibri"/>
+                        </a:rPr>
+                        <a:t>Historie · Checkpoint · Nebenfrage</a:t>
+                      </a:r>
+                    </a:p>
+                  </a:txBody>
+                  <a:tcPr marT="18288" marB="18288">
+                    <a:solidFill>
+                      <a:srgbClr val="FFFFFF"/>
+                    </a:solidFill>
+                  </a:tcPr>
+                </a:tc>
+              </a:tr>
+              <a:tr h="512064">
+                <a:tc>
+                  <a:txBody>
+                    <a:bodyPr wrap="square"/>
+                    <a:lstStyle/>
+                    <a:p>
+                      <a:r>
+                        <a:rPr sz="1300">
+                          <a:solidFill>
+                            <a:srgbClr val="1F2937"/>
+                          </a:solidFill>
+                          <a:latin typeface="Calibri"/>
+                        </a:rPr>
+                        <a:t>/learn-eval → /evolve → /promote</a:t>
+                      </a:r>
+                    </a:p>
+                  </a:txBody>
+                  <a:tcPr marT="18288" marB="18288">
+                    <a:solidFill>
+                      <a:srgbClr val="F3F4F6"/>
+                    </a:solidFill>
+                  </a:tcPr>
+                </a:tc>
+                <a:tc>
+                  <a:txBody>
+                    <a:bodyPr wrap="square"/>
+                    <a:lstStyle/>
+                    <a:p>
+                      <a:r>
+                        <a:rPr sz="1300">
+                          <a:solidFill>
+                            <a:srgbClr val="1F2937"/>
+                          </a:solidFill>
+                          <a:latin typeface="Calibri"/>
+                        </a:rPr>
+                        <a:t>Self-Improvement-Loop (Instincts)</a:t>
+                      </a:r>
+                    </a:p>
+                  </a:txBody>
+                  <a:tcPr marT="18288" marB="18288">
+                    <a:solidFill>
+                      <a:srgbClr val="F3F4F6"/>
+                    </a:solidFill>
+                  </a:tcPr>
+                </a:tc>
+              </a:tr>
+              <a:tr h="512064">
+                <a:tc>
+                  <a:txBody>
+                    <a:bodyPr wrap="square"/>
+                    <a:lstStyle/>
+                    <a:p>
+                      <a:r>
+                        <a:rPr sz="1300">
+                          <a:solidFill>
+                            <a:srgbClr val="1F2937"/>
+                          </a:solidFill>
+                          <a:latin typeface="Calibri"/>
+                        </a:rPr>
+                        <a:t>/instinct-status · /skill-create</a:t>
+                      </a:r>
+                    </a:p>
+                  </a:txBody>
+                  <a:tcPr marT="18288" marB="18288">
+                    <a:solidFill>
+                      <a:srgbClr val="FFFFFF"/>
+                    </a:solidFill>
+                  </a:tcPr>
+                </a:tc>
+                <a:tc>
+                  <a:txBody>
+                    <a:bodyPr wrap="square"/>
+                    <a:lstStyle/>
+                    <a:p>
+                      <a:r>
+                        <a:rPr sz="1300">
+                          <a:solidFill>
+                            <a:srgbClr val="1F2937"/>
+                          </a:solidFill>
+                          <a:latin typeface="Calibri"/>
+                        </a:rPr>
+                        <a:t>Instincts zeigen · Skill aus Git-History</a:t>
+                      </a:r>
+                    </a:p>
+                  </a:txBody>
+                  <a:tcPr marT="18288" marB="18288">
+                    <a:solidFill>
+                      <a:srgbClr val="FFFFFF"/>
+                    </a:solidFill>
+                  </a:tcPr>
+                </a:tc>
+              </a:tr>
+            </a:tbl>
+          </a:graphicData>
+        </a:graphic>
+      </p:graphicFrame>
+      <p:sp>
+        <p:nvSpPr>
+          <p:cNvPr id="5" name="TextBox 4"/>
           <p:cNvSpPr txBox="1"/>
           <p:nvPr/>
         </p:nvSpPr>
         <p:spPr>
           <a:xfrm>
-            <a:off x="640080" y="1234440"/>
-            <a:ext cx="10972800" cy="2377440"/>
+            <a:off x="640080" y="4206240"/>
+            <a:ext cx="10972800" cy="1463040"/>
           </a:xfrm>
           <a:prstGeom prst="rect">
             <a:avLst/>
@@ -4581,132 +5277,25 @@
           <a:p>
             <a:pPr/>
             <a:r>
-              <a:rPr sz="1600" b="1">
+              <a:rPr sz="1500" b="1">
+                <a:solidFill>
+                  <a:srgbClr val="F59E0B"/>
+                </a:solidFill>
+                <a:latin typeface="Calibri"/>
+              </a:rPr>
+              <a:t>EINE primäre Memory-Quelle je Projekt (claude-mem-Koexistenz). Keine Secrets in Memory.</a:t>
+            </a:r>
+          </a:p>
+          <a:p>
+            <a:pPr/>
+            <a:r>
+              <a:rPr sz="1500" b="0">
                 <a:solidFill>
                   <a:srgbClr val="312E81"/>
                 </a:solidFill>
                 <a:latin typeface="Calibri"/>
               </a:rPr>
-              <a:t>Aktiv / sicher:</a:t>
-            </a:r>
-          </a:p>
-          <a:p>
-            <a:pPr lvl="1"/>
-            <a:r>
-              <a:rPr sz="1300" b="0">
-                <a:solidFill>
-                  <a:srgbClr val="1F2937"/>
-                </a:solidFill>
-                <a:latin typeface="Calibri"/>
-              </a:rPr>
-              <a:t>RTK-Hook — PreToolUse:Bash bleibt unangetastet — Token-Ersparnis global.</a:t>
-            </a:r>
-          </a:p>
-          <a:p>
-            <a:pPr lvl="1"/>
-            <a:r>
-              <a:rPr sz="1300" b="0">
-                <a:solidFill>
-                  <a:srgbClr val="1F2937"/>
-                </a:solidFill>
-                <a:latin typeface="Calibri"/>
-              </a:rPr>
-              <a:t>ECC namespace-sicher — rules/ecc/, skills/ecc/ — keine Kollision mit Eigenem.</a:t>
-            </a:r>
-          </a:p>
-          <a:p>
-            <a:pPr lvl="1"/>
-            <a:r>
-              <a:rPr sz="1300" b="0">
-                <a:solidFill>
-                  <a:srgbClr val="1F2937"/>
-                </a:solidFill>
-                <a:latin typeface="Calibri"/>
-              </a:rPr>
-              <a:t>settings.json unberührt — kein Auto-Edit der Startup-Config; nur additiv via ./install-vps.sh --harden.</a:t>
-            </a:r>
-          </a:p>
-        </p:txBody>
-      </p:sp>
-      <p:sp>
-        <p:nvSpPr>
-          <p:cNvPr id="5" name="TextBox 4"/>
-          <p:cNvSpPr txBox="1"/>
-          <p:nvPr/>
-        </p:nvSpPr>
-        <p:spPr>
-          <a:xfrm>
-            <a:off x="640080" y="3657600"/>
-            <a:ext cx="10972800" cy="2560320"/>
-          </a:xfrm>
-          <a:prstGeom prst="rect">
-            <a:avLst/>
-          </a:prstGeom>
-          <a:noFill/>
-        </p:spPr>
-        <p:txBody>
-          <a:bodyPr wrap="none">
-            <a:spAutoFit/>
-          </a:bodyPr>
-          <a:lstStyle/>
-          <a:p>
-            <a:pPr/>
-            <a:r>
-              <a:rPr sz="1600" b="1">
-                <a:solidFill>
-                  <a:srgbClr val="F59E0B"/>
-                </a:solidFill>
-                <a:latin typeface="Calibri"/>
-              </a:rPr>
-              <a:t>Bewusst opt-in (Least-Agency):</a:t>
-            </a:r>
-          </a:p>
-          <a:p>
-            <a:pPr lvl="1"/>
-            <a:r>
-              <a:rPr sz="1300" b="0">
-                <a:solidFill>
-                  <a:srgbClr val="1F2937"/>
-                </a:solidFill>
-                <a:latin typeface="Calibri"/>
-              </a:rPr>
-              <a:t>ECC-Hooks INAKTIV — Repo-kontrollierte Hooks nicht blind aktiv. Bewusst aktivieren nach Sichtung von hooks.json.</a:t>
-            </a:r>
-          </a:p>
-          <a:p>
-            <a:pPr lvl="1"/>
-            <a:r>
-              <a:rPr sz="1300" b="0">
-                <a:solidFill>
-                  <a:srgbClr val="1F2937"/>
-                </a:solidFill>
-                <a:latin typeface="Calibri"/>
-              </a:rPr>
-              <a:t>deny-Baseline opt-in — ./install-vps.sh --harden ergänzt rm -rf / force-push / Secret-Reads (mit Backup).</a:t>
-            </a:r>
-          </a:p>
-          <a:p>
-            <a:pPr lvl="1"/>
-            <a:r>
-              <a:rPr sz="1300" b="0">
-                <a:solidFill>
-                  <a:srgbClr val="1F2937"/>
-                </a:solidFill>
-                <a:latin typeface="Calibri"/>
-              </a:rPr>
-              <a:t>AgentShield — npx ecc-agentshield scan lädt externes Paket — selbst vetten, dann ausführen.</a:t>
-            </a:r>
-          </a:p>
-          <a:p>
-            <a:pPr/>
-            <a:r>
-              <a:rPr sz="1300" b="0">
-                <a:solidFill>
-                  <a:srgbClr val="312E81"/>
-                </a:solidFill>
-                <a:latin typeface="Calibri"/>
-              </a:rPr>
-              <a:t>VPS-weit: ECC global → Hooks bleiben inaktiv bis zur bewussten Aktivierung. Härtung: ./install-vps.sh --harden.</a:t>
+              <a:t>Routine: Session-Ende → /learn-eval → /evolve → /promote.</a:t>
             </a:r>
           </a:p>
         </p:txBody>
@@ -4722,14 +5311,6 @@
 <file path=ppt/slides/slide13.xml><?xml version="1.0" encoding="utf-8"?>
 <p:sld xmlns:a="http://schemas.openxmlformats.org/drawingml/2006/main" xmlns:p="http://schemas.openxmlformats.org/presentationml/2006/main" xmlns:r="http://schemas.openxmlformats.org/officeDocument/2006/relationships">
   <p:cSld>
-    <p:bg>
-      <p:bgPr>
-        <a:solidFill>
-          <a:srgbClr val="1E1B4B"/>
-        </a:solidFill>
-        <a:effectLst/>
-      </p:bgPr>
-    </p:bg>
     <p:spTree>
       <p:nvGrpSpPr>
         <p:cNvPr id="1" name=""/>
@@ -4788,8 +5369,8 @@
         </p:nvSpPr>
         <p:spPr>
           <a:xfrm>
-            <a:off x="731520" y="548640"/>
-            <a:ext cx="10698480" cy="822960"/>
+            <a:off x="548640" y="320040"/>
+            <a:ext cx="11064240" cy="822960"/>
           </a:xfrm>
           <a:prstGeom prst="rect">
             <a:avLst/>
@@ -4806,11 +5387,11 @@
             <a:r>
               <a:rPr sz="2800" b="1">
                 <a:solidFill>
-                  <a:srgbClr val="FFFFFF"/>
+                  <a:srgbClr val="312E81"/>
                 </a:solidFill>
                 <a:latin typeface="Calibri"/>
               </a:rPr>
-              <a:t>Quellen &amp; TL;DR</a:t>
+              <a:t>12 · Security im Alltag + VPS</a:t>
             </a:r>
           </a:p>
         </p:txBody>
@@ -4823,8 +5404,8 @@
         </p:nvSpPr>
         <p:spPr>
           <a:xfrm>
-            <a:off x="731520" y="1463040"/>
-            <a:ext cx="10698480" cy="2011680"/>
+            <a:off x="640080" y="1234440"/>
+            <a:ext cx="10972800" cy="2377440"/>
           </a:xfrm>
           <a:prstGeom prst="rect">
             <a:avLst/>
@@ -4839,49 +5420,49 @@
           <a:p>
             <a:pPr/>
             <a:r>
-              <a:rPr sz="1500" b="1">
+              <a:rPr sz="1600" b="1">
                 <a:solidFill>
-                  <a:srgbClr val="06B6D4"/>
+                  <a:srgbClr val="312E81"/>
                 </a:solidFill>
                 <a:latin typeface="Calibri"/>
               </a:rPr>
-              <a:t>Guides von @affaanmustafa (X-Threads; lokal unter ecc/):</a:t>
-            </a:r>
-          </a:p>
-          <a:p>
-            <a:pPr/>
-            <a:r>
-              <a:rPr sz="1200" b="0">
+              <a:t>Aktiv / sicher:</a:t>
+            </a:r>
+          </a:p>
+          <a:p>
+            <a:pPr lvl="1"/>
+            <a:r>
+              <a:rPr sz="1300" b="0">
                 <a:solidFill>
-                  <a:srgbClr val="FFFFFF"/>
+                  <a:srgbClr val="1F2937"/>
                 </a:solidFill>
                 <a:latin typeface="Calibri"/>
               </a:rPr>
-              <a:t>Shortform: https://x.com/affaanmustafa/status/2012378465664745795</a:t>
-            </a:r>
-          </a:p>
-          <a:p>
-            <a:pPr/>
-            <a:r>
-              <a:rPr sz="1200" b="0">
+              <a:t>RTK-Hook — PreToolUse:Bash bleibt unangetastet — Token-Ersparnis global.</a:t>
+            </a:r>
+          </a:p>
+          <a:p>
+            <a:pPr lvl="1"/>
+            <a:r>
+              <a:rPr sz="1300" b="0">
                 <a:solidFill>
-                  <a:srgbClr val="FFFFFF"/>
+                  <a:srgbClr val="1F2937"/>
                 </a:solidFill>
                 <a:latin typeface="Calibri"/>
               </a:rPr>
-              <a:t>Longform:  https://x.com/affaanmustafa/status/2014040193557471352</a:t>
-            </a:r>
-          </a:p>
-          <a:p>
-            <a:pPr/>
-            <a:r>
-              <a:rPr sz="1200" b="0">
+              <a:t>ECC namespace-sicher — rules/ecc/, skills/ecc/ — keine Kollision mit Eigenem.</a:t>
+            </a:r>
+          </a:p>
+          <a:p>
+            <a:pPr lvl="1"/>
+            <a:r>
+              <a:rPr sz="1300" b="0">
                 <a:solidFill>
-                  <a:srgbClr val="FFFFFF"/>
+                  <a:srgbClr val="1F2937"/>
                 </a:solidFill>
                 <a:latin typeface="Calibri"/>
               </a:rPr>
-              <a:t>Security:  https://x.com/affaanmustafa/status/2033263813387223421</a:t>
+              <a:t>settings.json unberührt — kein Auto-Edit der Startup-Config; nur additiv via ./install-vps.sh --harden.</a:t>
             </a:r>
           </a:p>
         </p:txBody>
@@ -4894,8 +5475,8 @@
         </p:nvSpPr>
         <p:spPr>
           <a:xfrm>
-            <a:off x="731520" y="3566160"/>
-            <a:ext cx="10698480" cy="2926080"/>
+            <a:off x="640080" y="3657600"/>
+            <a:ext cx="10972800" cy="2560320"/>
           </a:xfrm>
           <a:prstGeom prst="rect">
             <a:avLst/>
@@ -4912,47 +5493,47 @@
             <a:r>
               <a:rPr sz="1600" b="1">
                 <a:solidFill>
-                  <a:srgbClr val="06B6D4"/>
+                  <a:srgbClr val="F59E0B"/>
                 </a:solidFill>
                 <a:latin typeface="Calibri"/>
               </a:rPr>
-              <a:t>TL;DR — wie der Erfinder:</a:t>
-            </a:r>
-          </a:p>
-          <a:p>
-            <a:pPr/>
+              <a:t>Bewusst opt-in (Least-Agency):</a:t>
+            </a:r>
+          </a:p>
+          <a:p>
+            <a:pPr lvl="1"/>
             <a:r>
               <a:rPr sz="1300" b="0">
                 <a:solidFill>
-                  <a:srgbClr val="FFFFFF"/>
+                  <a:srgbClr val="1F2937"/>
                 </a:solidFill>
                 <a:latin typeface="Calibri"/>
               </a:rPr>
-              <a:t>1. In Phasen: Research → /plan → /feature-dev+TDD → /code-review → Verify.</a:t>
-            </a:r>
-          </a:p>
-          <a:p>
-            <a:pPr/>
+              <a:t>ECC-Hooks INAKTIV — Repo-kontrollierte Hooks nicht blind aktiv. Bewusst aktivieren nach Sichtung von hooks.json.</a:t>
+            </a:r>
+          </a:p>
+          <a:p>
+            <a:pPr lvl="1"/>
             <a:r>
               <a:rPr sz="1300" b="0">
                 <a:solidFill>
-                  <a:srgbClr val="FFFFFF"/>
+                  <a:srgbClr val="1F2937"/>
                 </a:solidFill>
                 <a:latin typeface="Calibri"/>
               </a:rPr>
-              <a:t>2. Kontext sauber: &lt;10 MCPs, billigstes Modell, modulare Dateien, strategisch compacten.</a:t>
-            </a:r>
-          </a:p>
-          <a:p>
-            <a:pPr/>
+              <a:t>deny-Baseline opt-in — ./install-vps.sh --harden ergänzt rm -rf / force-push / Secret-Reads (mit Backup).</a:t>
+            </a:r>
+          </a:p>
+          <a:p>
+            <a:pPr lvl="1"/>
             <a:r>
               <a:rPr sz="1300" b="0">
                 <a:solidFill>
-                  <a:srgbClr val="FFFFFF"/>
+                  <a:srgbClr val="1F2937"/>
                 </a:solidFill>
                 <a:latin typeface="Calibri"/>
               </a:rPr>
-              <a:t>3. Persistieren: /save-session · /resume-session.   4. Lernen: /learn-eval → /evolve → /promote.</a:t>
+              <a:t>AgentShield — npx ecc-agentshield scan lädt externes Paket — selbst vetten, dann ausführen.</a:t>
             </a:r>
           </a:p>
           <a:p>
@@ -4960,23 +5541,11 @@
             <a:r>
               <a:rPr sz="1300" b="0">
                 <a:solidFill>
-                  <a:srgbClr val="FFFFFF"/>
+                  <a:srgbClr val="312E81"/>
                 </a:solidFill>
                 <a:latin typeface="Calibri"/>
               </a:rPr>
-              <a:t>5. Security zuerst: RTK aktiv, Hooks/AgentShield bewusst, nie blind ausführen.</a:t>
-            </a:r>
-          </a:p>
-          <a:p>
-            <a:pPr/>
-            <a:r>
-              <a:rPr sz="1300" b="0">
-                <a:solidFill>
-                  <a:srgbClr val="FFFFFF"/>
-                </a:solidFill>
-                <a:latin typeface="Calibri"/>
-              </a:rPr>
-              <a:t>6. Unsicher? /ecc-guide · ecc doctor · die drei Original-Guides.</a:t>
+              <a:t>VPS-weit: ECC global → Hooks bleiben inaktiv bis zur bewussten Aktivierung. Härtung: ./install-vps.sh --harden.</a:t>
             </a:r>
           </a:p>
         </p:txBody>
@@ -4989,9 +5558,17 @@
 </p:sld>
 </file>
 
-<file path=ppt/slides/slide2.xml><?xml version="1.0" encoding="utf-8"?>
+<file path=ppt/slides/slide14.xml><?xml version="1.0" encoding="utf-8"?>
 <p:sld xmlns:a="http://schemas.openxmlformats.org/drawingml/2006/main" xmlns:p="http://schemas.openxmlformats.org/presentationml/2006/main" xmlns:r="http://schemas.openxmlformats.org/officeDocument/2006/relationships">
   <p:cSld>
+    <p:bg>
+      <p:bgPr>
+        <a:solidFill>
+          <a:srgbClr val="1E1B4B"/>
+        </a:solidFill>
+        <a:effectLst/>
+      </p:bgPr>
+    </p:bg>
     <p:spTree>
       <p:nvGrpSpPr>
         <p:cNvPr id="1" name=""/>
@@ -5050,8 +5627,8 @@
         </p:nvSpPr>
         <p:spPr>
           <a:xfrm>
-            <a:off x="548640" y="320040"/>
-            <a:ext cx="11064240" cy="822960"/>
+            <a:off x="731520" y="548640"/>
+            <a:ext cx="10698480" cy="822960"/>
           </a:xfrm>
           <a:prstGeom prst="rect">
             <a:avLst/>
@@ -5068,11 +5645,11 @@
             <a:r>
               <a:rPr sz="2800" b="1">
                 <a:solidFill>
-                  <a:srgbClr val="312E81"/>
+                  <a:srgbClr val="FFFFFF"/>
                 </a:solidFill>
                 <a:latin typeface="Calibri"/>
               </a:rPr>
-              <a:t>1 · Was ist dieses Harness?</a:t>
+              <a:t>Quellen &amp; TL;DR</a:t>
             </a:r>
           </a:p>
         </p:txBody>
@@ -5085,8 +5662,8 @@
         </p:nvSpPr>
         <p:spPr>
           <a:xfrm>
-            <a:off x="640080" y="1280160"/>
-            <a:ext cx="10972800" cy="5029200"/>
+            <a:off x="731520" y="1463040"/>
+            <a:ext cx="10698480" cy="2011680"/>
           </a:xfrm>
           <a:prstGeom prst="rect">
             <a:avLst/>
@@ -5101,97 +5678,144 @@
           <a:p>
             <a:pPr/>
             <a:r>
-              <a:rPr sz="1800" b="1">
+              <a:rPr sz="1500" b="1">
                 <a:solidFill>
-                  <a:srgbClr val="312E81"/>
+                  <a:srgbClr val="06B6D4"/>
                 </a:solidFill>
                 <a:latin typeface="Calibri"/>
               </a:rPr>
-              <a:t>Fusion zweier Systeme — Fokus auf ECC:</a:t>
-            </a:r>
-          </a:p>
-          <a:p>
-            <a:pPr lvl="1"/>
-            <a:r>
-              <a:rPr sz="1500" b="0">
+              <a:t>Guides von @affaanmustafa (X-Threads; lokal unter ecc/):</a:t>
+            </a:r>
+          </a:p>
+          <a:p>
+            <a:pPr/>
+            <a:r>
+              <a:rPr sz="1200" b="0">
                 <a:solidFill>
-                  <a:srgbClr val="1F2937"/>
+                  <a:srgbClr val="FFFFFF"/>
                 </a:solidFill>
                 <a:latin typeface="Calibri"/>
               </a:rPr>
-              <a:t>ECC (Everything Claude Code) — die Engine: 63 Agents, ~79 Skills, 79 Commands, 21 Rule-Packs,</a:t>
-            </a:r>
-          </a:p>
-          <a:p>
-            <a:pPr lvl="2"/>
-            <a:r>
-              <a:rPr sz="1500" b="0">
+              <a:t>Shortform: https://x.com/affaanmustafa/status/2012378465664745795</a:t>
+            </a:r>
+          </a:p>
+          <a:p>
+            <a:pPr/>
+            <a:r>
+              <a:rPr sz="1200" b="0">
                 <a:solidFill>
-                  <a:srgbClr val="1F2937"/>
+                  <a:srgbClr val="FFFFFF"/>
                 </a:solidFill>
                 <a:latin typeface="Calibri"/>
               </a:rPr>
-              <a:t>manifest-Installer, Continuous Learning, Security-Scanning.</a:t>
-            </a:r>
-          </a:p>
-          <a:p>
-            <a:pPr lvl="1"/>
-            <a:r>
-              <a:rPr sz="1500" b="0">
+              <a:t>Longform:  https://x.com/affaanmustafa/status/2014040193557471352</a:t>
+            </a:r>
+          </a:p>
+          <a:p>
+            <a:pPr/>
+            <a:r>
+              <a:rPr sz="1200" b="0">
                 <a:solidFill>
-                  <a:srgbClr val="1F2937"/>
+                  <a:srgbClr val="FFFFFF"/>
                 </a:solidFill>
                 <a:latin typeface="Calibri"/>
               </a:rPr>
-              <a:t>BestPractice-Extras — /ecc-onboard (One-Shot-Setup), state/-Pattern, Karpathy-Prinzipien.</a:t>
-            </a:r>
-          </a:p>
+              <a:t>Security:  https://x.com/affaanmustafa/status/2033263813387223421</a:t>
+            </a:r>
+          </a:p>
+        </p:txBody>
+      </p:sp>
+      <p:sp>
+        <p:nvSpPr>
+          <p:cNvPr id="5" name="TextBox 4"/>
+          <p:cNvSpPr txBox="1"/>
+          <p:nvPr/>
+        </p:nvSpPr>
+        <p:spPr>
+          <a:xfrm>
+            <a:off x="731520" y="3566160"/>
+            <a:ext cx="10698480" cy="2926080"/>
+          </a:xfrm>
+          <a:prstGeom prst="rect">
+            <a:avLst/>
+          </a:prstGeom>
+          <a:noFill/>
+        </p:spPr>
+        <p:txBody>
+          <a:bodyPr wrap="none">
+            <a:spAutoFit/>
+          </a:bodyPr>
+          <a:lstStyle/>
           <a:p>
             <a:pPr/>
             <a:r>
-              <a:rPr sz="800" b="0">
+              <a:rPr sz="1600" b="1">
                 <a:solidFill>
-                  <a:srgbClr val="1F2937"/>
+                  <a:srgbClr val="06B6D4"/>
                 </a:solidFill>
                 <a:latin typeface="Calibri"/>
               </a:rPr>
-              <a:t/>
+              <a:t>TL;DR — wie der Erfinder:</a:t>
             </a:r>
           </a:p>
           <a:p>
             <a:pPr/>
             <a:r>
-              <a:rPr sz="1800" b="1">
+              <a:rPr sz="1300" b="0">
                 <a:solidFill>
-                  <a:srgbClr val="F59E0B"/>
+                  <a:srgbClr val="FFFFFF"/>
                 </a:solidFill>
                 <a:latin typeface="Calibri"/>
               </a:rPr>
-              <a:t>„Konfiguration ist Fine-Tuning, nicht Architektur."</a:t>
+              <a:t>1. In Phasen: Research → /plan → /feature-dev+TDD → /code-review → Verify.</a:t>
             </a:r>
           </a:p>
           <a:p>
             <a:pPr/>
             <a:r>
-              <a:rPr sz="1400" b="0">
+              <a:rPr sz="1300" b="0">
                 <a:solidFill>
-                  <a:srgbClr val="C7D2FE"/>
+                  <a:srgbClr val="FFFFFF"/>
                 </a:solidFill>
                 <a:latin typeface="Calibri"/>
               </a:rPr>
-              <a:t>Wiederverwendbare Muster · sauberer Kontext · billigstes Modell · Verifikation mit Evidenz · Security zuerst.</a:t>
+              <a:t>2. Kontext sauber: &lt;10 MCPs, billigstes Modell, modulare Dateien, strategisch compacten.</a:t>
             </a:r>
           </a:p>
           <a:p>
             <a:pPr/>
             <a:r>
-              <a:rPr sz="1400" b="0">
+              <a:rPr sz="1300" b="0">
                 <a:solidFill>
-                  <a:srgbClr val="312E81"/>
+                  <a:srgbClr val="FFFFFF"/>
                 </a:solidFill>
                 <a:latin typeface="Calibri"/>
               </a:rPr>
-              <a:t>5 Prinzipien: Agent-First · Test-Driven · Security-First · Immutability · Plan-Before-Execute.</a:t>
+              <a:t>3. Persistieren: /save-session · /resume-session.   4. Lernen: /learn-eval → /evolve → /promote.</a:t>
+            </a:r>
+          </a:p>
+          <a:p>
+            <a:pPr/>
+            <a:r>
+              <a:rPr sz="1300" b="0">
+                <a:solidFill>
+                  <a:srgbClr val="FFFFFF"/>
+                </a:solidFill>
+                <a:latin typeface="Calibri"/>
+              </a:rPr>
+              <a:t>5. Security zuerst: RTK aktiv, Hooks/AgentShield bewusst, nie blind ausführen.</a:t>
+            </a:r>
+          </a:p>
+          <a:p>
+            <a:pPr/>
+            <a:r>
+              <a:rPr sz="1300" b="0">
+                <a:solidFill>
+                  <a:srgbClr val="FFFFFF"/>
+                </a:solidFill>
+                <a:latin typeface="Calibri"/>
+              </a:rPr>
+              <a:t>6. Unsicher? /ecc-guide · ecc doctor · die drei Original-Guides.</a:t>
             </a:r>
           </a:p>
         </p:txBody>
@@ -5204,7 +5828,7 @@
 </p:sld>
 </file>
 
-<file path=ppt/slides/slide3.xml><?xml version="1.0" encoding="utf-8"?>
+<file path=ppt/slides/slide2.xml><?xml version="1.0" encoding="utf-8"?>
 <p:sld xmlns:a="http://schemas.openxmlformats.org/drawingml/2006/main" xmlns:p="http://schemas.openxmlformats.org/presentationml/2006/main" xmlns:r="http://schemas.openxmlformats.org/officeDocument/2006/relationships">
   <p:cSld>
     <p:spTree>
@@ -5287,7 +5911,7 @@
                 </a:solidFill>
                 <a:latin typeface="Calibri"/>
               </a:rPr>
-              <a:t>2 · Setup &amp; VPS-Architektur</a:t>
+              <a:t>1 · Was ist dieses Harness?</a:t>
             </a:r>
           </a:p>
         </p:txBody>
@@ -5300,8 +5924,8 @@
         </p:nvSpPr>
         <p:spPr>
           <a:xfrm>
-            <a:off x="640080" y="1234440"/>
-            <a:ext cx="10972800" cy="1920240"/>
+            <a:off x="640080" y="1280160"/>
+            <a:ext cx="10972800" cy="5029200"/>
           </a:xfrm>
           <a:prstGeom prst="rect">
             <a:avLst/>
@@ -5316,408 +5940,101 @@
           <a:p>
             <a:pPr/>
             <a:r>
-              <a:rPr sz="1600" b="1">
+              <a:rPr sz="1800" b="1">
                 <a:solidFill>
                   <a:srgbClr val="312E81"/>
                 </a:solidFill>
                 <a:latin typeface="Calibri"/>
               </a:rPr>
-              <a:t>ECC ist GLOBAL (~/.claude) → aktiv in JEDEM VPS-Projekt (WMS, Jarvis, n8n …).</a:t>
-            </a:r>
-          </a:p>
-          <a:p>
-            <a:pPr/>
-            <a:r>
-              <a:rPr sz="1400" b="0">
+              <a:t>Fusion zweier Systeme — Fokus auf ECC:</a:t>
+            </a:r>
+          </a:p>
+          <a:p>
+            <a:pPr lvl="1"/>
+            <a:r>
+              <a:rPr sz="1500" b="0">
                 <a:solidFill>
                   <a:srgbClr val="1F2937"/>
                 </a:solidFill>
                 <a:latin typeface="Calibri"/>
               </a:rPr>
-              <a:t>Namespace-sicher (rules/ecc, skills/ecc) · RTK-Hook unangetastet · Installer additiv.</a:t>
-            </a:r>
-          </a:p>
-          <a:p>
-            <a:pPr/>
-            <a:r>
-              <a:rPr sz="1400" b="0">
+              <a:t>ECC (Everything Claude Code) — die Engine: 63 Agents, ~79 Skills, 79 Commands, 21 Rule-Packs,</a:t>
+            </a:r>
+          </a:p>
+          <a:p>
+            <a:pPr lvl="2"/>
+            <a:r>
+              <a:rPr sz="1500" b="0">
                 <a:solidFill>
                   <a:srgbClr val="1F2937"/>
                 </a:solidFill>
                 <a:latin typeface="Calibri"/>
               </a:rPr>
-              <a:t>Reproduzierbar: Repo = Quelle, Re-Install via ./install-vps.sh (idempotent, mit Backup).</a:t>
-            </a:r>
-          </a:p>
-        </p:txBody>
-      </p:sp>
-      <p:graphicFrame>
-        <p:nvGraphicFramePr>
-          <p:cNvPr id="5" name="Table 4"/>
-          <p:cNvGraphicFramePr>
-            <a:graphicFrameLocks noGrp="1"/>
-          </p:cNvGraphicFramePr>
-          <p:nvPr/>
-        </p:nvGraphicFramePr>
-        <p:xfrm>
-          <a:off x="640080" y="3291840"/>
-          <a:ext cx="10972800" cy="2377440"/>
-        </p:xfrm>
-        <a:graphic>
-          <a:graphicData uri="http://schemas.openxmlformats.org/drawingml/2006/table">
-            <a:tbl>
-              <a:tblPr firstRow="1" bandRow="1">
-                <a:tableStyleId>{5C22544A-7EE6-4342-B048-85BDC9FD1C3A}</a:tableStyleId>
-              </a:tblPr>
-              <a:tblGrid>
-                <a:gridCol w="2194560"/>
-                <a:gridCol w="3840480"/>
-                <a:gridCol w="4937760"/>
-              </a:tblGrid>
-              <a:tr h="475488">
-                <a:tc>
-                  <a:txBody>
-                    <a:bodyPr wrap="square"/>
-                    <a:lstStyle/>
-                    <a:p>
-                      <a:r>
-                        <a:rPr sz="1200" b="1">
-                          <a:solidFill>
-                            <a:srgbClr val="FFFFFF"/>
-                          </a:solidFill>
-                          <a:latin typeface="Calibri"/>
-                        </a:rPr>
-                        <a:t>Dein Tool</a:t>
-                      </a:r>
-                    </a:p>
-                  </a:txBody>
-                  <a:tcPr marT="18288" marB="18288">
-                    <a:solidFill>
-                      <a:srgbClr val="312E81"/>
-                    </a:solidFill>
-                  </a:tcPr>
-                </a:tc>
-                <a:tc>
-                  <a:txBody>
-                    <a:bodyPr wrap="square"/>
-                    <a:lstStyle/>
-                    <a:p>
-                      <a:r>
-                        <a:rPr sz="1200" b="1">
-                          <a:solidFill>
-                            <a:srgbClr val="FFFFFF"/>
-                          </a:solidFill>
-                          <a:latin typeface="Calibri"/>
-                        </a:rPr>
-                        <a:t>ECC-Pendant</a:t>
-                      </a:r>
-                    </a:p>
-                  </a:txBody>
-                  <a:tcPr marT="18288" marB="18288">
-                    <a:solidFill>
-                      <a:srgbClr val="312E81"/>
-                    </a:solidFill>
-                  </a:tcPr>
-                </a:tc>
-                <a:tc>
-                  <a:txBody>
-                    <a:bodyPr wrap="square"/>
-                    <a:lstStyle/>
-                    <a:p>
-                      <a:r>
-                        <a:rPr sz="1200" b="1">
-                          <a:solidFill>
-                            <a:srgbClr val="FFFFFF"/>
-                          </a:solidFill>
-                          <a:latin typeface="Calibri"/>
-                        </a:rPr>
-                        <a:t>Empfehlung</a:t>
-                      </a:r>
-                    </a:p>
-                  </a:txBody>
-                  <a:tcPr marT="18288" marB="18288">
-                    <a:solidFill>
-                      <a:srgbClr val="312E81"/>
-                    </a:solidFill>
-                  </a:tcPr>
-                </a:tc>
-              </a:tr>
-              <a:tr h="475488">
-                <a:tc>
-                  <a:txBody>
-                    <a:bodyPr wrap="square"/>
-                    <a:lstStyle/>
-                    <a:p>
-                      <a:r>
-                        <a:rPr sz="1200">
-                          <a:solidFill>
-                            <a:srgbClr val="1F2937"/>
-                          </a:solidFill>
-                          <a:latin typeface="Calibri"/>
-                        </a:rPr>
-                        <a:t>superpowers</a:t>
-                      </a:r>
-                    </a:p>
-                  </a:txBody>
-                  <a:tcPr marT="18288" marB="18288">
-                    <a:solidFill>
-                      <a:srgbClr val="F3F4F6"/>
-                    </a:solidFill>
-                  </a:tcPr>
-                </a:tc>
-                <a:tc>
-                  <a:txBody>
-                    <a:bodyPr wrap="square"/>
-                    <a:lstStyle/>
-                    <a:p>
-                      <a:r>
-                        <a:rPr sz="1200">
-                          <a:solidFill>
-                            <a:srgbClr val="1F2937"/>
-                          </a:solidFill>
-                          <a:latin typeface="Calibri"/>
-                        </a:rPr>
-                        <a:t>tdd-workflow, verification-loop</a:t>
-                      </a:r>
-                    </a:p>
-                  </a:txBody>
-                  <a:tcPr marT="18288" marB="18288">
-                    <a:solidFill>
-                      <a:srgbClr val="F3F4F6"/>
-                    </a:solidFill>
-                  </a:tcPr>
-                </a:tc>
-                <a:tc>
-                  <a:txBody>
-                    <a:bodyPr wrap="square"/>
-                    <a:lstStyle/>
-                    <a:p>
-                      <a:r>
-                        <a:rPr sz="1200">
-                          <a:solidFill>
-                            <a:srgbClr val="1F2937"/>
-                          </a:solidFill>
-                          <a:latin typeface="Calibri"/>
-                        </a:rPr>
-                        <a:t>beides nutzbar; ECC bevorzugen</a:t>
-                      </a:r>
-                    </a:p>
-                  </a:txBody>
-                  <a:tcPr marT="18288" marB="18288">
-                    <a:solidFill>
-                      <a:srgbClr val="F3F4F6"/>
-                    </a:solidFill>
-                  </a:tcPr>
-                </a:tc>
-              </a:tr>
-              <a:tr h="475488">
-                <a:tc>
-                  <a:txBody>
-                    <a:bodyPr wrap="square"/>
-                    <a:lstStyle/>
-                    <a:p>
-                      <a:r>
-                        <a:rPr sz="1200">
-                          <a:solidFill>
-                            <a:srgbClr val="1F2937"/>
-                          </a:solidFill>
-                          <a:latin typeface="Calibri"/>
-                        </a:rPr>
-                        <a:t>claude-mem</a:t>
-                      </a:r>
-                    </a:p>
-                  </a:txBody>
-                  <a:tcPr marT="18288" marB="18288">
-                    <a:solidFill>
-                      <a:srgbClr val="FFFFFF"/>
-                    </a:solidFill>
-                  </a:tcPr>
-                </a:tc>
-                <a:tc>
-                  <a:txBody>
-                    <a:bodyPr wrap="square"/>
-                    <a:lstStyle/>
-                    <a:p>
-                      <a:r>
-                        <a:rPr sz="1200">
-                          <a:solidFill>
-                            <a:srgbClr val="1F2937"/>
-                          </a:solidFill>
-                          <a:latin typeface="Calibri"/>
-                        </a:rPr>
-                        <a:t>/save-session, learning-v2</a:t>
-                      </a:r>
-                    </a:p>
-                  </a:txBody>
-                  <a:tcPr marT="18288" marB="18288">
-                    <a:solidFill>
-                      <a:srgbClr val="FFFFFF"/>
-                    </a:solidFill>
-                  </a:tcPr>
-                </a:tc>
-                <a:tc>
-                  <a:txBody>
-                    <a:bodyPr wrap="square"/>
-                    <a:lstStyle/>
-                    <a:p>
-                      <a:r>
-                        <a:rPr sz="1200">
-                          <a:solidFill>
-                            <a:srgbClr val="1F2937"/>
-                          </a:solidFill>
-                          <a:latin typeface="Calibri"/>
-                        </a:rPr>
-                        <a:t>primäre Memory-Quelle, auto-injiziert</a:t>
-                      </a:r>
-                    </a:p>
-                  </a:txBody>
-                  <a:tcPr marT="18288" marB="18288">
-                    <a:solidFill>
-                      <a:srgbClr val="FFFFFF"/>
-                    </a:solidFill>
-                  </a:tcPr>
-                </a:tc>
-              </a:tr>
-              <a:tr h="475488">
-                <a:tc>
-                  <a:txBody>
-                    <a:bodyPr wrap="square"/>
-                    <a:lstStyle/>
-                    <a:p>
-                      <a:r>
-                        <a:rPr sz="1200">
-                          <a:solidFill>
-                            <a:srgbClr val="1F2937"/>
-                          </a:solidFill>
-                          <a:latin typeface="Calibri"/>
-                        </a:rPr>
-                        <a:t>RTK</a:t>
-                      </a:r>
-                    </a:p>
-                  </a:txBody>
-                  <a:tcPr marT="18288" marB="18288">
-                    <a:solidFill>
-                      <a:srgbClr val="F3F4F6"/>
-                    </a:solidFill>
-                  </a:tcPr>
-                </a:tc>
-                <a:tc>
-                  <a:txBody>
-                    <a:bodyPr wrap="square"/>
-                    <a:lstStyle/>
-                    <a:p>
-                      <a:r>
-                        <a:rPr sz="1200">
-                          <a:solidFill>
-                            <a:srgbClr val="1F2937"/>
-                          </a:solidFill>
-                          <a:latin typeface="Calibri"/>
-                        </a:rPr>
-                        <a:t>Token-Ökonomie</a:t>
-                      </a:r>
-                    </a:p>
-                  </a:txBody>
-                  <a:tcPr marT="18288" marB="18288">
-                    <a:solidFill>
-                      <a:srgbClr val="F3F4F6"/>
-                    </a:solidFill>
-                  </a:tcPr>
-                </a:tc>
-                <a:tc>
-                  <a:txBody>
-                    <a:bodyPr wrap="square"/>
-                    <a:lstStyle/>
-                    <a:p>
-                      <a:r>
-                        <a:rPr sz="1200">
-                          <a:solidFill>
-                            <a:srgbClr val="1F2937"/>
-                          </a:solidFill>
-                          <a:latin typeface="Calibri"/>
-                        </a:rPr>
-                        <a:t>ergänzen sich (Bash- vs Workflow-Ebene)</a:t>
-                      </a:r>
-                    </a:p>
-                  </a:txBody>
-                  <a:tcPr marT="18288" marB="18288">
-                    <a:solidFill>
-                      <a:srgbClr val="F3F4F6"/>
-                    </a:solidFill>
-                  </a:tcPr>
-                </a:tc>
-              </a:tr>
-              <a:tr h="475488">
-                <a:tc>
-                  <a:txBody>
-                    <a:bodyPr wrap="square"/>
-                    <a:lstStyle/>
-                    <a:p>
-                      <a:r>
-                        <a:rPr sz="1200">
-                          <a:solidFill>
-                            <a:srgbClr val="1F2937"/>
-                          </a:solidFill>
-                          <a:latin typeface="Calibri"/>
-                        </a:rPr>
-                        <a:t>codex / superpowers</a:t>
-                      </a:r>
-                    </a:p>
-                  </a:txBody>
-                  <a:tcPr marT="18288" marB="18288">
-                    <a:solidFill>
-                      <a:srgbClr val="FFFFFF"/>
-                    </a:solidFill>
-                  </a:tcPr>
-                </a:tc>
-                <a:tc>
-                  <a:txBody>
-                    <a:bodyPr wrap="square"/>
-                    <a:lstStyle/>
-                    <a:p>
-                      <a:r>
-                        <a:rPr sz="1200">
-                          <a:solidFill>
-                            <a:srgbClr val="1F2937"/>
-                          </a:solidFill>
-                          <a:latin typeface="Calibri"/>
-                        </a:rPr>
-                        <a:t>diverse Skills</a:t>
-                      </a:r>
-                    </a:p>
-                  </a:txBody>
-                  <a:tcPr marT="18288" marB="18288">
-                    <a:solidFill>
-                      <a:srgbClr val="FFFFFF"/>
-                    </a:solidFill>
-                  </a:tcPr>
-                </a:tc>
-                <a:tc>
-                  <a:txBody>
-                    <a:bodyPr wrap="square"/>
-                    <a:lstStyle/>
-                    <a:p>
-                      <a:r>
-                        <a:rPr sz="1200">
-                          <a:solidFill>
-                            <a:srgbClr val="1F2937"/>
-                          </a:solidFill>
-                          <a:latin typeface="Calibri"/>
-                        </a:rPr>
-                        <a:t>eigenständig; bleiben aktiv</a:t>
-                      </a:r>
-                    </a:p>
-                  </a:txBody>
-                  <a:tcPr marT="18288" marB="18288">
-                    <a:solidFill>
-                      <a:srgbClr val="FFFFFF"/>
-                    </a:solidFill>
-                  </a:tcPr>
-                </a:tc>
-              </a:tr>
-            </a:tbl>
-          </a:graphicData>
-        </a:graphic>
-      </p:graphicFrame>
+              <a:t>manifest-Installer, Continuous Learning, Security-Scanning.</a:t>
+            </a:r>
+          </a:p>
+          <a:p>
+            <a:pPr lvl="1"/>
+            <a:r>
+              <a:rPr sz="1500" b="0">
+                <a:solidFill>
+                  <a:srgbClr val="1F2937"/>
+                </a:solidFill>
+                <a:latin typeface="Calibri"/>
+              </a:rPr>
+              <a:t>BestPractice-Extras — /ecc-onboard (One-Shot-Setup), state/-Pattern, Karpathy-Prinzipien.</a:t>
+            </a:r>
+          </a:p>
+          <a:p>
+            <a:pPr/>
+            <a:r>
+              <a:rPr sz="800" b="0">
+                <a:solidFill>
+                  <a:srgbClr val="1F2937"/>
+                </a:solidFill>
+                <a:latin typeface="Calibri"/>
+              </a:rPr>
+              <a:t/>
+            </a:r>
+          </a:p>
+          <a:p>
+            <a:pPr/>
+            <a:r>
+              <a:rPr sz="1800" b="1">
+                <a:solidFill>
+                  <a:srgbClr val="F59E0B"/>
+                </a:solidFill>
+                <a:latin typeface="Calibri"/>
+              </a:rPr>
+              <a:t>„Konfiguration ist Fine-Tuning, nicht Architektur."</a:t>
+            </a:r>
+          </a:p>
+          <a:p>
+            <a:pPr/>
+            <a:r>
+              <a:rPr sz="1400" b="0">
+                <a:solidFill>
+                  <a:srgbClr val="C7D2FE"/>
+                </a:solidFill>
+                <a:latin typeface="Calibri"/>
+              </a:rPr>
+              <a:t>Wiederverwendbare Muster · sauberer Kontext · billigstes Modell · Verifikation mit Evidenz · Security zuerst.</a:t>
+            </a:r>
+          </a:p>
+          <a:p>
+            <a:pPr/>
+            <a:r>
+              <a:rPr sz="1400" b="0">
+                <a:solidFill>
+                  <a:srgbClr val="312E81"/>
+                </a:solidFill>
+                <a:latin typeface="Calibri"/>
+              </a:rPr>
+              <a:t>5 Prinzipien: Agent-First · Test-Driven · Security-First · Immutability · Plan-Before-Execute.</a:t>
+            </a:r>
+          </a:p>
+        </p:txBody>
+      </p:sp>
     </p:spTree>
   </p:cSld>
   <p:clrMapOvr>
@@ -5726,7 +6043,7 @@
 </p:sld>
 </file>
 
-<file path=ppt/slides/slide4.xml><?xml version="1.0" encoding="utf-8"?>
+<file path=ppt/slides/slide3.xml><?xml version="1.0" encoding="utf-8"?>
 <p:sld xmlns:a="http://schemas.openxmlformats.org/drawingml/2006/main" xmlns:p="http://schemas.openxmlformats.org/presentationml/2006/main" xmlns:r="http://schemas.openxmlformats.org/officeDocument/2006/relationships">
   <p:cSld>
     <p:spTree>
@@ -5809,22 +6126,81 @@
                 </a:solidFill>
                 <a:latin typeface="Calibri"/>
               </a:rPr>
-              <a:t>3 · Mentales Modell — die Bausteine</a:t>
+              <a:t>2 · Setup &amp; VPS-Architektur</a:t>
+            </a:r>
+          </a:p>
+        </p:txBody>
+      </p:sp>
+      <p:sp>
+        <p:nvSpPr>
+          <p:cNvPr id="4" name="TextBox 3"/>
+          <p:cNvSpPr txBox="1"/>
+          <p:nvPr/>
+        </p:nvSpPr>
+        <p:spPr>
+          <a:xfrm>
+            <a:off x="640080" y="1234440"/>
+            <a:ext cx="10972800" cy="1920240"/>
+          </a:xfrm>
+          <a:prstGeom prst="rect">
+            <a:avLst/>
+          </a:prstGeom>
+          <a:noFill/>
+        </p:spPr>
+        <p:txBody>
+          <a:bodyPr wrap="none">
+            <a:spAutoFit/>
+          </a:bodyPr>
+          <a:lstStyle/>
+          <a:p>
+            <a:pPr/>
+            <a:r>
+              <a:rPr sz="1600" b="1">
+                <a:solidFill>
+                  <a:srgbClr val="312E81"/>
+                </a:solidFill>
+                <a:latin typeface="Calibri"/>
+              </a:rPr>
+              <a:t>ECC ist GLOBAL (~/.claude) → aktiv in JEDEM VPS-Projekt (WMS, Jarvis, n8n …).</a:t>
+            </a:r>
+          </a:p>
+          <a:p>
+            <a:pPr/>
+            <a:r>
+              <a:rPr sz="1400" b="0">
+                <a:solidFill>
+                  <a:srgbClr val="1F2937"/>
+                </a:solidFill>
+                <a:latin typeface="Calibri"/>
+              </a:rPr>
+              <a:t>Namespace-sicher (rules/ecc, skills/ecc) · RTK-Hook unangetastet · Installer additiv.</a:t>
+            </a:r>
+          </a:p>
+          <a:p>
+            <a:pPr/>
+            <a:r>
+              <a:rPr sz="1400" b="0">
+                <a:solidFill>
+                  <a:srgbClr val="1F2937"/>
+                </a:solidFill>
+                <a:latin typeface="Calibri"/>
+              </a:rPr>
+              <a:t>Reproduzierbar: Repo = Quelle, Re-Install via ./install-vps.sh (idempotent, mit Backup).</a:t>
             </a:r>
           </a:p>
         </p:txBody>
       </p:sp>
       <p:graphicFrame>
         <p:nvGraphicFramePr>
-          <p:cNvPr id="4" name="Table 3"/>
+          <p:cNvPr id="5" name="Table 4"/>
           <p:cNvGraphicFramePr>
             <a:graphicFrameLocks noGrp="1"/>
           </p:cNvGraphicFramePr>
           <p:nvPr/>
         </p:nvGraphicFramePr>
         <p:xfrm>
-          <a:off x="640080" y="1371600"/>
-          <a:ext cx="10972800" cy="4023360"/>
+          <a:off x="640080" y="3291840"/>
+          <a:ext cx="10972800" cy="2377440"/>
         </p:xfrm>
         <a:graphic>
           <a:graphicData uri="http://schemas.openxmlformats.org/drawingml/2006/table">
@@ -5833,24 +6209,24 @@
                 <a:tableStyleId>{5C22544A-7EE6-4342-B048-85BDC9FD1C3A}</a:tableStyleId>
               </a:tblPr>
               <a:tblGrid>
-                <a:gridCol w="1828800"/>
-                <a:gridCol w="6400800"/>
-                <a:gridCol w="2743200"/>
+                <a:gridCol w="2194560"/>
+                <a:gridCol w="3840480"/>
+                <a:gridCol w="4937760"/>
               </a:tblGrid>
-              <a:tr h="502920">
-                <a:tc>
-                  <a:txBody>
-                    <a:bodyPr wrap="square"/>
-                    <a:lstStyle/>
-                    <a:p>
-                      <a:r>
-                        <a:rPr sz="1100" b="1">
+              <a:tr h="475488">
+                <a:tc>
+                  <a:txBody>
+                    <a:bodyPr wrap="square"/>
+                    <a:lstStyle/>
+                    <a:p>
+                      <a:r>
+                        <a:rPr sz="1200" b="1">
                           <a:solidFill>
                             <a:srgbClr val="FFFFFF"/>
                           </a:solidFill>
                           <a:latin typeface="Calibri"/>
                         </a:rPr>
-                        <a:t>Baustein</a:t>
+                        <a:t>Dein Tool</a:t>
                       </a:r>
                     </a:p>
                   </a:txBody>
@@ -5866,13 +6242,13 @@
                     <a:lstStyle/>
                     <a:p>
                       <a:r>
-                        <a:rPr sz="1100" b="1">
+                        <a:rPr sz="1200" b="1">
                           <a:solidFill>
                             <a:srgbClr val="FFFFFF"/>
                           </a:solidFill>
                           <a:latin typeface="Calibri"/>
                         </a:rPr>
-                        <a:t>Was es ist</a:t>
+                        <a:t>ECC-Pendant</a:t>
                       </a:r>
                     </a:p>
                   </a:txBody>
@@ -5888,13 +6264,13 @@
                     <a:lstStyle/>
                     <a:p>
                       <a:r>
-                        <a:rPr sz="1100" b="1">
+                        <a:rPr sz="1200" b="1">
                           <a:solidFill>
                             <a:srgbClr val="FFFFFF"/>
                           </a:solidFill>
                           <a:latin typeface="Calibri"/>
                         </a:rPr>
-                        <a:t>Wo (global)</a:t>
+                        <a:t>Empfehlung</a:t>
                       </a:r>
                     </a:p>
                   </a:txBody>
@@ -5905,20 +6281,20 @@
                   </a:tcPr>
                 </a:tc>
               </a:tr>
-              <a:tr h="502920">
-                <a:tc>
-                  <a:txBody>
-                    <a:bodyPr wrap="square"/>
-                    <a:lstStyle/>
-                    <a:p>
-                      <a:r>
-                        <a:rPr sz="1100">
-                          <a:solidFill>
-                            <a:srgbClr val="1F2937"/>
-                          </a:solidFill>
-                          <a:latin typeface="Calibri"/>
-                        </a:rPr>
-                        <a:t>Skills</a:t>
+              <a:tr h="475488">
+                <a:tc>
+                  <a:txBody>
+                    <a:bodyPr wrap="square"/>
+                    <a:lstStyle/>
+                    <a:p>
+                      <a:r>
+                        <a:rPr sz="1200">
+                          <a:solidFill>
+                            <a:srgbClr val="1F2937"/>
+                          </a:solidFill>
+                          <a:latin typeface="Calibri"/>
+                        </a:rPr>
+                        <a:t>superpowers</a:t>
                       </a:r>
                     </a:p>
                   </a:txBody>
@@ -5934,13 +6310,13 @@
                     <a:lstStyle/>
                     <a:p>
                       <a:r>
-                        <a:rPr sz="1100">
-                          <a:solidFill>
-                            <a:srgbClr val="1F2937"/>
-                          </a:solidFill>
-                          <a:latin typeface="Calibri"/>
-                        </a:rPr>
-                        <a:t>Durable Kern: wiederverwendbare Workflow-Bündel, laden on-demand</a:t>
+                        <a:rPr sz="1200">
+                          <a:solidFill>
+                            <a:srgbClr val="1F2937"/>
+                          </a:solidFill>
+                          <a:latin typeface="Calibri"/>
+                        </a:rPr>
+                        <a:t>tdd-workflow, verification-loop</a:t>
                       </a:r>
                     </a:p>
                   </a:txBody>
@@ -5956,13 +6332,13 @@
                     <a:lstStyle/>
                     <a:p>
                       <a:r>
-                        <a:rPr sz="1100">
-                          <a:solidFill>
-                            <a:srgbClr val="1F2937"/>
-                          </a:solidFill>
-                          <a:latin typeface="Calibri"/>
-                        </a:rPr>
-                        <a:t>~/.claude/skills/ecc/</a:t>
+                        <a:rPr sz="1200">
+                          <a:solidFill>
+                            <a:srgbClr val="1F2937"/>
+                          </a:solidFill>
+                          <a:latin typeface="Calibri"/>
+                        </a:rPr>
+                        <a:t>beides nutzbar; ECC bevorzugen</a:t>
                       </a:r>
                     </a:p>
                   </a:txBody>
@@ -5973,20 +6349,20 @@
                   </a:tcPr>
                 </a:tc>
               </a:tr>
-              <a:tr h="502920">
-                <a:tc>
-                  <a:txBody>
-                    <a:bodyPr wrap="square"/>
-                    <a:lstStyle/>
-                    <a:p>
-                      <a:r>
-                        <a:rPr sz="1100">
-                          <a:solidFill>
-                            <a:srgbClr val="1F2937"/>
-                          </a:solidFill>
-                          <a:latin typeface="Calibri"/>
-                        </a:rPr>
-                        <a:t>Commands</a:t>
+              <a:tr h="475488">
+                <a:tc>
+                  <a:txBody>
+                    <a:bodyPr wrap="square"/>
+                    <a:lstStyle/>
+                    <a:p>
+                      <a:r>
+                        <a:rPr sz="1200">
+                          <a:solidFill>
+                            <a:srgbClr val="1F2937"/>
+                          </a:solidFill>
+                          <a:latin typeface="Calibri"/>
+                        </a:rPr>
+                        <a:t>claude-mem</a:t>
                       </a:r>
                     </a:p>
                   </a:txBody>
@@ -6002,13 +6378,13 @@
                     <a:lstStyle/>
                     <a:p>
                       <a:r>
-                        <a:rPr sz="1100">
-                          <a:solidFill>
-                            <a:srgbClr val="1F2937"/>
-                          </a:solidFill>
-                          <a:latin typeface="Calibri"/>
-                        </a:rPr>
-                        <a:t>Slash-Einstiegspunkte (/plan, /code-review …)</a:t>
+                        <a:rPr sz="1200">
+                          <a:solidFill>
+                            <a:srgbClr val="1F2937"/>
+                          </a:solidFill>
+                          <a:latin typeface="Calibri"/>
+                        </a:rPr>
+                        <a:t>/save-session, learning-v2</a:t>
                       </a:r>
                     </a:p>
                   </a:txBody>
@@ -6024,13 +6400,13 @@
                     <a:lstStyle/>
                     <a:p>
                       <a:r>
-                        <a:rPr sz="1100">
-                          <a:solidFill>
-                            <a:srgbClr val="1F2937"/>
-                          </a:solidFill>
-                          <a:latin typeface="Calibri"/>
-                        </a:rPr>
-                        <a:t>~/.claude/commands/</a:t>
+                        <a:rPr sz="1200">
+                          <a:solidFill>
+                            <a:srgbClr val="1F2937"/>
+                          </a:solidFill>
+                          <a:latin typeface="Calibri"/>
+                        </a:rPr>
+                        <a:t>primäre Memory-Quelle, auto-injiziert</a:t>
                       </a:r>
                     </a:p>
                   </a:txBody>
@@ -6041,20 +6417,20 @@
                   </a:tcPr>
                 </a:tc>
               </a:tr>
-              <a:tr h="502920">
-                <a:tc>
-                  <a:txBody>
-                    <a:bodyPr wrap="square"/>
-                    <a:lstStyle/>
-                    <a:p>
-                      <a:r>
-                        <a:rPr sz="1100">
-                          <a:solidFill>
-                            <a:srgbClr val="1F2937"/>
-                          </a:solidFill>
-                          <a:latin typeface="Calibri"/>
-                        </a:rPr>
-                        <a:t>Subagents</a:t>
+              <a:tr h="475488">
+                <a:tc>
+                  <a:txBody>
+                    <a:bodyPr wrap="square"/>
+                    <a:lstStyle/>
+                    <a:p>
+                      <a:r>
+                        <a:rPr sz="1200">
+                          <a:solidFill>
+                            <a:srgbClr val="1F2937"/>
+                          </a:solidFill>
+                          <a:latin typeface="Calibri"/>
+                        </a:rPr>
+                        <a:t>RTK</a:t>
                       </a:r>
                     </a:p>
                   </a:txBody>
@@ -6070,13 +6446,13 @@
                     <a:lstStyle/>
                     <a:p>
                       <a:r>
-                        <a:rPr sz="1100">
-                          <a:solidFill>
-                            <a:srgbClr val="1F2937"/>
-                          </a:solidFill>
-                          <a:latin typeface="Calibri"/>
-                        </a:rPr>
-                        <a:t>Delegierbare Spezialisten mit eigenem Tool-Scope</a:t>
+                        <a:rPr sz="1200">
+                          <a:solidFill>
+                            <a:srgbClr val="1F2937"/>
+                          </a:solidFill>
+                          <a:latin typeface="Calibri"/>
+                        </a:rPr>
+                        <a:t>Token-Ökonomie</a:t>
                       </a:r>
                     </a:p>
                   </a:txBody>
@@ -6092,13 +6468,13 @@
                     <a:lstStyle/>
                     <a:p>
                       <a:r>
-                        <a:rPr sz="1100">
-                          <a:solidFill>
-                            <a:srgbClr val="1F2937"/>
-                          </a:solidFill>
-                          <a:latin typeface="Calibri"/>
-                        </a:rPr>
-                        <a:t>~/.claude/agents/</a:t>
+                        <a:rPr sz="1200">
+                          <a:solidFill>
+                            <a:srgbClr val="1F2937"/>
+                          </a:solidFill>
+                          <a:latin typeface="Calibri"/>
+                        </a:rPr>
+                        <a:t>ergänzen sich (Bash- vs Workflow-Ebene)</a:t>
                       </a:r>
                     </a:p>
                   </a:txBody>
@@ -6109,20 +6485,20 @@
                   </a:tcPr>
                 </a:tc>
               </a:tr>
-              <a:tr h="502920">
-                <a:tc>
-                  <a:txBody>
-                    <a:bodyPr wrap="square"/>
-                    <a:lstStyle/>
-                    <a:p>
-                      <a:r>
-                        <a:rPr sz="1100">
-                          <a:solidFill>
-                            <a:srgbClr val="1F2937"/>
-                          </a:solidFill>
-                          <a:latin typeface="Calibri"/>
-                        </a:rPr>
-                        <a:t>Hooks</a:t>
+              <a:tr h="475488">
+                <a:tc>
+                  <a:txBody>
+                    <a:bodyPr wrap="square"/>
+                    <a:lstStyle/>
+                    <a:p>
+                      <a:r>
+                        <a:rPr sz="1200">
+                          <a:solidFill>
+                            <a:srgbClr val="1F2937"/>
+                          </a:solidFill>
+                          <a:latin typeface="Calibri"/>
+                        </a:rPr>
+                        <a:t>codex / superpowers</a:t>
                       </a:r>
                     </a:p>
                   </a:txBody>
@@ -6138,13 +6514,13 @@
                     <a:lstStyle/>
                     <a:p>
                       <a:r>
-                        <a:rPr sz="1100">
-                          <a:solidFill>
-                            <a:srgbClr val="1F2937"/>
-                          </a:solidFill>
-                          <a:latin typeface="Calibri"/>
-                        </a:rPr>
-                        <a:t>Trigger-Automatik an Lifecycle-Events (INAKTIV per Default)</a:t>
+                        <a:rPr sz="1200">
+                          <a:solidFill>
+                            <a:srgbClr val="1F2937"/>
+                          </a:solidFill>
+                          <a:latin typeface="Calibri"/>
+                        </a:rPr>
+                        <a:t>diverse Skills</a:t>
                       </a:r>
                     </a:p>
                   </a:txBody>
@@ -6160,223 +6536,19 @@
                     <a:lstStyle/>
                     <a:p>
                       <a:r>
-                        <a:rPr sz="1100">
-                          <a:solidFill>
-                            <a:srgbClr val="1F2937"/>
-                          </a:solidFill>
-                          <a:latin typeface="Calibri"/>
-                        </a:rPr>
-                        <a:t>~/.claude/hooks/</a:t>
+                        <a:rPr sz="1200">
+                          <a:solidFill>
+                            <a:srgbClr val="1F2937"/>
+                          </a:solidFill>
+                          <a:latin typeface="Calibri"/>
+                        </a:rPr>
+                        <a:t>eigenständig; bleiben aktiv</a:t>
                       </a:r>
                     </a:p>
                   </a:txBody>
                   <a:tcPr marT="18288" marB="18288">
                     <a:solidFill>
                       <a:srgbClr val="FFFFFF"/>
-                    </a:solidFill>
-                  </a:tcPr>
-                </a:tc>
-              </a:tr>
-              <a:tr h="502920">
-                <a:tc>
-                  <a:txBody>
-                    <a:bodyPr wrap="square"/>
-                    <a:lstStyle/>
-                    <a:p>
-                      <a:r>
-                        <a:rPr sz="1100">
-                          <a:solidFill>
-                            <a:srgbClr val="1F2937"/>
-                          </a:solidFill>
-                          <a:latin typeface="Calibri"/>
-                        </a:rPr>
-                        <a:t>Rules</a:t>
-                      </a:r>
-                    </a:p>
-                  </a:txBody>
-                  <a:tcPr marT="18288" marB="18288">
-                    <a:solidFill>
-                      <a:srgbClr val="F3F4F6"/>
-                    </a:solidFill>
-                  </a:tcPr>
-                </a:tc>
-                <a:tc>
-                  <a:txBody>
-                    <a:bodyPr wrap="square"/>
-                    <a:lstStyle/>
-                    <a:p>
-                      <a:r>
-                        <a:rPr sz="1100">
-                          <a:solidFill>
-                            <a:srgbClr val="1F2937"/>
-                          </a:solidFill>
-                          <a:latin typeface="Calibri"/>
-                        </a:rPr>
-                        <a:t>„Immer befolgen"-Leitlinien je Sprache</a:t>
-                      </a:r>
-                    </a:p>
-                  </a:txBody>
-                  <a:tcPr marT="18288" marB="18288">
-                    <a:solidFill>
-                      <a:srgbClr val="F3F4F6"/>
-                    </a:solidFill>
-                  </a:tcPr>
-                </a:tc>
-                <a:tc>
-                  <a:txBody>
-                    <a:bodyPr wrap="square"/>
-                    <a:lstStyle/>
-                    <a:p>
-                      <a:r>
-                        <a:rPr sz="1100">
-                          <a:solidFill>
-                            <a:srgbClr val="1F2937"/>
-                          </a:solidFill>
-                          <a:latin typeface="Calibri"/>
-                        </a:rPr>
-                        <a:t>~/.claude/rules/ecc/</a:t>
-                      </a:r>
-                    </a:p>
-                  </a:txBody>
-                  <a:tcPr marT="18288" marB="18288">
-                    <a:solidFill>
-                      <a:srgbClr val="F3F4F6"/>
-                    </a:solidFill>
-                  </a:tcPr>
-                </a:tc>
-              </a:tr>
-              <a:tr h="502920">
-                <a:tc>
-                  <a:txBody>
-                    <a:bodyPr wrap="square"/>
-                    <a:lstStyle/>
-                    <a:p>
-                      <a:r>
-                        <a:rPr sz="1100">
-                          <a:solidFill>
-                            <a:srgbClr val="1F2937"/>
-                          </a:solidFill>
-                          <a:latin typeface="Calibri"/>
-                        </a:rPr>
-                        <a:t>MCP</a:t>
-                      </a:r>
-                    </a:p>
-                  </a:txBody>
-                  <a:tcPr marT="18288" marB="18288">
-                    <a:solidFill>
-                      <a:srgbClr val="FFFFFF"/>
-                    </a:solidFill>
-                  </a:tcPr>
-                </a:tc>
-                <a:tc>
-                  <a:txBody>
-                    <a:bodyPr wrap="square"/>
-                    <a:lstStyle/>
-                    <a:p>
-                      <a:r>
-                        <a:rPr sz="1100">
-                          <a:solidFill>
-                            <a:srgbClr val="1F2937"/>
-                          </a:solidFill>
-                          <a:latin typeface="Calibri"/>
-                        </a:rPr>
-                        <a:t>Prompt-getriebene Wrapper um externe Dienste</a:t>
-                      </a:r>
-                    </a:p>
-                  </a:txBody>
-                  <a:tcPr marT="18288" marB="18288">
-                    <a:solidFill>
-                      <a:srgbClr val="FFFFFF"/>
-                    </a:solidFill>
-                  </a:tcPr>
-                </a:tc>
-                <a:tc>
-                  <a:txBody>
-                    <a:bodyPr wrap="square"/>
-                    <a:lstStyle/>
-                    <a:p>
-                      <a:r>
-                        <a:rPr sz="1100">
-                          <a:solidFill>
-                            <a:srgbClr val="1F2937"/>
-                          </a:solidFill>
-                          <a:latin typeface="Calibri"/>
-                        </a:rPr>
-                        <a:t>.mcp.json / global</a:t>
-                      </a:r>
-                    </a:p>
-                  </a:txBody>
-                  <a:tcPr marT="18288" marB="18288">
-                    <a:solidFill>
-                      <a:srgbClr val="FFFFFF"/>
-                    </a:solidFill>
-                  </a:tcPr>
-                </a:tc>
-              </a:tr>
-              <a:tr h="502920">
-                <a:tc>
-                  <a:txBody>
-                    <a:bodyPr wrap="square"/>
-                    <a:lstStyle/>
-                    <a:p>
-                      <a:r>
-                        <a:rPr sz="1100">
-                          <a:solidFill>
-                            <a:srgbClr val="1F2937"/>
-                          </a:solidFill>
-                          <a:latin typeface="Calibri"/>
-                        </a:rPr>
-                        <a:t>Instincts</a:t>
-                      </a:r>
-                    </a:p>
-                  </a:txBody>
-                  <a:tcPr marT="18288" marB="18288">
-                    <a:solidFill>
-                      <a:srgbClr val="F3F4F6"/>
-                    </a:solidFill>
-                  </a:tcPr>
-                </a:tc>
-                <a:tc>
-                  <a:txBody>
-                    <a:bodyPr wrap="square"/>
-                    <a:lstStyle/>
-                    <a:p>
-                      <a:r>
-                        <a:rPr sz="1100">
-                          <a:solidFill>
-                            <a:srgbClr val="1F2937"/>
-                          </a:solidFill>
-                          <a:latin typeface="Calibri"/>
-                        </a:rPr>
-                        <a:t>Gelernte Muster aus deinen Sessions</a:t>
-                      </a:r>
-                    </a:p>
-                  </a:txBody>
-                  <a:tcPr marT="18288" marB="18288">
-                    <a:solidFill>
-                      <a:srgbClr val="F3F4F6"/>
-                    </a:solidFill>
-                  </a:tcPr>
-                </a:tc>
-                <a:tc>
-                  <a:txBody>
-                    <a:bodyPr wrap="square"/>
-                    <a:lstStyle/>
-                    <a:p>
-                      <a:r>
-                        <a:rPr sz="1100">
-                          <a:solidFill>
-                            <a:srgbClr val="1F2937"/>
-                          </a:solidFill>
-                          <a:latin typeface="Calibri"/>
-                        </a:rPr>
-                        <a:t>homunculus/instincts/</a:t>
-                      </a:r>
-                    </a:p>
-                  </a:txBody>
-                  <a:tcPr marT="18288" marB="18288">
-                    <a:solidFill>
-                      <a:srgbClr val="F3F4F6"/>
                     </a:solidFill>
                   </a:tcPr>
                 </a:tc>
@@ -6385,41 +6557,6 @@
           </a:graphicData>
         </a:graphic>
       </p:graphicFrame>
-      <p:sp>
-        <p:nvSpPr>
-          <p:cNvPr id="5" name="TextBox 4"/>
-          <p:cNvSpPr txBox="1"/>
-          <p:nvPr/>
-        </p:nvSpPr>
-        <p:spPr>
-          <a:xfrm>
-            <a:off x="640080" y="5532120"/>
-            <a:ext cx="10972800" cy="914400"/>
-          </a:xfrm>
-          <a:prstGeom prst="rect">
-            <a:avLst/>
-          </a:prstGeom>
-          <a:noFill/>
-        </p:spPr>
-        <p:txBody>
-          <a:bodyPr wrap="none">
-            <a:spAutoFit/>
-          </a:bodyPr>
-          <a:lstStyle/>
-          <a:p>
-            <a:pPr/>
-            <a:r>
-              <a:rPr sz="1500" b="1">
-                <a:solidFill>
-                  <a:srgbClr val="F59E0B"/>
-                </a:solidFill>
-                <a:latin typeface="Calibri"/>
-              </a:rPr>
-              <a:t>Regel: Durable Logik gehört in Skills. Was du 3× tippst → /skill-create.</a:t>
-            </a:r>
-          </a:p>
-        </p:txBody>
-      </p:sp>
     </p:spTree>
   </p:cSld>
   <p:clrMapOvr>
@@ -6428,7 +6565,7 @@
 </p:sld>
 </file>
 
-<file path=ppt/slides/slide5.xml><?xml version="1.0" encoding="utf-8"?>
+<file path=ppt/slides/slide4.xml><?xml version="1.0" encoding="utf-8"?>
 <p:sld xmlns:a="http://schemas.openxmlformats.org/drawingml/2006/main" xmlns:p="http://schemas.openxmlformats.org/presentationml/2006/main" xmlns:r="http://schemas.openxmlformats.org/officeDocument/2006/relationships">
   <p:cSld>
     <p:spTree>
@@ -6511,6 +6648,708 @@
                 </a:solidFill>
                 <a:latin typeface="Calibri"/>
               </a:rPr>
+              <a:t>3 · Mentales Modell — die Bausteine</a:t>
+            </a:r>
+          </a:p>
+        </p:txBody>
+      </p:sp>
+      <p:graphicFrame>
+        <p:nvGraphicFramePr>
+          <p:cNvPr id="4" name="Table 3"/>
+          <p:cNvGraphicFramePr>
+            <a:graphicFrameLocks noGrp="1"/>
+          </p:cNvGraphicFramePr>
+          <p:nvPr/>
+        </p:nvGraphicFramePr>
+        <p:xfrm>
+          <a:off x="640080" y="1371600"/>
+          <a:ext cx="10972800" cy="4023360"/>
+        </p:xfrm>
+        <a:graphic>
+          <a:graphicData uri="http://schemas.openxmlformats.org/drawingml/2006/table">
+            <a:tbl>
+              <a:tblPr firstRow="1" bandRow="1">
+                <a:tableStyleId>{5C22544A-7EE6-4342-B048-85BDC9FD1C3A}</a:tableStyleId>
+              </a:tblPr>
+              <a:tblGrid>
+                <a:gridCol w="1828800"/>
+                <a:gridCol w="6400800"/>
+                <a:gridCol w="2743200"/>
+              </a:tblGrid>
+              <a:tr h="502920">
+                <a:tc>
+                  <a:txBody>
+                    <a:bodyPr wrap="square"/>
+                    <a:lstStyle/>
+                    <a:p>
+                      <a:r>
+                        <a:rPr sz="1100" b="1">
+                          <a:solidFill>
+                            <a:srgbClr val="FFFFFF"/>
+                          </a:solidFill>
+                          <a:latin typeface="Calibri"/>
+                        </a:rPr>
+                        <a:t>Baustein</a:t>
+                      </a:r>
+                    </a:p>
+                  </a:txBody>
+                  <a:tcPr marT="18288" marB="18288">
+                    <a:solidFill>
+                      <a:srgbClr val="312E81"/>
+                    </a:solidFill>
+                  </a:tcPr>
+                </a:tc>
+                <a:tc>
+                  <a:txBody>
+                    <a:bodyPr wrap="square"/>
+                    <a:lstStyle/>
+                    <a:p>
+                      <a:r>
+                        <a:rPr sz="1100" b="1">
+                          <a:solidFill>
+                            <a:srgbClr val="FFFFFF"/>
+                          </a:solidFill>
+                          <a:latin typeface="Calibri"/>
+                        </a:rPr>
+                        <a:t>Was es ist</a:t>
+                      </a:r>
+                    </a:p>
+                  </a:txBody>
+                  <a:tcPr marT="18288" marB="18288">
+                    <a:solidFill>
+                      <a:srgbClr val="312E81"/>
+                    </a:solidFill>
+                  </a:tcPr>
+                </a:tc>
+                <a:tc>
+                  <a:txBody>
+                    <a:bodyPr wrap="square"/>
+                    <a:lstStyle/>
+                    <a:p>
+                      <a:r>
+                        <a:rPr sz="1100" b="1">
+                          <a:solidFill>
+                            <a:srgbClr val="FFFFFF"/>
+                          </a:solidFill>
+                          <a:latin typeface="Calibri"/>
+                        </a:rPr>
+                        <a:t>Wo (global)</a:t>
+                      </a:r>
+                    </a:p>
+                  </a:txBody>
+                  <a:tcPr marT="18288" marB="18288">
+                    <a:solidFill>
+                      <a:srgbClr val="312E81"/>
+                    </a:solidFill>
+                  </a:tcPr>
+                </a:tc>
+              </a:tr>
+              <a:tr h="502920">
+                <a:tc>
+                  <a:txBody>
+                    <a:bodyPr wrap="square"/>
+                    <a:lstStyle/>
+                    <a:p>
+                      <a:r>
+                        <a:rPr sz="1100">
+                          <a:solidFill>
+                            <a:srgbClr val="1F2937"/>
+                          </a:solidFill>
+                          <a:latin typeface="Calibri"/>
+                        </a:rPr>
+                        <a:t>Skills</a:t>
+                      </a:r>
+                    </a:p>
+                  </a:txBody>
+                  <a:tcPr marT="18288" marB="18288">
+                    <a:solidFill>
+                      <a:srgbClr val="F3F4F6"/>
+                    </a:solidFill>
+                  </a:tcPr>
+                </a:tc>
+                <a:tc>
+                  <a:txBody>
+                    <a:bodyPr wrap="square"/>
+                    <a:lstStyle/>
+                    <a:p>
+                      <a:r>
+                        <a:rPr sz="1100">
+                          <a:solidFill>
+                            <a:srgbClr val="1F2937"/>
+                          </a:solidFill>
+                          <a:latin typeface="Calibri"/>
+                        </a:rPr>
+                        <a:t>Durable Kern: wiederverwendbare Workflow-Bündel, laden on-demand</a:t>
+                      </a:r>
+                    </a:p>
+                  </a:txBody>
+                  <a:tcPr marT="18288" marB="18288">
+                    <a:solidFill>
+                      <a:srgbClr val="F3F4F6"/>
+                    </a:solidFill>
+                  </a:tcPr>
+                </a:tc>
+                <a:tc>
+                  <a:txBody>
+                    <a:bodyPr wrap="square"/>
+                    <a:lstStyle/>
+                    <a:p>
+                      <a:r>
+                        <a:rPr sz="1100">
+                          <a:solidFill>
+                            <a:srgbClr val="1F2937"/>
+                          </a:solidFill>
+                          <a:latin typeface="Calibri"/>
+                        </a:rPr>
+                        <a:t>~/.claude/skills/ecc/</a:t>
+                      </a:r>
+                    </a:p>
+                  </a:txBody>
+                  <a:tcPr marT="18288" marB="18288">
+                    <a:solidFill>
+                      <a:srgbClr val="F3F4F6"/>
+                    </a:solidFill>
+                  </a:tcPr>
+                </a:tc>
+              </a:tr>
+              <a:tr h="502920">
+                <a:tc>
+                  <a:txBody>
+                    <a:bodyPr wrap="square"/>
+                    <a:lstStyle/>
+                    <a:p>
+                      <a:r>
+                        <a:rPr sz="1100">
+                          <a:solidFill>
+                            <a:srgbClr val="1F2937"/>
+                          </a:solidFill>
+                          <a:latin typeface="Calibri"/>
+                        </a:rPr>
+                        <a:t>Commands</a:t>
+                      </a:r>
+                    </a:p>
+                  </a:txBody>
+                  <a:tcPr marT="18288" marB="18288">
+                    <a:solidFill>
+                      <a:srgbClr val="FFFFFF"/>
+                    </a:solidFill>
+                  </a:tcPr>
+                </a:tc>
+                <a:tc>
+                  <a:txBody>
+                    <a:bodyPr wrap="square"/>
+                    <a:lstStyle/>
+                    <a:p>
+                      <a:r>
+                        <a:rPr sz="1100">
+                          <a:solidFill>
+                            <a:srgbClr val="1F2937"/>
+                          </a:solidFill>
+                          <a:latin typeface="Calibri"/>
+                        </a:rPr>
+                        <a:t>Slash-Einstiegspunkte (/plan, /code-review …)</a:t>
+                      </a:r>
+                    </a:p>
+                  </a:txBody>
+                  <a:tcPr marT="18288" marB="18288">
+                    <a:solidFill>
+                      <a:srgbClr val="FFFFFF"/>
+                    </a:solidFill>
+                  </a:tcPr>
+                </a:tc>
+                <a:tc>
+                  <a:txBody>
+                    <a:bodyPr wrap="square"/>
+                    <a:lstStyle/>
+                    <a:p>
+                      <a:r>
+                        <a:rPr sz="1100">
+                          <a:solidFill>
+                            <a:srgbClr val="1F2937"/>
+                          </a:solidFill>
+                          <a:latin typeface="Calibri"/>
+                        </a:rPr>
+                        <a:t>~/.claude/commands/</a:t>
+                      </a:r>
+                    </a:p>
+                  </a:txBody>
+                  <a:tcPr marT="18288" marB="18288">
+                    <a:solidFill>
+                      <a:srgbClr val="FFFFFF"/>
+                    </a:solidFill>
+                  </a:tcPr>
+                </a:tc>
+              </a:tr>
+              <a:tr h="502920">
+                <a:tc>
+                  <a:txBody>
+                    <a:bodyPr wrap="square"/>
+                    <a:lstStyle/>
+                    <a:p>
+                      <a:r>
+                        <a:rPr sz="1100">
+                          <a:solidFill>
+                            <a:srgbClr val="1F2937"/>
+                          </a:solidFill>
+                          <a:latin typeface="Calibri"/>
+                        </a:rPr>
+                        <a:t>Subagents</a:t>
+                      </a:r>
+                    </a:p>
+                  </a:txBody>
+                  <a:tcPr marT="18288" marB="18288">
+                    <a:solidFill>
+                      <a:srgbClr val="F3F4F6"/>
+                    </a:solidFill>
+                  </a:tcPr>
+                </a:tc>
+                <a:tc>
+                  <a:txBody>
+                    <a:bodyPr wrap="square"/>
+                    <a:lstStyle/>
+                    <a:p>
+                      <a:r>
+                        <a:rPr sz="1100">
+                          <a:solidFill>
+                            <a:srgbClr val="1F2937"/>
+                          </a:solidFill>
+                          <a:latin typeface="Calibri"/>
+                        </a:rPr>
+                        <a:t>Delegierbare Spezialisten mit eigenem Tool-Scope</a:t>
+                      </a:r>
+                    </a:p>
+                  </a:txBody>
+                  <a:tcPr marT="18288" marB="18288">
+                    <a:solidFill>
+                      <a:srgbClr val="F3F4F6"/>
+                    </a:solidFill>
+                  </a:tcPr>
+                </a:tc>
+                <a:tc>
+                  <a:txBody>
+                    <a:bodyPr wrap="square"/>
+                    <a:lstStyle/>
+                    <a:p>
+                      <a:r>
+                        <a:rPr sz="1100">
+                          <a:solidFill>
+                            <a:srgbClr val="1F2937"/>
+                          </a:solidFill>
+                          <a:latin typeface="Calibri"/>
+                        </a:rPr>
+                        <a:t>~/.claude/agents/</a:t>
+                      </a:r>
+                    </a:p>
+                  </a:txBody>
+                  <a:tcPr marT="18288" marB="18288">
+                    <a:solidFill>
+                      <a:srgbClr val="F3F4F6"/>
+                    </a:solidFill>
+                  </a:tcPr>
+                </a:tc>
+              </a:tr>
+              <a:tr h="502920">
+                <a:tc>
+                  <a:txBody>
+                    <a:bodyPr wrap="square"/>
+                    <a:lstStyle/>
+                    <a:p>
+                      <a:r>
+                        <a:rPr sz="1100">
+                          <a:solidFill>
+                            <a:srgbClr val="1F2937"/>
+                          </a:solidFill>
+                          <a:latin typeface="Calibri"/>
+                        </a:rPr>
+                        <a:t>Hooks</a:t>
+                      </a:r>
+                    </a:p>
+                  </a:txBody>
+                  <a:tcPr marT="18288" marB="18288">
+                    <a:solidFill>
+                      <a:srgbClr val="FFFFFF"/>
+                    </a:solidFill>
+                  </a:tcPr>
+                </a:tc>
+                <a:tc>
+                  <a:txBody>
+                    <a:bodyPr wrap="square"/>
+                    <a:lstStyle/>
+                    <a:p>
+                      <a:r>
+                        <a:rPr sz="1100">
+                          <a:solidFill>
+                            <a:srgbClr val="1F2937"/>
+                          </a:solidFill>
+                          <a:latin typeface="Calibri"/>
+                        </a:rPr>
+                        <a:t>Trigger-Automatik an Lifecycle-Events (INAKTIV per Default)</a:t>
+                      </a:r>
+                    </a:p>
+                  </a:txBody>
+                  <a:tcPr marT="18288" marB="18288">
+                    <a:solidFill>
+                      <a:srgbClr val="FFFFFF"/>
+                    </a:solidFill>
+                  </a:tcPr>
+                </a:tc>
+                <a:tc>
+                  <a:txBody>
+                    <a:bodyPr wrap="square"/>
+                    <a:lstStyle/>
+                    <a:p>
+                      <a:r>
+                        <a:rPr sz="1100">
+                          <a:solidFill>
+                            <a:srgbClr val="1F2937"/>
+                          </a:solidFill>
+                          <a:latin typeface="Calibri"/>
+                        </a:rPr>
+                        <a:t>~/.claude/hooks/</a:t>
+                      </a:r>
+                    </a:p>
+                  </a:txBody>
+                  <a:tcPr marT="18288" marB="18288">
+                    <a:solidFill>
+                      <a:srgbClr val="FFFFFF"/>
+                    </a:solidFill>
+                  </a:tcPr>
+                </a:tc>
+              </a:tr>
+              <a:tr h="502920">
+                <a:tc>
+                  <a:txBody>
+                    <a:bodyPr wrap="square"/>
+                    <a:lstStyle/>
+                    <a:p>
+                      <a:r>
+                        <a:rPr sz="1100">
+                          <a:solidFill>
+                            <a:srgbClr val="1F2937"/>
+                          </a:solidFill>
+                          <a:latin typeface="Calibri"/>
+                        </a:rPr>
+                        <a:t>Rules</a:t>
+                      </a:r>
+                    </a:p>
+                  </a:txBody>
+                  <a:tcPr marT="18288" marB="18288">
+                    <a:solidFill>
+                      <a:srgbClr val="F3F4F6"/>
+                    </a:solidFill>
+                  </a:tcPr>
+                </a:tc>
+                <a:tc>
+                  <a:txBody>
+                    <a:bodyPr wrap="square"/>
+                    <a:lstStyle/>
+                    <a:p>
+                      <a:r>
+                        <a:rPr sz="1100">
+                          <a:solidFill>
+                            <a:srgbClr val="1F2937"/>
+                          </a:solidFill>
+                          <a:latin typeface="Calibri"/>
+                        </a:rPr>
+                        <a:t>„Immer befolgen"-Leitlinien je Sprache</a:t>
+                      </a:r>
+                    </a:p>
+                  </a:txBody>
+                  <a:tcPr marT="18288" marB="18288">
+                    <a:solidFill>
+                      <a:srgbClr val="F3F4F6"/>
+                    </a:solidFill>
+                  </a:tcPr>
+                </a:tc>
+                <a:tc>
+                  <a:txBody>
+                    <a:bodyPr wrap="square"/>
+                    <a:lstStyle/>
+                    <a:p>
+                      <a:r>
+                        <a:rPr sz="1100">
+                          <a:solidFill>
+                            <a:srgbClr val="1F2937"/>
+                          </a:solidFill>
+                          <a:latin typeface="Calibri"/>
+                        </a:rPr>
+                        <a:t>~/.claude/rules/ecc/</a:t>
+                      </a:r>
+                    </a:p>
+                  </a:txBody>
+                  <a:tcPr marT="18288" marB="18288">
+                    <a:solidFill>
+                      <a:srgbClr val="F3F4F6"/>
+                    </a:solidFill>
+                  </a:tcPr>
+                </a:tc>
+              </a:tr>
+              <a:tr h="502920">
+                <a:tc>
+                  <a:txBody>
+                    <a:bodyPr wrap="square"/>
+                    <a:lstStyle/>
+                    <a:p>
+                      <a:r>
+                        <a:rPr sz="1100">
+                          <a:solidFill>
+                            <a:srgbClr val="1F2937"/>
+                          </a:solidFill>
+                          <a:latin typeface="Calibri"/>
+                        </a:rPr>
+                        <a:t>MCP</a:t>
+                      </a:r>
+                    </a:p>
+                  </a:txBody>
+                  <a:tcPr marT="18288" marB="18288">
+                    <a:solidFill>
+                      <a:srgbClr val="FFFFFF"/>
+                    </a:solidFill>
+                  </a:tcPr>
+                </a:tc>
+                <a:tc>
+                  <a:txBody>
+                    <a:bodyPr wrap="square"/>
+                    <a:lstStyle/>
+                    <a:p>
+                      <a:r>
+                        <a:rPr sz="1100">
+                          <a:solidFill>
+                            <a:srgbClr val="1F2937"/>
+                          </a:solidFill>
+                          <a:latin typeface="Calibri"/>
+                        </a:rPr>
+                        <a:t>Prompt-getriebene Wrapper um externe Dienste</a:t>
+                      </a:r>
+                    </a:p>
+                  </a:txBody>
+                  <a:tcPr marT="18288" marB="18288">
+                    <a:solidFill>
+                      <a:srgbClr val="FFFFFF"/>
+                    </a:solidFill>
+                  </a:tcPr>
+                </a:tc>
+                <a:tc>
+                  <a:txBody>
+                    <a:bodyPr wrap="square"/>
+                    <a:lstStyle/>
+                    <a:p>
+                      <a:r>
+                        <a:rPr sz="1100">
+                          <a:solidFill>
+                            <a:srgbClr val="1F2937"/>
+                          </a:solidFill>
+                          <a:latin typeface="Calibri"/>
+                        </a:rPr>
+                        <a:t>.mcp.json / global</a:t>
+                      </a:r>
+                    </a:p>
+                  </a:txBody>
+                  <a:tcPr marT="18288" marB="18288">
+                    <a:solidFill>
+                      <a:srgbClr val="FFFFFF"/>
+                    </a:solidFill>
+                  </a:tcPr>
+                </a:tc>
+              </a:tr>
+              <a:tr h="502920">
+                <a:tc>
+                  <a:txBody>
+                    <a:bodyPr wrap="square"/>
+                    <a:lstStyle/>
+                    <a:p>
+                      <a:r>
+                        <a:rPr sz="1100">
+                          <a:solidFill>
+                            <a:srgbClr val="1F2937"/>
+                          </a:solidFill>
+                          <a:latin typeface="Calibri"/>
+                        </a:rPr>
+                        <a:t>Instincts</a:t>
+                      </a:r>
+                    </a:p>
+                  </a:txBody>
+                  <a:tcPr marT="18288" marB="18288">
+                    <a:solidFill>
+                      <a:srgbClr val="F3F4F6"/>
+                    </a:solidFill>
+                  </a:tcPr>
+                </a:tc>
+                <a:tc>
+                  <a:txBody>
+                    <a:bodyPr wrap="square"/>
+                    <a:lstStyle/>
+                    <a:p>
+                      <a:r>
+                        <a:rPr sz="1100">
+                          <a:solidFill>
+                            <a:srgbClr val="1F2937"/>
+                          </a:solidFill>
+                          <a:latin typeface="Calibri"/>
+                        </a:rPr>
+                        <a:t>Gelernte Muster aus deinen Sessions</a:t>
+                      </a:r>
+                    </a:p>
+                  </a:txBody>
+                  <a:tcPr marT="18288" marB="18288">
+                    <a:solidFill>
+                      <a:srgbClr val="F3F4F6"/>
+                    </a:solidFill>
+                  </a:tcPr>
+                </a:tc>
+                <a:tc>
+                  <a:txBody>
+                    <a:bodyPr wrap="square"/>
+                    <a:lstStyle/>
+                    <a:p>
+                      <a:r>
+                        <a:rPr sz="1100">
+                          <a:solidFill>
+                            <a:srgbClr val="1F2937"/>
+                          </a:solidFill>
+                          <a:latin typeface="Calibri"/>
+                        </a:rPr>
+                        <a:t>homunculus/instincts/</a:t>
+                      </a:r>
+                    </a:p>
+                  </a:txBody>
+                  <a:tcPr marT="18288" marB="18288">
+                    <a:solidFill>
+                      <a:srgbClr val="F3F4F6"/>
+                    </a:solidFill>
+                  </a:tcPr>
+                </a:tc>
+              </a:tr>
+            </a:tbl>
+          </a:graphicData>
+        </a:graphic>
+      </p:graphicFrame>
+      <p:sp>
+        <p:nvSpPr>
+          <p:cNvPr id="5" name="TextBox 4"/>
+          <p:cNvSpPr txBox="1"/>
+          <p:nvPr/>
+        </p:nvSpPr>
+        <p:spPr>
+          <a:xfrm>
+            <a:off x="640080" y="5532120"/>
+            <a:ext cx="10972800" cy="914400"/>
+          </a:xfrm>
+          <a:prstGeom prst="rect">
+            <a:avLst/>
+          </a:prstGeom>
+          <a:noFill/>
+        </p:spPr>
+        <p:txBody>
+          <a:bodyPr wrap="none">
+            <a:spAutoFit/>
+          </a:bodyPr>
+          <a:lstStyle/>
+          <a:p>
+            <a:pPr/>
+            <a:r>
+              <a:rPr sz="1500" b="1">
+                <a:solidFill>
+                  <a:srgbClr val="F59E0B"/>
+                </a:solidFill>
+                <a:latin typeface="Calibri"/>
+              </a:rPr>
+              <a:t>Regel: Durable Logik gehört in Skills. Was du 3× tippst → /skill-create.</a:t>
+            </a:r>
+          </a:p>
+        </p:txBody>
+      </p:sp>
+    </p:spTree>
+  </p:cSld>
+  <p:clrMapOvr>
+    <a:masterClrMapping/>
+  </p:clrMapOvr>
+</p:sld>
+</file>
+
+<file path=ppt/slides/slide5.xml><?xml version="1.0" encoding="utf-8"?>
+<p:sld xmlns:a="http://schemas.openxmlformats.org/drawingml/2006/main" xmlns:p="http://schemas.openxmlformats.org/presentationml/2006/main" xmlns:r="http://schemas.openxmlformats.org/officeDocument/2006/relationships">
+  <p:cSld>
+    <p:spTree>
+      <p:nvGrpSpPr>
+        <p:cNvPr id="1" name=""/>
+        <p:cNvGrpSpPr/>
+        <p:nvPr/>
+      </p:nvGrpSpPr>
+      <p:grpSpPr/>
+      <p:sp>
+        <p:nvSpPr>
+          <p:cNvPr id="2" name="Rectangle 1"/>
+          <p:cNvSpPr/>
+          <p:nvPr/>
+        </p:nvSpPr>
+        <p:spPr>
+          <a:xfrm>
+            <a:off x="0" y="0"/>
+            <a:ext cx="12191695" cy="164592"/>
+          </a:xfrm>
+          <a:prstGeom prst="rect">
+            <a:avLst/>
+          </a:prstGeom>
+          <a:solidFill>
+            <a:srgbClr val="06B6D4"/>
+          </a:solidFill>
+          <a:ln>
+            <a:noFill/>
+          </a:ln>
+        </p:spPr>
+        <p:style>
+          <a:lnRef idx="1">
+            <a:schemeClr val="accent1"/>
+          </a:lnRef>
+          <a:fillRef idx="3">
+            <a:schemeClr val="accent1"/>
+          </a:fillRef>
+          <a:effectRef idx="2">
+            <a:schemeClr val="accent1"/>
+          </a:effectRef>
+          <a:fontRef idx="minor">
+            <a:schemeClr val="lt1"/>
+          </a:fontRef>
+        </p:style>
+        <p:txBody>
+          <a:bodyPr rtlCol="0" anchor="ctr"/>
+          <a:lstStyle/>
+          <a:p>
+            <a:pPr algn="ctr"/>
+          </a:p>
+        </p:txBody>
+      </p:sp>
+      <p:sp>
+        <p:nvSpPr>
+          <p:cNvPr id="3" name="TextBox 2"/>
+          <p:cNvSpPr txBox="1"/>
+          <p:nvPr/>
+        </p:nvSpPr>
+        <p:spPr>
+          <a:xfrm>
+            <a:off x="548640" y="320040"/>
+            <a:ext cx="11064240" cy="822960"/>
+          </a:xfrm>
+          <a:prstGeom prst="rect">
+            <a:avLst/>
+          </a:prstGeom>
+          <a:noFill/>
+        </p:spPr>
+        <p:txBody>
+          <a:bodyPr wrap="square">
+            <a:spAutoFit/>
+          </a:bodyPr>
+          <a:lstStyle/>
+          <a:p>
+            <a:pPr algn="l"/>
+            <a:r>
+              <a:rPr sz="2800" b="1">
+                <a:solidFill>
+                  <a:srgbClr val="312E81"/>
+                </a:solidFill>
+                <a:latin typeface="Calibri"/>
+              </a:rPr>
               <a:t>4 · Täglicher Workflow — 5 Phasen</a:t>
             </a:r>
           </a:p>
@@ -6786,7 +7625,7 @@
                 </a:solidFill>
                 <a:latin typeface="Calibri"/>
               </a:rPr>
-              <a:t>5 · Projekt-Onboarding mit /ecc-onboard</a:t>
+              <a:t>5a · Projekt-Onboarding mit /ecc-onboard</a:t>
             </a:r>
           </a:p>
         </p:txBody>
@@ -7364,22 +8203,69 @@
                 </a:solidFill>
                 <a:latin typeface="Calibri"/>
               </a:rPr>
-              <a:t>6 · Cheat-Sheet — wann welcher Command (1/2)</a:t>
+              <a:t>5b · Codebase EINMAL erkunden (Codemaps)</a:t>
+            </a:r>
+          </a:p>
+        </p:txBody>
+      </p:sp>
+      <p:sp>
+        <p:nvSpPr>
+          <p:cNvPr id="4" name="TextBox 3"/>
+          <p:cNvSpPr txBox="1"/>
+          <p:nvPr/>
+        </p:nvSpPr>
+        <p:spPr>
+          <a:xfrm>
+            <a:off x="640080" y="1234440"/>
+            <a:ext cx="10972800" cy="1097280"/>
+          </a:xfrm>
+          <a:prstGeom prst="rect">
+            <a:avLst/>
+          </a:prstGeom>
+          <a:noFill/>
+        </p:spPr>
+        <p:txBody>
+          <a:bodyPr wrap="none">
+            <a:spAutoFit/>
+          </a:bodyPr>
+          <a:lstStyle/>
+          <a:p>
+            <a:pPr/>
+            <a:r>
+              <a:rPr sz="1600" b="1">
+                <a:solidFill>
+                  <a:srgbClr val="312E81"/>
+                </a:solidFill>
+                <a:latin typeface="Calibri"/>
+              </a:rPr>
+              <a:t>Prinzip: einmal kartieren → in Dateien festhalten → künftig die Karte lesen statt neu suchen.</a:t>
+            </a:r>
+          </a:p>
+          <a:p>
+            <a:pPr/>
+            <a:r>
+              <a:rPr sz="1400" b="0">
+                <a:solidFill>
+                  <a:srgbClr val="1F2937"/>
+                </a:solidFill>
+                <a:latin typeface="Calibri"/>
+              </a:rPr>
+              <a:t>/update-codemaps schreibt token-arme Architektur-Karten nach docs/CODEMAPS/:</a:t>
             </a:r>
           </a:p>
         </p:txBody>
       </p:sp>
       <p:graphicFrame>
         <p:nvGraphicFramePr>
-          <p:cNvPr id="4" name="Table 3"/>
+          <p:cNvPr id="5" name="Table 4"/>
           <p:cNvGraphicFramePr>
             <a:graphicFrameLocks noGrp="1"/>
           </p:cNvGraphicFramePr>
           <p:nvPr/>
         </p:nvGraphicFramePr>
         <p:xfrm>
-          <a:off x="548640" y="1371600"/>
-          <a:ext cx="11155680" cy="4754880"/>
+          <a:off x="640080" y="2468880"/>
+          <a:ext cx="10972800" cy="2651760"/>
         </p:xfrm>
         <a:graphic>
           <a:graphicData uri="http://schemas.openxmlformats.org/drawingml/2006/table">
@@ -7389,10 +8275,9 @@
               </a:tblPr>
               <a:tblGrid>
                 <a:gridCol w="2743200"/>
-                <a:gridCol w="3840480"/>
-                <a:gridCol w="4572000"/>
+                <a:gridCol w="8229600"/>
               </a:tblGrid>
-              <a:tr h="594360">
+              <a:tr h="441960">
                 <a:tc>
                   <a:txBody>
                     <a:bodyPr wrap="square"/>
@@ -7405,7 +8290,7 @@
                           </a:solidFill>
                           <a:latin typeface="Calibri"/>
                         </a:rPr>
-                        <a:t>Situation</a:t>
+                        <a:t>Datei</a:t>
                       </a:r>
                     </a:p>
                   </a:txBody>
@@ -7427,7 +8312,7 @@
                           </a:solidFill>
                           <a:latin typeface="Calibri"/>
                         </a:rPr>
-                        <a:t>Command</a:t>
+                        <a:t>Inhalt</a:t>
                       </a:r>
                     </a:p>
                   </a:txBody>
@@ -7437,43 +8322,21 @@
                     </a:solidFill>
                   </a:tcPr>
                 </a:tc>
-                <a:tc>
-                  <a:txBody>
-                    <a:bodyPr wrap="square"/>
-                    <a:lstStyle/>
-                    <a:p>
-                      <a:r>
-                        <a:rPr sz="1200" b="1">
-                          <a:solidFill>
-                            <a:srgbClr val="FFFFFF"/>
-                          </a:solidFill>
-                          <a:latin typeface="Calibri"/>
-                        </a:rPr>
-                        <a:t>Zweck</a:t>
-                      </a:r>
-                    </a:p>
-                  </a:txBody>
-                  <a:tcPr marT="18288" marB="18288">
-                    <a:solidFill>
-                      <a:srgbClr val="312E81"/>
-                    </a:solidFill>
-                  </a:tcPr>
-                </a:tc>
               </a:tr>
-              <a:tr h="594360">
-                <a:tc>
-                  <a:txBody>
-                    <a:bodyPr wrap="square"/>
-                    <a:lstStyle/>
-                    <a:p>
-                      <a:r>
-                        <a:rPr sz="1200">
-                          <a:solidFill>
-                            <a:srgbClr val="1F2937"/>
-                          </a:solidFill>
-                          <a:latin typeface="Calibri"/>
-                        </a:rPr>
-                        <a:t>Neues Feature planen</a:t>
+              <a:tr h="441960">
+                <a:tc>
+                  <a:txBody>
+                    <a:bodyPr wrap="square"/>
+                    <a:lstStyle/>
+                    <a:p>
+                      <a:r>
+                        <a:rPr sz="1200">
+                          <a:solidFill>
+                            <a:srgbClr val="1F2937"/>
+                          </a:solidFill>
+                          <a:latin typeface="Calibri"/>
+                        </a:rPr>
+                        <a:t>architecture.md</a:t>
                       </a:r>
                     </a:p>
                   </a:txBody>
@@ -7495,7 +8358,7 @@
                           </a:solidFill>
                           <a:latin typeface="Calibri"/>
                         </a:rPr>
-                        <a:t>/plan</a:t>
+                        <a:t>System-Diagramm, Service-Grenzen, Datenfluss</a:t>
                       </a:r>
                     </a:p>
                   </a:txBody>
@@ -7505,19 +8368,67 @@
                     </a:solidFill>
                   </a:tcPr>
                 </a:tc>
-                <a:tc>
-                  <a:txBody>
-                    <a:bodyPr wrap="square"/>
-                    <a:lstStyle/>
-                    <a:p>
-                      <a:r>
-                        <a:rPr sz="1200">
-                          <a:solidFill>
-                            <a:srgbClr val="1F2937"/>
-                          </a:solidFill>
-                          <a:latin typeface="Calibri"/>
-                        </a:rPr>
-                        <a:t>Anforderungen, Risiken, Schritte — wartet auf dein OK</a:t>
+              </a:tr>
+              <a:tr h="441960">
+                <a:tc>
+                  <a:txBody>
+                    <a:bodyPr wrap="square"/>
+                    <a:lstStyle/>
+                    <a:p>
+                      <a:r>
+                        <a:rPr sz="1200">
+                          <a:solidFill>
+                            <a:srgbClr val="1F2937"/>
+                          </a:solidFill>
+                          <a:latin typeface="Calibri"/>
+                        </a:rPr>
+                        <a:t>backend.md</a:t>
+                      </a:r>
+                    </a:p>
+                  </a:txBody>
+                  <a:tcPr marT="18288" marB="18288">
+                    <a:solidFill>
+                      <a:srgbClr val="FFFFFF"/>
+                    </a:solidFill>
+                  </a:tcPr>
+                </a:tc>
+                <a:tc>
+                  <a:txBody>
+                    <a:bodyPr wrap="square"/>
+                    <a:lstStyle/>
+                    <a:p>
+                      <a:r>
+                        <a:rPr sz="1200">
+                          <a:solidFill>
+                            <a:srgbClr val="1F2937"/>
+                          </a:solidFill>
+                          <a:latin typeface="Calibri"/>
+                        </a:rPr>
+                        <a:t>Routes → Controller → Service → Repository</a:t>
+                      </a:r>
+                    </a:p>
+                  </a:txBody>
+                  <a:tcPr marT="18288" marB="18288">
+                    <a:solidFill>
+                      <a:srgbClr val="FFFFFF"/>
+                    </a:solidFill>
+                  </a:tcPr>
+                </a:tc>
+              </a:tr>
+              <a:tr h="441960">
+                <a:tc>
+                  <a:txBody>
+                    <a:bodyPr wrap="square"/>
+                    <a:lstStyle/>
+                    <a:p>
+                      <a:r>
+                        <a:rPr sz="1200">
+                          <a:solidFill>
+                            <a:srgbClr val="1F2937"/>
+                          </a:solidFill>
+                          <a:latin typeface="Calibri"/>
+                        </a:rPr>
+                        <a:t>frontend.md</a:t>
                       </a:r>
                     </a:p>
                   </a:txBody>
@@ -7527,21 +8438,43 @@
                     </a:solidFill>
                   </a:tcPr>
                 </a:tc>
+                <a:tc>
+                  <a:txBody>
+                    <a:bodyPr wrap="square"/>
+                    <a:lstStyle/>
+                    <a:p>
+                      <a:r>
+                        <a:rPr sz="1200">
+                          <a:solidFill>
+                            <a:srgbClr val="1F2937"/>
+                          </a:solidFill>
+                          <a:latin typeface="Calibri"/>
+                        </a:rPr>
+                        <a:t>Page-Tree, Komponenten, State-Flow</a:t>
+                      </a:r>
+                    </a:p>
+                  </a:txBody>
+                  <a:tcPr marT="18288" marB="18288">
+                    <a:solidFill>
+                      <a:srgbClr val="F3F4F6"/>
+                    </a:solidFill>
+                  </a:tcPr>
+                </a:tc>
               </a:tr>
-              <a:tr h="594360">
-                <a:tc>
-                  <a:txBody>
-                    <a:bodyPr wrap="square"/>
-                    <a:lstStyle/>
-                    <a:p>
-                      <a:r>
-                        <a:rPr sz="1200">
-                          <a:solidFill>
-                            <a:srgbClr val="1F2937"/>
-                          </a:solidFill>
-                          <a:latin typeface="Calibri"/>
-                        </a:rPr>
-                        <a:t>Feature umsetzen</a:t>
+              <a:tr h="441960">
+                <a:tc>
+                  <a:txBody>
+                    <a:bodyPr wrap="square"/>
+                    <a:lstStyle/>
+                    <a:p>
+                      <a:r>
+                        <a:rPr sz="1200">
+                          <a:solidFill>
+                            <a:srgbClr val="1F2937"/>
+                          </a:solidFill>
+                          <a:latin typeface="Calibri"/>
+                        </a:rPr>
+                        <a:t>data.md</a:t>
                       </a:r>
                     </a:p>
                   </a:txBody>
@@ -7563,7 +8496,7 @@
                           </a:solidFill>
                           <a:latin typeface="Calibri"/>
                         </a:rPr>
-                        <a:t>/feature-dev</a:t>
+                        <a:t>Tabellen, Relationen, Migrationen</a:t>
                       </a:r>
                     </a:p>
                   </a:txBody>
@@ -7573,43 +8506,21 @@
                     </a:solidFill>
                   </a:tcPr>
                 </a:tc>
-                <a:tc>
-                  <a:txBody>
-                    <a:bodyPr wrap="square"/>
-                    <a:lstStyle/>
-                    <a:p>
-                      <a:r>
-                        <a:rPr sz="1200">
-                          <a:solidFill>
-                            <a:srgbClr val="1F2937"/>
-                          </a:solidFill>
-                          <a:latin typeface="Calibri"/>
-                        </a:rPr>
-                        <a:t>nutzt Skills/Agents, TDD zuerst</a:t>
-                      </a:r>
-                    </a:p>
-                  </a:txBody>
-                  <a:tcPr marT="18288" marB="18288">
-                    <a:solidFill>
-                      <a:srgbClr val="FFFFFF"/>
-                    </a:solidFill>
-                  </a:tcPr>
-                </a:tc>
               </a:tr>
-              <a:tr h="594360">
-                <a:tc>
-                  <a:txBody>
-                    <a:bodyPr wrap="square"/>
-                    <a:lstStyle/>
-                    <a:p>
-                      <a:r>
-                        <a:rPr sz="1200">
-                          <a:solidFill>
-                            <a:srgbClr val="1F2937"/>
-                          </a:solidFill>
-                          <a:latin typeface="Calibri"/>
-                        </a:rPr>
-                        <a:t>Projekt ECC-ready machen</a:t>
+              <a:tr h="441960">
+                <a:tc>
+                  <a:txBody>
+                    <a:bodyPr wrap="square"/>
+                    <a:lstStyle/>
+                    <a:p>
+                      <a:r>
+                        <a:rPr sz="1200">
+                          <a:solidFill>
+                            <a:srgbClr val="1F2937"/>
+                          </a:solidFill>
+                          <a:latin typeface="Calibri"/>
+                        </a:rPr>
+                        <a:t>dependencies.md</a:t>
                       </a:r>
                     </a:p>
                   </a:txBody>
@@ -7631,301 +8542,7 @@
                           </a:solidFill>
                           <a:latin typeface="Calibri"/>
                         </a:rPr>
-                        <a:t>/ecc-onboard</a:t>
-                      </a:r>
-                    </a:p>
-                  </a:txBody>
-                  <a:tcPr marT="18288" marB="18288">
-                    <a:solidFill>
-                      <a:srgbClr val="F3F4F6"/>
-                    </a:solidFill>
-                  </a:tcPr>
-                </a:tc>
-                <a:tc>
-                  <a:txBody>
-                    <a:bodyPr wrap="square"/>
-                    <a:lstStyle/>
-                    <a:p>
-                      <a:r>
-                        <a:rPr sz="1200">
-                          <a:solidFill>
-                            <a:srgbClr val="1F2937"/>
-                          </a:solidFill>
-                          <a:latin typeface="Calibri"/>
-                        </a:rPr>
-                        <a:t>Stack erkennen → 1× OK → Rules/Skills + PROJECT_RULES.md + state/</a:t>
-                      </a:r>
-                    </a:p>
-                  </a:txBody>
-                  <a:tcPr marT="18288" marB="18288">
-                    <a:solidFill>
-                      <a:srgbClr val="F3F4F6"/>
-                    </a:solidFill>
-                  </a:tcPr>
-                </a:tc>
-              </a:tr>
-              <a:tr h="594360">
-                <a:tc>
-                  <a:txBody>
-                    <a:bodyPr wrap="square"/>
-                    <a:lstStyle/>
-                    <a:p>
-                      <a:r>
-                        <a:rPr sz="1200">
-                          <a:solidFill>
-                            <a:srgbClr val="1F2937"/>
-                          </a:solidFill>
-                          <a:latin typeface="Calibri"/>
-                        </a:rPr>
-                        <a:t>Code geschrieben</a:t>
-                      </a:r>
-                    </a:p>
-                  </a:txBody>
-                  <a:tcPr marT="18288" marB="18288">
-                    <a:solidFill>
-                      <a:srgbClr val="FFFFFF"/>
-                    </a:solidFill>
-                  </a:tcPr>
-                </a:tc>
-                <a:tc>
-                  <a:txBody>
-                    <a:bodyPr wrap="square"/>
-                    <a:lstStyle/>
-                    <a:p>
-                      <a:r>
-                        <a:rPr sz="1200">
-                          <a:solidFill>
-                            <a:srgbClr val="1F2937"/>
-                          </a:solidFill>
-                          <a:latin typeface="Calibri"/>
-                        </a:rPr>
-                        <a:t>/code-review  (+ /python-review, /go-review …)</a:t>
-                      </a:r>
-                    </a:p>
-                  </a:txBody>
-                  <a:tcPr marT="18288" marB="18288">
-                    <a:solidFill>
-                      <a:srgbClr val="FFFFFF"/>
-                    </a:solidFill>
-                  </a:tcPr>
-                </a:tc>
-                <a:tc>
-                  <a:txBody>
-                    <a:bodyPr wrap="square"/>
-                    <a:lstStyle/>
-                    <a:p>
-                      <a:r>
-                        <a:rPr sz="1200">
-                          <a:solidFill>
-                            <a:srgbClr val="1F2937"/>
-                          </a:solidFill>
-                          <a:latin typeface="Calibri"/>
-                        </a:rPr>
-                        <a:t>Qualität + Security der Änderungen</a:t>
-                      </a:r>
-                    </a:p>
-                  </a:txBody>
-                  <a:tcPr marT="18288" marB="18288">
-                    <a:solidFill>
-                      <a:srgbClr val="FFFFFF"/>
-                    </a:solidFill>
-                  </a:tcPr>
-                </a:tc>
-              </a:tr>
-              <a:tr h="594360">
-                <a:tc>
-                  <a:txBody>
-                    <a:bodyPr wrap="square"/>
-                    <a:lstStyle/>
-                    <a:p>
-                      <a:r>
-                        <a:rPr sz="1200">
-                          <a:solidFill>
-                            <a:srgbClr val="1F2937"/>
-                          </a:solidFill>
-                          <a:latin typeface="Calibri"/>
-                        </a:rPr>
-                        <a:t>Build/Tests rot</a:t>
-                      </a:r>
-                    </a:p>
-                  </a:txBody>
-                  <a:tcPr marT="18288" marB="18288">
-                    <a:solidFill>
-                      <a:srgbClr val="F3F4F6"/>
-                    </a:solidFill>
-                  </a:tcPr>
-                </a:tc>
-                <a:tc>
-                  <a:txBody>
-                    <a:bodyPr wrap="square"/>
-                    <a:lstStyle/>
-                    <a:p>
-                      <a:r>
-                        <a:rPr sz="1200">
-                          <a:solidFill>
-                            <a:srgbClr val="1F2937"/>
-                          </a:solidFill>
-                          <a:latin typeface="Calibri"/>
-                        </a:rPr>
-                        <a:t>/build-fix</a:t>
-                      </a:r>
-                    </a:p>
-                  </a:txBody>
-                  <a:tcPr marT="18288" marB="18288">
-                    <a:solidFill>
-                      <a:srgbClr val="F3F4F6"/>
-                    </a:solidFill>
-                  </a:tcPr>
-                </a:tc>
-                <a:tc>
-                  <a:txBody>
-                    <a:bodyPr wrap="square"/>
-                    <a:lstStyle/>
-                    <a:p>
-                      <a:r>
-                        <a:rPr sz="1200">
-                          <a:solidFill>
-                            <a:srgbClr val="1F2937"/>
-                          </a:solidFill>
-                          <a:latin typeface="Calibri"/>
-                        </a:rPr>
-                        <a:t>inkrementelle, minimale Fixes</a:t>
-                      </a:r>
-                    </a:p>
-                  </a:txBody>
-                  <a:tcPr marT="18288" marB="18288">
-                    <a:solidFill>
-                      <a:srgbClr val="F3F4F6"/>
-                    </a:solidFill>
-                  </a:tcPr>
-                </a:tc>
-              </a:tr>
-              <a:tr h="594360">
-                <a:tc>
-                  <a:txBody>
-                    <a:bodyPr wrap="square"/>
-                    <a:lstStyle/>
-                    <a:p>
-                      <a:r>
-                        <a:rPr sz="1200">
-                          <a:solidFill>
-                            <a:srgbClr val="1F2937"/>
-                          </a:solidFill>
-                          <a:latin typeface="Calibri"/>
-                        </a:rPr>
-                        <a:t>Coverage / Qualität</a:t>
-                      </a:r>
-                    </a:p>
-                  </a:txBody>
-                  <a:tcPr marT="18288" marB="18288">
-                    <a:solidFill>
-                      <a:srgbClr val="FFFFFF"/>
-                    </a:solidFill>
-                  </a:tcPr>
-                </a:tc>
-                <a:tc>
-                  <a:txBody>
-                    <a:bodyPr wrap="square"/>
-                    <a:lstStyle/>
-                    <a:p>
-                      <a:r>
-                        <a:rPr sz="1200">
-                          <a:solidFill>
-                            <a:srgbClr val="1F2937"/>
-                          </a:solidFill>
-                          <a:latin typeface="Calibri"/>
-                        </a:rPr>
-                        <a:t>/test-coverage  ·  /quality-gate</a:t>
-                      </a:r>
-                    </a:p>
-                  </a:txBody>
-                  <a:tcPr marT="18288" marB="18288">
-                    <a:solidFill>
-                      <a:srgbClr val="FFFFFF"/>
-                    </a:solidFill>
-                  </a:tcPr>
-                </a:tc>
-                <a:tc>
-                  <a:txBody>
-                    <a:bodyPr wrap="square"/>
-                    <a:lstStyle/>
-                    <a:p>
-                      <a:r>
-                        <a:rPr sz="1200">
-                          <a:solidFill>
-                            <a:srgbClr val="1F2937"/>
-                          </a:solidFill>
-                          <a:latin typeface="Calibri"/>
-                        </a:rPr>
-                        <a:t>Lücken finden, Pipeline prüfen</a:t>
-                      </a:r>
-                    </a:p>
-                  </a:txBody>
-                  <a:tcPr marT="18288" marB="18288">
-                    <a:solidFill>
-                      <a:srgbClr val="FFFFFF"/>
-                    </a:solidFill>
-                  </a:tcPr>
-                </a:tc>
-              </a:tr>
-              <a:tr h="594360">
-                <a:tc>
-                  <a:txBody>
-                    <a:bodyPr wrap="square"/>
-                    <a:lstStyle/>
-                    <a:p>
-                      <a:r>
-                        <a:rPr sz="1200">
-                          <a:solidFill>
-                            <a:srgbClr val="1F2937"/>
-                          </a:solidFill>
-                          <a:latin typeface="Calibri"/>
-                        </a:rPr>
-                        <a:t>Aufräumen</a:t>
-                      </a:r>
-                    </a:p>
-                  </a:txBody>
-                  <a:tcPr marT="18288" marB="18288">
-                    <a:solidFill>
-                      <a:srgbClr val="F3F4F6"/>
-                    </a:solidFill>
-                  </a:tcPr>
-                </a:tc>
-                <a:tc>
-                  <a:txBody>
-                    <a:bodyPr wrap="square"/>
-                    <a:lstStyle/>
-                    <a:p>
-                      <a:r>
-                        <a:rPr sz="1200">
-                          <a:solidFill>
-                            <a:srgbClr val="1F2937"/>
-                          </a:solidFill>
-                          <a:latin typeface="Calibri"/>
-                        </a:rPr>
-                        <a:t>/refactor-clean</a:t>
-                      </a:r>
-                    </a:p>
-                  </a:txBody>
-                  <a:tcPr marT="18288" marB="18288">
-                    <a:solidFill>
-                      <a:srgbClr val="F3F4F6"/>
-                    </a:solidFill>
-                  </a:tcPr>
-                </a:tc>
-                <a:tc>
-                  <a:txBody>
-                    <a:bodyPr wrap="square"/>
-                    <a:lstStyle/>
-                    <a:p>
-                      <a:r>
-                        <a:rPr sz="1200">
-                          <a:solidFill>
-                            <a:srgbClr val="1F2937"/>
-                          </a:solidFill>
-                          <a:latin typeface="Calibri"/>
-                        </a:rPr>
-                        <a:t>toter Code + lose Dateien raus</a:t>
+                        <a:t>externe Dienste, Integrationen</a:t>
                       </a:r>
                     </a:p>
                   </a:txBody>
@@ -7940,6 +8557,53 @@
           </a:graphicData>
         </a:graphic>
       </p:graphicFrame>
+      <p:sp>
+        <p:nvSpPr>
+          <p:cNvPr id="6" name="TextBox 5"/>
+          <p:cNvSpPr txBox="1"/>
+          <p:nvPr/>
+        </p:nvSpPr>
+        <p:spPr>
+          <a:xfrm>
+            <a:off x="640080" y="5303520"/>
+            <a:ext cx="10972800" cy="1188720"/>
+          </a:xfrm>
+          <a:prstGeom prst="rect">
+            <a:avLst/>
+          </a:prstGeom>
+          <a:noFill/>
+        </p:spPr>
+        <p:txBody>
+          <a:bodyPr wrap="none">
+            <a:spAutoFit/>
+          </a:bodyPr>
+          <a:lstStyle/>
+          <a:p>
+            <a:pPr/>
+            <a:r>
+              <a:rPr sz="1400" b="1">
+                <a:solidFill>
+                  <a:srgbClr val="F59E0B"/>
+                </a:solidFill>
+                <a:latin typeface="Calibri"/>
+              </a:rPr>
+              <a:t>Snapshot — nach Architektur-Änderung neu bauen. Fremdes Repo: Skill codebase-onboarding.</a:t>
+            </a:r>
+          </a:p>
+          <a:p>
+            <a:pPr/>
+            <a:r>
+              <a:rPr sz="1400" b="0">
+                <a:solidFill>
+                  <a:srgbClr val="C7D2FE"/>
+                </a:solidFill>
+                <a:latin typeface="Calibri"/>
+              </a:rPr>
+              <a:t>Pro Aufgabe: research.md (Explore-Agent) → /plan. claude-mem injiziert Alt-Kontext automatisch.</a:t>
+            </a:r>
+          </a:p>
+        </p:txBody>
+      </p:sp>
     </p:spTree>
   </p:cSld>
   <p:clrMapOvr>
@@ -8031,7 +8695,7 @@
                 </a:solidFill>
                 <a:latin typeface="Calibri"/>
               </a:rPr>
-              <a:t>6 · Cheat-Sheet — wann welcher Command (2/2)</a:t>
+              <a:t>6 · Cheat-Sheet — wann welcher Command (1/2)</a:t>
             </a:r>
           </a:p>
         </p:txBody>
@@ -8059,7 +8723,7 @@
                 <a:gridCol w="3840480"/>
                 <a:gridCol w="4572000"/>
               </a:tblGrid>
-              <a:tr h="594360">
+              <a:tr h="528320">
                 <a:tc>
                   <a:txBody>
                     <a:bodyPr wrap="square"/>
@@ -8127,20 +8791,20 @@
                   </a:tcPr>
                 </a:tc>
               </a:tr>
-              <a:tr h="594360">
-                <a:tc>
-                  <a:txBody>
-                    <a:bodyPr wrap="square"/>
-                    <a:lstStyle/>
-                    <a:p>
-                      <a:r>
-                        <a:rPr sz="1200">
-                          <a:solidFill>
-                            <a:srgbClr val="1F2937"/>
-                          </a:solidFill>
-                          <a:latin typeface="Calibri"/>
-                        </a:rPr>
-                        <a:t>Library-Doku live</a:t>
+              <a:tr h="528320">
+                <a:tc>
+                  <a:txBody>
+                    <a:bodyPr wrap="square"/>
+                    <a:lstStyle/>
+                    <a:p>
+                      <a:r>
+                        <a:rPr sz="1200">
+                          <a:solidFill>
+                            <a:srgbClr val="1F2937"/>
+                          </a:solidFill>
+                          <a:latin typeface="Calibri"/>
+                        </a:rPr>
+                        <a:t>Neues Feature planen</a:t>
                       </a:r>
                     </a:p>
                   </a:txBody>
@@ -8162,7 +8826,7 @@
                           </a:solidFill>
                           <a:latin typeface="Calibri"/>
                         </a:rPr>
-                        <a:t>context7-MCP  ·  Skill documentation-lookup</a:t>
+                        <a:t>/plan</a:t>
                       </a:r>
                     </a:p>
                   </a:txBody>
@@ -8184,7 +8848,7 @@
                           </a:solidFill>
                           <a:latin typeface="Calibri"/>
                         </a:rPr>
-                        <a:t>aktuelle API-Doku statt Halluzination</a:t>
+                        <a:t>Anforderungen, Risiken, Schritte — wartet auf dein OK</a:t>
                       </a:r>
                     </a:p>
                   </a:txBody>
@@ -8195,20 +8859,20 @@
                   </a:tcPr>
                 </a:tc>
               </a:tr>
-              <a:tr h="594360">
-                <a:tc>
-                  <a:txBody>
-                    <a:bodyPr wrap="square"/>
-                    <a:lstStyle/>
-                    <a:p>
-                      <a:r>
-                        <a:rPr sz="1200">
-                          <a:solidFill>
-                            <a:srgbClr val="1F2937"/>
-                          </a:solidFill>
-                          <a:latin typeface="Calibri"/>
-                        </a:rPr>
-                        <a:t>Session sichern/laden</a:t>
+              <a:tr h="528320">
+                <a:tc>
+                  <a:txBody>
+                    <a:bodyPr wrap="square"/>
+                    <a:lstStyle/>
+                    <a:p>
+                      <a:r>
+                        <a:rPr sz="1200">
+                          <a:solidFill>
+                            <a:srgbClr val="1F2937"/>
+                          </a:solidFill>
+                          <a:latin typeface="Calibri"/>
+                        </a:rPr>
+                        <a:t>Feature umsetzen</a:t>
                       </a:r>
                     </a:p>
                   </a:txBody>
@@ -8230,7 +8894,7 @@
                           </a:solidFill>
                           <a:latin typeface="Calibri"/>
                         </a:rPr>
-                        <a:t>/save-session  ·  /resume-session  ·  /sessions</a:t>
+                        <a:t>/feature-dev</a:t>
                       </a:r>
                     </a:p>
                   </a:txBody>
@@ -8252,7 +8916,7 @@
                           </a:solidFill>
                           <a:latin typeface="Calibri"/>
                         </a:rPr>
-                        <a:t>über den Tag hinaus arbeiten</a:t>
+                        <a:t>nutzt Skills/Agents, TDD zuerst</a:t>
                       </a:r>
                     </a:p>
                   </a:txBody>
@@ -8263,20 +8927,20 @@
                   </a:tcPr>
                 </a:tc>
               </a:tr>
-              <a:tr h="594360">
-                <a:tc>
-                  <a:txBody>
-                    <a:bodyPr wrap="square"/>
-                    <a:lstStyle/>
-                    <a:p>
-                      <a:r>
-                        <a:rPr sz="1200">
-                          <a:solidFill>
-                            <a:srgbClr val="1F2937"/>
-                          </a:solidFill>
-                          <a:latin typeface="Calibri"/>
-                        </a:rPr>
-                        <a:t>Checkpoint / Nebenfrage</a:t>
+              <a:tr h="528320">
+                <a:tc>
+                  <a:txBody>
+                    <a:bodyPr wrap="square"/>
+                    <a:lstStyle/>
+                    <a:p>
+                      <a:r>
+                        <a:rPr sz="1200">
+                          <a:solidFill>
+                            <a:srgbClr val="1F2937"/>
+                          </a:solidFill>
+                          <a:latin typeface="Calibri"/>
+                        </a:rPr>
+                        <a:t>Projekt ECC-ready machen</a:t>
                       </a:r>
                     </a:p>
                   </a:txBody>
@@ -8298,7 +8962,7 @@
                           </a:solidFill>
                           <a:latin typeface="Calibri"/>
                         </a:rPr>
-                        <a:t>/checkpoint  ·  /aside</a:t>
+                        <a:t>/ecc-onboard</a:t>
                       </a:r>
                     </a:p>
                   </a:txBody>
@@ -8320,7 +8984,7 @@
                           </a:solidFill>
                           <a:latin typeface="Calibri"/>
                         </a:rPr>
-                        <a:t>Stand markieren / Kontext bewahren</a:t>
+                        <a:t>Stack erkennen → 1× OK → Rules/Skills + PROJECT_RULES.md + state/</a:t>
                       </a:r>
                     </a:p>
                   </a:txBody>
@@ -8331,20 +8995,20 @@
                   </a:tcPr>
                 </a:tc>
               </a:tr>
-              <a:tr h="594360">
-                <a:tc>
-                  <a:txBody>
-                    <a:bodyPr wrap="square"/>
-                    <a:lstStyle/>
-                    <a:p>
-                      <a:r>
-                        <a:rPr sz="1200">
-                          <a:solidFill>
-                            <a:srgbClr val="1F2937"/>
-                          </a:solidFill>
-                          <a:latin typeface="Calibri"/>
-                        </a:rPr>
-                        <a:t>Gelerntes extrahieren</a:t>
+              <a:tr h="528320">
+                <a:tc>
+                  <a:txBody>
+                    <a:bodyPr wrap="square"/>
+                    <a:lstStyle/>
+                    <a:p>
+                      <a:r>
+                        <a:rPr sz="1200">
+                          <a:solidFill>
+                            <a:srgbClr val="1F2937"/>
+                          </a:solidFill>
+                          <a:latin typeface="Calibri"/>
+                        </a:rPr>
+                        <a:t>Codebase kartieren (1×)</a:t>
                       </a:r>
                     </a:p>
                   </a:txBody>
@@ -8366,7 +9030,7 @@
                           </a:solidFill>
                           <a:latin typeface="Calibri"/>
                         </a:rPr>
-                        <a:t>/learn-eval → /evolve → /promote</a:t>
+                        <a:t>/update-codemaps</a:t>
                       </a:r>
                     </a:p>
                   </a:txBody>
@@ -8388,7 +9052,7 @@
                           </a:solidFill>
                           <a:latin typeface="Calibri"/>
                         </a:rPr>
-                        <a:t>Self-Improvement-Loop</a:t>
+                        <a:t>token-arme Architektur-Karten in docs/CODEMAPS/ — statt neu suchen</a:t>
                       </a:r>
                     </a:p>
                   </a:txBody>
@@ -8399,20 +9063,20 @@
                   </a:tcPr>
                 </a:tc>
               </a:tr>
-              <a:tr h="594360">
-                <a:tc>
-                  <a:txBody>
-                    <a:bodyPr wrap="square"/>
-                    <a:lstStyle/>
-                    <a:p>
-                      <a:r>
-                        <a:rPr sz="1200">
-                          <a:solidFill>
-                            <a:srgbClr val="1F2937"/>
-                          </a:solidFill>
-                          <a:latin typeface="Calibri"/>
-                        </a:rPr>
-                        <a:t>Modell / Kosten</a:t>
+              <a:tr h="528320">
+                <a:tc>
+                  <a:txBody>
+                    <a:bodyPr wrap="square"/>
+                    <a:lstStyle/>
+                    <a:p>
+                      <a:r>
+                        <a:rPr sz="1200">
+                          <a:solidFill>
+                            <a:srgbClr val="1F2937"/>
+                          </a:solidFill>
+                          <a:latin typeface="Calibri"/>
+                        </a:rPr>
+                        <a:t>Fremdes Repo verstehen</a:t>
                       </a:r>
                     </a:p>
                   </a:txBody>
@@ -8434,7 +9098,7 @@
                           </a:solidFill>
                           <a:latin typeface="Calibri"/>
                         </a:rPr>
-                        <a:t>/model-route  ·  /cost-report</a:t>
+                        <a:t>Skill codebase-onboarding</a:t>
                       </a:r>
                     </a:p>
                   </a:txBody>
@@ -8456,7 +9120,7 @@
                           </a:solidFill>
                           <a:latin typeface="Calibri"/>
                         </a:rPr>
-                        <a:t>billigstes ausreichendes Modell</a:t>
+                        <a:t>Entry-Points, Konventionen, Starter-CLAUDE.md</a:t>
                       </a:r>
                     </a:p>
                   </a:txBody>
@@ -8467,20 +9131,20 @@
                   </a:tcPr>
                 </a:tc>
               </a:tr>
-              <a:tr h="594360">
-                <a:tc>
-                  <a:txBody>
-                    <a:bodyPr wrap="square"/>
-                    <a:lstStyle/>
-                    <a:p>
-                      <a:r>
-                        <a:rPr sz="1200">
-                          <a:solidFill>
-                            <a:srgbClr val="1F2937"/>
-                          </a:solidFill>
-                          <a:latin typeface="Calibri"/>
-                        </a:rPr>
-                        <a:t>Harness prüfen</a:t>
+              <a:tr h="528320">
+                <a:tc>
+                  <a:txBody>
+                    <a:bodyPr wrap="square"/>
+                    <a:lstStyle/>
+                    <a:p>
+                      <a:r>
+                        <a:rPr sz="1200">
+                          <a:solidFill>
+                            <a:srgbClr val="1F2937"/>
+                          </a:solidFill>
+                          <a:latin typeface="Calibri"/>
+                        </a:rPr>
+                        <a:t>Code geschrieben</a:t>
                       </a:r>
                     </a:p>
                   </a:txBody>
@@ -8502,7 +9166,7 @@
                           </a:solidFill>
                           <a:latin typeface="Calibri"/>
                         </a:rPr>
-                        <a:t>/harness-audit  ·  /ecc-guide</a:t>
+                        <a:t>/code-review  (+ /python-review, /go-review …)</a:t>
                       </a:r>
                     </a:p>
                   </a:txBody>
@@ -8524,7 +9188,7 @@
                           </a:solidFill>
                           <a:latin typeface="Calibri"/>
                         </a:rPr>
-                        <a:t>Config-Scorecard / Onboarding</a:t>
+                        <a:t>Qualität + Security der Änderungen</a:t>
                       </a:r>
                     </a:p>
                   </a:txBody>
@@ -8535,20 +9199,20 @@
                   </a:tcPr>
                 </a:tc>
               </a:tr>
-              <a:tr h="594360">
-                <a:tc>
-                  <a:txBody>
-                    <a:bodyPr wrap="square"/>
-                    <a:lstStyle/>
-                    <a:p>
-                      <a:r>
-                        <a:rPr sz="1200">
-                          <a:solidFill>
-                            <a:srgbClr val="1F2937"/>
-                          </a:solidFill>
-                          <a:latin typeface="Calibri"/>
-                        </a:rPr>
-                        <a:t>Parallel / Loop</a:t>
+              <a:tr h="528320">
+                <a:tc>
+                  <a:txBody>
+                    <a:bodyPr wrap="square"/>
+                    <a:lstStyle/>
+                    <a:p>
+                      <a:r>
+                        <a:rPr sz="1200">
+                          <a:solidFill>
+                            <a:srgbClr val="1F2937"/>
+                          </a:solidFill>
+                          <a:latin typeface="Calibri"/>
+                        </a:rPr>
+                        <a:t>Build/Tests rot</a:t>
                       </a:r>
                     </a:p>
                   </a:txBody>
@@ -8570,7 +9234,7 @@
                           </a:solidFill>
                           <a:latin typeface="Calibri"/>
                         </a:rPr>
-                        <a:t>/multi-plan  ·  /loop-start  ·  /loop-status</a:t>
+                        <a:t>/build-fix</a:t>
                       </a:r>
                     </a:p>
                   </a:txBody>
@@ -8592,13 +9256,81 @@
                           </a:solidFill>
                           <a:latin typeface="Calibri"/>
                         </a:rPr>
-                        <a:t>mehrere Modelle / Automation</a:t>
+                        <a:t>inkrementelle, minimale Fixes</a:t>
                       </a:r>
                     </a:p>
                   </a:txBody>
                   <a:tcPr marT="18288" marB="18288">
                     <a:solidFill>
                       <a:srgbClr val="F3F4F6"/>
+                    </a:solidFill>
+                  </a:tcPr>
+                </a:tc>
+              </a:tr>
+              <a:tr h="528320">
+                <a:tc>
+                  <a:txBody>
+                    <a:bodyPr wrap="square"/>
+                    <a:lstStyle/>
+                    <a:p>
+                      <a:r>
+                        <a:rPr sz="1200">
+                          <a:solidFill>
+                            <a:srgbClr val="1F2937"/>
+                          </a:solidFill>
+                          <a:latin typeface="Calibri"/>
+                        </a:rPr>
+                        <a:t>Coverage / Qualität</a:t>
+                      </a:r>
+                    </a:p>
+                  </a:txBody>
+                  <a:tcPr marT="18288" marB="18288">
+                    <a:solidFill>
+                      <a:srgbClr val="FFFFFF"/>
+                    </a:solidFill>
+                  </a:tcPr>
+                </a:tc>
+                <a:tc>
+                  <a:txBody>
+                    <a:bodyPr wrap="square"/>
+                    <a:lstStyle/>
+                    <a:p>
+                      <a:r>
+                        <a:rPr sz="1200">
+                          <a:solidFill>
+                            <a:srgbClr val="1F2937"/>
+                          </a:solidFill>
+                          <a:latin typeface="Calibri"/>
+                        </a:rPr>
+                        <a:t>/test-coverage  ·  /quality-gate</a:t>
+                      </a:r>
+                    </a:p>
+                  </a:txBody>
+                  <a:tcPr marT="18288" marB="18288">
+                    <a:solidFill>
+                      <a:srgbClr val="FFFFFF"/>
+                    </a:solidFill>
+                  </a:tcPr>
+                </a:tc>
+                <a:tc>
+                  <a:txBody>
+                    <a:bodyPr wrap="square"/>
+                    <a:lstStyle/>
+                    <a:p>
+                      <a:r>
+                        <a:rPr sz="1200">
+                          <a:solidFill>
+                            <a:srgbClr val="1F2937"/>
+                          </a:solidFill>
+                          <a:latin typeface="Calibri"/>
+                        </a:rPr>
+                        <a:t>Lücken finden, Pipeline prüfen</a:t>
+                      </a:r>
+                    </a:p>
+                  </a:txBody>
+                  <a:tcPr marT="18288" marB="18288">
+                    <a:solidFill>
+                      <a:srgbClr val="FFFFFF"/>
                     </a:solidFill>
                   </a:tcPr>
                 </a:tc>
@@ -8698,57 +9430,22 @@
                 </a:solidFill>
                 <a:latin typeface="Calibri"/>
               </a:rPr>
-              <a:t>7 · Wann welcher MCP</a:t>
-            </a:r>
-          </a:p>
-        </p:txBody>
-      </p:sp>
-      <p:sp>
-        <p:nvSpPr>
-          <p:cNvPr id="4" name="TextBox 3"/>
-          <p:cNvSpPr txBox="1"/>
-          <p:nvPr/>
-        </p:nvSpPr>
-        <p:spPr>
-          <a:xfrm>
-            <a:off x="640080" y="1188720"/>
-            <a:ext cx="10972800" cy="548640"/>
-          </a:xfrm>
-          <a:prstGeom prst="rect">
-            <a:avLst/>
-          </a:prstGeom>
-          <a:noFill/>
-        </p:spPr>
-        <p:txBody>
-          <a:bodyPr wrap="square">
-            <a:spAutoFit/>
-          </a:bodyPr>
-          <a:lstStyle/>
-          <a:p>
-            <a:pPr algn="l"/>
-            <a:r>
-              <a:rPr sz="1400" b="1">
-                <a:solidFill>
-                  <a:srgbClr val="F59E0B"/>
-                </a:solidFill>
-                <a:latin typeface="Calibri"/>
-              </a:rPr>
-              <a:t>Faustregel: 20–30 konfiguriert, &lt; 10 aktiv / &lt; 80 Tools. Ungenutztes mit /mcp deaktivieren.</a:t>
+              <a:t>6 · Cheat-Sheet — wann welcher Command (2/2)</a:t>
             </a:r>
           </a:p>
         </p:txBody>
       </p:sp>
       <p:graphicFrame>
         <p:nvGraphicFramePr>
-          <p:cNvPr id="5" name="Table 4"/>
+          <p:cNvPr id="4" name="Table 3"/>
           <p:cNvGraphicFramePr>
             <a:graphicFrameLocks noGrp="1"/>
           </p:cNvGraphicFramePr>
           <p:nvPr/>
         </p:nvGraphicFramePr>
         <p:xfrm>
-          <a:off x="548640" y="1783080"/>
-          <a:ext cx="11155680" cy="4480560"/>
+          <a:off x="548640" y="1371600"/>
+          <a:ext cx="11155680" cy="4754880"/>
         </p:xfrm>
         <a:graphic>
           <a:graphicData uri="http://schemas.openxmlformats.org/drawingml/2006/table">
@@ -8757,24 +9454,24 @@
                 <a:tableStyleId>{5C22544A-7EE6-4342-B048-85BDC9FD1C3A}</a:tableStyleId>
               </a:tblPr>
               <a:tblGrid>
-                <a:gridCol w="3291840"/>
-                <a:gridCol w="2560320"/>
-                <a:gridCol w="5303520"/>
+                <a:gridCol w="2743200"/>
+                <a:gridCol w="3840480"/>
+                <a:gridCol w="4572000"/>
               </a:tblGrid>
-              <a:tr h="448056">
-                <a:tc>
-                  <a:txBody>
-                    <a:bodyPr wrap="square"/>
-                    <a:lstStyle/>
-                    <a:p>
-                      <a:r>
-                        <a:rPr sz="1100" b="1">
+              <a:tr h="528320">
+                <a:tc>
+                  <a:txBody>
+                    <a:bodyPr wrap="square"/>
+                    <a:lstStyle/>
+                    <a:p>
+                      <a:r>
+                        <a:rPr sz="1200" b="1">
                           <a:solidFill>
                             <a:srgbClr val="FFFFFF"/>
                           </a:solidFill>
                           <a:latin typeface="Calibri"/>
                         </a:rPr>
-                        <a:t>Aufgabe</a:t>
+                        <a:t>Situation</a:t>
                       </a:r>
                     </a:p>
                   </a:txBody>
@@ -8790,13 +9487,13 @@
                     <a:lstStyle/>
                     <a:p>
                       <a:r>
-                        <a:rPr sz="1100" b="1">
+                        <a:rPr sz="1200" b="1">
                           <a:solidFill>
                             <a:srgbClr val="FFFFFF"/>
                           </a:solidFill>
                           <a:latin typeface="Calibri"/>
                         </a:rPr>
-                        <a:t>MCP / Tool</a:t>
+                        <a:t>Command</a:t>
                       </a:r>
                     </a:p>
                   </a:txBody>
@@ -8812,13 +9509,13 @@
                     <a:lstStyle/>
                     <a:p>
                       <a:r>
-                        <a:rPr sz="1100" b="1">
+                        <a:rPr sz="1200" b="1">
                           <a:solidFill>
                             <a:srgbClr val="FFFFFF"/>
                           </a:solidFill>
                           <a:latin typeface="Calibri"/>
                         </a:rPr>
-                        <a:t>Hinweis</a:t>
+                        <a:t>Zweck</a:t>
                       </a:r>
                     </a:p>
                   </a:txBody>
@@ -8829,20 +9526,20 @@
                   </a:tcPr>
                 </a:tc>
               </a:tr>
-              <a:tr h="448056">
-                <a:tc>
-                  <a:txBody>
-                    <a:bodyPr wrap="square"/>
-                    <a:lstStyle/>
-                    <a:p>
-                      <a:r>
-                        <a:rPr sz="1100">
-                          <a:solidFill>
-                            <a:srgbClr val="1F2937"/>
-                          </a:solidFill>
-                          <a:latin typeface="Calibri"/>
-                        </a:rPr>
-                        <a:t>Aktuelle Library-/API-Doku</a:t>
+              <a:tr h="528320">
+                <a:tc>
+                  <a:txBody>
+                    <a:bodyPr wrap="square"/>
+                    <a:lstStyle/>
+                    <a:p>
+                      <a:r>
+                        <a:rPr sz="1200">
+                          <a:solidFill>
+                            <a:srgbClr val="1F2937"/>
+                          </a:solidFill>
+                          <a:latin typeface="Calibri"/>
+                        </a:rPr>
+                        <a:t>Aufräumen</a:t>
                       </a:r>
                     </a:p>
                   </a:txBody>
@@ -8858,13 +9555,13 @@
                     <a:lstStyle/>
                     <a:p>
                       <a:r>
-                        <a:rPr sz="1100">
-                          <a:solidFill>
-                            <a:srgbClr val="1F2937"/>
-                          </a:solidFill>
-                          <a:latin typeface="Calibri"/>
-                        </a:rPr>
-                        <a:t>context7</a:t>
+                        <a:rPr sz="1200">
+                          <a:solidFill>
+                            <a:srgbClr val="1F2937"/>
+                          </a:solidFill>
+                          <a:latin typeface="Calibri"/>
+                        </a:rPr>
+                        <a:t>/refactor-clean</a:t>
                       </a:r>
                     </a:p>
                   </a:txBody>
@@ -8880,13 +9577,13 @@
                     <a:lstStyle/>
                     <a:p>
                       <a:r>
-                        <a:rPr sz="1100">
-                          <a:solidFill>
-                            <a:srgbClr val="1F2937"/>
-                          </a:solidFill>
-                          <a:latin typeface="Calibri"/>
-                        </a:rPr>
-                        <a:t>React, Prisma, Next.js … statt veraltetem Wissen</a:t>
+                        <a:rPr sz="1200">
+                          <a:solidFill>
+                            <a:srgbClr val="1F2937"/>
+                          </a:solidFill>
+                          <a:latin typeface="Calibri"/>
+                        </a:rPr>
+                        <a:t>toter Code + lose Dateien raus</a:t>
                       </a:r>
                     </a:p>
                   </a:txBody>
@@ -8897,20 +9594,20 @@
                   </a:tcPr>
                 </a:tc>
               </a:tr>
-              <a:tr h="448056">
-                <a:tc>
-                  <a:txBody>
-                    <a:bodyPr wrap="square"/>
-                    <a:lstStyle/>
-                    <a:p>
-                      <a:r>
-                        <a:rPr sz="1100">
-                          <a:solidFill>
-                            <a:srgbClr val="1F2937"/>
-                          </a:solidFill>
-                          <a:latin typeface="Calibri"/>
-                        </a:rPr>
-                        <a:t>Web-Recherche / Discovery</a:t>
+              <a:tr h="528320">
+                <a:tc>
+                  <a:txBody>
+                    <a:bodyPr wrap="square"/>
+                    <a:lstStyle/>
+                    <a:p>
+                      <a:r>
+                        <a:rPr sz="1200">
+                          <a:solidFill>
+                            <a:srgbClr val="1F2937"/>
+                          </a:solidFill>
+                          <a:latin typeface="Calibri"/>
+                        </a:rPr>
+                        <a:t>Library-Doku live</a:t>
                       </a:r>
                     </a:p>
                   </a:txBody>
@@ -8926,13 +9623,13 @@
                     <a:lstStyle/>
                     <a:p>
                       <a:r>
-                        <a:rPr sz="1100">
-                          <a:solidFill>
-                            <a:srgbClr val="1F2937"/>
-                          </a:solidFill>
-                          <a:latin typeface="Calibri"/>
-                        </a:rPr>
-                        <a:t>exa</a:t>
+                        <a:rPr sz="1200">
+                          <a:solidFill>
+                            <a:srgbClr val="1F2937"/>
+                          </a:solidFill>
+                          <a:latin typeface="Calibri"/>
+                        </a:rPr>
+                        <a:t>context7-MCP  ·  Skill documentation-lookup</a:t>
                       </a:r>
                     </a:p>
                   </a:txBody>
@@ -8948,13 +9645,13 @@
                     <a:lstStyle/>
                     <a:p>
                       <a:r>
-                        <a:rPr sz="1100">
-                          <a:solidFill>
-                            <a:srgbClr val="1F2937"/>
-                          </a:solidFill>
-                          <a:latin typeface="Calibri"/>
-                        </a:rPr>
-                        <a:t>breite Suche, wenn GitHub+Docs nicht reichen</a:t>
+                        <a:rPr sz="1200">
+                          <a:solidFill>
+                            <a:srgbClr val="1F2937"/>
+                          </a:solidFill>
+                          <a:latin typeface="Calibri"/>
+                        </a:rPr>
+                        <a:t>aktuelle API-Doku statt Halluzination</a:t>
                       </a:r>
                     </a:p>
                   </a:txBody>
@@ -8965,20 +9662,20 @@
                   </a:tcPr>
                 </a:tc>
               </a:tr>
-              <a:tr h="448056">
-                <a:tc>
-                  <a:txBody>
-                    <a:bodyPr wrap="square"/>
-                    <a:lstStyle/>
-                    <a:p>
-                      <a:r>
-                        <a:rPr sz="1100">
-                          <a:solidFill>
-                            <a:srgbClr val="1F2937"/>
-                          </a:solidFill>
-                          <a:latin typeface="Calibri"/>
-                        </a:rPr>
-                        <a:t>GitHub (PRs, Issues, Code-Suche)</a:t>
+              <a:tr h="528320">
+                <a:tc>
+                  <a:txBody>
+                    <a:bodyPr wrap="square"/>
+                    <a:lstStyle/>
+                    <a:p>
+                      <a:r>
+                        <a:rPr sz="1200">
+                          <a:solidFill>
+                            <a:srgbClr val="1F2937"/>
+                          </a:solidFill>
+                          <a:latin typeface="Calibri"/>
+                        </a:rPr>
+                        <a:t>Session sichern/laden</a:t>
                       </a:r>
                     </a:p>
                   </a:txBody>
@@ -8994,13 +9691,13 @@
                     <a:lstStyle/>
                     <a:p>
                       <a:r>
-                        <a:rPr sz="1100">
-                          <a:solidFill>
-                            <a:srgbClr val="1F2937"/>
-                          </a:solidFill>
-                          <a:latin typeface="Calibri"/>
-                        </a:rPr>
-                        <a:t>github</a:t>
+                        <a:rPr sz="1200">
+                          <a:solidFill>
+                            <a:srgbClr val="1F2937"/>
+                          </a:solidFill>
+                          <a:latin typeface="Calibri"/>
+                        </a:rPr>
+                        <a:t>/save-session  ·  /resume-session  ·  /sessions</a:t>
                       </a:r>
                     </a:p>
                   </a:txBody>
@@ -9016,13 +9713,13 @@
                     <a:lstStyle/>
                     <a:p>
                       <a:r>
-                        <a:rPr sz="1100">
-                          <a:solidFill>
-                            <a:srgbClr val="1F2937"/>
-                          </a:solidFill>
-                          <a:latin typeface="Calibri"/>
-                        </a:rPr>
-                        <a:t>Code-Search FIRST vor Neuschreiben</a:t>
+                        <a:rPr sz="1200">
+                          <a:solidFill>
+                            <a:srgbClr val="1F2937"/>
+                          </a:solidFill>
+                          <a:latin typeface="Calibri"/>
+                        </a:rPr>
+                        <a:t>über den Tag hinaus arbeiten</a:t>
                       </a:r>
                     </a:p>
                   </a:txBody>
@@ -9033,20 +9730,20 @@
                   </a:tcPr>
                 </a:tc>
               </a:tr>
-              <a:tr h="448056">
-                <a:tc>
-                  <a:txBody>
-                    <a:bodyPr wrap="square"/>
-                    <a:lstStyle/>
-                    <a:p>
-                      <a:r>
-                        <a:rPr sz="1100">
-                          <a:solidFill>
-                            <a:srgbClr val="1F2937"/>
-                          </a:solidFill>
-                          <a:latin typeface="Calibri"/>
-                        </a:rPr>
-                        <a:t>Browser / E2E / Screenshots</a:t>
+              <a:tr h="528320">
+                <a:tc>
+                  <a:txBody>
+                    <a:bodyPr wrap="square"/>
+                    <a:lstStyle/>
+                    <a:p>
+                      <a:r>
+                        <a:rPr sz="1200">
+                          <a:solidFill>
+                            <a:srgbClr val="1F2937"/>
+                          </a:solidFill>
+                          <a:latin typeface="Calibri"/>
+                        </a:rPr>
+                        <a:t>Checkpoint / Nebenfrage</a:t>
                       </a:r>
                     </a:p>
                   </a:txBody>
@@ -9062,13 +9759,13 @@
                     <a:lstStyle/>
                     <a:p>
                       <a:r>
-                        <a:rPr sz="1100">
-                          <a:solidFill>
-                            <a:srgbClr val="1F2937"/>
-                          </a:solidFill>
-                          <a:latin typeface="Calibri"/>
-                        </a:rPr>
-                        <a:t>playwright</a:t>
+                        <a:rPr sz="1200">
+                          <a:solidFill>
+                            <a:srgbClr val="1F2937"/>
+                          </a:solidFill>
+                          <a:latin typeface="Calibri"/>
+                        </a:rPr>
+                        <a:t>/checkpoint  ·  /aside</a:t>
                       </a:r>
                     </a:p>
                   </a:txBody>
@@ -9084,13 +9781,13 @@
                     <a:lstStyle/>
                     <a:p>
                       <a:r>
-                        <a:rPr sz="1100">
-                          <a:solidFill>
-                            <a:srgbClr val="1F2937"/>
-                          </a:solidFill>
-                          <a:latin typeface="Calibri"/>
-                        </a:rPr>
-                        <a:t>headless Automation, visuelle Tests</a:t>
+                        <a:rPr sz="1200">
+                          <a:solidFill>
+                            <a:srgbClr val="1F2937"/>
+                          </a:solidFill>
+                          <a:latin typeface="Calibri"/>
+                        </a:rPr>
+                        <a:t>Stand markieren / Kontext bewahren</a:t>
                       </a:r>
                     </a:p>
                   </a:txBody>
@@ -9101,20 +9798,20 @@
                   </a:tcPr>
                 </a:tc>
               </a:tr>
-              <a:tr h="448056">
-                <a:tc>
-                  <a:txBody>
-                    <a:bodyPr wrap="square"/>
-                    <a:lstStyle/>
-                    <a:p>
-                      <a:r>
-                        <a:rPr sz="1100">
-                          <a:solidFill>
-                            <a:srgbClr val="1F2937"/>
-                          </a:solidFill>
-                          <a:latin typeface="Calibri"/>
-                        </a:rPr>
-                        <a:t>PDF / Word / Excel lesen</a:t>
+              <a:tr h="528320">
+                <a:tc>
+                  <a:txBody>
+                    <a:bodyPr wrap="square"/>
+                    <a:lstStyle/>
+                    <a:p>
+                      <a:r>
+                        <a:rPr sz="1200">
+                          <a:solidFill>
+                            <a:srgbClr val="1F2937"/>
+                          </a:solidFill>
+                          <a:latin typeface="Calibri"/>
+                        </a:rPr>
+                        <a:t>Gelerntes extrahieren</a:t>
                       </a:r>
                     </a:p>
                   </a:txBody>
@@ -9130,13 +9827,13 @@
                     <a:lstStyle/>
                     <a:p>
                       <a:r>
-                        <a:rPr sz="1100">
-                          <a:solidFill>
-                            <a:srgbClr val="1F2937"/>
-                          </a:solidFill>
-                          <a:latin typeface="Calibri"/>
-                        </a:rPr>
-                        <a:t>markitdown</a:t>
+                        <a:rPr sz="1200">
+                          <a:solidFill>
+                            <a:srgbClr val="1F2937"/>
+                          </a:solidFill>
+                          <a:latin typeface="Calibri"/>
+                        </a:rPr>
+                        <a:t>/learn-eval → /evolve → /promote</a:t>
                       </a:r>
                     </a:p>
                   </a:txBody>
@@ -9152,13 +9849,13 @@
                     <a:lstStyle/>
                     <a:p>
                       <a:r>
-                        <a:rPr sz="1100">
-                          <a:solidFill>
-                            <a:srgbClr val="1F2937"/>
-                          </a:solidFill>
-                          <a:latin typeface="Calibri"/>
-                        </a:rPr>
-                        <a:t>Dokumente → Markdown (global aktiv)</a:t>
+                        <a:rPr sz="1200">
+                          <a:solidFill>
+                            <a:srgbClr val="1F2937"/>
+                          </a:solidFill>
+                          <a:latin typeface="Calibri"/>
+                        </a:rPr>
+                        <a:t>Self-Improvement-Loop</a:t>
                       </a:r>
                     </a:p>
                   </a:txBody>
@@ -9169,20 +9866,20 @@
                   </a:tcPr>
                 </a:tc>
               </a:tr>
-              <a:tr h="448056">
-                <a:tc>
-                  <a:txBody>
-                    <a:bodyPr wrap="square"/>
-                    <a:lstStyle/>
-                    <a:p>
-                      <a:r>
-                        <a:rPr sz="1100">
-                          <a:solidFill>
-                            <a:srgbClr val="1F2937"/>
-                          </a:solidFill>
-                          <a:latin typeface="Calibri"/>
-                        </a:rPr>
-                        <a:t>Strukturierter Wissensgraph</a:t>
+              <a:tr h="528320">
+                <a:tc>
+                  <a:txBody>
+                    <a:bodyPr wrap="square"/>
+                    <a:lstStyle/>
+                    <a:p>
+                      <a:r>
+                        <a:rPr sz="1200">
+                          <a:solidFill>
+                            <a:srgbClr val="1F2937"/>
+                          </a:solidFill>
+                          <a:latin typeface="Calibri"/>
+                        </a:rPr>
+                        <a:t>Modell / Kosten</a:t>
                       </a:r>
                     </a:p>
                   </a:txBody>
@@ -9198,13 +9895,13 @@
                     <a:lstStyle/>
                     <a:p>
                       <a:r>
-                        <a:rPr sz="1100">
-                          <a:solidFill>
-                            <a:srgbClr val="1F2937"/>
-                          </a:solidFill>
-                          <a:latin typeface="Calibri"/>
-                        </a:rPr>
-                        <a:t>memory</a:t>
+                        <a:rPr sz="1200">
+                          <a:solidFill>
+                            <a:srgbClr val="1F2937"/>
+                          </a:solidFill>
+                          <a:latin typeface="Calibri"/>
+                        </a:rPr>
+                        <a:t>/model-route  ·  /cost-report</a:t>
                       </a:r>
                     </a:p>
                   </a:txBody>
@@ -9220,13 +9917,13 @@
                     <a:lstStyle/>
                     <a:p>
                       <a:r>
-                        <a:rPr sz="1100">
-                          <a:solidFill>
-                            <a:srgbClr val="1F2937"/>
-                          </a:solidFill>
-                          <a:latin typeface="Calibri"/>
-                        </a:rPr>
-                        <a:t>Laufzeit-Memory (mit claude-mem abstimmen)</a:t>
+                        <a:rPr sz="1200">
+                          <a:solidFill>
+                            <a:srgbClr val="1F2937"/>
+                          </a:solidFill>
+                          <a:latin typeface="Calibri"/>
+                        </a:rPr>
+                        <a:t>billigstes ausreichendes Modell</a:t>
                       </a:r>
                     </a:p>
                   </a:txBody>
@@ -9237,20 +9934,20 @@
                   </a:tcPr>
                 </a:tc>
               </a:tr>
-              <a:tr h="448056">
-                <a:tc>
-                  <a:txBody>
-                    <a:bodyPr wrap="square"/>
-                    <a:lstStyle/>
-                    <a:p>
-                      <a:r>
-                        <a:rPr sz="1100">
-                          <a:solidFill>
-                            <a:srgbClr val="1F2937"/>
-                          </a:solidFill>
-                          <a:latin typeface="Calibri"/>
-                        </a:rPr>
-                        <a:t>Schrittweises Reasoning</a:t>
+              <a:tr h="528320">
+                <a:tc>
+                  <a:txBody>
+                    <a:bodyPr wrap="square"/>
+                    <a:lstStyle/>
+                    <a:p>
+                      <a:r>
+                        <a:rPr sz="1200">
+                          <a:solidFill>
+                            <a:srgbClr val="1F2937"/>
+                          </a:solidFill>
+                          <a:latin typeface="Calibri"/>
+                        </a:rPr>
+                        <a:t>Harness prüfen</a:t>
                       </a:r>
                     </a:p>
                   </a:txBody>
@@ -9266,13 +9963,13 @@
                     <a:lstStyle/>
                     <a:p>
                       <a:r>
-                        <a:rPr sz="1100">
-                          <a:solidFill>
-                            <a:srgbClr val="1F2937"/>
-                          </a:solidFill>
-                          <a:latin typeface="Calibri"/>
-                        </a:rPr>
-                        <a:t>sequential-thinking</a:t>
+                        <a:rPr sz="1200">
+                          <a:solidFill>
+                            <a:srgbClr val="1F2937"/>
+                          </a:solidFill>
+                          <a:latin typeface="Calibri"/>
+                        </a:rPr>
+                        <a:t>/harness-audit  ·  /ecc-guide</a:t>
                       </a:r>
                     </a:p>
                   </a:txBody>
@@ -9288,13 +9985,13 @@
                     <a:lstStyle/>
                     <a:p>
                       <a:r>
-                        <a:rPr sz="1100">
-                          <a:solidFill>
-                            <a:srgbClr val="1F2937"/>
-                          </a:solidFill>
-                          <a:latin typeface="Calibri"/>
-                        </a:rPr>
-                        <a:t>komplexe Mehrschritt-Probleme</a:t>
+                        <a:rPr sz="1200">
+                          <a:solidFill>
+                            <a:srgbClr val="1F2937"/>
+                          </a:solidFill>
+                          <a:latin typeface="Calibri"/>
+                        </a:rPr>
+                        <a:t>Config-Scorecard / Onboarding</a:t>
                       </a:r>
                     </a:p>
                   </a:txBody>
@@ -9305,20 +10002,20 @@
                   </a:tcPr>
                 </a:tc>
               </a:tr>
-              <a:tr h="448056">
-                <a:tc>
-                  <a:txBody>
-                    <a:bodyPr wrap="square"/>
-                    <a:lstStyle/>
-                    <a:p>
-                      <a:r>
-                        <a:rPr sz="1100">
-                          <a:solidFill>
-                            <a:srgbClr val="1F2937"/>
-                          </a:solidFill>
-                          <a:latin typeface="Calibri"/>
-                        </a:rPr>
-                        <a:t>Bash-Token sparen (lokal)</a:t>
+              <a:tr h="528320">
+                <a:tc>
+                  <a:txBody>
+                    <a:bodyPr wrap="square"/>
+                    <a:lstStyle/>
+                    <a:p>
+                      <a:r>
+                        <a:rPr sz="1200">
+                          <a:solidFill>
+                            <a:srgbClr val="1F2937"/>
+                          </a:solidFill>
+                          <a:latin typeface="Calibri"/>
+                        </a:rPr>
+                        <a:t>Parallel / Loop</a:t>
                       </a:r>
                     </a:p>
                   </a:txBody>
@@ -9334,13 +10031,13 @@
                     <a:lstStyle/>
                     <a:p>
                       <a:r>
-                        <a:rPr sz="1100">
-                          <a:solidFill>
-                            <a:srgbClr val="1F2937"/>
-                          </a:solidFill>
-                          <a:latin typeface="Calibri"/>
-                        </a:rPr>
-                        <a:t>RTK-Hook</a:t>
+                        <a:rPr sz="1200">
+                          <a:solidFill>
+                            <a:srgbClr val="1F2937"/>
+                          </a:solidFill>
+                          <a:latin typeface="Calibri"/>
+                        </a:rPr>
+                        <a:t>/multi-plan  ·  /loop-start  ·  /loop-status</a:t>
                       </a:r>
                     </a:p>
                   </a:txBody>
@@ -9356,87 +10053,19 @@
                     <a:lstStyle/>
                     <a:p>
                       <a:r>
-                        <a:rPr sz="1100">
-                          <a:solidFill>
-                            <a:srgbClr val="1F2937"/>
-                          </a:solidFill>
-                          <a:latin typeface="Calibri"/>
-                        </a:rPr>
-                        <a:t>60–90 % Ersparnis, läuft transparent global</a:t>
+                        <a:rPr sz="1200">
+                          <a:solidFill>
+                            <a:srgbClr val="1F2937"/>
+                          </a:solidFill>
+                          <a:latin typeface="Calibri"/>
+                        </a:rPr>
+                        <a:t>mehrere Modelle / Automation</a:t>
                       </a:r>
                     </a:p>
                   </a:txBody>
                   <a:tcPr marT="18288" marB="18288">
                     <a:solidFill>
                       <a:srgbClr val="FFFFFF"/>
-                    </a:solidFill>
-                  </a:tcPr>
-                </a:tc>
-              </a:tr>
-              <a:tr h="448056">
-                <a:tc>
-                  <a:txBody>
-                    <a:bodyPr wrap="square"/>
-                    <a:lstStyle/>
-                    <a:p>
-                      <a:r>
-                        <a:rPr sz="1100">
-                          <a:solidFill>
-                            <a:srgbClr val="1F2937"/>
-                          </a:solidFill>
-                          <a:latin typeface="Calibri"/>
-                        </a:rPr>
-                        <a:t>Frühere Arbeit / „schon gelöst?"</a:t>
-                      </a:r>
-                    </a:p>
-                  </a:txBody>
-                  <a:tcPr marT="18288" marB="18288">
-                    <a:solidFill>
-                      <a:srgbClr val="F3F4F6"/>
-                    </a:solidFill>
-                  </a:tcPr>
-                </a:tc>
-                <a:tc>
-                  <a:txBody>
-                    <a:bodyPr wrap="square"/>
-                    <a:lstStyle/>
-                    <a:p>
-                      <a:r>
-                        <a:rPr sz="1100">
-                          <a:solidFill>
-                            <a:srgbClr val="1F2937"/>
-                          </a:solidFill>
-                          <a:latin typeface="Calibri"/>
-                        </a:rPr>
-                        <a:t>claude-mem (/mem-search)</a:t>
-                      </a:r>
-                    </a:p>
-                  </a:txBody>
-                  <a:tcPr marT="18288" marB="18288">
-                    <a:solidFill>
-                      <a:srgbClr val="F3F4F6"/>
-                    </a:solidFill>
-                  </a:tcPr>
-                </a:tc>
-                <a:tc>
-                  <a:txBody>
-                    <a:bodyPr wrap="square"/>
-                    <a:lstStyle/>
-                    <a:p>
-                      <a:r>
-                        <a:rPr sz="1100">
-                          <a:solidFill>
-                            <a:srgbClr val="1F2937"/>
-                          </a:solidFill>
-                          <a:latin typeface="Calibri"/>
-                        </a:rPr>
-                        <a:t>cross-session Memory, injiziert Kontext automatisch</a:t>
-                      </a:r>
-                    </a:p>
-                  </a:txBody>
-                  <a:tcPr marT="18288" marB="18288">
-                    <a:solidFill>
-                      <a:srgbClr val="F3F4F6"/>
                     </a:solidFill>
                   </a:tcPr>
                 </a:tc>

--- a/docs/ECC-Harness-Guide.de.pptx
+++ b/docs/ECC-Harness-Guide.de.pptx
@@ -4370,8 +4370,8 @@
         </p:nvSpPr>
         <p:spPr>
           <a:xfrm>
-            <a:off x="640080" y="1691640"/>
-            <a:ext cx="10972800" cy="502920"/>
+            <a:off x="640080" y="1645920"/>
+            <a:ext cx="10972800" cy="411480"/>
           </a:xfrm>
           <a:prstGeom prst="rect">
             <a:avLst/>
@@ -4392,22 +4392,57 @@
                 </a:solidFill>
                 <a:latin typeface="Calibri"/>
               </a:rPr>
-              <a:t>Faustregel: 20–30 konfiguriert, &lt; 10 aktiv / &lt; 80 Tools. Ungenutztes mit /mcp deaktivieren.</a:t>
+              <a:t>Faustregel: &lt; 10 MCPs aktiv / &lt; 80 Tools. Ungenutztes mit /mcp deaktivieren.</a:t>
+            </a:r>
+          </a:p>
+        </p:txBody>
+      </p:sp>
+      <p:sp>
+        <p:nvSpPr>
+          <p:cNvPr id="8" name="TextBox 7"/>
+          <p:cNvSpPr txBox="1"/>
+          <p:nvPr/>
+        </p:nvSpPr>
+        <p:spPr>
+          <a:xfrm>
+            <a:off x="640080" y="2103120"/>
+            <a:ext cx="10972800" cy="347472"/>
+          </a:xfrm>
+          <a:prstGeom prst="rect">
+            <a:avLst/>
+          </a:prstGeom>
+          <a:noFill/>
+        </p:spPr>
+        <p:txBody>
+          <a:bodyPr wrap="square">
+            <a:spAutoFit/>
+          </a:bodyPr>
+          <a:lstStyle/>
+          <a:p>
+            <a:pPr algn="l"/>
+            <a:r>
+              <a:rPr sz="1300" b="1">
+                <a:solidFill>
+                  <a:srgbClr val="22D3EE"/>
+                </a:solidFill>
+                <a:latin typeface="Calibri"/>
+              </a:rPr>
+              <a:t>● BEI DIR AKTIV</a:t>
             </a:r>
           </a:p>
         </p:txBody>
       </p:sp>
       <p:graphicFrame>
         <p:nvGraphicFramePr>
-          <p:cNvPr id="8" name="Table 7"/>
+          <p:cNvPr id="9" name="Table 8"/>
           <p:cNvGraphicFramePr>
             <a:graphicFrameLocks noGrp="1"/>
           </p:cNvGraphicFramePr>
           <p:nvPr/>
         </p:nvGraphicFramePr>
         <p:xfrm>
-          <a:off x="548640" y="2286000"/>
-          <a:ext cx="11155680" cy="4114800"/>
+          <a:off x="548640" y="2487168"/>
+          <a:ext cx="11155680" cy="3063240"/>
         </p:xfrm>
         <a:graphic>
           <a:graphicData uri="http://schemas.openxmlformats.org/drawingml/2006/table">
@@ -4416,11 +4451,11 @@
                 <a:tableStyleId>{2D5ABB26-0587-4C30-8999-92F81FD0307C}</a:tableStyleId>
               </a:tblPr>
               <a:tblGrid>
-                <a:gridCol w="3474720"/>
-                <a:gridCol w="2560320"/>
-                <a:gridCol w="5120640"/>
+                <a:gridCol w="3108960"/>
+                <a:gridCol w="2651760"/>
+                <a:gridCol w="5394960"/>
               </a:tblGrid>
-              <a:tr h="411480">
+              <a:tr h="437605">
                 <a:tc>
                   <a:txBody>
                     <a:bodyPr wrap="square"/>
@@ -4488,7 +4523,7 @@
                   </a:tcPr>
                 </a:tc>
               </a:tr>
-              <a:tr h="411480">
+              <a:tr h="437605">
                 <a:tc>
                   <a:txBody>
                     <a:bodyPr wrap="square"/>
@@ -4501,279 +4536,7 @@
                           </a:solidFill>
                           <a:latin typeface="Calibri"/>
                         </a:rPr>
-                        <a:t>Aktuelle Library-/API-Doku</a:t>
-                      </a:r>
-                    </a:p>
-                  </a:txBody>
-                  <a:tcPr marT="36576" marB="36576" marL="73152" marR="73152">
-                    <a:solidFill>
-                      <a:srgbClr val="141A2E"/>
-                    </a:solidFill>
-                  </a:tcPr>
-                </a:tc>
-                <a:tc>
-                  <a:txBody>
-                    <a:bodyPr wrap="square"/>
-                    <a:lstStyle/>
-                    <a:p>
-                      <a:r>
-                        <a:rPr sz="1100">
-                          <a:solidFill>
-                            <a:srgbClr val="E6EDF8"/>
-                          </a:solidFill>
-                          <a:latin typeface="Calibri"/>
-                        </a:rPr>
-                        <a:t>context7</a:t>
-                      </a:r>
-                    </a:p>
-                  </a:txBody>
-                  <a:tcPr marT="36576" marB="36576" marL="73152" marR="73152">
-                    <a:solidFill>
-                      <a:srgbClr val="141A2E"/>
-                    </a:solidFill>
-                  </a:tcPr>
-                </a:tc>
-                <a:tc>
-                  <a:txBody>
-                    <a:bodyPr wrap="square"/>
-                    <a:lstStyle/>
-                    <a:p>
-                      <a:r>
-                        <a:rPr sz="1100">
-                          <a:solidFill>
-                            <a:srgbClr val="E6EDF8"/>
-                          </a:solidFill>
-                          <a:latin typeface="Calibri"/>
-                        </a:rPr>
-                        <a:t>React, Prisma, Next.js … statt veraltetem Wissen</a:t>
-                      </a:r>
-                    </a:p>
-                  </a:txBody>
-                  <a:tcPr marT="36576" marB="36576" marL="73152" marR="73152">
-                    <a:solidFill>
-                      <a:srgbClr val="141A2E"/>
-                    </a:solidFill>
-                  </a:tcPr>
-                </a:tc>
-              </a:tr>
-              <a:tr h="411480">
-                <a:tc>
-                  <a:txBody>
-                    <a:bodyPr wrap="square"/>
-                    <a:lstStyle/>
-                    <a:p>
-                      <a:r>
-                        <a:rPr sz="1100">
-                          <a:solidFill>
-                            <a:srgbClr val="E6EDF8"/>
-                          </a:solidFill>
-                          <a:latin typeface="Calibri"/>
-                        </a:rPr>
-                        <a:t>Web-Recherche / Discovery</a:t>
-                      </a:r>
-                    </a:p>
-                  </a:txBody>
-                  <a:tcPr marT="36576" marB="36576" marL="73152" marR="73152">
-                    <a:solidFill>
-                      <a:srgbClr val="0A0E1A"/>
-                    </a:solidFill>
-                  </a:tcPr>
-                </a:tc>
-                <a:tc>
-                  <a:txBody>
-                    <a:bodyPr wrap="square"/>
-                    <a:lstStyle/>
-                    <a:p>
-                      <a:r>
-                        <a:rPr sz="1100">
-                          <a:solidFill>
-                            <a:srgbClr val="E6EDF8"/>
-                          </a:solidFill>
-                          <a:latin typeface="Calibri"/>
-                        </a:rPr>
-                        <a:t>exa</a:t>
-                      </a:r>
-                    </a:p>
-                  </a:txBody>
-                  <a:tcPr marT="36576" marB="36576" marL="73152" marR="73152">
-                    <a:solidFill>
-                      <a:srgbClr val="0A0E1A"/>
-                    </a:solidFill>
-                  </a:tcPr>
-                </a:tc>
-                <a:tc>
-                  <a:txBody>
-                    <a:bodyPr wrap="square"/>
-                    <a:lstStyle/>
-                    <a:p>
-                      <a:r>
-                        <a:rPr sz="1100">
-                          <a:solidFill>
-                            <a:srgbClr val="E6EDF8"/>
-                          </a:solidFill>
-                          <a:latin typeface="Calibri"/>
-                        </a:rPr>
-                        <a:t>breite Suche, wenn GitHub+Docs nicht reichen</a:t>
-                      </a:r>
-                    </a:p>
-                  </a:txBody>
-                  <a:tcPr marT="36576" marB="36576" marL="73152" marR="73152">
-                    <a:solidFill>
-                      <a:srgbClr val="0A0E1A"/>
-                    </a:solidFill>
-                  </a:tcPr>
-                </a:tc>
-              </a:tr>
-              <a:tr h="411480">
-                <a:tc>
-                  <a:txBody>
-                    <a:bodyPr wrap="square"/>
-                    <a:lstStyle/>
-                    <a:p>
-                      <a:r>
-                        <a:rPr sz="1100">
-                          <a:solidFill>
-                            <a:srgbClr val="E6EDF8"/>
-                          </a:solidFill>
-                          <a:latin typeface="Calibri"/>
-                        </a:rPr>
-                        <a:t>GitHub (PRs, Issues, Code-Suche)</a:t>
-                      </a:r>
-                    </a:p>
-                  </a:txBody>
-                  <a:tcPr marT="36576" marB="36576" marL="73152" marR="73152">
-                    <a:solidFill>
-                      <a:srgbClr val="141A2E"/>
-                    </a:solidFill>
-                  </a:tcPr>
-                </a:tc>
-                <a:tc>
-                  <a:txBody>
-                    <a:bodyPr wrap="square"/>
-                    <a:lstStyle/>
-                    <a:p>
-                      <a:r>
-                        <a:rPr sz="1100">
-                          <a:solidFill>
-                            <a:srgbClr val="E6EDF8"/>
-                          </a:solidFill>
-                          <a:latin typeface="Calibri"/>
-                        </a:rPr>
-                        <a:t>github</a:t>
-                      </a:r>
-                    </a:p>
-                  </a:txBody>
-                  <a:tcPr marT="36576" marB="36576" marL="73152" marR="73152">
-                    <a:solidFill>
-                      <a:srgbClr val="141A2E"/>
-                    </a:solidFill>
-                  </a:tcPr>
-                </a:tc>
-                <a:tc>
-                  <a:txBody>
-                    <a:bodyPr wrap="square"/>
-                    <a:lstStyle/>
-                    <a:p>
-                      <a:r>
-                        <a:rPr sz="1100">
-                          <a:solidFill>
-                            <a:srgbClr val="E6EDF8"/>
-                          </a:solidFill>
-                          <a:latin typeface="Calibri"/>
-                        </a:rPr>
-                        <a:t>Code-Search FIRST vor Neuschreiben</a:t>
-                      </a:r>
-                    </a:p>
-                  </a:txBody>
-                  <a:tcPr marT="36576" marB="36576" marL="73152" marR="73152">
-                    <a:solidFill>
-                      <a:srgbClr val="141A2E"/>
-                    </a:solidFill>
-                  </a:tcPr>
-                </a:tc>
-              </a:tr>
-              <a:tr h="411480">
-                <a:tc>
-                  <a:txBody>
-                    <a:bodyPr wrap="square"/>
-                    <a:lstStyle/>
-                    <a:p>
-                      <a:r>
-                        <a:rPr sz="1100">
-                          <a:solidFill>
-                            <a:srgbClr val="E6EDF8"/>
-                          </a:solidFill>
-                          <a:latin typeface="Calibri"/>
-                        </a:rPr>
-                        <a:t>Browser / E2E / Screenshots</a:t>
-                      </a:r>
-                    </a:p>
-                  </a:txBody>
-                  <a:tcPr marT="36576" marB="36576" marL="73152" marR="73152">
-                    <a:solidFill>
-                      <a:srgbClr val="0A0E1A"/>
-                    </a:solidFill>
-                  </a:tcPr>
-                </a:tc>
-                <a:tc>
-                  <a:txBody>
-                    <a:bodyPr wrap="square"/>
-                    <a:lstStyle/>
-                    <a:p>
-                      <a:r>
-                        <a:rPr sz="1100">
-                          <a:solidFill>
-                            <a:srgbClr val="E6EDF8"/>
-                          </a:solidFill>
-                          <a:latin typeface="Calibri"/>
-                        </a:rPr>
-                        <a:t>playwright</a:t>
-                      </a:r>
-                    </a:p>
-                  </a:txBody>
-                  <a:tcPr marT="36576" marB="36576" marL="73152" marR="73152">
-                    <a:solidFill>
-                      <a:srgbClr val="0A0E1A"/>
-                    </a:solidFill>
-                  </a:tcPr>
-                </a:tc>
-                <a:tc>
-                  <a:txBody>
-                    <a:bodyPr wrap="square"/>
-                    <a:lstStyle/>
-                    <a:p>
-                      <a:r>
-                        <a:rPr sz="1100">
-                          <a:solidFill>
-                            <a:srgbClr val="E6EDF8"/>
-                          </a:solidFill>
-                          <a:latin typeface="Calibri"/>
-                        </a:rPr>
-                        <a:t>headless Automation, visuelle Tests</a:t>
-                      </a:r>
-                    </a:p>
-                  </a:txBody>
-                  <a:tcPr marT="36576" marB="36576" marL="73152" marR="73152">
-                    <a:solidFill>
-                      <a:srgbClr val="0A0E1A"/>
-                    </a:solidFill>
-                  </a:tcPr>
-                </a:tc>
-              </a:tr>
-              <a:tr h="411480">
-                <a:tc>
-                  <a:txBody>
-                    <a:bodyPr wrap="square"/>
-                    <a:lstStyle/>
-                    <a:p>
-                      <a:r>
-                        <a:rPr sz="1100">
-                          <a:solidFill>
-                            <a:srgbClr val="E6EDF8"/>
-                          </a:solidFill>
-                          <a:latin typeface="Calibri"/>
-                        </a:rPr>
-                        <a:t>PDF / Word / Excel lesen</a:t>
+                        <a:t>PDF/Word/Excel/PPTX lesen</a:t>
                       </a:r>
                     </a:p>
                   </a:txBody>
@@ -4817,7 +4580,7 @@
                           </a:solidFill>
                           <a:latin typeface="Calibri"/>
                         </a:rPr>
-                        <a:t>Dokumente → Markdown (global aktiv)</a:t>
+                        <a:t>Dokumente → Markdown (lokal, global aktiv)</a:t>
                       </a:r>
                     </a:p>
                   </a:txBody>
@@ -4828,7 +4591,7 @@
                   </a:tcPr>
                 </a:tc>
               </a:tr>
-              <a:tr h="411480">
+              <a:tr h="437605">
                 <a:tc>
                   <a:txBody>
                     <a:bodyPr wrap="square"/>
@@ -4841,7 +4604,7 @@
                           </a:solidFill>
                           <a:latin typeface="Calibri"/>
                         </a:rPr>
-                        <a:t>Strukturierter Wissensgraph</a:t>
+                        <a:t>Aktuelle Library-/API-Doku</a:t>
                       </a:r>
                     </a:p>
                   </a:txBody>
@@ -4863,7 +4626,7 @@
                           </a:solidFill>
                           <a:latin typeface="Calibri"/>
                         </a:rPr>
-                        <a:t>memory</a:t>
+                        <a:t>context7</a:t>
                       </a:r>
                     </a:p>
                   </a:txBody>
@@ -4885,7 +4648,7 @@
                           </a:solidFill>
                           <a:latin typeface="Calibri"/>
                         </a:rPr>
-                        <a:t>Laufzeit-Memory (mit claude-mem abstimmen)</a:t>
+                        <a:t>React, Prisma, Next.js … statt veraltetem Wissen (Plugin)</a:t>
                       </a:r>
                     </a:p>
                   </a:txBody>
@@ -4896,7 +4659,7 @@
                   </a:tcPr>
                 </a:tc>
               </a:tr>
-              <a:tr h="411480">
+              <a:tr h="437605">
                 <a:tc>
                   <a:txBody>
                     <a:bodyPr wrap="square"/>
@@ -4909,7 +4672,7 @@
                           </a:solidFill>
                           <a:latin typeface="Calibri"/>
                         </a:rPr>
-                        <a:t>Schrittweises Reasoning</a:t>
+                        <a:t>Frühere Arbeit / „schon gelöst?“</a:t>
                       </a:r>
                     </a:p>
                   </a:txBody>
@@ -4931,7 +4694,7 @@
                           </a:solidFill>
                           <a:latin typeface="Calibri"/>
                         </a:rPr>
-                        <a:t>sequential-thinking</a:t>
+                        <a:t>claude-mem</a:t>
                       </a:r>
                     </a:p>
                   </a:txBody>
@@ -4953,7 +4716,7 @@
                           </a:solidFill>
                           <a:latin typeface="Calibri"/>
                         </a:rPr>
-                        <a:t>komplexe Mehrschritt-Probleme</a:t>
+                        <a:t>deine Memory-Quelle: /mem-search, Auto-Injektion ab 2. Session</a:t>
                       </a:r>
                     </a:p>
                   </a:txBody>
@@ -4964,7 +4727,7 @@
                   </a:tcPr>
                 </a:tc>
               </a:tr>
-              <a:tr h="411480">
+              <a:tr h="437605">
                 <a:tc>
                   <a:txBody>
                     <a:bodyPr wrap="square"/>
@@ -4977,7 +4740,7 @@
                           </a:solidFill>
                           <a:latin typeface="Calibri"/>
                         </a:rPr>
-                        <a:t>Bash-Token sparen (lokal)</a:t>
+                        <a:t>Kontext-Tooling</a:t>
                       </a:r>
                     </a:p>
                   </a:txBody>
@@ -4999,7 +4762,143 @@
                           </a:solidFill>
                           <a:latin typeface="Calibri"/>
                         </a:rPr>
-                        <a:t>RTK-Hook</a:t>
+                        <a:t>context-mode</a:t>
+                      </a:r>
+                    </a:p>
+                  </a:txBody>
+                  <a:tcPr marT="36576" marB="36576" marL="73152" marR="73152">
+                    <a:solidFill>
+                      <a:srgbClr val="0A0E1A"/>
+                    </a:solidFill>
+                  </a:tcPr>
+                </a:tc>
+                <a:tc>
+                  <a:txBody>
+                    <a:bodyPr wrap="square"/>
+                    <a:lstStyle/>
+                    <a:p>
+                      <a:r>
+                        <a:rPr sz="1100">
+                          <a:solidFill>
+                            <a:srgbClr val="E6EDF8"/>
+                          </a:solidFill>
+                          <a:latin typeface="Calibri"/>
+                        </a:rPr>
+                        <a:t>lokaler MCP</a:t>
+                      </a:r>
+                    </a:p>
+                  </a:txBody>
+                  <a:tcPr marT="36576" marB="36576" marL="73152" marR="73152">
+                    <a:solidFill>
+                      <a:srgbClr val="0A0E1A"/>
+                    </a:solidFill>
+                  </a:tcPr>
+                </a:tc>
+              </a:tr>
+              <a:tr h="437605">
+                <a:tc>
+                  <a:txBody>
+                    <a:bodyPr wrap="square"/>
+                    <a:lstStyle/>
+                    <a:p>
+                      <a:r>
+                        <a:rPr sz="1100">
+                          <a:solidFill>
+                            <a:srgbClr val="E6EDF8"/>
+                          </a:solidFill>
+                          <a:latin typeface="Calibri"/>
+                        </a:rPr>
+                        <a:t>Dienste anbinden</a:t>
+                      </a:r>
+                    </a:p>
+                  </a:txBody>
+                  <a:tcPr marT="36576" marB="36576" marL="73152" marR="73152">
+                    <a:solidFill>
+                      <a:srgbClr val="141A2E"/>
+                    </a:solidFill>
+                  </a:tcPr>
+                </a:tc>
+                <a:tc>
+                  <a:txBody>
+                    <a:bodyPr wrap="square"/>
+                    <a:lstStyle/>
+                    <a:p>
+                      <a:r>
+                        <a:rPr sz="1100">
+                          <a:solidFill>
+                            <a:srgbClr val="E6EDF8"/>
+                          </a:solidFill>
+                          <a:latin typeface="Calibri"/>
+                        </a:rPr>
+                        <a:t>claude.ai-Connectoren</a:t>
+                      </a:r>
+                    </a:p>
+                  </a:txBody>
+                  <a:tcPr marT="36576" marB="36576" marL="73152" marR="73152">
+                    <a:solidFill>
+                      <a:srgbClr val="141A2E"/>
+                    </a:solidFill>
+                  </a:tcPr>
+                </a:tc>
+                <a:tc>
+                  <a:txBody>
+                    <a:bodyPr wrap="square"/>
+                    <a:lstStyle/>
+                    <a:p>
+                      <a:r>
+                        <a:rPr sz="1100">
+                          <a:solidFill>
+                            <a:srgbClr val="E6EDF8"/>
+                          </a:solidFill>
+                          <a:latin typeface="Calibri"/>
+                        </a:rPr>
+                        <a:t>n8n · Notion · Gamma · Google Drive · Microsoft Learn · Kiwi</a:t>
+                      </a:r>
+                    </a:p>
+                  </a:txBody>
+                  <a:tcPr marT="36576" marB="36576" marL="73152" marR="73152">
+                    <a:solidFill>
+                      <a:srgbClr val="141A2E"/>
+                    </a:solidFill>
+                  </a:tcPr>
+                </a:tc>
+              </a:tr>
+              <a:tr h="437610">
+                <a:tc>
+                  <a:txBody>
+                    <a:bodyPr wrap="square"/>
+                    <a:lstStyle/>
+                    <a:p>
+                      <a:r>
+                        <a:rPr sz="1100">
+                          <a:solidFill>
+                            <a:srgbClr val="E6EDF8"/>
+                          </a:solidFill>
+                          <a:latin typeface="Calibri"/>
+                        </a:rPr>
+                        <a:t>Bash-Token sparen</a:t>
+                      </a:r>
+                    </a:p>
+                  </a:txBody>
+                  <a:tcPr marT="36576" marB="36576" marL="73152" marR="73152">
+                    <a:solidFill>
+                      <a:srgbClr val="0A0E1A"/>
+                    </a:solidFill>
+                  </a:tcPr>
+                </a:tc>
+                <a:tc>
+                  <a:txBody>
+                    <a:bodyPr wrap="square"/>
+                    <a:lstStyle/>
+                    <a:p>
+                      <a:r>
+                        <a:rPr sz="1100">
+                          <a:solidFill>
+                            <a:srgbClr val="E6EDF8"/>
+                          </a:solidFill>
+                          <a:latin typeface="Calibri"/>
+                        </a:rPr>
+                        <a:t>RTK (Hook, kein MCP)</a:t>
                       </a:r>
                     </a:p>
                   </a:txBody>
@@ -5032,78 +4931,57 @@
                   </a:tcPr>
                 </a:tc>
               </a:tr>
-              <a:tr h="411480">
-                <a:tc>
-                  <a:txBody>
-                    <a:bodyPr wrap="square"/>
-                    <a:lstStyle/>
-                    <a:p>
-                      <a:r>
-                        <a:rPr sz="1100">
-                          <a:solidFill>
-                            <a:srgbClr val="E6EDF8"/>
-                          </a:solidFill>
-                          <a:latin typeface="Calibri"/>
-                        </a:rPr>
-                        <a:t>Frühere Arbeit / „schon gelöst?"</a:t>
-                      </a:r>
-                    </a:p>
-                  </a:txBody>
-                  <a:tcPr marT="36576" marB="36576" marL="73152" marR="73152">
-                    <a:solidFill>
-                      <a:srgbClr val="141A2E"/>
-                    </a:solidFill>
-                  </a:tcPr>
-                </a:tc>
-                <a:tc>
-                  <a:txBody>
-                    <a:bodyPr wrap="square"/>
-                    <a:lstStyle/>
-                    <a:p>
-                      <a:r>
-                        <a:rPr sz="1100">
-                          <a:solidFill>
-                            <a:srgbClr val="E6EDF8"/>
-                          </a:solidFill>
-                          <a:latin typeface="Calibri"/>
-                        </a:rPr>
-                        <a:t>claude-mem (/mem-search)</a:t>
-                      </a:r>
-                    </a:p>
-                  </a:txBody>
-                  <a:tcPr marT="36576" marB="36576" marL="73152" marR="73152">
-                    <a:solidFill>
-                      <a:srgbClr val="141A2E"/>
-                    </a:solidFill>
-                  </a:tcPr>
-                </a:tc>
-                <a:tc>
-                  <a:txBody>
-                    <a:bodyPr wrap="square"/>
-                    <a:lstStyle/>
-                    <a:p>
-                      <a:r>
-                        <a:rPr sz="1100">
-                          <a:solidFill>
-                            <a:srgbClr val="E6EDF8"/>
-                          </a:solidFill>
-                          <a:latin typeface="Calibri"/>
-                        </a:rPr>
-                        <a:t>cross-session Memory, injiziert Kontext automatisch</a:t>
-                      </a:r>
-                    </a:p>
-                  </a:txBody>
-                  <a:tcPr marT="36576" marB="36576" marL="73152" marR="73152">
-                    <a:solidFill>
-                      <a:srgbClr val="141A2E"/>
-                    </a:solidFill>
-                  </a:tcPr>
-                </a:tc>
-              </a:tr>
             </a:tbl>
           </a:graphicData>
         </a:graphic>
       </p:graphicFrame>
+      <p:sp>
+        <p:nvSpPr>
+          <p:cNvPr id="10" name="TextBox 9"/>
+          <p:cNvSpPr txBox="1"/>
+          <p:nvPr/>
+        </p:nvSpPr>
+        <p:spPr>
+          <a:xfrm>
+            <a:off x="640080" y="5669280"/>
+            <a:ext cx="10972800" cy="960120"/>
+          </a:xfrm>
+          <a:prstGeom prst="rect">
+            <a:avLst/>
+          </a:prstGeom>
+          <a:noFill/>
+        </p:spPr>
+        <p:txBody>
+          <a:bodyPr wrap="none">
+            <a:spAutoFit/>
+          </a:bodyPr>
+          <a:lstStyle/>
+          <a:p>
+            <a:pPr algn="l"/>
+            <a:r>
+              <a:rPr sz="1300" b="0">
+                <a:solidFill>
+                  <a:srgbClr val="8B98B0"/>
+                </a:solidFill>
+                <a:latin typeface="Calibri"/>
+              </a:rPr>
+              <a:t>Optional, NICHT installiert: exa · github (du: gh-CLI) · playwright · sequential-thinking.</a:t>
+            </a:r>
+          </a:p>
+          <a:p>
+            <a:pPr algn="l"/>
+            <a:r>
+              <a:rPr sz="1300" b="1">
+                <a:solidFill>
+                  <a:srgbClr val="FBBF24"/>
+                </a:solidFill>
+                <a:latin typeface="Calibri"/>
+              </a:rPr>
+              <a:t>„memory“-MCP (Wissensgraph) nicht nötig — claude-mem ist deine Memory-Quelle.</a:t>
+            </a:r>
+          </a:p>
+        </p:txBody>
+      </p:sp>
     </p:spTree>
   </p:cSld>
   <p:clrMapOvr>
@@ -6270,8 +6148,8 @@
         </p:nvSpPr>
         <p:spPr>
           <a:xfrm>
-            <a:off x="640080" y="4846320"/>
-            <a:ext cx="10972800" cy="1280160"/>
+            <a:off x="640080" y="4754880"/>
+            <a:ext cx="10972800" cy="1554480"/>
           </a:xfrm>
           <a:prstGeom prst="rect">
             <a:avLst/>
@@ -6286,19 +6164,31 @@
           <a:p>
             <a:pPr algn="l"/>
             <a:r>
-              <a:rPr sz="1500" b="1">
+              <a:rPr sz="1400" b="1">
+                <a:solidFill>
+                  <a:srgbClr val="E6EDF8"/>
+                </a:solidFill>
+                <a:latin typeface="Calibri"/>
+              </a:rPr>
+              <a:t>claude-mem = deine Memory-Quelle: Auto-Injektion ab 2. Session · /mem-search für frühere Arbeit.</a:t>
+            </a:r>
+          </a:p>
+          <a:p>
+            <a:pPr algn="l"/>
+            <a:r>
+              <a:rPr sz="1400" b="1">
                 <a:solidFill>
                   <a:srgbClr val="FBBF24"/>
                 </a:solidFill>
                 <a:latin typeface="Calibri"/>
               </a:rPr>
-              <a:t>EINE primäre Memory-Quelle je Projekt (claude-mem-Koexistenz). Keine Secrets in Memory.</a:t>
-            </a:r>
-          </a:p>
-          <a:p>
-            <a:pPr algn="l"/>
-            <a:r>
-              <a:rPr sz="1400" b="0">
+              <a:t>EINE primäre Memory-Quelle je Projekt — kein zusätzlicher memory-MCP. Keine Secrets in Memory.</a:t>
+            </a:r>
+          </a:p>
+          <a:p>
+            <a:pPr algn="l"/>
+            <a:r>
+              <a:rPr sz="1300" b="0">
                 <a:solidFill>
                   <a:srgbClr val="818CF8"/>
                 </a:solidFill>

--- a/docs/ECC-Harness-Guide.de.pptx
+++ b/docs/ECC-Harness-Guide.de.pptx
@@ -22,6 +22,8 @@
     <p:sldId id="270" r:id="rId21"/>
     <p:sldId id="271" r:id="rId22"/>
     <p:sldId id="272" r:id="rId23"/>
+    <p:sldId id="273" r:id="rId24"/>
+    <p:sldId id="274" r:id="rId25"/>
   </p:sldIdLst>
   <p:sldSz cx="12191695" cy="6858000" type="screen4x3"/>
   <p:notesSz cx="6858000" cy="9144000"/>
@@ -3385,7 +3387,7 @@
                 </a:solidFill>
                 <a:latin typeface="Calibri"/>
               </a:rPr>
-              <a:t>CHEAT-SHEET</a:t>
+              <a:t>DURCHGESPIELT</a:t>
             </a:r>
           </a:p>
         </p:txBody>
@@ -3420,7 +3422,7 @@
                 </a:solidFill>
                 <a:latin typeface="Calibri"/>
               </a:rPr>
-              <a:t>9 / 16</a:t>
+              <a:t>9 / 18</a:t>
             </a:r>
           </a:p>
         </p:txBody>
@@ -3455,7 +3457,1566 @@
                 </a:solidFill>
                 <a:latin typeface="Calibri"/>
               </a:rPr>
-              <a:t>§7 Cheat-Sheet — Command (2/2)</a:t>
+              <a:t>§7b Ein Feature von 0 auf grün — /api/search</a:t>
+            </a:r>
+          </a:p>
+        </p:txBody>
+      </p:sp>
+      <p:sp>
+        <p:nvSpPr>
+          <p:cNvPr id="6" name="Rectangle 5"/>
+          <p:cNvSpPr/>
+          <p:nvPr/>
+        </p:nvSpPr>
+        <p:spPr>
+          <a:xfrm>
+            <a:off x="594360" y="1481328"/>
+            <a:ext cx="2011680" cy="41148"/>
+          </a:xfrm>
+          <a:prstGeom prst="rect">
+            <a:avLst/>
+          </a:prstGeom>
+          <a:solidFill>
+            <a:srgbClr val="22D3EE"/>
+          </a:solidFill>
+          <a:ln>
+            <a:noFill/>
+          </a:ln>
+          <a:effectLst/>
+        </p:spPr>
+        <p:style>
+          <a:lnRef idx="1">
+            <a:schemeClr val="accent1"/>
+          </a:lnRef>
+          <a:fillRef idx="3">
+            <a:schemeClr val="accent1"/>
+          </a:fillRef>
+          <a:effectRef idx="2">
+            <a:schemeClr val="accent1"/>
+          </a:effectRef>
+          <a:fontRef idx="minor">
+            <a:schemeClr val="lt1"/>
+          </a:fontRef>
+        </p:style>
+        <p:txBody>
+          <a:bodyPr rtlCol="0" anchor="ctr"/>
+          <a:lstStyle/>
+          <a:p>
+            <a:pPr algn="ctr"/>
+          </a:p>
+        </p:txBody>
+      </p:sp>
+      <p:graphicFrame>
+        <p:nvGraphicFramePr>
+          <p:cNvPr id="7" name="Table 6"/>
+          <p:cNvGraphicFramePr>
+            <a:graphicFrameLocks noGrp="1"/>
+          </p:cNvGraphicFramePr>
+          <p:nvPr/>
+        </p:nvGraphicFramePr>
+        <p:xfrm>
+          <a:off x="548640" y="1783080"/>
+          <a:ext cx="11155679" cy="3291840"/>
+        </p:xfrm>
+        <a:graphic>
+          <a:graphicData uri="http://schemas.openxmlformats.org/drawingml/2006/table">
+            <a:tbl>
+              <a:tblPr>
+                <a:tableStyleId>{2D5ABB26-0587-4C30-8999-92F81FD0307C}</a:tableStyleId>
+              </a:tblPr>
+              <a:tblGrid>
+                <a:gridCol w="1828800"/>
+                <a:gridCol w="5577840"/>
+                <a:gridCol w="3749039"/>
+              </a:tblGrid>
+              <a:tr h="548640">
+                <a:tc>
+                  <a:txBody>
+                    <a:bodyPr wrap="square"/>
+                    <a:lstStyle/>
+                    <a:p>
+                      <a:r>
+                        <a:rPr sz="1150" b="1">
+                          <a:solidFill>
+                            <a:srgbClr val="22D3EE"/>
+                          </a:solidFill>
+                          <a:latin typeface="Calibri"/>
+                        </a:rPr>
+                        <a:t>Phase</a:t>
+                      </a:r>
+                    </a:p>
+                  </a:txBody>
+                  <a:tcPr marT="36576" marB="36576" marL="73152" marR="73152">
+                    <a:solidFill>
+                      <a:srgbClr val="0E1424"/>
+                    </a:solidFill>
+                  </a:tcPr>
+                </a:tc>
+                <a:tc>
+                  <a:txBody>
+                    <a:bodyPr wrap="square"/>
+                    <a:lstStyle/>
+                    <a:p>
+                      <a:r>
+                        <a:rPr sz="1150" b="1">
+                          <a:solidFill>
+                            <a:srgbClr val="22D3EE"/>
+                          </a:solidFill>
+                          <a:latin typeface="Calibri"/>
+                        </a:rPr>
+                        <a:t>Du tippst</a:t>
+                      </a:r>
+                    </a:p>
+                  </a:txBody>
+                  <a:tcPr marT="36576" marB="36576" marL="73152" marR="73152">
+                    <a:solidFill>
+                      <a:srgbClr val="0E1424"/>
+                    </a:solidFill>
+                  </a:tcPr>
+                </a:tc>
+                <a:tc>
+                  <a:txBody>
+                    <a:bodyPr wrap="square"/>
+                    <a:lstStyle/>
+                    <a:p>
+                      <a:r>
+                        <a:rPr sz="1150" b="1">
+                          <a:solidFill>
+                            <a:srgbClr val="22D3EE"/>
+                          </a:solidFill>
+                          <a:latin typeface="Calibri"/>
+                        </a:rPr>
+                        <a:t>→ Output · Modell</a:t>
+                      </a:r>
+                    </a:p>
+                  </a:txBody>
+                  <a:tcPr marT="36576" marB="36576" marL="73152" marR="73152">
+                    <a:solidFill>
+                      <a:srgbClr val="0E1424"/>
+                    </a:solidFill>
+                  </a:tcPr>
+                </a:tc>
+              </a:tr>
+              <a:tr h="548640">
+                <a:tc>
+                  <a:txBody>
+                    <a:bodyPr wrap="square"/>
+                    <a:lstStyle/>
+                    <a:p>
+                      <a:r>
+                        <a:rPr sz="1150">
+                          <a:solidFill>
+                            <a:srgbClr val="E6EDF8"/>
+                          </a:solidFill>
+                          <a:latin typeface="Calibri"/>
+                        </a:rPr>
+                        <a:t>1 RESEARCH</a:t>
+                      </a:r>
+                    </a:p>
+                  </a:txBody>
+                  <a:tcPr marT="36576" marB="36576" marL="73152" marR="73152">
+                    <a:solidFill>
+                      <a:srgbClr val="141A2E"/>
+                    </a:solidFill>
+                  </a:tcPr>
+                </a:tc>
+                <a:tc>
+                  <a:txBody>
+                    <a:bodyPr wrap="square"/>
+                    <a:lstStyle/>
+                    <a:p>
+                      <a:r>
+                        <a:rPr sz="1150">
+                          <a:solidFill>
+                            <a:srgbClr val="E6EDF8"/>
+                          </a:solidFill>
+                          <a:latin typeface="Calibri"/>
+                        </a:rPr>
+                        <a:t>Explore-Agent: Routing/Handler/Tests kartieren (+ claude-mem)</a:t>
+                      </a:r>
+                    </a:p>
+                  </a:txBody>
+                  <a:tcPr marT="36576" marB="36576" marL="73152" marR="73152">
+                    <a:solidFill>
+                      <a:srgbClr val="141A2E"/>
+                    </a:solidFill>
+                  </a:tcPr>
+                </a:tc>
+                <a:tc>
+                  <a:txBody>
+                    <a:bodyPr wrap="square"/>
+                    <a:lstStyle/>
+                    <a:p>
+                      <a:r>
+                        <a:rPr sz="1150">
+                          <a:solidFill>
+                            <a:srgbClr val="E6EDF8"/>
+                          </a:solidFill>
+                          <a:latin typeface="Calibri"/>
+                        </a:rPr>
+                        <a:t>research.md · Haiku</a:t>
+                      </a:r>
+                    </a:p>
+                  </a:txBody>
+                  <a:tcPr marT="36576" marB="36576" marL="73152" marR="73152">
+                    <a:solidFill>
+                      <a:srgbClr val="141A2E"/>
+                    </a:solidFill>
+                  </a:tcPr>
+                </a:tc>
+              </a:tr>
+              <a:tr h="548640">
+                <a:tc>
+                  <a:txBody>
+                    <a:bodyPr wrap="square"/>
+                    <a:lstStyle/>
+                    <a:p>
+                      <a:r>
+                        <a:rPr sz="1150">
+                          <a:solidFill>
+                            <a:srgbClr val="E6EDF8"/>
+                          </a:solidFill>
+                          <a:latin typeface="Calibri"/>
+                        </a:rPr>
+                        <a:t>2 PLAN</a:t>
+                      </a:r>
+                    </a:p>
+                  </a:txBody>
+                  <a:tcPr marT="36576" marB="36576" marL="73152" marR="73152">
+                    <a:solidFill>
+                      <a:srgbClr val="0A0E1A"/>
+                    </a:solidFill>
+                  </a:tcPr>
+                </a:tc>
+                <a:tc>
+                  <a:txBody>
+                    <a:bodyPr wrap="square"/>
+                    <a:lstStyle/>
+                    <a:p>
+                      <a:r>
+                        <a:rPr sz="1150">
+                          <a:solidFill>
+                            <a:srgbClr val="E6EDF8"/>
+                          </a:solidFill>
+                          <a:latin typeface="Calibri"/>
+                        </a:rPr>
+                        <a:t>/plan  /api/search: Query → Filter → Paginierung, Tests zuerst</a:t>
+                      </a:r>
+                    </a:p>
+                  </a:txBody>
+                  <a:tcPr marT="36576" marB="36576" marL="73152" marR="73152">
+                    <a:solidFill>
+                      <a:srgbClr val="0A0E1A"/>
+                    </a:solidFill>
+                  </a:tcPr>
+                </a:tc>
+                <a:tc>
+                  <a:txBody>
+                    <a:bodyPr wrap="square"/>
+                    <a:lstStyle/>
+                    <a:p>
+                      <a:r>
+                        <a:rPr sz="1150">
+                          <a:solidFill>
+                            <a:srgbClr val="E6EDF8"/>
+                          </a:solidFill>
+                          <a:latin typeface="Calibri"/>
+                        </a:rPr>
+                        <a:t>plan.md (wartet) · Opus</a:t>
+                      </a:r>
+                    </a:p>
+                  </a:txBody>
+                  <a:tcPr marT="36576" marB="36576" marL="73152" marR="73152">
+                    <a:solidFill>
+                      <a:srgbClr val="0A0E1A"/>
+                    </a:solidFill>
+                  </a:tcPr>
+                </a:tc>
+              </a:tr>
+              <a:tr h="548640">
+                <a:tc>
+                  <a:txBody>
+                    <a:bodyPr wrap="square"/>
+                    <a:lstStyle/>
+                    <a:p>
+                      <a:r>
+                        <a:rPr sz="1150">
+                          <a:solidFill>
+                            <a:srgbClr val="E6EDF8"/>
+                          </a:solidFill>
+                          <a:latin typeface="Calibri"/>
+                        </a:rPr>
+                        <a:t>3 IMPLEMENT</a:t>
+                      </a:r>
+                    </a:p>
+                  </a:txBody>
+                  <a:tcPr marT="36576" marB="36576" marL="73152" marR="73152">
+                    <a:solidFill>
+                      <a:srgbClr val="141A2E"/>
+                    </a:solidFill>
+                  </a:tcPr>
+                </a:tc>
+                <a:tc>
+                  <a:txBody>
+                    <a:bodyPr wrap="square"/>
+                    <a:lstStyle/>
+                    <a:p>
+                      <a:r>
+                        <a:rPr sz="1150">
+                          <a:solidFill>
+                            <a:srgbClr val="E6EDF8"/>
+                          </a:solidFill>
+                          <a:latin typeface="Calibri"/>
+                        </a:rPr>
+                        <a:t>/feature-dev  plan.md umsetzen (tdd-workflow: Tests zuerst)</a:t>
+                      </a:r>
+                    </a:p>
+                  </a:txBody>
+                  <a:tcPr marT="36576" marB="36576" marL="73152" marR="73152">
+                    <a:solidFill>
+                      <a:srgbClr val="141A2E"/>
+                    </a:solidFill>
+                  </a:tcPr>
+                </a:tc>
+                <a:tc>
+                  <a:txBody>
+                    <a:bodyPr wrap="square"/>
+                    <a:lstStyle/>
+                    <a:p>
+                      <a:r>
+                        <a:rPr sz="1150">
+                          <a:solidFill>
+                            <a:srgbClr val="E6EDF8"/>
+                          </a:solidFill>
+                          <a:latin typeface="Calibri"/>
+                        </a:rPr>
+                        <a:t>Code+Tests RED→GREEN · Sonnet</a:t>
+                      </a:r>
+                    </a:p>
+                  </a:txBody>
+                  <a:tcPr marT="36576" marB="36576" marL="73152" marR="73152">
+                    <a:solidFill>
+                      <a:srgbClr val="141A2E"/>
+                    </a:solidFill>
+                  </a:tcPr>
+                </a:tc>
+              </a:tr>
+              <a:tr h="548640">
+                <a:tc>
+                  <a:txBody>
+                    <a:bodyPr wrap="square"/>
+                    <a:lstStyle/>
+                    <a:p>
+                      <a:r>
+                        <a:rPr sz="1150">
+                          <a:solidFill>
+                            <a:srgbClr val="E6EDF8"/>
+                          </a:solidFill>
+                          <a:latin typeface="Calibri"/>
+                        </a:rPr>
+                        <a:t>4 REVIEW</a:t>
+                      </a:r>
+                    </a:p>
+                  </a:txBody>
+                  <a:tcPr marT="36576" marB="36576" marL="73152" marR="73152">
+                    <a:solidFill>
+                      <a:srgbClr val="0A0E1A"/>
+                    </a:solidFill>
+                  </a:tcPr>
+                </a:tc>
+                <a:tc>
+                  <a:txBody>
+                    <a:bodyPr wrap="square"/>
+                    <a:lstStyle/>
+                    <a:p>
+                      <a:r>
+                        <a:rPr sz="1150">
+                          <a:solidFill>
+                            <a:srgbClr val="E6EDF8"/>
+                          </a:solidFill>
+                          <a:latin typeface="Calibri"/>
+                        </a:rPr>
+                        <a:t>/code-review  (+ /python-review …)</a:t>
+                      </a:r>
+                    </a:p>
+                  </a:txBody>
+                  <a:tcPr marT="36576" marB="36576" marL="73152" marR="73152">
+                    <a:solidFill>
+                      <a:srgbClr val="0A0E1A"/>
+                    </a:solidFill>
+                  </a:tcPr>
+                </a:tc>
+                <a:tc>
+                  <a:txBody>
+                    <a:bodyPr wrap="square"/>
+                    <a:lstStyle/>
+                    <a:p>
+                      <a:r>
+                        <a:rPr sz="1150">
+                          <a:solidFill>
+                            <a:srgbClr val="E6EDF8"/>
+                          </a:solidFill>
+                          <a:latin typeface="Calibri"/>
+                        </a:rPr>
+                        <a:t>review.md · Opus</a:t>
+                      </a:r>
+                    </a:p>
+                  </a:txBody>
+                  <a:tcPr marT="36576" marB="36576" marL="73152" marR="73152">
+                    <a:solidFill>
+                      <a:srgbClr val="0A0E1A"/>
+                    </a:solidFill>
+                  </a:tcPr>
+                </a:tc>
+              </a:tr>
+              <a:tr h="548640">
+                <a:tc>
+                  <a:txBody>
+                    <a:bodyPr wrap="square"/>
+                    <a:lstStyle/>
+                    <a:p>
+                      <a:r>
+                        <a:rPr sz="1150">
+                          <a:solidFill>
+                            <a:srgbClr val="E6EDF8"/>
+                          </a:solidFill>
+                          <a:latin typeface="Calibri"/>
+                        </a:rPr>
+                        <a:t>5 VERIFY</a:t>
+                      </a:r>
+                    </a:p>
+                  </a:txBody>
+                  <a:tcPr marT="36576" marB="36576" marL="73152" marR="73152">
+                    <a:solidFill>
+                      <a:srgbClr val="141A2E"/>
+                    </a:solidFill>
+                  </a:tcPr>
+                </a:tc>
+                <a:tc>
+                  <a:txBody>
+                    <a:bodyPr wrap="square"/>
+                    <a:lstStyle/>
+                    <a:p>
+                      <a:r>
+                        <a:rPr sz="1150">
+                          <a:solidFill>
+                            <a:srgbClr val="E6EDF8"/>
+                          </a:solidFill>
+                          <a:latin typeface="Calibri"/>
+                        </a:rPr>
+                        <a:t>Tests/Build grün? sonst /build-fix → zurück zu Phase 3</a:t>
+                      </a:r>
+                    </a:p>
+                  </a:txBody>
+                  <a:tcPr marT="36576" marB="36576" marL="73152" marR="73152">
+                    <a:solidFill>
+                      <a:srgbClr val="141A2E"/>
+                    </a:solidFill>
+                  </a:tcPr>
+                </a:tc>
+                <a:tc>
+                  <a:txBody>
+                    <a:bodyPr wrap="square"/>
+                    <a:lstStyle/>
+                    <a:p>
+                      <a:r>
+                        <a:rPr sz="1150">
+                          <a:solidFill>
+                            <a:srgbClr val="E6EDF8"/>
+                          </a:solidFill>
+                          <a:latin typeface="Calibri"/>
+                        </a:rPr>
+                        <a:t>grün → commit · Sonnet</a:t>
+                      </a:r>
+                    </a:p>
+                  </a:txBody>
+                  <a:tcPr marT="36576" marB="36576" marL="73152" marR="73152">
+                    <a:solidFill>
+                      <a:srgbClr val="141A2E"/>
+                    </a:solidFill>
+                  </a:tcPr>
+                </a:tc>
+              </a:tr>
+            </a:tbl>
+          </a:graphicData>
+        </a:graphic>
+      </p:graphicFrame>
+      <p:sp>
+        <p:nvSpPr>
+          <p:cNvPr id="8" name="TextBox 7"/>
+          <p:cNvSpPr txBox="1"/>
+          <p:nvPr/>
+        </p:nvSpPr>
+        <p:spPr>
+          <a:xfrm>
+            <a:off x="640080" y="5257800"/>
+            <a:ext cx="10972800" cy="1188720"/>
+          </a:xfrm>
+          <a:prstGeom prst="rect">
+            <a:avLst/>
+          </a:prstGeom>
+          <a:noFill/>
+        </p:spPr>
+        <p:txBody>
+          <a:bodyPr wrap="none">
+            <a:spAutoFit/>
+          </a:bodyPr>
+          <a:lstStyle/>
+          <a:p>
+            <a:pPr algn="l"/>
+            <a:r>
+              <a:rPr sz="1400" b="1">
+                <a:solidFill>
+                  <a:srgbClr val="FBBF24"/>
+                </a:solidFill>
+                <a:latin typeface="Calibri"/>
+              </a:rPr>
+              <a:t>/clear zwischen den Phasen. Jede Phase: ein Input, ein Output (Datei). Phasen nicht überspringen.</a:t>
+            </a:r>
+          </a:p>
+          <a:p>
+            <a:pPr algn="l"/>
+            <a:r>
+              <a:rPr sz="1300" b="0">
+                <a:solidFill>
+                  <a:srgbClr val="8B98B0"/>
+                </a:solidFill>
+                <a:latin typeface="Calibri"/>
+              </a:rPr>
+              <a:t>Regel: „In Dateien speichern, nicht im Kopf behalten.“  research.md → plan.md → review.md.</a:t>
+            </a:r>
+          </a:p>
+        </p:txBody>
+      </p:sp>
+    </p:spTree>
+  </p:cSld>
+  <p:clrMapOvr>
+    <a:masterClrMapping/>
+  </p:clrMapOvr>
+</p:sld>
+</file>
+
+<file path=ppt/slides/slide11.xml><?xml version="1.0" encoding="utf-8"?>
+<p:sld xmlns:a="http://schemas.openxmlformats.org/drawingml/2006/main" xmlns:p="http://schemas.openxmlformats.org/presentationml/2006/main" xmlns:r="http://schemas.openxmlformats.org/officeDocument/2006/relationships">
+  <p:cSld>
+    <p:bg>
+      <p:bgPr>
+        <a:solidFill>
+          <a:srgbClr val="0A0E1A"/>
+        </a:solidFill>
+        <a:effectLst/>
+      </p:bgPr>
+    </p:bg>
+    <p:spTree>
+      <p:nvGrpSpPr>
+        <p:cNvPr id="1" name=""/>
+        <p:cNvGrpSpPr/>
+        <p:nvPr/>
+      </p:nvGrpSpPr>
+      <p:grpSpPr/>
+      <p:sp>
+        <p:nvSpPr>
+          <p:cNvPr id="2" name="Oval 1"/>
+          <p:cNvSpPr/>
+          <p:nvPr/>
+        </p:nvSpPr>
+        <p:spPr>
+          <a:xfrm>
+            <a:off x="548640" y="384048"/>
+            <a:ext cx="146304" cy="146304"/>
+          </a:xfrm>
+          <a:prstGeom prst="ellipse">
+            <a:avLst/>
+          </a:prstGeom>
+          <a:solidFill>
+            <a:srgbClr val="22D3EE"/>
+          </a:solidFill>
+          <a:ln>
+            <a:noFill/>
+          </a:ln>
+          <a:effectLst/>
+        </p:spPr>
+        <p:style>
+          <a:lnRef idx="1">
+            <a:schemeClr val="accent1"/>
+          </a:lnRef>
+          <a:fillRef idx="3">
+            <a:schemeClr val="accent1"/>
+          </a:fillRef>
+          <a:effectRef idx="2">
+            <a:schemeClr val="accent1"/>
+          </a:effectRef>
+          <a:fontRef idx="minor">
+            <a:schemeClr val="lt1"/>
+          </a:fontRef>
+        </p:style>
+        <p:txBody>
+          <a:bodyPr rtlCol="0" anchor="ctr"/>
+          <a:lstStyle/>
+          <a:p>
+            <a:pPr algn="ctr"/>
+          </a:p>
+        </p:txBody>
+      </p:sp>
+      <p:sp>
+        <p:nvSpPr>
+          <p:cNvPr id="3" name="TextBox 2"/>
+          <p:cNvSpPr txBox="1"/>
+          <p:nvPr/>
+        </p:nvSpPr>
+        <p:spPr>
+          <a:xfrm>
+            <a:off x="777240" y="301752"/>
+            <a:ext cx="7315200" cy="457200"/>
+          </a:xfrm>
+          <a:prstGeom prst="rect">
+            <a:avLst/>
+          </a:prstGeom>
+          <a:noFill/>
+        </p:spPr>
+        <p:txBody>
+          <a:bodyPr wrap="square">
+            <a:spAutoFit/>
+          </a:bodyPr>
+          <a:lstStyle/>
+          <a:p>
+            <a:pPr algn="l"/>
+            <a:r>
+              <a:rPr sz="1200" b="1">
+                <a:solidFill>
+                  <a:srgbClr val="22D3EE"/>
+                </a:solidFill>
+                <a:latin typeface="Calibri"/>
+              </a:rPr>
+              <a:t>CHEAT-SHEET</a:t>
+            </a:r>
+          </a:p>
+        </p:txBody>
+      </p:sp>
+      <p:sp>
+        <p:nvSpPr>
+          <p:cNvPr id="4" name="TextBox 3"/>
+          <p:cNvSpPr txBox="1"/>
+          <p:nvPr/>
+        </p:nvSpPr>
+        <p:spPr>
+          <a:xfrm>
+            <a:off x="9601200" y="301752"/>
+            <a:ext cx="2011680" cy="457200"/>
+          </a:xfrm>
+          <a:prstGeom prst="rect">
+            <a:avLst/>
+          </a:prstGeom>
+          <a:noFill/>
+        </p:spPr>
+        <p:txBody>
+          <a:bodyPr wrap="square">
+            <a:spAutoFit/>
+          </a:bodyPr>
+          <a:lstStyle/>
+          <a:p>
+            <a:pPr algn="r"/>
+            <a:r>
+              <a:rPr sz="1200" b="0">
+                <a:solidFill>
+                  <a:srgbClr val="8B98B0"/>
+                </a:solidFill>
+                <a:latin typeface="Calibri"/>
+              </a:rPr>
+              <a:t>10 / 18</a:t>
+            </a:r>
+          </a:p>
+        </p:txBody>
+      </p:sp>
+      <p:sp>
+        <p:nvSpPr>
+          <p:cNvPr id="5" name="TextBox 4"/>
+          <p:cNvSpPr txBox="1"/>
+          <p:nvPr/>
+        </p:nvSpPr>
+        <p:spPr>
+          <a:xfrm>
+            <a:off x="548640" y="777240"/>
+            <a:ext cx="11064240" cy="777240"/>
+          </a:xfrm>
+          <a:prstGeom prst="rect">
+            <a:avLst/>
+          </a:prstGeom>
+          <a:noFill/>
+        </p:spPr>
+        <p:txBody>
+          <a:bodyPr wrap="square">
+            <a:spAutoFit/>
+          </a:bodyPr>
+          <a:lstStyle/>
+          <a:p>
+            <a:pPr algn="l"/>
+            <a:r>
+              <a:rPr sz="2700" b="1">
+                <a:solidFill>
+                  <a:srgbClr val="E6EDF8"/>
+                </a:solidFill>
+                <a:latin typeface="Calibri"/>
+              </a:rPr>
+              <a:t>§8 Cheat-Sheet — Command (1/2)</a:t>
+            </a:r>
+          </a:p>
+        </p:txBody>
+      </p:sp>
+      <p:sp>
+        <p:nvSpPr>
+          <p:cNvPr id="6" name="Rectangle 5"/>
+          <p:cNvSpPr/>
+          <p:nvPr/>
+        </p:nvSpPr>
+        <p:spPr>
+          <a:xfrm>
+            <a:off x="594360" y="1481328"/>
+            <a:ext cx="2011680" cy="41148"/>
+          </a:xfrm>
+          <a:prstGeom prst="rect">
+            <a:avLst/>
+          </a:prstGeom>
+          <a:solidFill>
+            <a:srgbClr val="22D3EE"/>
+          </a:solidFill>
+          <a:ln>
+            <a:noFill/>
+          </a:ln>
+          <a:effectLst/>
+        </p:spPr>
+        <p:style>
+          <a:lnRef idx="1">
+            <a:schemeClr val="accent1"/>
+          </a:lnRef>
+          <a:fillRef idx="3">
+            <a:schemeClr val="accent1"/>
+          </a:fillRef>
+          <a:effectRef idx="2">
+            <a:schemeClr val="accent1"/>
+          </a:effectRef>
+          <a:fontRef idx="minor">
+            <a:schemeClr val="lt1"/>
+          </a:fontRef>
+        </p:style>
+        <p:txBody>
+          <a:bodyPr rtlCol="0" anchor="ctr"/>
+          <a:lstStyle/>
+          <a:p>
+            <a:pPr algn="ctr"/>
+          </a:p>
+        </p:txBody>
+      </p:sp>
+      <p:graphicFrame>
+        <p:nvGraphicFramePr>
+          <p:cNvPr id="7" name="Table 6"/>
+          <p:cNvGraphicFramePr>
+            <a:graphicFrameLocks noGrp="1"/>
+          </p:cNvGraphicFramePr>
+          <p:nvPr/>
+        </p:nvGraphicFramePr>
+        <p:xfrm>
+          <a:off x="548640" y="1737360"/>
+          <a:ext cx="11155680" cy="4572000"/>
+        </p:xfrm>
+        <a:graphic>
+          <a:graphicData uri="http://schemas.openxmlformats.org/drawingml/2006/table">
+            <a:tbl>
+              <a:tblPr>
+                <a:tableStyleId>{2D5ABB26-0587-4C30-8999-92F81FD0307C}</a:tableStyleId>
+              </a:tblPr>
+              <a:tblGrid>
+                <a:gridCol w="2743200"/>
+                <a:gridCol w="4023360"/>
+                <a:gridCol w="4389120"/>
+              </a:tblGrid>
+              <a:tr h="508000">
+                <a:tc>
+                  <a:txBody>
+                    <a:bodyPr wrap="square"/>
+                    <a:lstStyle/>
+                    <a:p>
+                      <a:r>
+                        <a:rPr sz="1150" b="1">
+                          <a:solidFill>
+                            <a:srgbClr val="22D3EE"/>
+                          </a:solidFill>
+                          <a:latin typeface="Calibri"/>
+                        </a:rPr>
+                        <a:t>Situation</a:t>
+                      </a:r>
+                    </a:p>
+                  </a:txBody>
+                  <a:tcPr marT="36576" marB="36576" marL="73152" marR="73152">
+                    <a:solidFill>
+                      <a:srgbClr val="0E1424"/>
+                    </a:solidFill>
+                  </a:tcPr>
+                </a:tc>
+                <a:tc>
+                  <a:txBody>
+                    <a:bodyPr wrap="square"/>
+                    <a:lstStyle/>
+                    <a:p>
+                      <a:r>
+                        <a:rPr sz="1150" b="1">
+                          <a:solidFill>
+                            <a:srgbClr val="22D3EE"/>
+                          </a:solidFill>
+                          <a:latin typeface="Calibri"/>
+                        </a:rPr>
+                        <a:t>Command</a:t>
+                      </a:r>
+                    </a:p>
+                  </a:txBody>
+                  <a:tcPr marT="36576" marB="36576" marL="73152" marR="73152">
+                    <a:solidFill>
+                      <a:srgbClr val="0E1424"/>
+                    </a:solidFill>
+                  </a:tcPr>
+                </a:tc>
+                <a:tc>
+                  <a:txBody>
+                    <a:bodyPr wrap="square"/>
+                    <a:lstStyle/>
+                    <a:p>
+                      <a:r>
+                        <a:rPr sz="1150" b="1">
+                          <a:solidFill>
+                            <a:srgbClr val="22D3EE"/>
+                          </a:solidFill>
+                          <a:latin typeface="Calibri"/>
+                        </a:rPr>
+                        <a:t>Zweck</a:t>
+                      </a:r>
+                    </a:p>
+                  </a:txBody>
+                  <a:tcPr marT="36576" marB="36576" marL="73152" marR="73152">
+                    <a:solidFill>
+                      <a:srgbClr val="0E1424"/>
+                    </a:solidFill>
+                  </a:tcPr>
+                </a:tc>
+              </a:tr>
+              <a:tr h="508000">
+                <a:tc>
+                  <a:txBody>
+                    <a:bodyPr wrap="square"/>
+                    <a:lstStyle/>
+                    <a:p>
+                      <a:r>
+                        <a:rPr sz="1150">
+                          <a:solidFill>
+                            <a:srgbClr val="E6EDF8"/>
+                          </a:solidFill>
+                          <a:latin typeface="Calibri"/>
+                        </a:rPr>
+                        <a:t>Neues Feature planen</a:t>
+                      </a:r>
+                    </a:p>
+                  </a:txBody>
+                  <a:tcPr marT="36576" marB="36576" marL="73152" marR="73152">
+                    <a:solidFill>
+                      <a:srgbClr val="141A2E"/>
+                    </a:solidFill>
+                  </a:tcPr>
+                </a:tc>
+                <a:tc>
+                  <a:txBody>
+                    <a:bodyPr wrap="square"/>
+                    <a:lstStyle/>
+                    <a:p>
+                      <a:r>
+                        <a:rPr sz="1150">
+                          <a:solidFill>
+                            <a:srgbClr val="E6EDF8"/>
+                          </a:solidFill>
+                          <a:latin typeface="Calibri"/>
+                        </a:rPr>
+                        <a:t>/plan</a:t>
+                      </a:r>
+                    </a:p>
+                  </a:txBody>
+                  <a:tcPr marT="36576" marB="36576" marL="73152" marR="73152">
+                    <a:solidFill>
+                      <a:srgbClr val="141A2E"/>
+                    </a:solidFill>
+                  </a:tcPr>
+                </a:tc>
+                <a:tc>
+                  <a:txBody>
+                    <a:bodyPr wrap="square"/>
+                    <a:lstStyle/>
+                    <a:p>
+                      <a:r>
+                        <a:rPr sz="1150">
+                          <a:solidFill>
+                            <a:srgbClr val="E6EDF8"/>
+                          </a:solidFill>
+                          <a:latin typeface="Calibri"/>
+                        </a:rPr>
+                        <a:t>Anforderungen, Risiken, Schritte — wartet auf dein OK</a:t>
+                      </a:r>
+                    </a:p>
+                  </a:txBody>
+                  <a:tcPr marT="36576" marB="36576" marL="73152" marR="73152">
+                    <a:solidFill>
+                      <a:srgbClr val="141A2E"/>
+                    </a:solidFill>
+                  </a:tcPr>
+                </a:tc>
+              </a:tr>
+              <a:tr h="508000">
+                <a:tc>
+                  <a:txBody>
+                    <a:bodyPr wrap="square"/>
+                    <a:lstStyle/>
+                    <a:p>
+                      <a:r>
+                        <a:rPr sz="1150">
+                          <a:solidFill>
+                            <a:srgbClr val="E6EDF8"/>
+                          </a:solidFill>
+                          <a:latin typeface="Calibri"/>
+                        </a:rPr>
+                        <a:t>Feature umsetzen</a:t>
+                      </a:r>
+                    </a:p>
+                  </a:txBody>
+                  <a:tcPr marT="36576" marB="36576" marL="73152" marR="73152">
+                    <a:solidFill>
+                      <a:srgbClr val="0A0E1A"/>
+                    </a:solidFill>
+                  </a:tcPr>
+                </a:tc>
+                <a:tc>
+                  <a:txBody>
+                    <a:bodyPr wrap="square"/>
+                    <a:lstStyle/>
+                    <a:p>
+                      <a:r>
+                        <a:rPr sz="1150">
+                          <a:solidFill>
+                            <a:srgbClr val="E6EDF8"/>
+                          </a:solidFill>
+                          <a:latin typeface="Calibri"/>
+                        </a:rPr>
+                        <a:t>/feature-dev</a:t>
+                      </a:r>
+                    </a:p>
+                  </a:txBody>
+                  <a:tcPr marT="36576" marB="36576" marL="73152" marR="73152">
+                    <a:solidFill>
+                      <a:srgbClr val="0A0E1A"/>
+                    </a:solidFill>
+                  </a:tcPr>
+                </a:tc>
+                <a:tc>
+                  <a:txBody>
+                    <a:bodyPr wrap="square"/>
+                    <a:lstStyle/>
+                    <a:p>
+                      <a:r>
+                        <a:rPr sz="1150">
+                          <a:solidFill>
+                            <a:srgbClr val="E6EDF8"/>
+                          </a:solidFill>
+                          <a:latin typeface="Calibri"/>
+                        </a:rPr>
+                        <a:t>nutzt Skills/Agents, TDD zuerst</a:t>
+                      </a:r>
+                    </a:p>
+                  </a:txBody>
+                  <a:tcPr marT="36576" marB="36576" marL="73152" marR="73152">
+                    <a:solidFill>
+                      <a:srgbClr val="0A0E1A"/>
+                    </a:solidFill>
+                  </a:tcPr>
+                </a:tc>
+              </a:tr>
+              <a:tr h="508000">
+                <a:tc>
+                  <a:txBody>
+                    <a:bodyPr wrap="square"/>
+                    <a:lstStyle/>
+                    <a:p>
+                      <a:r>
+                        <a:rPr sz="1150">
+                          <a:solidFill>
+                            <a:srgbClr val="E6EDF8"/>
+                          </a:solidFill>
+                          <a:latin typeface="Calibri"/>
+                        </a:rPr>
+                        <a:t>Projekt ECC-ready machen</a:t>
+                      </a:r>
+                    </a:p>
+                  </a:txBody>
+                  <a:tcPr marT="36576" marB="36576" marL="73152" marR="73152">
+                    <a:solidFill>
+                      <a:srgbClr val="141A2E"/>
+                    </a:solidFill>
+                  </a:tcPr>
+                </a:tc>
+                <a:tc>
+                  <a:txBody>
+                    <a:bodyPr wrap="square"/>
+                    <a:lstStyle/>
+                    <a:p>
+                      <a:r>
+                        <a:rPr sz="1150">
+                          <a:solidFill>
+                            <a:srgbClr val="E6EDF8"/>
+                          </a:solidFill>
+                          <a:latin typeface="Calibri"/>
+                        </a:rPr>
+                        <a:t>/ecc-onboard</a:t>
+                      </a:r>
+                    </a:p>
+                  </a:txBody>
+                  <a:tcPr marT="36576" marB="36576" marL="73152" marR="73152">
+                    <a:solidFill>
+                      <a:srgbClr val="141A2E"/>
+                    </a:solidFill>
+                  </a:tcPr>
+                </a:tc>
+                <a:tc>
+                  <a:txBody>
+                    <a:bodyPr wrap="square"/>
+                    <a:lstStyle/>
+                    <a:p>
+                      <a:r>
+                        <a:rPr sz="1150">
+                          <a:solidFill>
+                            <a:srgbClr val="E6EDF8"/>
+                          </a:solidFill>
+                          <a:latin typeface="Calibri"/>
+                        </a:rPr>
+                        <a:t>Stack erkennen → 1× OK → Rules/Skills + PROJECT_RULES.md + state/</a:t>
+                      </a:r>
+                    </a:p>
+                  </a:txBody>
+                  <a:tcPr marT="36576" marB="36576" marL="73152" marR="73152">
+                    <a:solidFill>
+                      <a:srgbClr val="141A2E"/>
+                    </a:solidFill>
+                  </a:tcPr>
+                </a:tc>
+              </a:tr>
+              <a:tr h="508000">
+                <a:tc>
+                  <a:txBody>
+                    <a:bodyPr wrap="square"/>
+                    <a:lstStyle/>
+                    <a:p>
+                      <a:r>
+                        <a:rPr sz="1150">
+                          <a:solidFill>
+                            <a:srgbClr val="E6EDF8"/>
+                          </a:solidFill>
+                          <a:latin typeface="Calibri"/>
+                        </a:rPr>
+                        <a:t>Codebase kartieren (1×)</a:t>
+                      </a:r>
+                    </a:p>
+                  </a:txBody>
+                  <a:tcPr marT="36576" marB="36576" marL="73152" marR="73152">
+                    <a:solidFill>
+                      <a:srgbClr val="0A0E1A"/>
+                    </a:solidFill>
+                  </a:tcPr>
+                </a:tc>
+                <a:tc>
+                  <a:txBody>
+                    <a:bodyPr wrap="square"/>
+                    <a:lstStyle/>
+                    <a:p>
+                      <a:r>
+                        <a:rPr sz="1150">
+                          <a:solidFill>
+                            <a:srgbClr val="E6EDF8"/>
+                          </a:solidFill>
+                          <a:latin typeface="Calibri"/>
+                        </a:rPr>
+                        <a:t>/update-codemaps</a:t>
+                      </a:r>
+                    </a:p>
+                  </a:txBody>
+                  <a:tcPr marT="36576" marB="36576" marL="73152" marR="73152">
+                    <a:solidFill>
+                      <a:srgbClr val="0A0E1A"/>
+                    </a:solidFill>
+                  </a:tcPr>
+                </a:tc>
+                <a:tc>
+                  <a:txBody>
+                    <a:bodyPr wrap="square"/>
+                    <a:lstStyle/>
+                    <a:p>
+                      <a:r>
+                        <a:rPr sz="1150">
+                          <a:solidFill>
+                            <a:srgbClr val="E6EDF8"/>
+                          </a:solidFill>
+                          <a:latin typeface="Calibri"/>
+                        </a:rPr>
+                        <a:t>token-arme Architektur-Karten in docs/CODEMAPS/ — statt neu suchen</a:t>
+                      </a:r>
+                    </a:p>
+                  </a:txBody>
+                  <a:tcPr marT="36576" marB="36576" marL="73152" marR="73152">
+                    <a:solidFill>
+                      <a:srgbClr val="0A0E1A"/>
+                    </a:solidFill>
+                  </a:tcPr>
+                </a:tc>
+              </a:tr>
+              <a:tr h="508000">
+                <a:tc>
+                  <a:txBody>
+                    <a:bodyPr wrap="square"/>
+                    <a:lstStyle/>
+                    <a:p>
+                      <a:r>
+                        <a:rPr sz="1150">
+                          <a:solidFill>
+                            <a:srgbClr val="E6EDF8"/>
+                          </a:solidFill>
+                          <a:latin typeface="Calibri"/>
+                        </a:rPr>
+                        <a:t>Fremdes Repo verstehen</a:t>
+                      </a:r>
+                    </a:p>
+                  </a:txBody>
+                  <a:tcPr marT="36576" marB="36576" marL="73152" marR="73152">
+                    <a:solidFill>
+                      <a:srgbClr val="141A2E"/>
+                    </a:solidFill>
+                  </a:tcPr>
+                </a:tc>
+                <a:tc>
+                  <a:txBody>
+                    <a:bodyPr wrap="square"/>
+                    <a:lstStyle/>
+                    <a:p>
+                      <a:r>
+                        <a:rPr sz="1150">
+                          <a:solidFill>
+                            <a:srgbClr val="E6EDF8"/>
+                          </a:solidFill>
+                          <a:latin typeface="Calibri"/>
+                        </a:rPr>
+                        <a:t>/update-codemaps · code-tour · smart-explore</a:t>
+                      </a:r>
+                    </a:p>
+                  </a:txBody>
+                  <a:tcPr marT="36576" marB="36576" marL="73152" marR="73152">
+                    <a:solidFill>
+                      <a:srgbClr val="141A2E"/>
+                    </a:solidFill>
+                  </a:tcPr>
+                </a:tc>
+                <a:tc>
+                  <a:txBody>
+                    <a:bodyPr wrap="square"/>
+                    <a:lstStyle/>
+                    <a:p>
+                      <a:r>
+                        <a:rPr sz="1150">
+                          <a:solidFill>
+                            <a:srgbClr val="E6EDF8"/>
+                          </a:solidFill>
+                          <a:latin typeface="Calibri"/>
+                        </a:rPr>
+                        <a:t>Architektur kartieren, gefuehrte Touren, Struktur-Suche</a:t>
+                      </a:r>
+                    </a:p>
+                  </a:txBody>
+                  <a:tcPr marT="36576" marB="36576" marL="73152" marR="73152">
+                    <a:solidFill>
+                      <a:srgbClr val="141A2E"/>
+                    </a:solidFill>
+                  </a:tcPr>
+                </a:tc>
+              </a:tr>
+              <a:tr h="508000">
+                <a:tc>
+                  <a:txBody>
+                    <a:bodyPr wrap="square"/>
+                    <a:lstStyle/>
+                    <a:p>
+                      <a:r>
+                        <a:rPr sz="1150">
+                          <a:solidFill>
+                            <a:srgbClr val="E6EDF8"/>
+                          </a:solidFill>
+                          <a:latin typeface="Calibri"/>
+                        </a:rPr>
+                        <a:t>Code geschrieben</a:t>
+                      </a:r>
+                    </a:p>
+                  </a:txBody>
+                  <a:tcPr marT="36576" marB="36576" marL="73152" marR="73152">
+                    <a:solidFill>
+                      <a:srgbClr val="0A0E1A"/>
+                    </a:solidFill>
+                  </a:tcPr>
+                </a:tc>
+                <a:tc>
+                  <a:txBody>
+                    <a:bodyPr wrap="square"/>
+                    <a:lstStyle/>
+                    <a:p>
+                      <a:r>
+                        <a:rPr sz="1150">
+                          <a:solidFill>
+                            <a:srgbClr val="E6EDF8"/>
+                          </a:solidFill>
+                          <a:latin typeface="Calibri"/>
+                        </a:rPr>
+                        <a:t>/code-review  (+ /python-review, /go-review …)</a:t>
+                      </a:r>
+                    </a:p>
+                  </a:txBody>
+                  <a:tcPr marT="36576" marB="36576" marL="73152" marR="73152">
+                    <a:solidFill>
+                      <a:srgbClr val="0A0E1A"/>
+                    </a:solidFill>
+                  </a:tcPr>
+                </a:tc>
+                <a:tc>
+                  <a:txBody>
+                    <a:bodyPr wrap="square"/>
+                    <a:lstStyle/>
+                    <a:p>
+                      <a:r>
+                        <a:rPr sz="1150">
+                          <a:solidFill>
+                            <a:srgbClr val="E6EDF8"/>
+                          </a:solidFill>
+                          <a:latin typeface="Calibri"/>
+                        </a:rPr>
+                        <a:t>Qualität + Security der Änderungen</a:t>
+                      </a:r>
+                    </a:p>
+                  </a:txBody>
+                  <a:tcPr marT="36576" marB="36576" marL="73152" marR="73152">
+                    <a:solidFill>
+                      <a:srgbClr val="0A0E1A"/>
+                    </a:solidFill>
+                  </a:tcPr>
+                </a:tc>
+              </a:tr>
+              <a:tr h="508000">
+                <a:tc>
+                  <a:txBody>
+                    <a:bodyPr wrap="square"/>
+                    <a:lstStyle/>
+                    <a:p>
+                      <a:r>
+                        <a:rPr sz="1150">
+                          <a:solidFill>
+                            <a:srgbClr val="E6EDF8"/>
+                          </a:solidFill>
+                          <a:latin typeface="Calibri"/>
+                        </a:rPr>
+                        <a:t>Build/Tests rot</a:t>
+                      </a:r>
+                    </a:p>
+                  </a:txBody>
+                  <a:tcPr marT="36576" marB="36576" marL="73152" marR="73152">
+                    <a:solidFill>
+                      <a:srgbClr val="141A2E"/>
+                    </a:solidFill>
+                  </a:tcPr>
+                </a:tc>
+                <a:tc>
+                  <a:txBody>
+                    <a:bodyPr wrap="square"/>
+                    <a:lstStyle/>
+                    <a:p>
+                      <a:r>
+                        <a:rPr sz="1150">
+                          <a:solidFill>
+                            <a:srgbClr val="E6EDF8"/>
+                          </a:solidFill>
+                          <a:latin typeface="Calibri"/>
+                        </a:rPr>
+                        <a:t>/build-fix</a:t>
+                      </a:r>
+                    </a:p>
+                  </a:txBody>
+                  <a:tcPr marT="36576" marB="36576" marL="73152" marR="73152">
+                    <a:solidFill>
+                      <a:srgbClr val="141A2E"/>
+                    </a:solidFill>
+                  </a:tcPr>
+                </a:tc>
+                <a:tc>
+                  <a:txBody>
+                    <a:bodyPr wrap="square"/>
+                    <a:lstStyle/>
+                    <a:p>
+                      <a:r>
+                        <a:rPr sz="1150">
+                          <a:solidFill>
+                            <a:srgbClr val="E6EDF8"/>
+                          </a:solidFill>
+                          <a:latin typeface="Calibri"/>
+                        </a:rPr>
+                        <a:t>inkrementelle, minimale Fixes</a:t>
+                      </a:r>
+                    </a:p>
+                  </a:txBody>
+                  <a:tcPr marT="36576" marB="36576" marL="73152" marR="73152">
+                    <a:solidFill>
+                      <a:srgbClr val="141A2E"/>
+                    </a:solidFill>
+                  </a:tcPr>
+                </a:tc>
+              </a:tr>
+              <a:tr h="508000">
+                <a:tc>
+                  <a:txBody>
+                    <a:bodyPr wrap="square"/>
+                    <a:lstStyle/>
+                    <a:p>
+                      <a:r>
+                        <a:rPr sz="1150">
+                          <a:solidFill>
+                            <a:srgbClr val="E6EDF8"/>
+                          </a:solidFill>
+                          <a:latin typeface="Calibri"/>
+                        </a:rPr>
+                        <a:t>Coverage / Qualität</a:t>
+                      </a:r>
+                    </a:p>
+                  </a:txBody>
+                  <a:tcPr marT="36576" marB="36576" marL="73152" marR="73152">
+                    <a:solidFill>
+                      <a:srgbClr val="0A0E1A"/>
+                    </a:solidFill>
+                  </a:tcPr>
+                </a:tc>
+                <a:tc>
+                  <a:txBody>
+                    <a:bodyPr wrap="square"/>
+                    <a:lstStyle/>
+                    <a:p>
+                      <a:r>
+                        <a:rPr sz="1150">
+                          <a:solidFill>
+                            <a:srgbClr val="E6EDF8"/>
+                          </a:solidFill>
+                          <a:latin typeface="Calibri"/>
+                        </a:rPr>
+                        <a:t>/test-coverage  ·  /quality-gate</a:t>
+                      </a:r>
+                    </a:p>
+                  </a:txBody>
+                  <a:tcPr marT="36576" marB="36576" marL="73152" marR="73152">
+                    <a:solidFill>
+                      <a:srgbClr val="0A0E1A"/>
+                    </a:solidFill>
+                  </a:tcPr>
+                </a:tc>
+                <a:tc>
+                  <a:txBody>
+                    <a:bodyPr wrap="square"/>
+                    <a:lstStyle/>
+                    <a:p>
+                      <a:r>
+                        <a:rPr sz="1150">
+                          <a:solidFill>
+                            <a:srgbClr val="E6EDF8"/>
+                          </a:solidFill>
+                          <a:latin typeface="Calibri"/>
+                        </a:rPr>
+                        <a:t>Lücken finden, Pipeline prüfen</a:t>
+                      </a:r>
+                    </a:p>
+                  </a:txBody>
+                  <a:tcPr marT="36576" marB="36576" marL="73152" marR="73152">
+                    <a:solidFill>
+                      <a:srgbClr val="0A0E1A"/>
+                    </a:solidFill>
+                  </a:tcPr>
+                </a:tc>
+              </a:tr>
+            </a:tbl>
+          </a:graphicData>
+        </a:graphic>
+      </p:graphicFrame>
+    </p:spTree>
+  </p:cSld>
+  <p:clrMapOvr>
+    <a:masterClrMapping/>
+  </p:clrMapOvr>
+</p:sld>
+</file>
+
+<file path=ppt/slides/slide12.xml><?xml version="1.0" encoding="utf-8"?>
+<p:sld xmlns:a="http://schemas.openxmlformats.org/drawingml/2006/main" xmlns:p="http://schemas.openxmlformats.org/presentationml/2006/main" xmlns:r="http://schemas.openxmlformats.org/officeDocument/2006/relationships">
+  <p:cSld>
+    <p:bg>
+      <p:bgPr>
+        <a:solidFill>
+          <a:srgbClr val="0A0E1A"/>
+        </a:solidFill>
+        <a:effectLst/>
+      </p:bgPr>
+    </p:bg>
+    <p:spTree>
+      <p:nvGrpSpPr>
+        <p:cNvPr id="1" name=""/>
+        <p:cNvGrpSpPr/>
+        <p:nvPr/>
+      </p:nvGrpSpPr>
+      <p:grpSpPr/>
+      <p:sp>
+        <p:nvSpPr>
+          <p:cNvPr id="2" name="Oval 1"/>
+          <p:cNvSpPr/>
+          <p:nvPr/>
+        </p:nvSpPr>
+        <p:spPr>
+          <a:xfrm>
+            <a:off x="548640" y="384048"/>
+            <a:ext cx="146304" cy="146304"/>
+          </a:xfrm>
+          <a:prstGeom prst="ellipse">
+            <a:avLst/>
+          </a:prstGeom>
+          <a:solidFill>
+            <a:srgbClr val="22D3EE"/>
+          </a:solidFill>
+          <a:ln>
+            <a:noFill/>
+          </a:ln>
+          <a:effectLst/>
+        </p:spPr>
+        <p:style>
+          <a:lnRef idx="1">
+            <a:schemeClr val="accent1"/>
+          </a:lnRef>
+          <a:fillRef idx="3">
+            <a:schemeClr val="accent1"/>
+          </a:fillRef>
+          <a:effectRef idx="2">
+            <a:schemeClr val="accent1"/>
+          </a:effectRef>
+          <a:fontRef idx="minor">
+            <a:schemeClr val="lt1"/>
+          </a:fontRef>
+        </p:style>
+        <p:txBody>
+          <a:bodyPr rtlCol="0" anchor="ctr"/>
+          <a:lstStyle/>
+          <a:p>
+            <a:pPr algn="ctr"/>
+          </a:p>
+        </p:txBody>
+      </p:sp>
+      <p:sp>
+        <p:nvSpPr>
+          <p:cNvPr id="3" name="TextBox 2"/>
+          <p:cNvSpPr txBox="1"/>
+          <p:nvPr/>
+        </p:nvSpPr>
+        <p:spPr>
+          <a:xfrm>
+            <a:off x="777240" y="301752"/>
+            <a:ext cx="7315200" cy="457200"/>
+          </a:xfrm>
+          <a:prstGeom prst="rect">
+            <a:avLst/>
+          </a:prstGeom>
+          <a:noFill/>
+        </p:spPr>
+        <p:txBody>
+          <a:bodyPr wrap="square">
+            <a:spAutoFit/>
+          </a:bodyPr>
+          <a:lstStyle/>
+          <a:p>
+            <a:pPr algn="l"/>
+            <a:r>
+              <a:rPr sz="1200" b="1">
+                <a:solidFill>
+                  <a:srgbClr val="22D3EE"/>
+                </a:solidFill>
+                <a:latin typeface="Calibri"/>
+              </a:rPr>
+              <a:t>CHEAT-SHEET</a:t>
+            </a:r>
+          </a:p>
+        </p:txBody>
+      </p:sp>
+      <p:sp>
+        <p:nvSpPr>
+          <p:cNvPr id="4" name="TextBox 3"/>
+          <p:cNvSpPr txBox="1"/>
+          <p:nvPr/>
+        </p:nvSpPr>
+        <p:spPr>
+          <a:xfrm>
+            <a:off x="9601200" y="301752"/>
+            <a:ext cx="2011680" cy="457200"/>
+          </a:xfrm>
+          <a:prstGeom prst="rect">
+            <a:avLst/>
+          </a:prstGeom>
+          <a:noFill/>
+        </p:spPr>
+        <p:txBody>
+          <a:bodyPr wrap="square">
+            <a:spAutoFit/>
+          </a:bodyPr>
+          <a:lstStyle/>
+          <a:p>
+            <a:pPr algn="r"/>
+            <a:r>
+              <a:rPr sz="1200" b="0">
+                <a:solidFill>
+                  <a:srgbClr val="8B98B0"/>
+                </a:solidFill>
+                <a:latin typeface="Calibri"/>
+              </a:rPr>
+              <a:t>11 / 18</a:t>
+            </a:r>
+          </a:p>
+        </p:txBody>
+      </p:sp>
+      <p:sp>
+        <p:nvSpPr>
+          <p:cNvPr id="5" name="TextBox 4"/>
+          <p:cNvSpPr txBox="1"/>
+          <p:nvPr/>
+        </p:nvSpPr>
+        <p:spPr>
+          <a:xfrm>
+            <a:off x="548640" y="777240"/>
+            <a:ext cx="11064240" cy="777240"/>
+          </a:xfrm>
+          <a:prstGeom prst="rect">
+            <a:avLst/>
+          </a:prstGeom>
+          <a:noFill/>
+        </p:spPr>
+        <p:txBody>
+          <a:bodyPr wrap="square">
+            <a:spAutoFit/>
+          </a:bodyPr>
+          <a:lstStyle/>
+          <a:p>
+            <a:pPr algn="l"/>
+            <a:r>
+              <a:rPr sz="2700" b="1">
+                <a:solidFill>
+                  <a:srgbClr val="E6EDF8"/>
+                </a:solidFill>
+                <a:latin typeface="Calibri"/>
+              </a:rPr>
+              <a:t>§8 Cheat-Sheet — Command (2/2)</a:t>
             </a:r>
           </a:p>
         </p:txBody>
@@ -4151,7 +5712,7 @@
 </p:sld>
 </file>
 
-<file path=ppt/slides/slide11.xml><?xml version="1.0" encoding="utf-8"?>
+<file path=ppt/slides/slide13.xml><?xml version="1.0" encoding="utf-8"?>
 <p:sld xmlns:a="http://schemas.openxmlformats.org/drawingml/2006/main" xmlns:p="http://schemas.openxmlformats.org/presentationml/2006/main" xmlns:r="http://schemas.openxmlformats.org/officeDocument/2006/relationships">
   <p:cSld>
     <p:bg>
@@ -4278,7 +5839,7 @@
                 </a:solidFill>
                 <a:latin typeface="Calibri"/>
               </a:rPr>
-              <a:t>10 / 16</a:t>
+              <a:t>12 / 18</a:t>
             </a:r>
           </a:p>
         </p:txBody>
@@ -4313,7 +5874,7 @@
                 </a:solidFill>
                 <a:latin typeface="Calibri"/>
               </a:rPr>
-              <a:t>§8 Wann welcher MCP</a:t>
+              <a:t>§9 Wann welcher MCP</a:t>
             </a:r>
           </a:p>
         </p:txBody>
@@ -4990,7 +6551,7 @@
 </p:sld>
 </file>
 
-<file path=ppt/slides/slide12.xml><?xml version="1.0" encoding="utf-8"?>
+<file path=ppt/slides/slide14.xml><?xml version="1.0" encoding="utf-8"?>
 <p:sld xmlns:a="http://schemas.openxmlformats.org/drawingml/2006/main" xmlns:p="http://schemas.openxmlformats.org/presentationml/2006/main" xmlns:r="http://schemas.openxmlformats.org/officeDocument/2006/relationships">
   <p:cSld>
     <p:bg>
@@ -5117,7 +6678,7 @@
                 </a:solidFill>
                 <a:latin typeface="Calibri"/>
               </a:rPr>
-              <a:t>11 / 16</a:t>
+              <a:t>13 / 18</a:t>
             </a:r>
           </a:p>
         </p:txBody>
@@ -5152,7 +6713,7 @@
                 </a:solidFill>
                 <a:latin typeface="Calibri"/>
               </a:rPr>
-              <a:t>§9 Token-Ökonomie &amp; Modellstrategie</a:t>
+              <a:t>§10 Token-Ökonomie &amp; Modellstrategie</a:t>
             </a:r>
           </a:p>
         </p:txBody>
@@ -5673,7 +7234,7 @@
 </p:sld>
 </file>
 
-<file path=ppt/slides/slide13.xml><?xml version="1.0" encoding="utf-8"?>
+<file path=ppt/slides/slide15.xml><?xml version="1.0" encoding="utf-8"?>
 <p:sld xmlns:a="http://schemas.openxmlformats.org/drawingml/2006/main" xmlns:p="http://schemas.openxmlformats.org/presentationml/2006/main" xmlns:r="http://schemas.openxmlformats.org/officeDocument/2006/relationships">
   <p:cSld>
     <p:bg>
@@ -5800,7 +7361,7 @@
                 </a:solidFill>
                 <a:latin typeface="Calibri"/>
               </a:rPr>
-              <a:t>12 / 16</a:t>
+              <a:t>14 / 18</a:t>
             </a:r>
           </a:p>
         </p:txBody>
@@ -5835,7 +7396,7 @@
                 </a:solidFill>
                 <a:latin typeface="Calibri"/>
               </a:rPr>
-              <a:t>§10–11 Memory, Sessions &amp; Continuous Learning</a:t>
+              <a:t>§11–12 Memory, Sessions &amp; Continuous Learning</a:t>
             </a:r>
           </a:p>
         </p:txBody>
@@ -6207,1274 +7768,6 @@
 </p:sld>
 </file>
 
-<file path=ppt/slides/slide14.xml><?xml version="1.0" encoding="utf-8"?>
-<p:sld xmlns:a="http://schemas.openxmlformats.org/drawingml/2006/main" xmlns:p="http://schemas.openxmlformats.org/presentationml/2006/main" xmlns:r="http://schemas.openxmlformats.org/officeDocument/2006/relationships">
-  <p:cSld>
-    <p:bg>
-      <p:bgPr>
-        <a:solidFill>
-          <a:srgbClr val="0A0E1A"/>
-        </a:solidFill>
-        <a:effectLst/>
-      </p:bgPr>
-    </p:bg>
-    <p:spTree>
-      <p:nvGrpSpPr>
-        <p:cNvPr id="1" name=""/>
-        <p:cNvGrpSpPr/>
-        <p:nvPr/>
-      </p:nvGrpSpPr>
-      <p:grpSpPr/>
-      <p:sp>
-        <p:nvSpPr>
-          <p:cNvPr id="2" name="Oval 1"/>
-          <p:cNvSpPr/>
-          <p:nvPr/>
-        </p:nvSpPr>
-        <p:spPr>
-          <a:xfrm>
-            <a:off x="548640" y="384048"/>
-            <a:ext cx="146304" cy="146304"/>
-          </a:xfrm>
-          <a:prstGeom prst="ellipse">
-            <a:avLst/>
-          </a:prstGeom>
-          <a:solidFill>
-            <a:srgbClr val="22D3EE"/>
-          </a:solidFill>
-          <a:ln>
-            <a:noFill/>
-          </a:ln>
-          <a:effectLst/>
-        </p:spPr>
-        <p:style>
-          <a:lnRef idx="1">
-            <a:schemeClr val="accent1"/>
-          </a:lnRef>
-          <a:fillRef idx="3">
-            <a:schemeClr val="accent1"/>
-          </a:fillRef>
-          <a:effectRef idx="2">
-            <a:schemeClr val="accent1"/>
-          </a:effectRef>
-          <a:fontRef idx="minor">
-            <a:schemeClr val="lt1"/>
-          </a:fontRef>
-        </p:style>
-        <p:txBody>
-          <a:bodyPr rtlCol="0" anchor="ctr"/>
-          <a:lstStyle/>
-          <a:p>
-            <a:pPr algn="ctr"/>
-          </a:p>
-        </p:txBody>
-      </p:sp>
-      <p:sp>
-        <p:nvSpPr>
-          <p:cNvPr id="3" name="TextBox 2"/>
-          <p:cNvSpPr txBox="1"/>
-          <p:nvPr/>
-        </p:nvSpPr>
-        <p:spPr>
-          <a:xfrm>
-            <a:off x="777240" y="301752"/>
-            <a:ext cx="7315200" cy="457200"/>
-          </a:xfrm>
-          <a:prstGeom prst="rect">
-            <a:avLst/>
-          </a:prstGeom>
-          <a:noFill/>
-        </p:spPr>
-        <p:txBody>
-          <a:bodyPr wrap="square">
-            <a:spAutoFit/>
-          </a:bodyPr>
-          <a:lstStyle/>
-          <a:p>
-            <a:pPr algn="l"/>
-            <a:r>
-              <a:rPr sz="1200" b="1">
-                <a:solidFill>
-                  <a:srgbClr val="22D3EE"/>
-                </a:solidFill>
-                <a:latin typeface="Calibri"/>
-              </a:rPr>
-              <a:t>PARALLEL</a:t>
-            </a:r>
-          </a:p>
-        </p:txBody>
-      </p:sp>
-      <p:sp>
-        <p:nvSpPr>
-          <p:cNvPr id="4" name="TextBox 3"/>
-          <p:cNvSpPr txBox="1"/>
-          <p:nvPr/>
-        </p:nvSpPr>
-        <p:spPr>
-          <a:xfrm>
-            <a:off x="9601200" y="301752"/>
-            <a:ext cx="2011680" cy="457200"/>
-          </a:xfrm>
-          <a:prstGeom prst="rect">
-            <a:avLst/>
-          </a:prstGeom>
-          <a:noFill/>
-        </p:spPr>
-        <p:txBody>
-          <a:bodyPr wrap="square">
-            <a:spAutoFit/>
-          </a:bodyPr>
-          <a:lstStyle/>
-          <a:p>
-            <a:pPr algn="r"/>
-            <a:r>
-              <a:rPr sz="1200" b="0">
-                <a:solidFill>
-                  <a:srgbClr val="8B98B0"/>
-                </a:solidFill>
-                <a:latin typeface="Calibri"/>
-              </a:rPr>
-              <a:t>13 / 16</a:t>
-            </a:r>
-          </a:p>
-        </p:txBody>
-      </p:sp>
-      <p:sp>
-        <p:nvSpPr>
-          <p:cNvPr id="5" name="TextBox 4"/>
-          <p:cNvSpPr txBox="1"/>
-          <p:nvPr/>
-        </p:nvSpPr>
-        <p:spPr>
-          <a:xfrm>
-            <a:off x="548640" y="777240"/>
-            <a:ext cx="11064240" cy="777240"/>
-          </a:xfrm>
-          <a:prstGeom prst="rect">
-            <a:avLst/>
-          </a:prstGeom>
-          <a:noFill/>
-        </p:spPr>
-        <p:txBody>
-          <a:bodyPr wrap="square">
-            <a:spAutoFit/>
-          </a:bodyPr>
-          <a:lstStyle/>
-          <a:p>
-            <a:pPr algn="l"/>
-            <a:r>
-              <a:rPr sz="2700" b="1">
-                <a:solidFill>
-                  <a:srgbClr val="E6EDF8"/>
-                </a:solidFill>
-                <a:latin typeface="Calibri"/>
-              </a:rPr>
-              <a:t>§12 Parallelisierung</a:t>
-            </a:r>
-          </a:p>
-        </p:txBody>
-      </p:sp>
-      <p:sp>
-        <p:nvSpPr>
-          <p:cNvPr id="6" name="Rectangle 5"/>
-          <p:cNvSpPr/>
-          <p:nvPr/>
-        </p:nvSpPr>
-        <p:spPr>
-          <a:xfrm>
-            <a:off x="594360" y="1481328"/>
-            <a:ext cx="2011680" cy="41148"/>
-          </a:xfrm>
-          <a:prstGeom prst="rect">
-            <a:avLst/>
-          </a:prstGeom>
-          <a:solidFill>
-            <a:srgbClr val="22D3EE"/>
-          </a:solidFill>
-          <a:ln>
-            <a:noFill/>
-          </a:ln>
-          <a:effectLst/>
-        </p:spPr>
-        <p:style>
-          <a:lnRef idx="1">
-            <a:schemeClr val="accent1"/>
-          </a:lnRef>
-          <a:fillRef idx="3">
-            <a:schemeClr val="accent1"/>
-          </a:fillRef>
-          <a:effectRef idx="2">
-            <a:schemeClr val="accent1"/>
-          </a:effectRef>
-          <a:fontRef idx="minor">
-            <a:schemeClr val="lt1"/>
-          </a:fontRef>
-        </p:style>
-        <p:txBody>
-          <a:bodyPr rtlCol="0" anchor="ctr"/>
-          <a:lstStyle/>
-          <a:p>
-            <a:pPr algn="ctr"/>
-          </a:p>
-        </p:txBody>
-      </p:sp>
-      <p:sp>
-        <p:nvSpPr>
-          <p:cNvPr id="7" name="Rounded Rectangle 6"/>
-          <p:cNvSpPr/>
-          <p:nvPr/>
-        </p:nvSpPr>
-        <p:spPr>
-          <a:xfrm>
-            <a:off x="640080" y="1783080"/>
-            <a:ext cx="5166360" cy="1371600"/>
-          </a:xfrm>
-          <a:prstGeom prst="roundRect">
-            <a:avLst>
-              <a:gd name="adj" fmla="val 6000"/>
-            </a:avLst>
-          </a:prstGeom>
-          <a:solidFill>
-            <a:srgbClr val="141A2E"/>
-          </a:solidFill>
-          <a:ln w="9525">
-            <a:solidFill>
-              <a:srgbClr val="22D3EE"/>
-            </a:solidFill>
-          </a:ln>
-          <a:effectLst/>
-        </p:spPr>
-        <p:style>
-          <a:lnRef idx="1">
-            <a:schemeClr val="accent1"/>
-          </a:lnRef>
-          <a:fillRef idx="3">
-            <a:schemeClr val="accent1"/>
-          </a:fillRef>
-          <a:effectRef idx="2">
-            <a:schemeClr val="accent1"/>
-          </a:effectRef>
-          <a:fontRef idx="minor">
-            <a:schemeClr val="lt1"/>
-          </a:fontRef>
-        </p:style>
-        <p:txBody>
-          <a:bodyPr rtlCol="0" anchor="ctr"/>
-          <a:lstStyle/>
-          <a:p>
-            <a:pPr algn="ctr"/>
-          </a:p>
-        </p:txBody>
-      </p:sp>
-      <p:sp>
-        <p:nvSpPr>
-          <p:cNvPr id="8" name="TextBox 7"/>
-          <p:cNvSpPr txBox="1"/>
-          <p:nvPr/>
-        </p:nvSpPr>
-        <p:spPr>
-          <a:xfrm>
-            <a:off x="822959" y="1920240"/>
-            <a:ext cx="4800600" cy="1097280"/>
-          </a:xfrm>
-          <a:prstGeom prst="rect">
-            <a:avLst/>
-          </a:prstGeom>
-          <a:noFill/>
-        </p:spPr>
-        <p:txBody>
-          <a:bodyPr wrap="none">
-            <a:spAutoFit/>
-          </a:bodyPr>
-          <a:lstStyle/>
-          <a:p>
-            <a:pPr algn="l"/>
-            <a:r>
-              <a:rPr sz="1500" b="1">
-                <a:solidFill>
-                  <a:srgbClr val="22D3EE"/>
-                </a:solidFill>
-                <a:latin typeface="Calibri"/>
-              </a:rPr>
-              <a:t>/fork</a:t>
-            </a:r>
-          </a:p>
-          <a:p>
-            <a:pPr algn="l"/>
-            <a:r>
-              <a:rPr sz="1150" b="0">
-                <a:solidFill>
-                  <a:srgbClr val="8B98B0"/>
-                </a:solidFill>
-                <a:latin typeface="Calibri"/>
-              </a:rPr>
-              <a:t>Konversation forken für nicht-überlappende Nebenaufgaben (Codebase-Fragen).</a:t>
-            </a:r>
-          </a:p>
-        </p:txBody>
-      </p:sp>
-      <p:sp>
-        <p:nvSpPr>
-          <p:cNvPr id="9" name="Rounded Rectangle 8"/>
-          <p:cNvSpPr/>
-          <p:nvPr/>
-        </p:nvSpPr>
-        <p:spPr>
-          <a:xfrm>
-            <a:off x="6400800" y="1783080"/>
-            <a:ext cx="5166360" cy="1371600"/>
-          </a:xfrm>
-          <a:prstGeom prst="roundRect">
-            <a:avLst>
-              <a:gd name="adj" fmla="val 6000"/>
-            </a:avLst>
-          </a:prstGeom>
-          <a:solidFill>
-            <a:srgbClr val="141A2E"/>
-          </a:solidFill>
-          <a:ln w="9525">
-            <a:solidFill>
-              <a:srgbClr val="22D3EE"/>
-            </a:solidFill>
-          </a:ln>
-          <a:effectLst/>
-        </p:spPr>
-        <p:style>
-          <a:lnRef idx="1">
-            <a:schemeClr val="accent1"/>
-          </a:lnRef>
-          <a:fillRef idx="3">
-            <a:schemeClr val="accent1"/>
-          </a:fillRef>
-          <a:effectRef idx="2">
-            <a:schemeClr val="accent1"/>
-          </a:effectRef>
-          <a:fontRef idx="minor">
-            <a:schemeClr val="lt1"/>
-          </a:fontRef>
-        </p:style>
-        <p:txBody>
-          <a:bodyPr rtlCol="0" anchor="ctr"/>
-          <a:lstStyle/>
-          <a:p>
-            <a:pPr algn="ctr"/>
-          </a:p>
-        </p:txBody>
-      </p:sp>
-      <p:sp>
-        <p:nvSpPr>
-          <p:cNvPr id="10" name="TextBox 9"/>
-          <p:cNvSpPr txBox="1"/>
-          <p:nvPr/>
-        </p:nvSpPr>
-        <p:spPr>
-          <a:xfrm>
-            <a:off x="6583680" y="1920240"/>
-            <a:ext cx="4800600" cy="1097280"/>
-          </a:xfrm>
-          <a:prstGeom prst="rect">
-            <a:avLst/>
-          </a:prstGeom>
-          <a:noFill/>
-        </p:spPr>
-        <p:txBody>
-          <a:bodyPr wrap="none">
-            <a:spAutoFit/>
-          </a:bodyPr>
-          <a:lstStyle/>
-          <a:p>
-            <a:pPr algn="l"/>
-            <a:r>
-              <a:rPr sz="1500" b="1">
-                <a:solidFill>
-                  <a:srgbClr val="22D3EE"/>
-                </a:solidFill>
-                <a:latin typeface="Calibri"/>
-              </a:rPr>
-              <a:t>Git-Worktrees</a:t>
-            </a:r>
-          </a:p>
-          <a:p>
-            <a:pPr algn="l"/>
-            <a:r>
-              <a:rPr sz="1150" b="0">
-                <a:solidFill>
-                  <a:srgbClr val="8B98B0"/>
-                </a:solidFill>
-                <a:latin typeface="Calibri"/>
-              </a:rPr>
-              <a:t>überlappende parallele Arbeit ohne Konflikte — eigene Claude-Instanz je Worktree.</a:t>
-            </a:r>
-          </a:p>
-        </p:txBody>
-      </p:sp>
-      <p:sp>
-        <p:nvSpPr>
-          <p:cNvPr id="11" name="Rounded Rectangle 10"/>
-          <p:cNvSpPr/>
-          <p:nvPr/>
-        </p:nvSpPr>
-        <p:spPr>
-          <a:xfrm>
-            <a:off x="640080" y="3337560"/>
-            <a:ext cx="5166360" cy="1371600"/>
-          </a:xfrm>
-          <a:prstGeom prst="roundRect">
-            <a:avLst>
-              <a:gd name="adj" fmla="val 6000"/>
-            </a:avLst>
-          </a:prstGeom>
-          <a:solidFill>
-            <a:srgbClr val="141A2E"/>
-          </a:solidFill>
-          <a:ln w="9525">
-            <a:solidFill>
-              <a:srgbClr val="22D3EE"/>
-            </a:solidFill>
-          </a:ln>
-          <a:effectLst/>
-        </p:spPr>
-        <p:style>
-          <a:lnRef idx="1">
-            <a:schemeClr val="accent1"/>
-          </a:lnRef>
-          <a:fillRef idx="3">
-            <a:schemeClr val="accent1"/>
-          </a:fillRef>
-          <a:effectRef idx="2">
-            <a:schemeClr val="accent1"/>
-          </a:effectRef>
-          <a:fontRef idx="minor">
-            <a:schemeClr val="lt1"/>
-          </a:fontRef>
-        </p:style>
-        <p:txBody>
-          <a:bodyPr rtlCol="0" anchor="ctr"/>
-          <a:lstStyle/>
-          <a:p>
-            <a:pPr algn="ctr"/>
-          </a:p>
-        </p:txBody>
-      </p:sp>
-      <p:sp>
-        <p:nvSpPr>
-          <p:cNvPr id="12" name="TextBox 11"/>
-          <p:cNvSpPr txBox="1"/>
-          <p:nvPr/>
-        </p:nvSpPr>
-        <p:spPr>
-          <a:xfrm>
-            <a:off x="822959" y="3474720"/>
-            <a:ext cx="4800600" cy="1097280"/>
-          </a:xfrm>
-          <a:prstGeom prst="rect">
-            <a:avLst/>
-          </a:prstGeom>
-          <a:noFill/>
-        </p:spPr>
-        <p:txBody>
-          <a:bodyPr wrap="none">
-            <a:spAutoFit/>
-          </a:bodyPr>
-          <a:lstStyle/>
-          <a:p>
-            <a:pPr algn="l"/>
-            <a:r>
-              <a:rPr sz="1500" b="1">
-                <a:solidFill>
-                  <a:srgbClr val="22D3EE"/>
-                </a:solidFill>
-                <a:latin typeface="Calibri"/>
-              </a:rPr>
-              <a:t>Cascade-Methode</a:t>
-            </a:r>
-          </a:p>
-          <a:p>
-            <a:pPr algn="l"/>
-            <a:r>
-              <a:rPr sz="1150" b="0">
-                <a:solidFill>
-                  <a:srgbClr val="8B98B0"/>
-                </a:solidFill>
-                <a:latin typeface="Calibri"/>
-              </a:rPr>
-              <a:t>neue Tasks in neuen Tabs, alt→neu abarbeiten, max. 3–4 gleichzeitig.</a:t>
-            </a:r>
-          </a:p>
-        </p:txBody>
-      </p:sp>
-      <p:sp>
-        <p:nvSpPr>
-          <p:cNvPr id="13" name="Rounded Rectangle 12"/>
-          <p:cNvSpPr/>
-          <p:nvPr/>
-        </p:nvSpPr>
-        <p:spPr>
-          <a:xfrm>
-            <a:off x="6400800" y="3337560"/>
-            <a:ext cx="5166360" cy="1371600"/>
-          </a:xfrm>
-          <a:prstGeom prst="roundRect">
-            <a:avLst>
-              <a:gd name="adj" fmla="val 6000"/>
-            </a:avLst>
-          </a:prstGeom>
-          <a:solidFill>
-            <a:srgbClr val="141A2E"/>
-          </a:solidFill>
-          <a:ln w="9525">
-            <a:solidFill>
-              <a:srgbClr val="22D3EE"/>
-            </a:solidFill>
-          </a:ln>
-          <a:effectLst/>
-        </p:spPr>
-        <p:style>
-          <a:lnRef idx="1">
-            <a:schemeClr val="accent1"/>
-          </a:lnRef>
-          <a:fillRef idx="3">
-            <a:schemeClr val="accent1"/>
-          </a:fillRef>
-          <a:effectRef idx="2">
-            <a:schemeClr val="accent1"/>
-          </a:effectRef>
-          <a:fontRef idx="minor">
-            <a:schemeClr val="lt1"/>
-          </a:fontRef>
-        </p:style>
-        <p:txBody>
-          <a:bodyPr rtlCol="0" anchor="ctr"/>
-          <a:lstStyle/>
-          <a:p>
-            <a:pPr algn="ctr"/>
-          </a:p>
-        </p:txBody>
-      </p:sp>
-      <p:sp>
-        <p:nvSpPr>
-          <p:cNvPr id="14" name="TextBox 13"/>
-          <p:cNvSpPr txBox="1"/>
-          <p:nvPr/>
-        </p:nvSpPr>
-        <p:spPr>
-          <a:xfrm>
-            <a:off x="6583680" y="3474720"/>
-            <a:ext cx="4800600" cy="1097280"/>
-          </a:xfrm>
-          <a:prstGeom prst="rect">
-            <a:avLst/>
-          </a:prstGeom>
-          <a:noFill/>
-        </p:spPr>
-        <p:txBody>
-          <a:bodyPr wrap="none">
-            <a:spAutoFit/>
-          </a:bodyPr>
-          <a:lstStyle/>
-          <a:p>
-            <a:pPr algn="l"/>
-            <a:r>
-              <a:rPr sz="1500" b="1">
-                <a:solidFill>
-                  <a:srgbClr val="22D3EE"/>
-                </a:solidFill>
-                <a:latin typeface="Calibri"/>
-              </a:rPr>
-              <a:t>ECC-Multi-Model</a:t>
-            </a:r>
-          </a:p>
-          <a:p>
-            <a:pPr algn="l"/>
-            <a:r>
-              <a:rPr sz="1150" b="0">
-                <a:solidFill>
-                  <a:srgbClr val="8B98B0"/>
-                </a:solidFill>
-                <a:latin typeface="Calibri"/>
-              </a:rPr>
-              <a:t>/multi-plan · /multi-workflow · /multi-backend · /multi-frontend · /loop-start.</a:t>
-            </a:r>
-          </a:p>
-        </p:txBody>
-      </p:sp>
-      <p:sp>
-        <p:nvSpPr>
-          <p:cNvPr id="15" name="Rounded Rectangle 14"/>
-          <p:cNvSpPr/>
-          <p:nvPr/>
-        </p:nvSpPr>
-        <p:spPr>
-          <a:xfrm>
-            <a:off x="640080" y="4937760"/>
-            <a:ext cx="10927080" cy="960120"/>
-          </a:xfrm>
-          <a:prstGeom prst="roundRect">
-            <a:avLst>
-              <a:gd name="adj" fmla="val 6000"/>
-            </a:avLst>
-          </a:prstGeom>
-          <a:solidFill>
-            <a:srgbClr val="0E1424"/>
-          </a:solidFill>
-          <a:ln>
-            <a:noFill/>
-          </a:ln>
-          <a:effectLst/>
-        </p:spPr>
-        <p:style>
-          <a:lnRef idx="1">
-            <a:schemeClr val="accent1"/>
-          </a:lnRef>
-          <a:fillRef idx="3">
-            <a:schemeClr val="accent1"/>
-          </a:fillRef>
-          <a:effectRef idx="2">
-            <a:schemeClr val="accent1"/>
-          </a:effectRef>
-          <a:fontRef idx="minor">
-            <a:schemeClr val="lt1"/>
-          </a:fontRef>
-        </p:style>
-        <p:txBody>
-          <a:bodyPr rtlCol="0" anchor="ctr"/>
-          <a:lstStyle/>
-          <a:p>
-            <a:pPr algn="ctr"/>
-          </a:p>
-        </p:txBody>
-      </p:sp>
-      <p:sp>
-        <p:nvSpPr>
-          <p:cNvPr id="16" name="TextBox 15"/>
-          <p:cNvSpPr txBox="1"/>
-          <p:nvPr/>
-        </p:nvSpPr>
-        <p:spPr>
-          <a:xfrm>
-            <a:off x="868680" y="5074920"/>
-            <a:ext cx="10515600" cy="731520"/>
-          </a:xfrm>
-          <a:prstGeom prst="rect">
-            <a:avLst/>
-          </a:prstGeom>
-          <a:noFill/>
-        </p:spPr>
-        <p:txBody>
-          <a:bodyPr wrap="none">
-            <a:spAutoFit/>
-          </a:bodyPr>
-          <a:lstStyle/>
-          <a:p>
-            <a:pPr algn="l"/>
-            <a:r>
-              <a:rPr sz="1400" b="1">
-                <a:solidFill>
-                  <a:srgbClr val="9CE3F0"/>
-                </a:solidFill>
-                <a:latin typeface="Consolas"/>
-              </a:rPr>
-              <a:t>git worktree add ../feature-a feature-a &amp;&amp; cd ../feature-a &amp;&amp; claude</a:t>
-            </a:r>
-          </a:p>
-        </p:txBody>
-      </p:sp>
-    </p:spTree>
-  </p:cSld>
-  <p:clrMapOvr>
-    <a:masterClrMapping/>
-  </p:clrMapOvr>
-</p:sld>
-</file>
-
-<file path=ppt/slides/slide15.xml><?xml version="1.0" encoding="utf-8"?>
-<p:sld xmlns:a="http://schemas.openxmlformats.org/drawingml/2006/main" xmlns:p="http://schemas.openxmlformats.org/presentationml/2006/main" xmlns:r="http://schemas.openxmlformats.org/officeDocument/2006/relationships">
-  <p:cSld>
-    <p:bg>
-      <p:bgPr>
-        <a:solidFill>
-          <a:srgbClr val="0A0E1A"/>
-        </a:solidFill>
-        <a:effectLst/>
-      </p:bgPr>
-    </p:bg>
-    <p:spTree>
-      <p:nvGrpSpPr>
-        <p:cNvPr id="1" name=""/>
-        <p:cNvGrpSpPr/>
-        <p:nvPr/>
-      </p:nvGrpSpPr>
-      <p:grpSpPr/>
-      <p:sp>
-        <p:nvSpPr>
-          <p:cNvPr id="2" name="Oval 1"/>
-          <p:cNvSpPr/>
-          <p:nvPr/>
-        </p:nvSpPr>
-        <p:spPr>
-          <a:xfrm>
-            <a:off x="548640" y="384048"/>
-            <a:ext cx="146304" cy="146304"/>
-          </a:xfrm>
-          <a:prstGeom prst="ellipse">
-            <a:avLst/>
-          </a:prstGeom>
-          <a:solidFill>
-            <a:srgbClr val="22D3EE"/>
-          </a:solidFill>
-          <a:ln>
-            <a:noFill/>
-          </a:ln>
-          <a:effectLst/>
-        </p:spPr>
-        <p:style>
-          <a:lnRef idx="1">
-            <a:schemeClr val="accent1"/>
-          </a:lnRef>
-          <a:fillRef idx="3">
-            <a:schemeClr val="accent1"/>
-          </a:fillRef>
-          <a:effectRef idx="2">
-            <a:schemeClr val="accent1"/>
-          </a:effectRef>
-          <a:fontRef idx="minor">
-            <a:schemeClr val="lt1"/>
-          </a:fontRef>
-        </p:style>
-        <p:txBody>
-          <a:bodyPr rtlCol="0" anchor="ctr"/>
-          <a:lstStyle/>
-          <a:p>
-            <a:pPr algn="ctr"/>
-          </a:p>
-        </p:txBody>
-      </p:sp>
-      <p:sp>
-        <p:nvSpPr>
-          <p:cNvPr id="3" name="TextBox 2"/>
-          <p:cNvSpPr txBox="1"/>
-          <p:nvPr/>
-        </p:nvSpPr>
-        <p:spPr>
-          <a:xfrm>
-            <a:off x="777240" y="301752"/>
-            <a:ext cx="7315200" cy="457200"/>
-          </a:xfrm>
-          <a:prstGeom prst="rect">
-            <a:avLst/>
-          </a:prstGeom>
-          <a:noFill/>
-        </p:spPr>
-        <p:txBody>
-          <a:bodyPr wrap="square">
-            <a:spAutoFit/>
-          </a:bodyPr>
-          <a:lstStyle/>
-          <a:p>
-            <a:pPr algn="l"/>
-            <a:r>
-              <a:rPr sz="1200" b="1">
-                <a:solidFill>
-                  <a:srgbClr val="22D3EE"/>
-                </a:solidFill>
-                <a:latin typeface="Calibri"/>
-              </a:rPr>
-              <a:t>SECURITY</a:t>
-            </a:r>
-          </a:p>
-        </p:txBody>
-      </p:sp>
-      <p:sp>
-        <p:nvSpPr>
-          <p:cNvPr id="4" name="TextBox 3"/>
-          <p:cNvSpPr txBox="1"/>
-          <p:nvPr/>
-        </p:nvSpPr>
-        <p:spPr>
-          <a:xfrm>
-            <a:off x="9601200" y="301752"/>
-            <a:ext cx="2011680" cy="457200"/>
-          </a:xfrm>
-          <a:prstGeom prst="rect">
-            <a:avLst/>
-          </a:prstGeom>
-          <a:noFill/>
-        </p:spPr>
-        <p:txBody>
-          <a:bodyPr wrap="square">
-            <a:spAutoFit/>
-          </a:bodyPr>
-          <a:lstStyle/>
-          <a:p>
-            <a:pPr algn="r"/>
-            <a:r>
-              <a:rPr sz="1200" b="0">
-                <a:solidFill>
-                  <a:srgbClr val="8B98B0"/>
-                </a:solidFill>
-                <a:latin typeface="Calibri"/>
-              </a:rPr>
-              <a:t>14 / 16</a:t>
-            </a:r>
-          </a:p>
-        </p:txBody>
-      </p:sp>
-      <p:sp>
-        <p:nvSpPr>
-          <p:cNvPr id="5" name="TextBox 4"/>
-          <p:cNvSpPr txBox="1"/>
-          <p:nvPr/>
-        </p:nvSpPr>
-        <p:spPr>
-          <a:xfrm>
-            <a:off x="548640" y="777240"/>
-            <a:ext cx="11064240" cy="777240"/>
-          </a:xfrm>
-          <a:prstGeom prst="rect">
-            <a:avLst/>
-          </a:prstGeom>
-          <a:noFill/>
-        </p:spPr>
-        <p:txBody>
-          <a:bodyPr wrap="square">
-            <a:spAutoFit/>
-          </a:bodyPr>
-          <a:lstStyle/>
-          <a:p>
-            <a:pPr algn="l"/>
-            <a:r>
-              <a:rPr sz="2700" b="1">
-                <a:solidFill>
-                  <a:srgbClr val="E6EDF8"/>
-                </a:solidFill>
-                <a:latin typeface="Calibri"/>
-              </a:rPr>
-              <a:t>§13 Security im Alltag + VPS</a:t>
-            </a:r>
-          </a:p>
-        </p:txBody>
-      </p:sp>
-      <p:sp>
-        <p:nvSpPr>
-          <p:cNvPr id="6" name="Rectangle 5"/>
-          <p:cNvSpPr/>
-          <p:nvPr/>
-        </p:nvSpPr>
-        <p:spPr>
-          <a:xfrm>
-            <a:off x="594360" y="1481328"/>
-            <a:ext cx="2011680" cy="41148"/>
-          </a:xfrm>
-          <a:prstGeom prst="rect">
-            <a:avLst/>
-          </a:prstGeom>
-          <a:solidFill>
-            <a:srgbClr val="22D3EE"/>
-          </a:solidFill>
-          <a:ln>
-            <a:noFill/>
-          </a:ln>
-          <a:effectLst/>
-        </p:spPr>
-        <p:style>
-          <a:lnRef idx="1">
-            <a:schemeClr val="accent1"/>
-          </a:lnRef>
-          <a:fillRef idx="3">
-            <a:schemeClr val="accent1"/>
-          </a:fillRef>
-          <a:effectRef idx="2">
-            <a:schemeClr val="accent1"/>
-          </a:effectRef>
-          <a:fontRef idx="minor">
-            <a:schemeClr val="lt1"/>
-          </a:fontRef>
-        </p:style>
-        <p:txBody>
-          <a:bodyPr rtlCol="0" anchor="ctr"/>
-          <a:lstStyle/>
-          <a:p>
-            <a:pPr algn="ctr"/>
-          </a:p>
-        </p:txBody>
-      </p:sp>
-      <p:sp>
-        <p:nvSpPr>
-          <p:cNvPr id="7" name="Rounded Rectangle 6"/>
-          <p:cNvSpPr/>
-          <p:nvPr/>
-        </p:nvSpPr>
-        <p:spPr>
-          <a:xfrm>
-            <a:off x="640080" y="1783080"/>
-            <a:ext cx="5349240" cy="3383280"/>
-          </a:xfrm>
-          <a:prstGeom prst="roundRect">
-            <a:avLst>
-              <a:gd name="adj" fmla="val 6000"/>
-            </a:avLst>
-          </a:prstGeom>
-          <a:solidFill>
-            <a:srgbClr val="141A2E"/>
-          </a:solidFill>
-          <a:ln w="9525">
-            <a:solidFill>
-              <a:srgbClr val="34D399"/>
-            </a:solidFill>
-          </a:ln>
-          <a:effectLst/>
-        </p:spPr>
-        <p:style>
-          <a:lnRef idx="1">
-            <a:schemeClr val="accent1"/>
-          </a:lnRef>
-          <a:fillRef idx="3">
-            <a:schemeClr val="accent1"/>
-          </a:fillRef>
-          <a:effectRef idx="2">
-            <a:schemeClr val="accent1"/>
-          </a:effectRef>
-          <a:fontRef idx="minor">
-            <a:schemeClr val="lt1"/>
-          </a:fontRef>
-        </p:style>
-        <p:txBody>
-          <a:bodyPr rtlCol="0" anchor="ctr"/>
-          <a:lstStyle/>
-          <a:p>
-            <a:pPr algn="ctr"/>
-          </a:p>
-        </p:txBody>
-      </p:sp>
-      <p:sp>
-        <p:nvSpPr>
-          <p:cNvPr id="8" name="TextBox 7"/>
-          <p:cNvSpPr txBox="1"/>
-          <p:nvPr/>
-        </p:nvSpPr>
-        <p:spPr>
-          <a:xfrm>
-            <a:off x="868680" y="1965960"/>
-            <a:ext cx="4937760" cy="3108960"/>
-          </a:xfrm>
-          <a:prstGeom prst="rect">
-            <a:avLst/>
-          </a:prstGeom>
-          <a:noFill/>
-        </p:spPr>
-        <p:txBody>
-          <a:bodyPr wrap="none">
-            <a:spAutoFit/>
-          </a:bodyPr>
-          <a:lstStyle/>
-          <a:p>
-            <a:pPr algn="l"/>
-            <a:r>
-              <a:rPr sz="1600" b="1">
-                <a:solidFill>
-                  <a:srgbClr val="34D399"/>
-                </a:solidFill>
-                <a:latin typeface="Calibri"/>
-              </a:rPr>
-              <a:t>Aktiv / sicher</a:t>
-            </a:r>
-          </a:p>
-          <a:p>
-            <a:pPr algn="l"/>
-            <a:r>
-              <a:rPr sz="400" b="0">
-                <a:solidFill>
-                  <a:srgbClr val="E6EDF8"/>
-                </a:solidFill>
-                <a:latin typeface="Calibri"/>
-              </a:rPr>
-              <a:t/>
-            </a:r>
-          </a:p>
-          <a:p>
-            <a:pPr algn="l"/>
-            <a:r>
-              <a:rPr sz="1250" b="1">
-                <a:solidFill>
-                  <a:srgbClr val="E6EDF8"/>
-                </a:solidFill>
-                <a:latin typeface="Calibri"/>
-              </a:rPr>
-              <a:t>RTK-Hook</a:t>
-            </a:r>
-          </a:p>
-          <a:p>
-            <a:pPr lvl="1" algn="l"/>
-            <a:r>
-              <a:rPr sz="1100" b="0">
-                <a:solidFill>
-                  <a:srgbClr val="8B98B0"/>
-                </a:solidFill>
-                <a:latin typeface="Calibri"/>
-              </a:rPr>
-              <a:t>PreToolUse:Bash bleibt unangetastet — Token-Ersparnis global.</a:t>
-            </a:r>
-          </a:p>
-          <a:p>
-            <a:pPr algn="l"/>
-            <a:r>
-              <a:rPr sz="1250" b="1">
-                <a:solidFill>
-                  <a:srgbClr val="E6EDF8"/>
-                </a:solidFill>
-                <a:latin typeface="Calibri"/>
-              </a:rPr>
-              <a:t>ECC namespace-sicher</a:t>
-            </a:r>
-          </a:p>
-          <a:p>
-            <a:pPr lvl="1" algn="l"/>
-            <a:r>
-              <a:rPr sz="1100" b="0">
-                <a:solidFill>
-                  <a:srgbClr val="8B98B0"/>
-                </a:solidFill>
-                <a:latin typeface="Calibri"/>
-              </a:rPr>
-              <a:t>rules/ecc/, skills/ecc/ — keine Kollision mit Eigenem.</a:t>
-            </a:r>
-          </a:p>
-          <a:p>
-            <a:pPr algn="l"/>
-            <a:r>
-              <a:rPr sz="1250" b="1">
-                <a:solidFill>
-                  <a:srgbClr val="E6EDF8"/>
-                </a:solidFill>
-                <a:latin typeface="Calibri"/>
-              </a:rPr>
-              <a:t>settings.json unberührt</a:t>
-            </a:r>
-          </a:p>
-          <a:p>
-            <a:pPr lvl="1" algn="l"/>
-            <a:r>
-              <a:rPr sz="1100" b="0">
-                <a:solidFill>
-                  <a:srgbClr val="8B98B0"/>
-                </a:solidFill>
-                <a:latin typeface="Calibri"/>
-              </a:rPr>
-              <a:t>kein Auto-Edit der Startup-Config; nur additiv via ./install-vps.sh --harden.</a:t>
-            </a:r>
-          </a:p>
-        </p:txBody>
-      </p:sp>
-      <p:sp>
-        <p:nvSpPr>
-          <p:cNvPr id="9" name="Rounded Rectangle 8"/>
-          <p:cNvSpPr/>
-          <p:nvPr/>
-        </p:nvSpPr>
-        <p:spPr>
-          <a:xfrm>
-            <a:off x="6263640" y="1783080"/>
-            <a:ext cx="5303520" cy="3383280"/>
-          </a:xfrm>
-          <a:prstGeom prst="roundRect">
-            <a:avLst>
-              <a:gd name="adj" fmla="val 6000"/>
-            </a:avLst>
-          </a:prstGeom>
-          <a:solidFill>
-            <a:srgbClr val="141A2E"/>
-          </a:solidFill>
-          <a:ln w="9525">
-            <a:solidFill>
-              <a:srgbClr val="FBBF24"/>
-            </a:solidFill>
-          </a:ln>
-          <a:effectLst/>
-        </p:spPr>
-        <p:style>
-          <a:lnRef idx="1">
-            <a:schemeClr val="accent1"/>
-          </a:lnRef>
-          <a:fillRef idx="3">
-            <a:schemeClr val="accent1"/>
-          </a:fillRef>
-          <a:effectRef idx="2">
-            <a:schemeClr val="accent1"/>
-          </a:effectRef>
-          <a:fontRef idx="minor">
-            <a:schemeClr val="lt1"/>
-          </a:fontRef>
-        </p:style>
-        <p:txBody>
-          <a:bodyPr rtlCol="0" anchor="ctr"/>
-          <a:lstStyle/>
-          <a:p>
-            <a:pPr algn="ctr"/>
-          </a:p>
-        </p:txBody>
-      </p:sp>
-      <p:sp>
-        <p:nvSpPr>
-          <p:cNvPr id="10" name="TextBox 9"/>
-          <p:cNvSpPr txBox="1"/>
-          <p:nvPr/>
-        </p:nvSpPr>
-        <p:spPr>
-          <a:xfrm>
-            <a:off x="6492240" y="1965960"/>
-            <a:ext cx="4892040" cy="3108960"/>
-          </a:xfrm>
-          <a:prstGeom prst="rect">
-            <a:avLst/>
-          </a:prstGeom>
-          <a:noFill/>
-        </p:spPr>
-        <p:txBody>
-          <a:bodyPr wrap="none">
-            <a:spAutoFit/>
-          </a:bodyPr>
-          <a:lstStyle/>
-          <a:p>
-            <a:pPr algn="l"/>
-            <a:r>
-              <a:rPr sz="1600" b="1">
-                <a:solidFill>
-                  <a:srgbClr val="FBBF24"/>
-                </a:solidFill>
-                <a:latin typeface="Calibri"/>
-              </a:rPr>
-              <a:t>Bewusst opt-in</a:t>
-            </a:r>
-          </a:p>
-          <a:p>
-            <a:pPr algn="l"/>
-            <a:r>
-              <a:rPr sz="400" b="0">
-                <a:solidFill>
-                  <a:srgbClr val="E6EDF8"/>
-                </a:solidFill>
-                <a:latin typeface="Calibri"/>
-              </a:rPr>
-              <a:t/>
-            </a:r>
-          </a:p>
-          <a:p>
-            <a:pPr algn="l"/>
-            <a:r>
-              <a:rPr sz="1250" b="1">
-                <a:solidFill>
-                  <a:srgbClr val="E6EDF8"/>
-                </a:solidFill>
-                <a:latin typeface="Calibri"/>
-              </a:rPr>
-              <a:t>ECC-Hooks INAKTIV</a:t>
-            </a:r>
-          </a:p>
-          <a:p>
-            <a:pPr lvl="1" algn="l"/>
-            <a:r>
-              <a:rPr sz="1100" b="0">
-                <a:solidFill>
-                  <a:srgbClr val="8B98B0"/>
-                </a:solidFill>
-                <a:latin typeface="Calibri"/>
-              </a:rPr>
-              <a:t>Repo-kontrollierte Hooks nicht blind aktiv. Bewusst aktivieren nach Sichtung von hooks.json.</a:t>
-            </a:r>
-          </a:p>
-          <a:p>
-            <a:pPr algn="l"/>
-            <a:r>
-              <a:rPr sz="1250" b="1">
-                <a:solidFill>
-                  <a:srgbClr val="E6EDF8"/>
-                </a:solidFill>
-                <a:latin typeface="Calibri"/>
-              </a:rPr>
-              <a:t>deny-Baseline opt-in</a:t>
-            </a:r>
-          </a:p>
-          <a:p>
-            <a:pPr lvl="1" algn="l"/>
-            <a:r>
-              <a:rPr sz="1100" b="0">
-                <a:solidFill>
-                  <a:srgbClr val="8B98B0"/>
-                </a:solidFill>
-                <a:latin typeface="Calibri"/>
-              </a:rPr>
-              <a:t>./install-vps.sh --harden ergänzt rm -rf / force-push / Secret-Reads (mit Backup).</a:t>
-            </a:r>
-          </a:p>
-          <a:p>
-            <a:pPr algn="l"/>
-            <a:r>
-              <a:rPr sz="1250" b="1">
-                <a:solidFill>
-                  <a:srgbClr val="E6EDF8"/>
-                </a:solidFill>
-                <a:latin typeface="Calibri"/>
-              </a:rPr>
-              <a:t>AgentShield</a:t>
-            </a:r>
-          </a:p>
-          <a:p>
-            <a:pPr lvl="1" algn="l"/>
-            <a:r>
-              <a:rPr sz="1100" b="0">
-                <a:solidFill>
-                  <a:srgbClr val="8B98B0"/>
-                </a:solidFill>
-                <a:latin typeface="Calibri"/>
-              </a:rPr>
-              <a:t>npx ecc-agentshield scan lädt externes Paket — selbst vetten, dann ausführen.</a:t>
-            </a:r>
-          </a:p>
-        </p:txBody>
-      </p:sp>
-      <p:sp>
-        <p:nvSpPr>
-          <p:cNvPr id="11" name="TextBox 10"/>
-          <p:cNvSpPr txBox="1"/>
-          <p:nvPr/>
-        </p:nvSpPr>
-        <p:spPr>
-          <a:xfrm>
-            <a:off x="640080" y="5349240"/>
-            <a:ext cx="10972800" cy="1005840"/>
-          </a:xfrm>
-          <a:prstGeom prst="rect">
-            <a:avLst/>
-          </a:prstGeom>
-          <a:noFill/>
-        </p:spPr>
-        <p:txBody>
-          <a:bodyPr wrap="square">
-            <a:spAutoFit/>
-          </a:bodyPr>
-          <a:lstStyle/>
-          <a:p>
-            <a:pPr algn="l"/>
-            <a:r>
-              <a:rPr sz="1300" b="0">
-                <a:solidFill>
-                  <a:srgbClr val="8B98B0"/>
-                </a:solidFill>
-                <a:latin typeface="Calibri"/>
-              </a:rPr>
-              <a:t>VPS-weit: ECC global → Hooks bleiben inaktiv bis zur bewussten Aktivierung. Härtung: ./install-vps.sh --harden (mit settings.json-Backup).</a:t>
-            </a:r>
-          </a:p>
-        </p:txBody>
-      </p:sp>
-    </p:spTree>
-  </p:cSld>
-  <p:clrMapOvr>
-    <a:masterClrMapping/>
-  </p:clrMapOvr>
-</p:sld>
-</file>
-
 <file path=ppt/slides/slide16.xml><?xml version="1.0" encoding="utf-8"?>
 <p:sld xmlns:a="http://schemas.openxmlformats.org/drawingml/2006/main" xmlns:p="http://schemas.openxmlformats.org/presentationml/2006/main" xmlns:r="http://schemas.openxmlformats.org/officeDocument/2006/relationships">
   <p:cSld>
@@ -7567,7 +7860,7 @@
                 </a:solidFill>
                 <a:latin typeface="Calibri"/>
               </a:rPr>
-              <a:t>CLIS &amp; WARTUNG</a:t>
+              <a:t>PARALLEL</a:t>
             </a:r>
           </a:p>
         </p:txBody>
@@ -7602,7 +7895,7 @@
                 </a:solidFill>
                 <a:latin typeface="Calibri"/>
               </a:rPr>
-              <a:t>15 / 16</a:t>
+              <a:t>15 / 18</a:t>
             </a:r>
           </a:p>
         </p:txBody>
@@ -7637,7 +7930,7 @@
                 </a:solidFill>
                 <a:latin typeface="Calibri"/>
               </a:rPr>
-              <a:t>§14 ECC-CLIs &amp; Wartung</a:t>
+              <a:t>§13 Parallelisierung</a:t>
             </a:r>
           </a:p>
         </p:txBody>
@@ -7695,7 +7988,387 @@
         <p:spPr>
           <a:xfrm>
             <a:off x="640080" y="1783080"/>
-            <a:ext cx="10927080" cy="2926080"/>
+            <a:ext cx="5166360" cy="1371600"/>
+          </a:xfrm>
+          <a:prstGeom prst="roundRect">
+            <a:avLst>
+              <a:gd name="adj" fmla="val 6000"/>
+            </a:avLst>
+          </a:prstGeom>
+          <a:solidFill>
+            <a:srgbClr val="141A2E"/>
+          </a:solidFill>
+          <a:ln w="9525">
+            <a:solidFill>
+              <a:srgbClr val="22D3EE"/>
+            </a:solidFill>
+          </a:ln>
+          <a:effectLst/>
+        </p:spPr>
+        <p:style>
+          <a:lnRef idx="1">
+            <a:schemeClr val="accent1"/>
+          </a:lnRef>
+          <a:fillRef idx="3">
+            <a:schemeClr val="accent1"/>
+          </a:fillRef>
+          <a:effectRef idx="2">
+            <a:schemeClr val="accent1"/>
+          </a:effectRef>
+          <a:fontRef idx="minor">
+            <a:schemeClr val="lt1"/>
+          </a:fontRef>
+        </p:style>
+        <p:txBody>
+          <a:bodyPr rtlCol="0" anchor="ctr"/>
+          <a:lstStyle/>
+          <a:p>
+            <a:pPr algn="ctr"/>
+          </a:p>
+        </p:txBody>
+      </p:sp>
+      <p:sp>
+        <p:nvSpPr>
+          <p:cNvPr id="8" name="TextBox 7"/>
+          <p:cNvSpPr txBox="1"/>
+          <p:nvPr/>
+        </p:nvSpPr>
+        <p:spPr>
+          <a:xfrm>
+            <a:off x="822959" y="1920240"/>
+            <a:ext cx="4800600" cy="1097280"/>
+          </a:xfrm>
+          <a:prstGeom prst="rect">
+            <a:avLst/>
+          </a:prstGeom>
+          <a:noFill/>
+        </p:spPr>
+        <p:txBody>
+          <a:bodyPr wrap="none">
+            <a:spAutoFit/>
+          </a:bodyPr>
+          <a:lstStyle/>
+          <a:p>
+            <a:pPr algn="l"/>
+            <a:r>
+              <a:rPr sz="1500" b="1">
+                <a:solidFill>
+                  <a:srgbClr val="22D3EE"/>
+                </a:solidFill>
+                <a:latin typeface="Calibri"/>
+              </a:rPr>
+              <a:t>/fork</a:t>
+            </a:r>
+          </a:p>
+          <a:p>
+            <a:pPr algn="l"/>
+            <a:r>
+              <a:rPr sz="1150" b="0">
+                <a:solidFill>
+                  <a:srgbClr val="8B98B0"/>
+                </a:solidFill>
+                <a:latin typeface="Calibri"/>
+              </a:rPr>
+              <a:t>Konversation forken für nicht-überlappende Nebenaufgaben (Codebase-Fragen).</a:t>
+            </a:r>
+          </a:p>
+        </p:txBody>
+      </p:sp>
+      <p:sp>
+        <p:nvSpPr>
+          <p:cNvPr id="9" name="Rounded Rectangle 8"/>
+          <p:cNvSpPr/>
+          <p:nvPr/>
+        </p:nvSpPr>
+        <p:spPr>
+          <a:xfrm>
+            <a:off x="6400800" y="1783080"/>
+            <a:ext cx="5166360" cy="1371600"/>
+          </a:xfrm>
+          <a:prstGeom prst="roundRect">
+            <a:avLst>
+              <a:gd name="adj" fmla="val 6000"/>
+            </a:avLst>
+          </a:prstGeom>
+          <a:solidFill>
+            <a:srgbClr val="141A2E"/>
+          </a:solidFill>
+          <a:ln w="9525">
+            <a:solidFill>
+              <a:srgbClr val="22D3EE"/>
+            </a:solidFill>
+          </a:ln>
+          <a:effectLst/>
+        </p:spPr>
+        <p:style>
+          <a:lnRef idx="1">
+            <a:schemeClr val="accent1"/>
+          </a:lnRef>
+          <a:fillRef idx="3">
+            <a:schemeClr val="accent1"/>
+          </a:fillRef>
+          <a:effectRef idx="2">
+            <a:schemeClr val="accent1"/>
+          </a:effectRef>
+          <a:fontRef idx="minor">
+            <a:schemeClr val="lt1"/>
+          </a:fontRef>
+        </p:style>
+        <p:txBody>
+          <a:bodyPr rtlCol="0" anchor="ctr"/>
+          <a:lstStyle/>
+          <a:p>
+            <a:pPr algn="ctr"/>
+          </a:p>
+        </p:txBody>
+      </p:sp>
+      <p:sp>
+        <p:nvSpPr>
+          <p:cNvPr id="10" name="TextBox 9"/>
+          <p:cNvSpPr txBox="1"/>
+          <p:nvPr/>
+        </p:nvSpPr>
+        <p:spPr>
+          <a:xfrm>
+            <a:off x="6583680" y="1920240"/>
+            <a:ext cx="4800600" cy="1097280"/>
+          </a:xfrm>
+          <a:prstGeom prst="rect">
+            <a:avLst/>
+          </a:prstGeom>
+          <a:noFill/>
+        </p:spPr>
+        <p:txBody>
+          <a:bodyPr wrap="none">
+            <a:spAutoFit/>
+          </a:bodyPr>
+          <a:lstStyle/>
+          <a:p>
+            <a:pPr algn="l"/>
+            <a:r>
+              <a:rPr sz="1500" b="1">
+                <a:solidFill>
+                  <a:srgbClr val="22D3EE"/>
+                </a:solidFill>
+                <a:latin typeface="Calibri"/>
+              </a:rPr>
+              <a:t>Git-Worktrees</a:t>
+            </a:r>
+          </a:p>
+          <a:p>
+            <a:pPr algn="l"/>
+            <a:r>
+              <a:rPr sz="1150" b="0">
+                <a:solidFill>
+                  <a:srgbClr val="8B98B0"/>
+                </a:solidFill>
+                <a:latin typeface="Calibri"/>
+              </a:rPr>
+              <a:t>überlappende parallele Arbeit ohne Konflikte — eigene Claude-Instanz je Worktree.</a:t>
+            </a:r>
+          </a:p>
+        </p:txBody>
+      </p:sp>
+      <p:sp>
+        <p:nvSpPr>
+          <p:cNvPr id="11" name="Rounded Rectangle 10"/>
+          <p:cNvSpPr/>
+          <p:nvPr/>
+        </p:nvSpPr>
+        <p:spPr>
+          <a:xfrm>
+            <a:off x="640080" y="3337560"/>
+            <a:ext cx="5166360" cy="1371600"/>
+          </a:xfrm>
+          <a:prstGeom prst="roundRect">
+            <a:avLst>
+              <a:gd name="adj" fmla="val 6000"/>
+            </a:avLst>
+          </a:prstGeom>
+          <a:solidFill>
+            <a:srgbClr val="141A2E"/>
+          </a:solidFill>
+          <a:ln w="9525">
+            <a:solidFill>
+              <a:srgbClr val="22D3EE"/>
+            </a:solidFill>
+          </a:ln>
+          <a:effectLst/>
+        </p:spPr>
+        <p:style>
+          <a:lnRef idx="1">
+            <a:schemeClr val="accent1"/>
+          </a:lnRef>
+          <a:fillRef idx="3">
+            <a:schemeClr val="accent1"/>
+          </a:fillRef>
+          <a:effectRef idx="2">
+            <a:schemeClr val="accent1"/>
+          </a:effectRef>
+          <a:fontRef idx="minor">
+            <a:schemeClr val="lt1"/>
+          </a:fontRef>
+        </p:style>
+        <p:txBody>
+          <a:bodyPr rtlCol="0" anchor="ctr"/>
+          <a:lstStyle/>
+          <a:p>
+            <a:pPr algn="ctr"/>
+          </a:p>
+        </p:txBody>
+      </p:sp>
+      <p:sp>
+        <p:nvSpPr>
+          <p:cNvPr id="12" name="TextBox 11"/>
+          <p:cNvSpPr txBox="1"/>
+          <p:nvPr/>
+        </p:nvSpPr>
+        <p:spPr>
+          <a:xfrm>
+            <a:off x="822959" y="3474720"/>
+            <a:ext cx="4800600" cy="1097280"/>
+          </a:xfrm>
+          <a:prstGeom prst="rect">
+            <a:avLst/>
+          </a:prstGeom>
+          <a:noFill/>
+        </p:spPr>
+        <p:txBody>
+          <a:bodyPr wrap="none">
+            <a:spAutoFit/>
+          </a:bodyPr>
+          <a:lstStyle/>
+          <a:p>
+            <a:pPr algn="l"/>
+            <a:r>
+              <a:rPr sz="1500" b="1">
+                <a:solidFill>
+                  <a:srgbClr val="22D3EE"/>
+                </a:solidFill>
+                <a:latin typeface="Calibri"/>
+              </a:rPr>
+              <a:t>Cascade-Methode</a:t>
+            </a:r>
+          </a:p>
+          <a:p>
+            <a:pPr algn="l"/>
+            <a:r>
+              <a:rPr sz="1150" b="0">
+                <a:solidFill>
+                  <a:srgbClr val="8B98B0"/>
+                </a:solidFill>
+                <a:latin typeface="Calibri"/>
+              </a:rPr>
+              <a:t>neue Tasks in neuen Tabs, alt→neu abarbeiten, max. 3–4 gleichzeitig.</a:t>
+            </a:r>
+          </a:p>
+        </p:txBody>
+      </p:sp>
+      <p:sp>
+        <p:nvSpPr>
+          <p:cNvPr id="13" name="Rounded Rectangle 12"/>
+          <p:cNvSpPr/>
+          <p:nvPr/>
+        </p:nvSpPr>
+        <p:spPr>
+          <a:xfrm>
+            <a:off x="6400800" y="3337560"/>
+            <a:ext cx="5166360" cy="1371600"/>
+          </a:xfrm>
+          <a:prstGeom prst="roundRect">
+            <a:avLst>
+              <a:gd name="adj" fmla="val 6000"/>
+            </a:avLst>
+          </a:prstGeom>
+          <a:solidFill>
+            <a:srgbClr val="141A2E"/>
+          </a:solidFill>
+          <a:ln w="9525">
+            <a:solidFill>
+              <a:srgbClr val="22D3EE"/>
+            </a:solidFill>
+          </a:ln>
+          <a:effectLst/>
+        </p:spPr>
+        <p:style>
+          <a:lnRef idx="1">
+            <a:schemeClr val="accent1"/>
+          </a:lnRef>
+          <a:fillRef idx="3">
+            <a:schemeClr val="accent1"/>
+          </a:fillRef>
+          <a:effectRef idx="2">
+            <a:schemeClr val="accent1"/>
+          </a:effectRef>
+          <a:fontRef idx="minor">
+            <a:schemeClr val="lt1"/>
+          </a:fontRef>
+        </p:style>
+        <p:txBody>
+          <a:bodyPr rtlCol="0" anchor="ctr"/>
+          <a:lstStyle/>
+          <a:p>
+            <a:pPr algn="ctr"/>
+          </a:p>
+        </p:txBody>
+      </p:sp>
+      <p:sp>
+        <p:nvSpPr>
+          <p:cNvPr id="14" name="TextBox 13"/>
+          <p:cNvSpPr txBox="1"/>
+          <p:nvPr/>
+        </p:nvSpPr>
+        <p:spPr>
+          <a:xfrm>
+            <a:off x="6583680" y="3474720"/>
+            <a:ext cx="4800600" cy="1097280"/>
+          </a:xfrm>
+          <a:prstGeom prst="rect">
+            <a:avLst/>
+          </a:prstGeom>
+          <a:noFill/>
+        </p:spPr>
+        <p:txBody>
+          <a:bodyPr wrap="none">
+            <a:spAutoFit/>
+          </a:bodyPr>
+          <a:lstStyle/>
+          <a:p>
+            <a:pPr algn="l"/>
+            <a:r>
+              <a:rPr sz="1500" b="1">
+                <a:solidFill>
+                  <a:srgbClr val="22D3EE"/>
+                </a:solidFill>
+                <a:latin typeface="Calibri"/>
+              </a:rPr>
+              <a:t>ECC-Multi-Model</a:t>
+            </a:r>
+          </a:p>
+          <a:p>
+            <a:pPr algn="l"/>
+            <a:r>
+              <a:rPr sz="1150" b="0">
+                <a:solidFill>
+                  <a:srgbClr val="8B98B0"/>
+                </a:solidFill>
+                <a:latin typeface="Calibri"/>
+              </a:rPr>
+              <a:t>/multi-plan · /multi-workflow · /multi-backend · /multi-frontend · /loop-start.</a:t>
+            </a:r>
+          </a:p>
+        </p:txBody>
+      </p:sp>
+      <p:sp>
+        <p:nvSpPr>
+          <p:cNvPr id="15" name="Rounded Rectangle 14"/>
+          <p:cNvSpPr/>
+          <p:nvPr/>
+        </p:nvSpPr>
+        <p:spPr>
+          <a:xfrm>
+            <a:off x="640080" y="4937760"/>
+            <a:ext cx="10927080" cy="960120"/>
           </a:xfrm>
           <a:prstGeom prst="roundRect">
             <a:avLst>
@@ -7734,14 +8407,14 @@
       </p:sp>
       <p:sp>
         <p:nvSpPr>
-          <p:cNvPr id="8" name="TextBox 7"/>
+          <p:cNvPr id="16" name="TextBox 15"/>
           <p:cNvSpPr txBox="1"/>
           <p:nvPr/>
         </p:nvSpPr>
         <p:spPr>
           <a:xfrm>
-            <a:off x="914400" y="2011680"/>
-            <a:ext cx="10424160" cy="2560320"/>
+            <a:off x="868680" y="5074920"/>
+            <a:ext cx="10515600" cy="731520"/>
           </a:xfrm>
           <a:prstGeom prst="rect">
             <a:avLst/>
@@ -7756,96 +8429,13 @@
           <a:p>
             <a:pPr algn="l"/>
             <a:r>
-              <a:rPr sz="1300" b="0">
+              <a:rPr sz="1400" b="1">
                 <a:solidFill>
                   <a:srgbClr val="9CE3F0"/>
                 </a:solidFill>
                 <a:latin typeface="Consolas"/>
               </a:rPr>
-              <a:t>node scripts/ecc.js doctor          # Health-Check (claude-home: OK)</a:t>
-            </a:r>
-          </a:p>
-          <a:p>
-            <a:pPr algn="l"/>
-            <a:r>
-              <a:rPr sz="1300" b="0">
-                <a:solidFill>
-                  <a:srgbClr val="9CE3F0"/>
-                </a:solidFill>
-                <a:latin typeface="Consolas"/>
-              </a:rPr>
-              <a:t>node scripts/ecc.js list-installed   # was ist installiert</a:t>
-            </a:r>
-          </a:p>
-          <a:p>
-            <a:pPr algn="l"/>
-            <a:r>
-              <a:rPr sz="1300" b="0">
-                <a:solidFill>
-                  <a:srgbClr val="9CE3F0"/>
-                </a:solidFill>
-                <a:latin typeface="Consolas"/>
-              </a:rPr>
-              <a:t>node scripts/ecc.js repair           # ECC-Dateien wiederherstellen</a:t>
-            </a:r>
-          </a:p>
-          <a:p>
-            <a:pPr algn="l"/>
-            <a:r>
-              <a:rPr sz="1300" b="0">
-                <a:solidFill>
-                  <a:srgbClr val="9CE3F0"/>
-                </a:solidFill>
-                <a:latin typeface="Consolas"/>
-              </a:rPr>
-              <a:t>npx ecc consult "security reviews"   # Advisor: welche Komponenten?</a:t>
-            </a:r>
-          </a:p>
-          <a:p>
-            <a:pPr algn="l"/>
-            <a:r>
-              <a:rPr sz="1300" b="0">
-                <a:solidFill>
-                  <a:srgbClr val="9CE3F0"/>
-                </a:solidFill>
-                <a:latin typeface="Consolas"/>
-              </a:rPr>
-              <a:t>./install-vps.sh                     # Re-Install / Update VPS-weit</a:t>
-            </a:r>
-          </a:p>
-        </p:txBody>
-      </p:sp>
-      <p:sp>
-        <p:nvSpPr>
-          <p:cNvPr id="9" name="TextBox 8"/>
-          <p:cNvSpPr txBox="1"/>
-          <p:nvPr/>
-        </p:nvSpPr>
-        <p:spPr>
-          <a:xfrm>
-            <a:off x="640080" y="5029200"/>
-            <a:ext cx="10972800" cy="1097280"/>
-          </a:xfrm>
-          <a:prstGeom prst="rect">
-            <a:avLst/>
-          </a:prstGeom>
-          <a:noFill/>
-        </p:spPr>
-        <p:txBody>
-          <a:bodyPr wrap="square">
-            <a:spAutoFit/>
-          </a:bodyPr>
-          <a:lstStyle/>
-          <a:p>
-            <a:pPr algn="l"/>
-            <a:r>
-              <a:rPr sz="1500" b="1">
-                <a:solidFill>
-                  <a:srgbClr val="818CF8"/>
-                </a:solidFill>
-                <a:latin typeface="Calibri"/>
-              </a:rPr>
-              <a:t>Slash-Einstieg:  /ecc-guide · /harness-audit · /cost-report · /skill-health · /projects.</a:t>
+              <a:t>git worktree add ../feature-a feature-a &amp;&amp; cd ../feature-a &amp;&amp; claude</a:t>
             </a:r>
           </a:p>
         </p:txBody>
@@ -7950,7 +8540,7 @@
                 </a:solidFill>
                 <a:latin typeface="Calibri"/>
               </a:rPr>
-              <a:t>QUELLEN</a:t>
+              <a:t>SECURITY</a:t>
             </a:r>
           </a:p>
         </p:txBody>
@@ -7985,7 +8575,978 @@
                 </a:solidFill>
                 <a:latin typeface="Calibri"/>
               </a:rPr>
-              <a:t>16 / 16</a:t>
+              <a:t>16 / 18</a:t>
+            </a:r>
+          </a:p>
+        </p:txBody>
+      </p:sp>
+      <p:sp>
+        <p:nvSpPr>
+          <p:cNvPr id="5" name="TextBox 4"/>
+          <p:cNvSpPr txBox="1"/>
+          <p:nvPr/>
+        </p:nvSpPr>
+        <p:spPr>
+          <a:xfrm>
+            <a:off x="548640" y="777240"/>
+            <a:ext cx="11064240" cy="777240"/>
+          </a:xfrm>
+          <a:prstGeom prst="rect">
+            <a:avLst/>
+          </a:prstGeom>
+          <a:noFill/>
+        </p:spPr>
+        <p:txBody>
+          <a:bodyPr wrap="square">
+            <a:spAutoFit/>
+          </a:bodyPr>
+          <a:lstStyle/>
+          <a:p>
+            <a:pPr algn="l"/>
+            <a:r>
+              <a:rPr sz="2700" b="1">
+                <a:solidFill>
+                  <a:srgbClr val="E6EDF8"/>
+                </a:solidFill>
+                <a:latin typeface="Calibri"/>
+              </a:rPr>
+              <a:t>§14 Security im Alltag + VPS</a:t>
+            </a:r>
+          </a:p>
+        </p:txBody>
+      </p:sp>
+      <p:sp>
+        <p:nvSpPr>
+          <p:cNvPr id="6" name="Rectangle 5"/>
+          <p:cNvSpPr/>
+          <p:nvPr/>
+        </p:nvSpPr>
+        <p:spPr>
+          <a:xfrm>
+            <a:off x="594360" y="1481328"/>
+            <a:ext cx="2011680" cy="41148"/>
+          </a:xfrm>
+          <a:prstGeom prst="rect">
+            <a:avLst/>
+          </a:prstGeom>
+          <a:solidFill>
+            <a:srgbClr val="22D3EE"/>
+          </a:solidFill>
+          <a:ln>
+            <a:noFill/>
+          </a:ln>
+          <a:effectLst/>
+        </p:spPr>
+        <p:style>
+          <a:lnRef idx="1">
+            <a:schemeClr val="accent1"/>
+          </a:lnRef>
+          <a:fillRef idx="3">
+            <a:schemeClr val="accent1"/>
+          </a:fillRef>
+          <a:effectRef idx="2">
+            <a:schemeClr val="accent1"/>
+          </a:effectRef>
+          <a:fontRef idx="minor">
+            <a:schemeClr val="lt1"/>
+          </a:fontRef>
+        </p:style>
+        <p:txBody>
+          <a:bodyPr rtlCol="0" anchor="ctr"/>
+          <a:lstStyle/>
+          <a:p>
+            <a:pPr algn="ctr"/>
+          </a:p>
+        </p:txBody>
+      </p:sp>
+      <p:sp>
+        <p:nvSpPr>
+          <p:cNvPr id="7" name="Rounded Rectangle 6"/>
+          <p:cNvSpPr/>
+          <p:nvPr/>
+        </p:nvSpPr>
+        <p:spPr>
+          <a:xfrm>
+            <a:off x="640080" y="1783080"/>
+            <a:ext cx="5349240" cy="3383280"/>
+          </a:xfrm>
+          <a:prstGeom prst="roundRect">
+            <a:avLst>
+              <a:gd name="adj" fmla="val 6000"/>
+            </a:avLst>
+          </a:prstGeom>
+          <a:solidFill>
+            <a:srgbClr val="141A2E"/>
+          </a:solidFill>
+          <a:ln w="9525">
+            <a:solidFill>
+              <a:srgbClr val="34D399"/>
+            </a:solidFill>
+          </a:ln>
+          <a:effectLst/>
+        </p:spPr>
+        <p:style>
+          <a:lnRef idx="1">
+            <a:schemeClr val="accent1"/>
+          </a:lnRef>
+          <a:fillRef idx="3">
+            <a:schemeClr val="accent1"/>
+          </a:fillRef>
+          <a:effectRef idx="2">
+            <a:schemeClr val="accent1"/>
+          </a:effectRef>
+          <a:fontRef idx="minor">
+            <a:schemeClr val="lt1"/>
+          </a:fontRef>
+        </p:style>
+        <p:txBody>
+          <a:bodyPr rtlCol="0" anchor="ctr"/>
+          <a:lstStyle/>
+          <a:p>
+            <a:pPr algn="ctr"/>
+          </a:p>
+        </p:txBody>
+      </p:sp>
+      <p:sp>
+        <p:nvSpPr>
+          <p:cNvPr id="8" name="TextBox 7"/>
+          <p:cNvSpPr txBox="1"/>
+          <p:nvPr/>
+        </p:nvSpPr>
+        <p:spPr>
+          <a:xfrm>
+            <a:off x="868680" y="1965960"/>
+            <a:ext cx="4937760" cy="3108960"/>
+          </a:xfrm>
+          <a:prstGeom prst="rect">
+            <a:avLst/>
+          </a:prstGeom>
+          <a:noFill/>
+        </p:spPr>
+        <p:txBody>
+          <a:bodyPr wrap="none">
+            <a:spAutoFit/>
+          </a:bodyPr>
+          <a:lstStyle/>
+          <a:p>
+            <a:pPr algn="l"/>
+            <a:r>
+              <a:rPr sz="1600" b="1">
+                <a:solidFill>
+                  <a:srgbClr val="34D399"/>
+                </a:solidFill>
+                <a:latin typeface="Calibri"/>
+              </a:rPr>
+              <a:t>Aktiv / sicher</a:t>
+            </a:r>
+          </a:p>
+          <a:p>
+            <a:pPr algn="l"/>
+            <a:r>
+              <a:rPr sz="400" b="0">
+                <a:solidFill>
+                  <a:srgbClr val="E6EDF8"/>
+                </a:solidFill>
+                <a:latin typeface="Calibri"/>
+              </a:rPr>
+              <a:t/>
+            </a:r>
+          </a:p>
+          <a:p>
+            <a:pPr algn="l"/>
+            <a:r>
+              <a:rPr sz="1250" b="1">
+                <a:solidFill>
+                  <a:srgbClr val="E6EDF8"/>
+                </a:solidFill>
+                <a:latin typeface="Calibri"/>
+              </a:rPr>
+              <a:t>RTK-Hook</a:t>
+            </a:r>
+          </a:p>
+          <a:p>
+            <a:pPr lvl="1" algn="l"/>
+            <a:r>
+              <a:rPr sz="1100" b="0">
+                <a:solidFill>
+                  <a:srgbClr val="8B98B0"/>
+                </a:solidFill>
+                <a:latin typeface="Calibri"/>
+              </a:rPr>
+              <a:t>PreToolUse:Bash bleibt unangetastet — Token-Ersparnis global.</a:t>
+            </a:r>
+          </a:p>
+          <a:p>
+            <a:pPr algn="l"/>
+            <a:r>
+              <a:rPr sz="1250" b="1">
+                <a:solidFill>
+                  <a:srgbClr val="E6EDF8"/>
+                </a:solidFill>
+                <a:latin typeface="Calibri"/>
+              </a:rPr>
+              <a:t>ECC namespace-sicher</a:t>
+            </a:r>
+          </a:p>
+          <a:p>
+            <a:pPr lvl="1" algn="l"/>
+            <a:r>
+              <a:rPr sz="1100" b="0">
+                <a:solidFill>
+                  <a:srgbClr val="8B98B0"/>
+                </a:solidFill>
+                <a:latin typeface="Calibri"/>
+              </a:rPr>
+              <a:t>rules/ecc/, skills/ecc/ — keine Kollision mit Eigenem.</a:t>
+            </a:r>
+          </a:p>
+          <a:p>
+            <a:pPr algn="l"/>
+            <a:r>
+              <a:rPr sz="1250" b="1">
+                <a:solidFill>
+                  <a:srgbClr val="E6EDF8"/>
+                </a:solidFill>
+                <a:latin typeface="Calibri"/>
+              </a:rPr>
+              <a:t>settings.json unberührt</a:t>
+            </a:r>
+          </a:p>
+          <a:p>
+            <a:pPr lvl="1" algn="l"/>
+            <a:r>
+              <a:rPr sz="1100" b="0">
+                <a:solidFill>
+                  <a:srgbClr val="8B98B0"/>
+                </a:solidFill>
+                <a:latin typeface="Calibri"/>
+              </a:rPr>
+              <a:t>kein Auto-Edit der Startup-Config; nur additiv via ./install-vps.sh --harden.</a:t>
+            </a:r>
+          </a:p>
+        </p:txBody>
+      </p:sp>
+      <p:sp>
+        <p:nvSpPr>
+          <p:cNvPr id="9" name="Rounded Rectangle 8"/>
+          <p:cNvSpPr/>
+          <p:nvPr/>
+        </p:nvSpPr>
+        <p:spPr>
+          <a:xfrm>
+            <a:off x="6263640" y="1783080"/>
+            <a:ext cx="5303520" cy="3383280"/>
+          </a:xfrm>
+          <a:prstGeom prst="roundRect">
+            <a:avLst>
+              <a:gd name="adj" fmla="val 6000"/>
+            </a:avLst>
+          </a:prstGeom>
+          <a:solidFill>
+            <a:srgbClr val="141A2E"/>
+          </a:solidFill>
+          <a:ln w="9525">
+            <a:solidFill>
+              <a:srgbClr val="FBBF24"/>
+            </a:solidFill>
+          </a:ln>
+          <a:effectLst/>
+        </p:spPr>
+        <p:style>
+          <a:lnRef idx="1">
+            <a:schemeClr val="accent1"/>
+          </a:lnRef>
+          <a:fillRef idx="3">
+            <a:schemeClr val="accent1"/>
+          </a:fillRef>
+          <a:effectRef idx="2">
+            <a:schemeClr val="accent1"/>
+          </a:effectRef>
+          <a:fontRef idx="minor">
+            <a:schemeClr val="lt1"/>
+          </a:fontRef>
+        </p:style>
+        <p:txBody>
+          <a:bodyPr rtlCol="0" anchor="ctr"/>
+          <a:lstStyle/>
+          <a:p>
+            <a:pPr algn="ctr"/>
+          </a:p>
+        </p:txBody>
+      </p:sp>
+      <p:sp>
+        <p:nvSpPr>
+          <p:cNvPr id="10" name="TextBox 9"/>
+          <p:cNvSpPr txBox="1"/>
+          <p:nvPr/>
+        </p:nvSpPr>
+        <p:spPr>
+          <a:xfrm>
+            <a:off x="6492240" y="1965960"/>
+            <a:ext cx="4892040" cy="3108960"/>
+          </a:xfrm>
+          <a:prstGeom prst="rect">
+            <a:avLst/>
+          </a:prstGeom>
+          <a:noFill/>
+        </p:spPr>
+        <p:txBody>
+          <a:bodyPr wrap="none">
+            <a:spAutoFit/>
+          </a:bodyPr>
+          <a:lstStyle/>
+          <a:p>
+            <a:pPr algn="l"/>
+            <a:r>
+              <a:rPr sz="1600" b="1">
+                <a:solidFill>
+                  <a:srgbClr val="FBBF24"/>
+                </a:solidFill>
+                <a:latin typeface="Calibri"/>
+              </a:rPr>
+              <a:t>Bewusst opt-in</a:t>
+            </a:r>
+          </a:p>
+          <a:p>
+            <a:pPr algn="l"/>
+            <a:r>
+              <a:rPr sz="400" b="0">
+                <a:solidFill>
+                  <a:srgbClr val="E6EDF8"/>
+                </a:solidFill>
+                <a:latin typeface="Calibri"/>
+              </a:rPr>
+              <a:t/>
+            </a:r>
+          </a:p>
+          <a:p>
+            <a:pPr algn="l"/>
+            <a:r>
+              <a:rPr sz="1250" b="1">
+                <a:solidFill>
+                  <a:srgbClr val="E6EDF8"/>
+                </a:solidFill>
+                <a:latin typeface="Calibri"/>
+              </a:rPr>
+              <a:t>ECC-Hooks INAKTIV</a:t>
+            </a:r>
+          </a:p>
+          <a:p>
+            <a:pPr lvl="1" algn="l"/>
+            <a:r>
+              <a:rPr sz="1100" b="0">
+                <a:solidFill>
+                  <a:srgbClr val="8B98B0"/>
+                </a:solidFill>
+                <a:latin typeface="Calibri"/>
+              </a:rPr>
+              <a:t>Repo-kontrollierte Hooks nicht blind aktiv. Bewusst aktivieren nach Sichtung von hooks.json.</a:t>
+            </a:r>
+          </a:p>
+          <a:p>
+            <a:pPr algn="l"/>
+            <a:r>
+              <a:rPr sz="1250" b="1">
+                <a:solidFill>
+                  <a:srgbClr val="E6EDF8"/>
+                </a:solidFill>
+                <a:latin typeface="Calibri"/>
+              </a:rPr>
+              <a:t>deny-Baseline opt-in</a:t>
+            </a:r>
+          </a:p>
+          <a:p>
+            <a:pPr lvl="1" algn="l"/>
+            <a:r>
+              <a:rPr sz="1100" b="0">
+                <a:solidFill>
+                  <a:srgbClr val="8B98B0"/>
+                </a:solidFill>
+                <a:latin typeface="Calibri"/>
+              </a:rPr>
+              <a:t>./install-vps.sh --harden ergänzt rm -rf / force-push / Secret-Reads (mit Backup).</a:t>
+            </a:r>
+          </a:p>
+          <a:p>
+            <a:pPr algn="l"/>
+            <a:r>
+              <a:rPr sz="1250" b="1">
+                <a:solidFill>
+                  <a:srgbClr val="E6EDF8"/>
+                </a:solidFill>
+                <a:latin typeface="Calibri"/>
+              </a:rPr>
+              <a:t>AgentShield</a:t>
+            </a:r>
+          </a:p>
+          <a:p>
+            <a:pPr lvl="1" algn="l"/>
+            <a:r>
+              <a:rPr sz="1100" b="0">
+                <a:solidFill>
+                  <a:srgbClr val="8B98B0"/>
+                </a:solidFill>
+                <a:latin typeface="Calibri"/>
+              </a:rPr>
+              <a:t>npx ecc-agentshield scan lädt externes Paket — selbst vetten, dann ausführen.</a:t>
+            </a:r>
+          </a:p>
+        </p:txBody>
+      </p:sp>
+      <p:sp>
+        <p:nvSpPr>
+          <p:cNvPr id="11" name="TextBox 10"/>
+          <p:cNvSpPr txBox="1"/>
+          <p:nvPr/>
+        </p:nvSpPr>
+        <p:spPr>
+          <a:xfrm>
+            <a:off x="640080" y="5349240"/>
+            <a:ext cx="10972800" cy="1005840"/>
+          </a:xfrm>
+          <a:prstGeom prst="rect">
+            <a:avLst/>
+          </a:prstGeom>
+          <a:noFill/>
+        </p:spPr>
+        <p:txBody>
+          <a:bodyPr wrap="square">
+            <a:spAutoFit/>
+          </a:bodyPr>
+          <a:lstStyle/>
+          <a:p>
+            <a:pPr algn="l"/>
+            <a:r>
+              <a:rPr sz="1300" b="0">
+                <a:solidFill>
+                  <a:srgbClr val="8B98B0"/>
+                </a:solidFill>
+                <a:latin typeface="Calibri"/>
+              </a:rPr>
+              <a:t>VPS-weit: ECC global → Hooks bleiben inaktiv bis zur bewussten Aktivierung. Härtung: ./install-vps.sh --harden (mit settings.json-Backup).</a:t>
+            </a:r>
+          </a:p>
+        </p:txBody>
+      </p:sp>
+    </p:spTree>
+  </p:cSld>
+  <p:clrMapOvr>
+    <a:masterClrMapping/>
+  </p:clrMapOvr>
+</p:sld>
+</file>
+
+<file path=ppt/slides/slide18.xml><?xml version="1.0" encoding="utf-8"?>
+<p:sld xmlns:a="http://schemas.openxmlformats.org/drawingml/2006/main" xmlns:p="http://schemas.openxmlformats.org/presentationml/2006/main" xmlns:r="http://schemas.openxmlformats.org/officeDocument/2006/relationships">
+  <p:cSld>
+    <p:bg>
+      <p:bgPr>
+        <a:solidFill>
+          <a:srgbClr val="0A0E1A"/>
+        </a:solidFill>
+        <a:effectLst/>
+      </p:bgPr>
+    </p:bg>
+    <p:spTree>
+      <p:nvGrpSpPr>
+        <p:cNvPr id="1" name=""/>
+        <p:cNvGrpSpPr/>
+        <p:nvPr/>
+      </p:nvGrpSpPr>
+      <p:grpSpPr/>
+      <p:sp>
+        <p:nvSpPr>
+          <p:cNvPr id="2" name="Oval 1"/>
+          <p:cNvSpPr/>
+          <p:nvPr/>
+        </p:nvSpPr>
+        <p:spPr>
+          <a:xfrm>
+            <a:off x="548640" y="384048"/>
+            <a:ext cx="146304" cy="146304"/>
+          </a:xfrm>
+          <a:prstGeom prst="ellipse">
+            <a:avLst/>
+          </a:prstGeom>
+          <a:solidFill>
+            <a:srgbClr val="22D3EE"/>
+          </a:solidFill>
+          <a:ln>
+            <a:noFill/>
+          </a:ln>
+          <a:effectLst/>
+        </p:spPr>
+        <p:style>
+          <a:lnRef idx="1">
+            <a:schemeClr val="accent1"/>
+          </a:lnRef>
+          <a:fillRef idx="3">
+            <a:schemeClr val="accent1"/>
+          </a:fillRef>
+          <a:effectRef idx="2">
+            <a:schemeClr val="accent1"/>
+          </a:effectRef>
+          <a:fontRef idx="minor">
+            <a:schemeClr val="lt1"/>
+          </a:fontRef>
+        </p:style>
+        <p:txBody>
+          <a:bodyPr rtlCol="0" anchor="ctr"/>
+          <a:lstStyle/>
+          <a:p>
+            <a:pPr algn="ctr"/>
+          </a:p>
+        </p:txBody>
+      </p:sp>
+      <p:sp>
+        <p:nvSpPr>
+          <p:cNvPr id="3" name="TextBox 2"/>
+          <p:cNvSpPr txBox="1"/>
+          <p:nvPr/>
+        </p:nvSpPr>
+        <p:spPr>
+          <a:xfrm>
+            <a:off x="777240" y="301752"/>
+            <a:ext cx="7315200" cy="457200"/>
+          </a:xfrm>
+          <a:prstGeom prst="rect">
+            <a:avLst/>
+          </a:prstGeom>
+          <a:noFill/>
+        </p:spPr>
+        <p:txBody>
+          <a:bodyPr wrap="square">
+            <a:spAutoFit/>
+          </a:bodyPr>
+          <a:lstStyle/>
+          <a:p>
+            <a:pPr algn="l"/>
+            <a:r>
+              <a:rPr sz="1200" b="1">
+                <a:solidFill>
+                  <a:srgbClr val="22D3EE"/>
+                </a:solidFill>
+                <a:latin typeface="Calibri"/>
+              </a:rPr>
+              <a:t>CLIS &amp; WARTUNG</a:t>
+            </a:r>
+          </a:p>
+        </p:txBody>
+      </p:sp>
+      <p:sp>
+        <p:nvSpPr>
+          <p:cNvPr id="4" name="TextBox 3"/>
+          <p:cNvSpPr txBox="1"/>
+          <p:nvPr/>
+        </p:nvSpPr>
+        <p:spPr>
+          <a:xfrm>
+            <a:off x="9601200" y="301752"/>
+            <a:ext cx="2011680" cy="457200"/>
+          </a:xfrm>
+          <a:prstGeom prst="rect">
+            <a:avLst/>
+          </a:prstGeom>
+          <a:noFill/>
+        </p:spPr>
+        <p:txBody>
+          <a:bodyPr wrap="square">
+            <a:spAutoFit/>
+          </a:bodyPr>
+          <a:lstStyle/>
+          <a:p>
+            <a:pPr algn="r"/>
+            <a:r>
+              <a:rPr sz="1200" b="0">
+                <a:solidFill>
+                  <a:srgbClr val="8B98B0"/>
+                </a:solidFill>
+                <a:latin typeface="Calibri"/>
+              </a:rPr>
+              <a:t>17 / 18</a:t>
+            </a:r>
+          </a:p>
+        </p:txBody>
+      </p:sp>
+      <p:sp>
+        <p:nvSpPr>
+          <p:cNvPr id="5" name="TextBox 4"/>
+          <p:cNvSpPr txBox="1"/>
+          <p:nvPr/>
+        </p:nvSpPr>
+        <p:spPr>
+          <a:xfrm>
+            <a:off x="548640" y="777240"/>
+            <a:ext cx="11064240" cy="777240"/>
+          </a:xfrm>
+          <a:prstGeom prst="rect">
+            <a:avLst/>
+          </a:prstGeom>
+          <a:noFill/>
+        </p:spPr>
+        <p:txBody>
+          <a:bodyPr wrap="square">
+            <a:spAutoFit/>
+          </a:bodyPr>
+          <a:lstStyle/>
+          <a:p>
+            <a:pPr algn="l"/>
+            <a:r>
+              <a:rPr sz="2700" b="1">
+                <a:solidFill>
+                  <a:srgbClr val="E6EDF8"/>
+                </a:solidFill>
+                <a:latin typeface="Calibri"/>
+              </a:rPr>
+              <a:t>§15 ECC-CLIs &amp; Wartung</a:t>
+            </a:r>
+          </a:p>
+        </p:txBody>
+      </p:sp>
+      <p:sp>
+        <p:nvSpPr>
+          <p:cNvPr id="6" name="Rectangle 5"/>
+          <p:cNvSpPr/>
+          <p:nvPr/>
+        </p:nvSpPr>
+        <p:spPr>
+          <a:xfrm>
+            <a:off x="594360" y="1481328"/>
+            <a:ext cx="2011680" cy="41148"/>
+          </a:xfrm>
+          <a:prstGeom prst="rect">
+            <a:avLst/>
+          </a:prstGeom>
+          <a:solidFill>
+            <a:srgbClr val="22D3EE"/>
+          </a:solidFill>
+          <a:ln>
+            <a:noFill/>
+          </a:ln>
+          <a:effectLst/>
+        </p:spPr>
+        <p:style>
+          <a:lnRef idx="1">
+            <a:schemeClr val="accent1"/>
+          </a:lnRef>
+          <a:fillRef idx="3">
+            <a:schemeClr val="accent1"/>
+          </a:fillRef>
+          <a:effectRef idx="2">
+            <a:schemeClr val="accent1"/>
+          </a:effectRef>
+          <a:fontRef idx="minor">
+            <a:schemeClr val="lt1"/>
+          </a:fontRef>
+        </p:style>
+        <p:txBody>
+          <a:bodyPr rtlCol="0" anchor="ctr"/>
+          <a:lstStyle/>
+          <a:p>
+            <a:pPr algn="ctr"/>
+          </a:p>
+        </p:txBody>
+      </p:sp>
+      <p:sp>
+        <p:nvSpPr>
+          <p:cNvPr id="7" name="Rounded Rectangle 6"/>
+          <p:cNvSpPr/>
+          <p:nvPr/>
+        </p:nvSpPr>
+        <p:spPr>
+          <a:xfrm>
+            <a:off x="640080" y="1783080"/>
+            <a:ext cx="10927080" cy="2926080"/>
+          </a:xfrm>
+          <a:prstGeom prst="roundRect">
+            <a:avLst>
+              <a:gd name="adj" fmla="val 6000"/>
+            </a:avLst>
+          </a:prstGeom>
+          <a:solidFill>
+            <a:srgbClr val="0E1424"/>
+          </a:solidFill>
+          <a:ln>
+            <a:noFill/>
+          </a:ln>
+          <a:effectLst/>
+        </p:spPr>
+        <p:style>
+          <a:lnRef idx="1">
+            <a:schemeClr val="accent1"/>
+          </a:lnRef>
+          <a:fillRef idx="3">
+            <a:schemeClr val="accent1"/>
+          </a:fillRef>
+          <a:effectRef idx="2">
+            <a:schemeClr val="accent1"/>
+          </a:effectRef>
+          <a:fontRef idx="minor">
+            <a:schemeClr val="lt1"/>
+          </a:fontRef>
+        </p:style>
+        <p:txBody>
+          <a:bodyPr rtlCol="0" anchor="ctr"/>
+          <a:lstStyle/>
+          <a:p>
+            <a:pPr algn="ctr"/>
+          </a:p>
+        </p:txBody>
+      </p:sp>
+      <p:sp>
+        <p:nvSpPr>
+          <p:cNvPr id="8" name="TextBox 7"/>
+          <p:cNvSpPr txBox="1"/>
+          <p:nvPr/>
+        </p:nvSpPr>
+        <p:spPr>
+          <a:xfrm>
+            <a:off x="914400" y="2011680"/>
+            <a:ext cx="10424160" cy="2560320"/>
+          </a:xfrm>
+          <a:prstGeom prst="rect">
+            <a:avLst/>
+          </a:prstGeom>
+          <a:noFill/>
+        </p:spPr>
+        <p:txBody>
+          <a:bodyPr wrap="none">
+            <a:spAutoFit/>
+          </a:bodyPr>
+          <a:lstStyle/>
+          <a:p>
+            <a:pPr algn="l"/>
+            <a:r>
+              <a:rPr sz="1300" b="0">
+                <a:solidFill>
+                  <a:srgbClr val="9CE3F0"/>
+                </a:solidFill>
+                <a:latin typeface="Consolas"/>
+              </a:rPr>
+              <a:t>node scripts/ecc.js doctor          # Health-Check (claude-home: OK)</a:t>
+            </a:r>
+          </a:p>
+          <a:p>
+            <a:pPr algn="l"/>
+            <a:r>
+              <a:rPr sz="1300" b="0">
+                <a:solidFill>
+                  <a:srgbClr val="9CE3F0"/>
+                </a:solidFill>
+                <a:latin typeface="Consolas"/>
+              </a:rPr>
+              <a:t>node scripts/ecc.js list-installed   # was ist installiert</a:t>
+            </a:r>
+          </a:p>
+          <a:p>
+            <a:pPr algn="l"/>
+            <a:r>
+              <a:rPr sz="1300" b="0">
+                <a:solidFill>
+                  <a:srgbClr val="9CE3F0"/>
+                </a:solidFill>
+                <a:latin typeface="Consolas"/>
+              </a:rPr>
+              <a:t>node scripts/ecc.js repair           # ECC-Dateien wiederherstellen</a:t>
+            </a:r>
+          </a:p>
+          <a:p>
+            <a:pPr algn="l"/>
+            <a:r>
+              <a:rPr sz="1300" b="0">
+                <a:solidFill>
+                  <a:srgbClr val="9CE3F0"/>
+                </a:solidFill>
+                <a:latin typeface="Consolas"/>
+              </a:rPr>
+              <a:t>npx ecc consult "security reviews"   # Advisor: welche Komponenten?</a:t>
+            </a:r>
+          </a:p>
+          <a:p>
+            <a:pPr algn="l"/>
+            <a:r>
+              <a:rPr sz="1300" b="0">
+                <a:solidFill>
+                  <a:srgbClr val="9CE3F0"/>
+                </a:solidFill>
+                <a:latin typeface="Consolas"/>
+              </a:rPr>
+              <a:t>./install-vps.sh                     # Re-Install / Update VPS-weit</a:t>
+            </a:r>
+          </a:p>
+        </p:txBody>
+      </p:sp>
+      <p:sp>
+        <p:nvSpPr>
+          <p:cNvPr id="9" name="TextBox 8"/>
+          <p:cNvSpPr txBox="1"/>
+          <p:nvPr/>
+        </p:nvSpPr>
+        <p:spPr>
+          <a:xfrm>
+            <a:off x="640080" y="5029200"/>
+            <a:ext cx="10972800" cy="1097280"/>
+          </a:xfrm>
+          <a:prstGeom prst="rect">
+            <a:avLst/>
+          </a:prstGeom>
+          <a:noFill/>
+        </p:spPr>
+        <p:txBody>
+          <a:bodyPr wrap="square">
+            <a:spAutoFit/>
+          </a:bodyPr>
+          <a:lstStyle/>
+          <a:p>
+            <a:pPr algn="l"/>
+            <a:r>
+              <a:rPr sz="1500" b="1">
+                <a:solidFill>
+                  <a:srgbClr val="818CF8"/>
+                </a:solidFill>
+                <a:latin typeface="Calibri"/>
+              </a:rPr>
+              <a:t>Slash-Einstieg:  /ecc-guide · /harness-audit · /cost-report · /skill-health · /projects.</a:t>
+            </a:r>
+          </a:p>
+        </p:txBody>
+      </p:sp>
+    </p:spTree>
+  </p:cSld>
+  <p:clrMapOvr>
+    <a:masterClrMapping/>
+  </p:clrMapOvr>
+</p:sld>
+</file>
+
+<file path=ppt/slides/slide19.xml><?xml version="1.0" encoding="utf-8"?>
+<p:sld xmlns:a="http://schemas.openxmlformats.org/drawingml/2006/main" xmlns:p="http://schemas.openxmlformats.org/presentationml/2006/main" xmlns:r="http://schemas.openxmlformats.org/officeDocument/2006/relationships">
+  <p:cSld>
+    <p:bg>
+      <p:bgPr>
+        <a:solidFill>
+          <a:srgbClr val="0A0E1A"/>
+        </a:solidFill>
+        <a:effectLst/>
+      </p:bgPr>
+    </p:bg>
+    <p:spTree>
+      <p:nvGrpSpPr>
+        <p:cNvPr id="1" name=""/>
+        <p:cNvGrpSpPr/>
+        <p:nvPr/>
+      </p:nvGrpSpPr>
+      <p:grpSpPr/>
+      <p:sp>
+        <p:nvSpPr>
+          <p:cNvPr id="2" name="Oval 1"/>
+          <p:cNvSpPr/>
+          <p:nvPr/>
+        </p:nvSpPr>
+        <p:spPr>
+          <a:xfrm>
+            <a:off x="548640" y="384048"/>
+            <a:ext cx="146304" cy="146304"/>
+          </a:xfrm>
+          <a:prstGeom prst="ellipse">
+            <a:avLst/>
+          </a:prstGeom>
+          <a:solidFill>
+            <a:srgbClr val="22D3EE"/>
+          </a:solidFill>
+          <a:ln>
+            <a:noFill/>
+          </a:ln>
+          <a:effectLst/>
+        </p:spPr>
+        <p:style>
+          <a:lnRef idx="1">
+            <a:schemeClr val="accent1"/>
+          </a:lnRef>
+          <a:fillRef idx="3">
+            <a:schemeClr val="accent1"/>
+          </a:fillRef>
+          <a:effectRef idx="2">
+            <a:schemeClr val="accent1"/>
+          </a:effectRef>
+          <a:fontRef idx="minor">
+            <a:schemeClr val="lt1"/>
+          </a:fontRef>
+        </p:style>
+        <p:txBody>
+          <a:bodyPr rtlCol="0" anchor="ctr"/>
+          <a:lstStyle/>
+          <a:p>
+            <a:pPr algn="ctr"/>
+          </a:p>
+        </p:txBody>
+      </p:sp>
+      <p:sp>
+        <p:nvSpPr>
+          <p:cNvPr id="3" name="TextBox 2"/>
+          <p:cNvSpPr txBox="1"/>
+          <p:nvPr/>
+        </p:nvSpPr>
+        <p:spPr>
+          <a:xfrm>
+            <a:off x="777240" y="301752"/>
+            <a:ext cx="7315200" cy="457200"/>
+          </a:xfrm>
+          <a:prstGeom prst="rect">
+            <a:avLst/>
+          </a:prstGeom>
+          <a:noFill/>
+        </p:spPr>
+        <p:txBody>
+          <a:bodyPr wrap="square">
+            <a:spAutoFit/>
+          </a:bodyPr>
+          <a:lstStyle/>
+          <a:p>
+            <a:pPr algn="l"/>
+            <a:r>
+              <a:rPr sz="1200" b="1">
+                <a:solidFill>
+                  <a:srgbClr val="22D3EE"/>
+                </a:solidFill>
+                <a:latin typeface="Calibri"/>
+              </a:rPr>
+              <a:t>QUELLEN</a:t>
+            </a:r>
+          </a:p>
+        </p:txBody>
+      </p:sp>
+      <p:sp>
+        <p:nvSpPr>
+          <p:cNvPr id="4" name="TextBox 3"/>
+          <p:cNvSpPr txBox="1"/>
+          <p:nvPr/>
+        </p:nvSpPr>
+        <p:spPr>
+          <a:xfrm>
+            <a:off x="9601200" y="301752"/>
+            <a:ext cx="2011680" cy="457200"/>
+          </a:xfrm>
+          <a:prstGeom prst="rect">
+            <a:avLst/>
+          </a:prstGeom>
+          <a:noFill/>
+        </p:spPr>
+        <p:txBody>
+          <a:bodyPr wrap="square">
+            <a:spAutoFit/>
+          </a:bodyPr>
+          <a:lstStyle/>
+          <a:p>
+            <a:pPr algn="r"/>
+            <a:r>
+              <a:rPr sz="1200" b="0">
+                <a:solidFill>
+                  <a:srgbClr val="8B98B0"/>
+                </a:solidFill>
+                <a:latin typeface="Calibri"/>
+              </a:rPr>
+              <a:t>18 / 18</a:t>
             </a:r>
           </a:p>
         </p:txBody>
@@ -8382,7 +9943,7 @@
                 </a:solidFill>
                 <a:latin typeface="Calibri"/>
               </a:rPr>
-              <a:t>1 / 16</a:t>
+              <a:t>1 / 18</a:t>
             </a:r>
           </a:p>
         </p:txBody>
@@ -8838,7 +10399,7 @@
                 </a:solidFill>
                 <a:latin typeface="Calibri"/>
               </a:rPr>
-              <a:t>2 / 16</a:t>
+              <a:t>2 / 18</a:t>
             </a:r>
           </a:p>
         </p:txBody>
@@ -9483,7 +11044,7 @@
                 </a:solidFill>
                 <a:latin typeface="Calibri"/>
               </a:rPr>
-              <a:t>3 / 16</a:t>
+              <a:t>3 / 18</a:t>
             </a:r>
           </a:p>
         </p:txBody>
@@ -10472,7 +12033,7 @@
                 </a:solidFill>
                 <a:latin typeface="Calibri"/>
               </a:rPr>
-              <a:t>4 / 16</a:t>
+              <a:t>4 / 18</a:t>
             </a:r>
           </a:p>
         </p:txBody>
@@ -11098,7 +12659,7 @@
                 </a:solidFill>
                 <a:latin typeface="Calibri"/>
               </a:rPr>
-              <a:t>5 / 16</a:t>
+              <a:t>5 / 18</a:t>
             </a:r>
           </a:p>
         </p:txBody>
@@ -12147,7 +13708,7 @@
                 </a:solidFill>
                 <a:latin typeface="Calibri"/>
               </a:rPr>
-              <a:t>6 / 16</a:t>
+              <a:t>6 / 18</a:t>
             </a:r>
           </a:p>
         </p:txBody>
@@ -13008,7 +14569,7 @@
                 </a:solidFill>
                 <a:latin typeface="Calibri"/>
               </a:rPr>
-              <a:t>7 / 16</a:t>
+              <a:t>7 / 18</a:t>
             </a:r>
           </a:p>
         </p:txBody>
@@ -13576,7 +15137,7 @@
                 </a:solidFill>
                 <a:latin typeface="Calibri"/>
               </a:rPr>
-              <a:t>CHEAT-SHEET</a:t>
+              <a:t>START</a:t>
             </a:r>
           </a:p>
         </p:txBody>
@@ -13611,7 +15172,7 @@
                 </a:solidFill>
                 <a:latin typeface="Calibri"/>
               </a:rPr>
-              <a:t>8 / 16</a:t>
+              <a:t>8 / 18</a:t>
             </a:r>
           </a:p>
         </p:txBody>
@@ -13646,7 +15207,7 @@
                 </a:solidFill>
                 <a:latin typeface="Calibri"/>
               </a:rPr>
-              <a:t>§7 Cheat-Sheet — Command (1/2)</a:t>
+              <a:t>§7a Zwei Startpunkte — leer oder Codebase</a:t>
             </a:r>
           </a:p>
         </p:txBody>
@@ -13695,645 +15256,347 @@
           </a:p>
         </p:txBody>
       </p:sp>
-      <p:graphicFrame>
-        <p:nvGraphicFramePr>
-          <p:cNvPr id="7" name="Table 6"/>
-          <p:cNvGraphicFramePr>
-            <a:graphicFrameLocks noGrp="1"/>
-          </p:cNvGraphicFramePr>
-          <p:nvPr/>
-        </p:nvGraphicFramePr>
-        <p:xfrm>
-          <a:off x="548640" y="1737360"/>
-          <a:ext cx="11155680" cy="4572000"/>
-        </p:xfrm>
-        <a:graphic>
-          <a:graphicData uri="http://schemas.openxmlformats.org/drawingml/2006/table">
-            <a:tbl>
-              <a:tblPr>
-                <a:tableStyleId>{2D5ABB26-0587-4C30-8999-92F81FD0307C}</a:tableStyleId>
-              </a:tblPr>
-              <a:tblGrid>
-                <a:gridCol w="2743200"/>
-                <a:gridCol w="4023360"/>
-                <a:gridCol w="4389120"/>
-              </a:tblGrid>
-              <a:tr h="508000">
-                <a:tc>
-                  <a:txBody>
-                    <a:bodyPr wrap="square"/>
-                    <a:lstStyle/>
-                    <a:p>
-                      <a:r>
-                        <a:rPr sz="1150" b="1">
-                          <a:solidFill>
-                            <a:srgbClr val="22D3EE"/>
-                          </a:solidFill>
-                          <a:latin typeface="Calibri"/>
-                        </a:rPr>
-                        <a:t>Situation</a:t>
-                      </a:r>
-                    </a:p>
-                  </a:txBody>
-                  <a:tcPr marT="36576" marB="36576" marL="73152" marR="73152">
-                    <a:solidFill>
-                      <a:srgbClr val="0E1424"/>
-                    </a:solidFill>
-                  </a:tcPr>
-                </a:tc>
-                <a:tc>
-                  <a:txBody>
-                    <a:bodyPr wrap="square"/>
-                    <a:lstStyle/>
-                    <a:p>
-                      <a:r>
-                        <a:rPr sz="1150" b="1">
-                          <a:solidFill>
-                            <a:srgbClr val="22D3EE"/>
-                          </a:solidFill>
-                          <a:latin typeface="Calibri"/>
-                        </a:rPr>
-                        <a:t>Command</a:t>
-                      </a:r>
-                    </a:p>
-                  </a:txBody>
-                  <a:tcPr marT="36576" marB="36576" marL="73152" marR="73152">
-                    <a:solidFill>
-                      <a:srgbClr val="0E1424"/>
-                    </a:solidFill>
-                  </a:tcPr>
-                </a:tc>
-                <a:tc>
-                  <a:txBody>
-                    <a:bodyPr wrap="square"/>
-                    <a:lstStyle/>
-                    <a:p>
-                      <a:r>
-                        <a:rPr sz="1150" b="1">
-                          <a:solidFill>
-                            <a:srgbClr val="22D3EE"/>
-                          </a:solidFill>
-                          <a:latin typeface="Calibri"/>
-                        </a:rPr>
-                        <a:t>Zweck</a:t>
-                      </a:r>
-                    </a:p>
-                  </a:txBody>
-                  <a:tcPr marT="36576" marB="36576" marL="73152" marR="73152">
-                    <a:solidFill>
-                      <a:srgbClr val="0E1424"/>
-                    </a:solidFill>
-                  </a:tcPr>
-                </a:tc>
-              </a:tr>
-              <a:tr h="508000">
-                <a:tc>
-                  <a:txBody>
-                    <a:bodyPr wrap="square"/>
-                    <a:lstStyle/>
-                    <a:p>
-                      <a:r>
-                        <a:rPr sz="1150">
-                          <a:solidFill>
-                            <a:srgbClr val="E6EDF8"/>
-                          </a:solidFill>
-                          <a:latin typeface="Calibri"/>
-                        </a:rPr>
-                        <a:t>Neues Feature planen</a:t>
-                      </a:r>
-                    </a:p>
-                  </a:txBody>
-                  <a:tcPr marT="36576" marB="36576" marL="73152" marR="73152">
-                    <a:solidFill>
-                      <a:srgbClr val="141A2E"/>
-                    </a:solidFill>
-                  </a:tcPr>
-                </a:tc>
-                <a:tc>
-                  <a:txBody>
-                    <a:bodyPr wrap="square"/>
-                    <a:lstStyle/>
-                    <a:p>
-                      <a:r>
-                        <a:rPr sz="1150">
-                          <a:solidFill>
-                            <a:srgbClr val="E6EDF8"/>
-                          </a:solidFill>
-                          <a:latin typeface="Calibri"/>
-                        </a:rPr>
-                        <a:t>/plan</a:t>
-                      </a:r>
-                    </a:p>
-                  </a:txBody>
-                  <a:tcPr marT="36576" marB="36576" marL="73152" marR="73152">
-                    <a:solidFill>
-                      <a:srgbClr val="141A2E"/>
-                    </a:solidFill>
-                  </a:tcPr>
-                </a:tc>
-                <a:tc>
-                  <a:txBody>
-                    <a:bodyPr wrap="square"/>
-                    <a:lstStyle/>
-                    <a:p>
-                      <a:r>
-                        <a:rPr sz="1150">
-                          <a:solidFill>
-                            <a:srgbClr val="E6EDF8"/>
-                          </a:solidFill>
-                          <a:latin typeface="Calibri"/>
-                        </a:rPr>
-                        <a:t>Anforderungen, Risiken, Schritte — wartet auf dein OK</a:t>
-                      </a:r>
-                    </a:p>
-                  </a:txBody>
-                  <a:tcPr marT="36576" marB="36576" marL="73152" marR="73152">
-                    <a:solidFill>
-                      <a:srgbClr val="141A2E"/>
-                    </a:solidFill>
-                  </a:tcPr>
-                </a:tc>
-              </a:tr>
-              <a:tr h="508000">
-                <a:tc>
-                  <a:txBody>
-                    <a:bodyPr wrap="square"/>
-                    <a:lstStyle/>
-                    <a:p>
-                      <a:r>
-                        <a:rPr sz="1150">
-                          <a:solidFill>
-                            <a:srgbClr val="E6EDF8"/>
-                          </a:solidFill>
-                          <a:latin typeface="Calibri"/>
-                        </a:rPr>
-                        <a:t>Feature umsetzen</a:t>
-                      </a:r>
-                    </a:p>
-                  </a:txBody>
-                  <a:tcPr marT="36576" marB="36576" marL="73152" marR="73152">
-                    <a:solidFill>
-                      <a:srgbClr val="0A0E1A"/>
-                    </a:solidFill>
-                  </a:tcPr>
-                </a:tc>
-                <a:tc>
-                  <a:txBody>
-                    <a:bodyPr wrap="square"/>
-                    <a:lstStyle/>
-                    <a:p>
-                      <a:r>
-                        <a:rPr sz="1150">
-                          <a:solidFill>
-                            <a:srgbClr val="E6EDF8"/>
-                          </a:solidFill>
-                          <a:latin typeface="Calibri"/>
-                        </a:rPr>
-                        <a:t>/feature-dev</a:t>
-                      </a:r>
-                    </a:p>
-                  </a:txBody>
-                  <a:tcPr marT="36576" marB="36576" marL="73152" marR="73152">
-                    <a:solidFill>
-                      <a:srgbClr val="0A0E1A"/>
-                    </a:solidFill>
-                  </a:tcPr>
-                </a:tc>
-                <a:tc>
-                  <a:txBody>
-                    <a:bodyPr wrap="square"/>
-                    <a:lstStyle/>
-                    <a:p>
-                      <a:r>
-                        <a:rPr sz="1150">
-                          <a:solidFill>
-                            <a:srgbClr val="E6EDF8"/>
-                          </a:solidFill>
-                          <a:latin typeface="Calibri"/>
-                        </a:rPr>
-                        <a:t>nutzt Skills/Agents, TDD zuerst</a:t>
-                      </a:r>
-                    </a:p>
-                  </a:txBody>
-                  <a:tcPr marT="36576" marB="36576" marL="73152" marR="73152">
-                    <a:solidFill>
-                      <a:srgbClr val="0A0E1A"/>
-                    </a:solidFill>
-                  </a:tcPr>
-                </a:tc>
-              </a:tr>
-              <a:tr h="508000">
-                <a:tc>
-                  <a:txBody>
-                    <a:bodyPr wrap="square"/>
-                    <a:lstStyle/>
-                    <a:p>
-                      <a:r>
-                        <a:rPr sz="1150">
-                          <a:solidFill>
-                            <a:srgbClr val="E6EDF8"/>
-                          </a:solidFill>
-                          <a:latin typeface="Calibri"/>
-                        </a:rPr>
-                        <a:t>Projekt ECC-ready machen</a:t>
-                      </a:r>
-                    </a:p>
-                  </a:txBody>
-                  <a:tcPr marT="36576" marB="36576" marL="73152" marR="73152">
-                    <a:solidFill>
-                      <a:srgbClr val="141A2E"/>
-                    </a:solidFill>
-                  </a:tcPr>
-                </a:tc>
-                <a:tc>
-                  <a:txBody>
-                    <a:bodyPr wrap="square"/>
-                    <a:lstStyle/>
-                    <a:p>
-                      <a:r>
-                        <a:rPr sz="1150">
-                          <a:solidFill>
-                            <a:srgbClr val="E6EDF8"/>
-                          </a:solidFill>
-                          <a:latin typeface="Calibri"/>
-                        </a:rPr>
-                        <a:t>/ecc-onboard</a:t>
-                      </a:r>
-                    </a:p>
-                  </a:txBody>
-                  <a:tcPr marT="36576" marB="36576" marL="73152" marR="73152">
-                    <a:solidFill>
-                      <a:srgbClr val="141A2E"/>
-                    </a:solidFill>
-                  </a:tcPr>
-                </a:tc>
-                <a:tc>
-                  <a:txBody>
-                    <a:bodyPr wrap="square"/>
-                    <a:lstStyle/>
-                    <a:p>
-                      <a:r>
-                        <a:rPr sz="1150">
-                          <a:solidFill>
-                            <a:srgbClr val="E6EDF8"/>
-                          </a:solidFill>
-                          <a:latin typeface="Calibri"/>
-                        </a:rPr>
-                        <a:t>Stack erkennen → 1× OK → Rules/Skills + PROJECT_RULES.md + state/</a:t>
-                      </a:r>
-                    </a:p>
-                  </a:txBody>
-                  <a:tcPr marT="36576" marB="36576" marL="73152" marR="73152">
-                    <a:solidFill>
-                      <a:srgbClr val="141A2E"/>
-                    </a:solidFill>
-                  </a:tcPr>
-                </a:tc>
-              </a:tr>
-              <a:tr h="508000">
-                <a:tc>
-                  <a:txBody>
-                    <a:bodyPr wrap="square"/>
-                    <a:lstStyle/>
-                    <a:p>
-                      <a:r>
-                        <a:rPr sz="1150">
-                          <a:solidFill>
-                            <a:srgbClr val="E6EDF8"/>
-                          </a:solidFill>
-                          <a:latin typeface="Calibri"/>
-                        </a:rPr>
-                        <a:t>Codebase kartieren (1×)</a:t>
-                      </a:r>
-                    </a:p>
-                  </a:txBody>
-                  <a:tcPr marT="36576" marB="36576" marL="73152" marR="73152">
-                    <a:solidFill>
-                      <a:srgbClr val="0A0E1A"/>
-                    </a:solidFill>
-                  </a:tcPr>
-                </a:tc>
-                <a:tc>
-                  <a:txBody>
-                    <a:bodyPr wrap="square"/>
-                    <a:lstStyle/>
-                    <a:p>
-                      <a:r>
-                        <a:rPr sz="1150">
-                          <a:solidFill>
-                            <a:srgbClr val="E6EDF8"/>
-                          </a:solidFill>
-                          <a:latin typeface="Calibri"/>
-                        </a:rPr>
-                        <a:t>/update-codemaps</a:t>
-                      </a:r>
-                    </a:p>
-                  </a:txBody>
-                  <a:tcPr marT="36576" marB="36576" marL="73152" marR="73152">
-                    <a:solidFill>
-                      <a:srgbClr val="0A0E1A"/>
-                    </a:solidFill>
-                  </a:tcPr>
-                </a:tc>
-                <a:tc>
-                  <a:txBody>
-                    <a:bodyPr wrap="square"/>
-                    <a:lstStyle/>
-                    <a:p>
-                      <a:r>
-                        <a:rPr sz="1150">
-                          <a:solidFill>
-                            <a:srgbClr val="E6EDF8"/>
-                          </a:solidFill>
-                          <a:latin typeface="Calibri"/>
-                        </a:rPr>
-                        <a:t>token-arme Architektur-Karten in docs/CODEMAPS/ — statt neu suchen</a:t>
-                      </a:r>
-                    </a:p>
-                  </a:txBody>
-                  <a:tcPr marT="36576" marB="36576" marL="73152" marR="73152">
-                    <a:solidFill>
-                      <a:srgbClr val="0A0E1A"/>
-                    </a:solidFill>
-                  </a:tcPr>
-                </a:tc>
-              </a:tr>
-              <a:tr h="508000">
-                <a:tc>
-                  <a:txBody>
-                    <a:bodyPr wrap="square"/>
-                    <a:lstStyle/>
-                    <a:p>
-                      <a:r>
-                        <a:rPr sz="1150">
-                          <a:solidFill>
-                            <a:srgbClr val="E6EDF8"/>
-                          </a:solidFill>
-                          <a:latin typeface="Calibri"/>
-                        </a:rPr>
-                        <a:t>Fremdes Repo verstehen</a:t>
-                      </a:r>
-                    </a:p>
-                  </a:txBody>
-                  <a:tcPr marT="36576" marB="36576" marL="73152" marR="73152">
-                    <a:solidFill>
-                      <a:srgbClr val="141A2E"/>
-                    </a:solidFill>
-                  </a:tcPr>
-                </a:tc>
-                <a:tc>
-                  <a:txBody>
-                    <a:bodyPr wrap="square"/>
-                    <a:lstStyle/>
-                    <a:p>
-                      <a:r>
-                        <a:rPr sz="1150">
-                          <a:solidFill>
-                            <a:srgbClr val="E6EDF8"/>
-                          </a:solidFill>
-                          <a:latin typeface="Calibri"/>
-                        </a:rPr>
-                        <a:t>/update-codemaps · code-tour · smart-explore</a:t>
-                      </a:r>
-                    </a:p>
-                  </a:txBody>
-                  <a:tcPr marT="36576" marB="36576" marL="73152" marR="73152">
-                    <a:solidFill>
-                      <a:srgbClr val="141A2E"/>
-                    </a:solidFill>
-                  </a:tcPr>
-                </a:tc>
-                <a:tc>
-                  <a:txBody>
-                    <a:bodyPr wrap="square"/>
-                    <a:lstStyle/>
-                    <a:p>
-                      <a:r>
-                        <a:rPr sz="1150">
-                          <a:solidFill>
-                            <a:srgbClr val="E6EDF8"/>
-                          </a:solidFill>
-                          <a:latin typeface="Calibri"/>
-                        </a:rPr>
-                        <a:t>Architektur kartieren, gefuehrte Touren, Struktur-Suche</a:t>
-                      </a:r>
-                    </a:p>
-                  </a:txBody>
-                  <a:tcPr marT="36576" marB="36576" marL="73152" marR="73152">
-                    <a:solidFill>
-                      <a:srgbClr val="141A2E"/>
-                    </a:solidFill>
-                  </a:tcPr>
-                </a:tc>
-              </a:tr>
-              <a:tr h="508000">
-                <a:tc>
-                  <a:txBody>
-                    <a:bodyPr wrap="square"/>
-                    <a:lstStyle/>
-                    <a:p>
-                      <a:r>
-                        <a:rPr sz="1150">
-                          <a:solidFill>
-                            <a:srgbClr val="E6EDF8"/>
-                          </a:solidFill>
-                          <a:latin typeface="Calibri"/>
-                        </a:rPr>
-                        <a:t>Code geschrieben</a:t>
-                      </a:r>
-                    </a:p>
-                  </a:txBody>
-                  <a:tcPr marT="36576" marB="36576" marL="73152" marR="73152">
-                    <a:solidFill>
-                      <a:srgbClr val="0A0E1A"/>
-                    </a:solidFill>
-                  </a:tcPr>
-                </a:tc>
-                <a:tc>
-                  <a:txBody>
-                    <a:bodyPr wrap="square"/>
-                    <a:lstStyle/>
-                    <a:p>
-                      <a:r>
-                        <a:rPr sz="1150">
-                          <a:solidFill>
-                            <a:srgbClr val="E6EDF8"/>
-                          </a:solidFill>
-                          <a:latin typeface="Calibri"/>
-                        </a:rPr>
-                        <a:t>/code-review  (+ /python-review, /go-review …)</a:t>
-                      </a:r>
-                    </a:p>
-                  </a:txBody>
-                  <a:tcPr marT="36576" marB="36576" marL="73152" marR="73152">
-                    <a:solidFill>
-                      <a:srgbClr val="0A0E1A"/>
-                    </a:solidFill>
-                  </a:tcPr>
-                </a:tc>
-                <a:tc>
-                  <a:txBody>
-                    <a:bodyPr wrap="square"/>
-                    <a:lstStyle/>
-                    <a:p>
-                      <a:r>
-                        <a:rPr sz="1150">
-                          <a:solidFill>
-                            <a:srgbClr val="E6EDF8"/>
-                          </a:solidFill>
-                          <a:latin typeface="Calibri"/>
-                        </a:rPr>
-                        <a:t>Qualität + Security der Änderungen</a:t>
-                      </a:r>
-                    </a:p>
-                  </a:txBody>
-                  <a:tcPr marT="36576" marB="36576" marL="73152" marR="73152">
-                    <a:solidFill>
-                      <a:srgbClr val="0A0E1A"/>
-                    </a:solidFill>
-                  </a:tcPr>
-                </a:tc>
-              </a:tr>
-              <a:tr h="508000">
-                <a:tc>
-                  <a:txBody>
-                    <a:bodyPr wrap="square"/>
-                    <a:lstStyle/>
-                    <a:p>
-                      <a:r>
-                        <a:rPr sz="1150">
-                          <a:solidFill>
-                            <a:srgbClr val="E6EDF8"/>
-                          </a:solidFill>
-                          <a:latin typeface="Calibri"/>
-                        </a:rPr>
-                        <a:t>Build/Tests rot</a:t>
-                      </a:r>
-                    </a:p>
-                  </a:txBody>
-                  <a:tcPr marT="36576" marB="36576" marL="73152" marR="73152">
-                    <a:solidFill>
-                      <a:srgbClr val="141A2E"/>
-                    </a:solidFill>
-                  </a:tcPr>
-                </a:tc>
-                <a:tc>
-                  <a:txBody>
-                    <a:bodyPr wrap="square"/>
-                    <a:lstStyle/>
-                    <a:p>
-                      <a:r>
-                        <a:rPr sz="1150">
-                          <a:solidFill>
-                            <a:srgbClr val="E6EDF8"/>
-                          </a:solidFill>
-                          <a:latin typeface="Calibri"/>
-                        </a:rPr>
-                        <a:t>/build-fix</a:t>
-                      </a:r>
-                    </a:p>
-                  </a:txBody>
-                  <a:tcPr marT="36576" marB="36576" marL="73152" marR="73152">
-                    <a:solidFill>
-                      <a:srgbClr val="141A2E"/>
-                    </a:solidFill>
-                  </a:tcPr>
-                </a:tc>
-                <a:tc>
-                  <a:txBody>
-                    <a:bodyPr wrap="square"/>
-                    <a:lstStyle/>
-                    <a:p>
-                      <a:r>
-                        <a:rPr sz="1150">
-                          <a:solidFill>
-                            <a:srgbClr val="E6EDF8"/>
-                          </a:solidFill>
-                          <a:latin typeface="Calibri"/>
-                        </a:rPr>
-                        <a:t>inkrementelle, minimale Fixes</a:t>
-                      </a:r>
-                    </a:p>
-                  </a:txBody>
-                  <a:tcPr marT="36576" marB="36576" marL="73152" marR="73152">
-                    <a:solidFill>
-                      <a:srgbClr val="141A2E"/>
-                    </a:solidFill>
-                  </a:tcPr>
-                </a:tc>
-              </a:tr>
-              <a:tr h="508000">
-                <a:tc>
-                  <a:txBody>
-                    <a:bodyPr wrap="square"/>
-                    <a:lstStyle/>
-                    <a:p>
-                      <a:r>
-                        <a:rPr sz="1150">
-                          <a:solidFill>
-                            <a:srgbClr val="E6EDF8"/>
-                          </a:solidFill>
-                          <a:latin typeface="Calibri"/>
-                        </a:rPr>
-                        <a:t>Coverage / Qualität</a:t>
-                      </a:r>
-                    </a:p>
-                  </a:txBody>
-                  <a:tcPr marT="36576" marB="36576" marL="73152" marR="73152">
-                    <a:solidFill>
-                      <a:srgbClr val="0A0E1A"/>
-                    </a:solidFill>
-                  </a:tcPr>
-                </a:tc>
-                <a:tc>
-                  <a:txBody>
-                    <a:bodyPr wrap="square"/>
-                    <a:lstStyle/>
-                    <a:p>
-                      <a:r>
-                        <a:rPr sz="1150">
-                          <a:solidFill>
-                            <a:srgbClr val="E6EDF8"/>
-                          </a:solidFill>
-                          <a:latin typeface="Calibri"/>
-                        </a:rPr>
-                        <a:t>/test-coverage  ·  /quality-gate</a:t>
-                      </a:r>
-                    </a:p>
-                  </a:txBody>
-                  <a:tcPr marT="36576" marB="36576" marL="73152" marR="73152">
-                    <a:solidFill>
-                      <a:srgbClr val="0A0E1A"/>
-                    </a:solidFill>
-                  </a:tcPr>
-                </a:tc>
-                <a:tc>
-                  <a:txBody>
-                    <a:bodyPr wrap="square"/>
-                    <a:lstStyle/>
-                    <a:p>
-                      <a:r>
-                        <a:rPr sz="1150">
-                          <a:solidFill>
-                            <a:srgbClr val="E6EDF8"/>
-                          </a:solidFill>
-                          <a:latin typeface="Calibri"/>
-                        </a:rPr>
-                        <a:t>Lücken finden, Pipeline prüfen</a:t>
-                      </a:r>
-                    </a:p>
-                  </a:txBody>
-                  <a:tcPr marT="36576" marB="36576" marL="73152" marR="73152">
-                    <a:solidFill>
-                      <a:srgbClr val="0A0E1A"/>
-                    </a:solidFill>
-                  </a:tcPr>
-                </a:tc>
-              </a:tr>
-            </a:tbl>
-          </a:graphicData>
-        </a:graphic>
-      </p:graphicFrame>
+      <p:sp>
+        <p:nvSpPr>
+          <p:cNvPr id="7" name="Rounded Rectangle 6"/>
+          <p:cNvSpPr/>
+          <p:nvPr/>
+        </p:nvSpPr>
+        <p:spPr>
+          <a:xfrm>
+            <a:off x="640080" y="1783080"/>
+            <a:ext cx="5349240" cy="3200400"/>
+          </a:xfrm>
+          <a:prstGeom prst="roundRect">
+            <a:avLst>
+              <a:gd name="adj" fmla="val 6000"/>
+            </a:avLst>
+          </a:prstGeom>
+          <a:solidFill>
+            <a:srgbClr val="0E1424"/>
+          </a:solidFill>
+          <a:ln>
+            <a:noFill/>
+          </a:ln>
+          <a:effectLst/>
+        </p:spPr>
+        <p:style>
+          <a:lnRef idx="1">
+            <a:schemeClr val="accent1"/>
+          </a:lnRef>
+          <a:fillRef idx="3">
+            <a:schemeClr val="accent1"/>
+          </a:fillRef>
+          <a:effectRef idx="2">
+            <a:schemeClr val="accent1"/>
+          </a:effectRef>
+          <a:fontRef idx="minor">
+            <a:schemeClr val="lt1"/>
+          </a:fontRef>
+        </p:style>
+        <p:txBody>
+          <a:bodyPr rtlCol="0" anchor="ctr"/>
+          <a:lstStyle/>
+          <a:p>
+            <a:pPr algn="ctr"/>
+          </a:p>
+        </p:txBody>
+      </p:sp>
+      <p:sp>
+        <p:nvSpPr>
+          <p:cNvPr id="8" name="TextBox 7"/>
+          <p:cNvSpPr txBox="1"/>
+          <p:nvPr/>
+        </p:nvSpPr>
+        <p:spPr>
+          <a:xfrm>
+            <a:off x="868680" y="1993392"/>
+            <a:ext cx="4937760" cy="2926080"/>
+          </a:xfrm>
+          <a:prstGeom prst="rect">
+            <a:avLst/>
+          </a:prstGeom>
+          <a:noFill/>
+        </p:spPr>
+        <p:txBody>
+          <a:bodyPr wrap="none">
+            <a:spAutoFit/>
+          </a:bodyPr>
+          <a:lstStyle/>
+          <a:p>
+            <a:pPr algn="l"/>
+            <a:r>
+              <a:rPr sz="1400" b="1">
+                <a:solidFill>
+                  <a:srgbClr val="22D3EE"/>
+                </a:solidFill>
+                <a:latin typeface="Calibri"/>
+              </a:rPr>
+              <a:t>LEERES PROJEKT (greenfield)</a:t>
+            </a:r>
+          </a:p>
+          <a:p>
+            <a:pPr algn="l"/>
+            <a:r>
+              <a:rPr sz="600" b="0">
+                <a:solidFill>
+                  <a:srgbClr val="E6EDF8"/>
+                </a:solidFill>
+                <a:latin typeface="Calibri"/>
+              </a:rPr>
+              <a:t/>
+            </a:r>
+          </a:p>
+          <a:p>
+            <a:pPr algn="l"/>
+            <a:r>
+              <a:rPr sz="1250" b="0">
+                <a:solidFill>
+                  <a:srgbClr val="9CE3F0"/>
+                </a:solidFill>
+                <a:latin typeface="Consolas"/>
+              </a:rPr>
+              <a:t>mkdir app &amp;&amp; cd app &amp;&amp; git init</a:t>
+            </a:r>
+          </a:p>
+          <a:p>
+            <a:pPr algn="l"/>
+            <a:r>
+              <a:rPr sz="1250" b="0">
+                <a:solidFill>
+                  <a:srgbClr val="9CE3F0"/>
+                </a:solidFill>
+                <a:latin typeface="Consolas"/>
+              </a:rPr>
+              <a:t>claude</a:t>
+            </a:r>
+          </a:p>
+          <a:p>
+            <a:pPr algn="l"/>
+            <a:r>
+              <a:rPr sz="1250" b="0">
+                <a:solidFill>
+                  <a:srgbClr val="9CE3F0"/>
+                </a:solidFill>
+                <a:latin typeface="Consolas"/>
+              </a:rPr>
+              <a:t>/ecc-onboard      # Stack → 1x OK</a:t>
+            </a:r>
+          </a:p>
+          <a:p>
+            <a:pPr algn="l"/>
+            <a:r>
+              <a:rPr sz="1250" b="0">
+                <a:solidFill>
+                  <a:srgbClr val="9CE3F0"/>
+                </a:solidFill>
+                <a:latin typeface="Consolas"/>
+              </a:rPr>
+              <a:t>/plan  Baue &lt;Feature&gt; …</a:t>
+            </a:r>
+          </a:p>
+        </p:txBody>
+      </p:sp>
+      <p:sp>
+        <p:nvSpPr>
+          <p:cNvPr id="9" name="Rounded Rectangle 8"/>
+          <p:cNvSpPr/>
+          <p:nvPr/>
+        </p:nvSpPr>
+        <p:spPr>
+          <a:xfrm>
+            <a:off x="6263640" y="1783080"/>
+            <a:ext cx="5303520" cy="3200400"/>
+          </a:xfrm>
+          <a:prstGeom prst="roundRect">
+            <a:avLst>
+              <a:gd name="adj" fmla="val 6000"/>
+            </a:avLst>
+          </a:prstGeom>
+          <a:solidFill>
+            <a:srgbClr val="0E1424"/>
+          </a:solidFill>
+          <a:ln>
+            <a:noFill/>
+          </a:ln>
+          <a:effectLst/>
+        </p:spPr>
+        <p:style>
+          <a:lnRef idx="1">
+            <a:schemeClr val="accent1"/>
+          </a:lnRef>
+          <a:fillRef idx="3">
+            <a:schemeClr val="accent1"/>
+          </a:fillRef>
+          <a:effectRef idx="2">
+            <a:schemeClr val="accent1"/>
+          </a:effectRef>
+          <a:fontRef idx="minor">
+            <a:schemeClr val="lt1"/>
+          </a:fontRef>
+        </p:style>
+        <p:txBody>
+          <a:bodyPr rtlCol="0" anchor="ctr"/>
+          <a:lstStyle/>
+          <a:p>
+            <a:pPr algn="ctr"/>
+          </a:p>
+        </p:txBody>
+      </p:sp>
+      <p:sp>
+        <p:nvSpPr>
+          <p:cNvPr id="10" name="TextBox 9"/>
+          <p:cNvSpPr txBox="1"/>
+          <p:nvPr/>
+        </p:nvSpPr>
+        <p:spPr>
+          <a:xfrm>
+            <a:off x="6492240" y="1993392"/>
+            <a:ext cx="4892040" cy="2926080"/>
+          </a:xfrm>
+          <a:prstGeom prst="rect">
+            <a:avLst/>
+          </a:prstGeom>
+          <a:noFill/>
+        </p:spPr>
+        <p:txBody>
+          <a:bodyPr wrap="none">
+            <a:spAutoFit/>
+          </a:bodyPr>
+          <a:lstStyle/>
+          <a:p>
+            <a:pPr algn="l"/>
+            <a:r>
+              <a:rPr sz="1400" b="1">
+                <a:solidFill>
+                  <a:srgbClr val="22D3EE"/>
+                </a:solidFill>
+                <a:latin typeface="Calibri"/>
+              </a:rPr>
+              <a:t>BESTEHENDE CODEBASE</a:t>
+            </a:r>
+          </a:p>
+          <a:p>
+            <a:pPr algn="l"/>
+            <a:r>
+              <a:rPr sz="600" b="0">
+                <a:solidFill>
+                  <a:srgbClr val="E6EDF8"/>
+                </a:solidFill>
+                <a:latin typeface="Calibri"/>
+              </a:rPr>
+              <a:t/>
+            </a:r>
+          </a:p>
+          <a:p>
+            <a:pPr algn="l"/>
+            <a:r>
+              <a:rPr sz="1250" b="0">
+                <a:solidFill>
+                  <a:srgbClr val="9CE3F0"/>
+                </a:solidFill>
+                <a:latin typeface="Consolas"/>
+              </a:rPr>
+              <a:t>git clone &lt;repo&gt; &amp;&amp; cd &lt;repo&gt;</a:t>
+            </a:r>
+          </a:p>
+          <a:p>
+            <a:pPr algn="l"/>
+            <a:r>
+              <a:rPr sz="1250" b="0">
+                <a:solidFill>
+                  <a:srgbClr val="9CE3F0"/>
+                </a:solidFill>
+                <a:latin typeface="Consolas"/>
+              </a:rPr>
+              <a:t>claude</a:t>
+            </a:r>
+          </a:p>
+          <a:p>
+            <a:pPr algn="l"/>
+            <a:r>
+              <a:rPr sz="1250" b="0">
+                <a:solidFill>
+                  <a:srgbClr val="9CE3F0"/>
+                </a:solidFill>
+                <a:latin typeface="Consolas"/>
+              </a:rPr>
+              <a:t>/ecc-onboard      # Stack erkannt</a:t>
+            </a:r>
+          </a:p>
+          <a:p>
+            <a:pPr algn="l"/>
+            <a:r>
+              <a:rPr sz="1250" b="0">
+                <a:solidFill>
+                  <a:srgbClr val="9CE3F0"/>
+                </a:solidFill>
+                <a:latin typeface="Consolas"/>
+              </a:rPr>
+              <a:t>/update-codemaps  # EINMAL kartieren</a:t>
+            </a:r>
+          </a:p>
+          <a:p>
+            <a:pPr algn="l"/>
+            <a:r>
+              <a:rPr sz="1250" b="0">
+                <a:solidFill>
+                  <a:srgbClr val="9CE3F0"/>
+                </a:solidFill>
+                <a:latin typeface="Consolas"/>
+              </a:rPr>
+              <a:t>code-tour · smart-explore</a:t>
+            </a:r>
+          </a:p>
+        </p:txBody>
+      </p:sp>
+      <p:sp>
+        <p:nvSpPr>
+          <p:cNvPr id="11" name="TextBox 10"/>
+          <p:cNvSpPr txBox="1"/>
+          <p:nvPr/>
+        </p:nvSpPr>
+        <p:spPr>
+          <a:xfrm>
+            <a:off x="640080" y="5212080"/>
+            <a:ext cx="10972800" cy="1188720"/>
+          </a:xfrm>
+          <a:prstGeom prst="rect">
+            <a:avLst/>
+          </a:prstGeom>
+          <a:noFill/>
+        </p:spPr>
+        <p:txBody>
+          <a:bodyPr wrap="none">
+            <a:spAutoFit/>
+          </a:bodyPr>
+          <a:lstStyle/>
+          <a:p>
+            <a:pPr algn="l"/>
+            <a:r>
+              <a:rPr sz="1500" b="1">
+                <a:solidFill>
+                  <a:srgbClr val="FBBF24"/>
+                </a:solidFill>
+                <a:latin typeface="Calibri"/>
+              </a:rPr>
+              <a:t>Einmal, nicht jedes Mal: /ecc-onboard + /update-codemaps laufen pro Projekt EINMAL.</a:t>
+            </a:r>
+          </a:p>
+          <a:p>
+            <a:pPr algn="l"/>
+            <a:r>
+              <a:rPr sz="1300" b="0">
+                <a:solidFill>
+                  <a:srgbClr val="8B98B0"/>
+                </a:solidFill>
+                <a:latin typeface="Calibri"/>
+              </a:rPr>
+              <a:t>Ergebnis ist persistent (Dateien) — jede Folge-Session startet mit der kompakten Karte.</a:t>
+            </a:r>
+          </a:p>
+        </p:txBody>
+      </p:sp>
     </p:spTree>
   </p:cSld>
   <p:clrMapOvr>

--- a/docs/ECC-Harness-Guide.de.pptx
+++ b/docs/ECC-Harness-Guide.de.pptx
@@ -24,6 +24,7 @@
     <p:sldId id="272" r:id="rId23"/>
     <p:sldId id="273" r:id="rId24"/>
     <p:sldId id="274" r:id="rId25"/>
+    <p:sldId id="275" r:id="rId26"/>
   </p:sldIdLst>
   <p:sldSz cx="12191695" cy="6858000" type="screen4x3"/>
   <p:notesSz cx="6858000" cy="9144000"/>
@@ -3422,7 +3423,7 @@
                 </a:solidFill>
                 <a:latin typeface="Calibri"/>
               </a:rPr>
-              <a:t>9 / 18</a:t>
+              <a:t>9 / 19</a:t>
             </a:r>
           </a:p>
         </p:txBody>
@@ -4123,7 +4124,7 @@
                 </a:solidFill>
                 <a:latin typeface="Calibri"/>
               </a:rPr>
-              <a:t>10 / 18</a:t>
+              <a:t>10 / 19</a:t>
             </a:r>
           </a:p>
         </p:txBody>
@@ -4981,7 +4982,7 @@
                 </a:solidFill>
                 <a:latin typeface="Calibri"/>
               </a:rPr>
-              <a:t>11 / 18</a:t>
+              <a:t>11 / 19</a:t>
             </a:r>
           </a:p>
         </p:txBody>
@@ -5839,7 +5840,7 @@
                 </a:solidFill>
                 <a:latin typeface="Calibri"/>
               </a:rPr>
-              <a:t>12 / 18</a:t>
+              <a:t>12 / 19</a:t>
             </a:r>
           </a:p>
         </p:txBody>
@@ -6678,7 +6679,7 @@
                 </a:solidFill>
                 <a:latin typeface="Calibri"/>
               </a:rPr>
-              <a:t>13 / 18</a:t>
+              <a:t>13 / 19</a:t>
             </a:r>
           </a:p>
         </p:txBody>
@@ -7361,7 +7362,7 @@
                 </a:solidFill>
                 <a:latin typeface="Calibri"/>
               </a:rPr>
-              <a:t>14 / 18</a:t>
+              <a:t>14 / 19</a:t>
             </a:r>
           </a:p>
         </p:txBody>
@@ -7895,7 +7896,7 @@
                 </a:solidFill>
                 <a:latin typeface="Calibri"/>
               </a:rPr>
-              <a:t>15 / 18</a:t>
+              <a:t>15 / 19</a:t>
             </a:r>
           </a:p>
         </p:txBody>
@@ -8575,7 +8576,7 @@
                 </a:solidFill>
                 <a:latin typeface="Calibri"/>
               </a:rPr>
-              <a:t>16 / 18</a:t>
+              <a:t>16 / 19</a:t>
             </a:r>
           </a:p>
         </p:txBody>
@@ -9163,7 +9164,7 @@
                 </a:solidFill>
                 <a:latin typeface="Calibri"/>
               </a:rPr>
-              <a:t>17 / 18</a:t>
+              <a:t>17 / 19</a:t>
             </a:r>
           </a:p>
         </p:txBody>
@@ -9511,7 +9512,7 @@
                 </a:solidFill>
                 <a:latin typeface="Calibri"/>
               </a:rPr>
-              <a:t>QUELLEN</a:t>
+              <a:t>HYBRID-LOOP</a:t>
             </a:r>
           </a:p>
         </p:txBody>
@@ -9546,7 +9547,7 @@
                 </a:solidFill>
                 <a:latin typeface="Calibri"/>
               </a:rPr>
-              <a:t>18 / 18</a:t>
+              <a:t>18 / 19</a:t>
             </a:r>
           </a:p>
         </p:txBody>
@@ -9581,7 +9582,7 @@
                 </a:solidFill>
                 <a:latin typeface="Calibri"/>
               </a:rPr>
-              <a:t>Quellen &amp; TL;DR</a:t>
+              <a:t>§16 Hybrid-Mega-Workflow — State-Sync + RPI</a:t>
             </a:r>
           </a:p>
         </p:txBody>
@@ -9638,8 +9639,89 @@
         </p:nvSpPr>
         <p:spPr>
           <a:xfrm>
-            <a:off x="640080" y="1737360"/>
-            <a:ext cx="10972800" cy="1554480"/>
+            <a:off x="640080" y="1645920"/>
+            <a:ext cx="10972800" cy="457200"/>
+          </a:xfrm>
+          <a:prstGeom prst="rect">
+            <a:avLst/>
+          </a:prstGeom>
+          <a:noFill/>
+        </p:spPr>
+        <p:txBody>
+          <a:bodyPr wrap="square">
+            <a:spAutoFit/>
+          </a:bodyPr>
+          <a:lstStyle/>
+          <a:p>
+            <a:pPr algn="l"/>
+            <a:r>
+              <a:rPr sz="1400" b="1">
+                <a:solidFill>
+                  <a:srgbClr val="FBBF24"/>
+                </a:solidFill>
+                <a:latin typeface="Calibri"/>
+              </a:rPr>
+              <a:t>state/ ist die Wahrheit · WORKING-CONTEXT.md ist ihr generiertes Spiegelbild für den Loop.</a:t>
+            </a:r>
+          </a:p>
+        </p:txBody>
+      </p:sp>
+      <p:sp>
+        <p:nvSpPr>
+          <p:cNvPr id="8" name="Rounded Rectangle 7"/>
+          <p:cNvSpPr/>
+          <p:nvPr/>
+        </p:nvSpPr>
+        <p:spPr>
+          <a:xfrm>
+            <a:off x="640080" y="2194560"/>
+            <a:ext cx="10927080" cy="1600200"/>
+          </a:xfrm>
+          <a:prstGeom prst="roundRect">
+            <a:avLst>
+              <a:gd name="adj" fmla="val 6000"/>
+            </a:avLst>
+          </a:prstGeom>
+          <a:solidFill>
+            <a:srgbClr val="0E1424"/>
+          </a:solidFill>
+          <a:ln>
+            <a:noFill/>
+          </a:ln>
+          <a:effectLst/>
+        </p:spPr>
+        <p:style>
+          <a:lnRef idx="1">
+            <a:schemeClr val="accent1"/>
+          </a:lnRef>
+          <a:fillRef idx="3">
+            <a:schemeClr val="accent1"/>
+          </a:fillRef>
+          <a:effectRef idx="2">
+            <a:schemeClr val="accent1"/>
+          </a:effectRef>
+          <a:fontRef idx="minor">
+            <a:schemeClr val="lt1"/>
+          </a:fontRef>
+        </p:style>
+        <p:txBody>
+          <a:bodyPr rtlCol="0" anchor="ctr"/>
+          <a:lstStyle/>
+          <a:p>
+            <a:pPr algn="ctr"/>
+          </a:p>
+        </p:txBody>
+      </p:sp>
+      <p:sp>
+        <p:nvSpPr>
+          <p:cNvPr id="9" name="TextBox 8"/>
+          <p:cNvSpPr txBox="1"/>
+          <p:nvPr/>
+        </p:nvSpPr>
+        <p:spPr>
+          <a:xfrm>
+            <a:off x="914400" y="2377440"/>
+            <a:ext cx="10424160" cy="1280160"/>
           </a:xfrm>
           <a:prstGeom prst="rect">
             <a:avLst/>
@@ -9654,63 +9736,330 @@
           <a:p>
             <a:pPr algn="l"/>
             <a:r>
+              <a:rPr sz="1200" b="0">
+                <a:solidFill>
+                  <a:srgbClr val="9CE3F0"/>
+                </a:solidFill>
+                <a:latin typeface="Consolas"/>
+              </a:rPr>
+              <a:t>state/*.md   --PRE (SessionStart)--&gt;   WORKING-CONTEXT.md   (Loop: liest STATE:*, fuellt SYNC:*)</a:t>
+            </a:r>
+          </a:p>
+          <a:p>
+            <a:pPr algn="l"/>
+            <a:r>
+              <a:rPr sz="1200" b="0">
+                <a:solidFill>
+                  <a:srgbClr val="9CE3F0"/>
+                </a:solidFill>
+                <a:latin typeface="Consolas"/>
+              </a:rPr>
+              <a:t>WORKING-CONTEXT.md   --POST (Stop/PreCompact)--&gt;   state/progress.md + tasks.md   (nur Delta)</a:t>
+            </a:r>
+          </a:p>
+        </p:txBody>
+      </p:sp>
+      <p:sp>
+        <p:nvSpPr>
+          <p:cNvPr id="10" name="TextBox 9"/>
+          <p:cNvSpPr txBox="1"/>
+          <p:nvPr/>
+        </p:nvSpPr>
+        <p:spPr>
+          <a:xfrm>
+            <a:off x="640080" y="3977639"/>
+            <a:ext cx="10972800" cy="365760"/>
+          </a:xfrm>
+          <a:prstGeom prst="rect">
+            <a:avLst/>
+          </a:prstGeom>
+          <a:noFill/>
+        </p:spPr>
+        <p:txBody>
+          <a:bodyPr wrap="square">
+            <a:spAutoFit/>
+          </a:bodyPr>
+          <a:lstStyle/>
+          <a:p>
+            <a:pPr algn="l"/>
+            <a:r>
               <a:rPr sz="1400" b="1">
                 <a:solidFill>
-                  <a:srgbClr val="22D3EE"/>
-                </a:solidFill>
-                <a:latin typeface="Calibri"/>
-              </a:rPr>
-              <a:t>Guides von @affaanmustafa (X-Threads; lokal unter ecc/):</a:t>
-            </a:r>
-          </a:p>
-          <a:p>
-            <a:pPr algn="l"/>
-            <a:r>
-              <a:rPr sz="1150" b="0">
-                <a:solidFill>
-                  <a:srgbClr val="E6EDF8"/>
-                </a:solidFill>
-                <a:latin typeface="Calibri"/>
-              </a:rPr>
-              <a:t>Shortform: https://x.com/affaanmustafa/status/2012378465664745795</a:t>
-            </a:r>
-          </a:p>
-          <a:p>
-            <a:pPr algn="l"/>
-            <a:r>
-              <a:rPr sz="1150" b="0">
-                <a:solidFill>
-                  <a:srgbClr val="E6EDF8"/>
-                </a:solidFill>
-                <a:latin typeface="Calibri"/>
-              </a:rPr>
-              <a:t>Longform:  https://x.com/affaanmustafa/status/2014040193557471352</a:t>
-            </a:r>
-          </a:p>
-          <a:p>
-            <a:pPr algn="l"/>
-            <a:r>
-              <a:rPr sz="1150" b="0">
-                <a:solidFill>
-                  <a:srgbClr val="E6EDF8"/>
-                </a:solidFill>
-                <a:latin typeface="Calibri"/>
-              </a:rPr>
-              <a:t>Security:  https://x.com/affaanmustafa/status/2033263813387223421</a:t>
-            </a:r>
-          </a:p>
-        </p:txBody>
-      </p:sp>
-      <p:sp>
-        <p:nvSpPr>
-          <p:cNvPr id="8" name="TextBox 7"/>
+                  <a:srgbClr val="818CF8"/>
+                </a:solidFill>
+                <a:latin typeface="Calibri"/>
+              </a:rPr>
+              <a:t>/mega-plan — RPI-Berater PARALLEL (read-only) → Briefing → /plan:</a:t>
+            </a:r>
+          </a:p>
+        </p:txBody>
+      </p:sp>
+      <p:graphicFrame>
+        <p:nvGraphicFramePr>
+          <p:cNvPr id="11" name="Table 10"/>
+          <p:cNvGraphicFramePr>
+            <a:graphicFrameLocks noGrp="1"/>
+          </p:cNvGraphicFramePr>
+          <p:nvPr/>
+        </p:nvGraphicFramePr>
+        <p:xfrm>
+          <a:off x="640080" y="4343400"/>
+          <a:ext cx="10972800" cy="1417320"/>
+        </p:xfrm>
+        <a:graphic>
+          <a:graphicData uri="http://schemas.openxmlformats.org/drawingml/2006/table">
+            <a:tbl>
+              <a:tblPr>
+                <a:tableStyleId>{2D5ABB26-0587-4C30-8999-92F81FD0307C}</a:tableStyleId>
+              </a:tblPr>
+              <a:tblGrid>
+                <a:gridCol w="2194560"/>
+                <a:gridCol w="8778240"/>
+              </a:tblGrid>
+              <a:tr h="283464">
+                <a:tc>
+                  <a:txBody>
+                    <a:bodyPr wrap="square"/>
+                    <a:lstStyle/>
+                    <a:p>
+                      <a:r>
+                        <a:rPr sz="1150" b="1">
+                          <a:solidFill>
+                            <a:srgbClr val="22D3EE"/>
+                          </a:solidFill>
+                          <a:latin typeface="Calibri"/>
+                        </a:rPr>
+                        <a:t>Berater</a:t>
+                      </a:r>
+                    </a:p>
+                  </a:txBody>
+                  <a:tcPr marT="36576" marB="36576" marL="73152" marR="73152">
+                    <a:solidFill>
+                      <a:srgbClr val="0E1424"/>
+                    </a:solidFill>
+                  </a:tcPr>
+                </a:tc>
+                <a:tc>
+                  <a:txBody>
+                    <a:bodyPr wrap="square"/>
+                    <a:lstStyle/>
+                    <a:p>
+                      <a:r>
+                        <a:rPr sz="1150" b="1">
+                          <a:solidFill>
+                            <a:srgbClr val="22D3EE"/>
+                          </a:solidFill>
+                          <a:latin typeface="Calibri"/>
+                        </a:rPr>
+                        <a:t>Perspektive</a:t>
+                      </a:r>
+                    </a:p>
+                  </a:txBody>
+                  <a:tcPr marT="36576" marB="36576" marL="73152" marR="73152">
+                    <a:solidFill>
+                      <a:srgbClr val="0E1424"/>
+                    </a:solidFill>
+                  </a:tcPr>
+                </a:tc>
+              </a:tr>
+              <a:tr h="283464">
+                <a:tc>
+                  <a:txBody>
+                    <a:bodyPr wrap="square"/>
+                    <a:lstStyle/>
+                    <a:p>
+                      <a:r>
+                        <a:rPr sz="1150">
+                          <a:solidFill>
+                            <a:srgbClr val="E6EDF8"/>
+                          </a:solidFill>
+                          <a:latin typeface="Calibri"/>
+                        </a:rPr>
+                        <a:t>Intake</a:t>
+                      </a:r>
+                    </a:p>
+                  </a:txBody>
+                  <a:tcPr marT="36576" marB="36576" marL="73152" marR="73152">
+                    <a:solidFill>
+                      <a:srgbClr val="141A2E"/>
+                    </a:solidFill>
+                  </a:tcPr>
+                </a:tc>
+                <a:tc>
+                  <a:txBody>
+                    <a:bodyPr wrap="square"/>
+                    <a:lstStyle/>
+                    <a:p>
+                      <a:r>
+                        <a:rPr sz="1150">
+                          <a:solidFill>
+                            <a:srgbClr val="E6EDF8"/>
+                          </a:solidFill>
+                          <a:latin typeface="Calibri"/>
+                        </a:rPr>
+                        <a:t>Anforderungen · Constraints · offene Fragen</a:t>
+                      </a:r>
+                    </a:p>
+                  </a:txBody>
+                  <a:tcPr marT="36576" marB="36576" marL="73152" marR="73152">
+                    <a:solidFill>
+                      <a:srgbClr val="141A2E"/>
+                    </a:solidFill>
+                  </a:tcPr>
+                </a:tc>
+              </a:tr>
+              <a:tr h="283464">
+                <a:tc>
+                  <a:txBody>
+                    <a:bodyPr wrap="square"/>
+                    <a:lstStyle/>
+                    <a:p>
+                      <a:r>
+                        <a:rPr sz="1150">
+                          <a:solidFill>
+                            <a:srgbClr val="E6EDF8"/>
+                          </a:solidFill>
+                          <a:latin typeface="Calibri"/>
+                        </a:rPr>
+                        <a:t>CTO</a:t>
+                      </a:r>
+                    </a:p>
+                  </a:txBody>
+                  <a:tcPr marT="36576" marB="36576" marL="73152" marR="73152">
+                    <a:solidFill>
+                      <a:srgbClr val="0A0E1A"/>
+                    </a:solidFill>
+                  </a:tcPr>
+                </a:tc>
+                <a:tc>
+                  <a:txBody>
+                    <a:bodyPr wrap="square"/>
+                    <a:lstStyle/>
+                    <a:p>
+                      <a:r>
+                        <a:rPr sz="1150">
+                          <a:solidFill>
+                            <a:srgbClr val="E6EDF8"/>
+                          </a:solidFill>
+                          <a:latin typeface="Calibri"/>
+                        </a:rPr>
+                        <a:t>Technik-Strategie · Architektur-Fit · Risiko</a:t>
+                      </a:r>
+                    </a:p>
+                  </a:txBody>
+                  <a:tcPr marT="36576" marB="36576" marL="73152" marR="73152">
+                    <a:solidFill>
+                      <a:srgbClr val="0A0E1A"/>
+                    </a:solidFill>
+                  </a:tcPr>
+                </a:tc>
+              </a:tr>
+              <a:tr h="283464">
+                <a:tc>
+                  <a:txBody>
+                    <a:bodyPr wrap="square"/>
+                    <a:lstStyle/>
+                    <a:p>
+                      <a:r>
+                        <a:rPr sz="1150">
+                          <a:solidFill>
+                            <a:srgbClr val="E6EDF8"/>
+                          </a:solidFill>
+                          <a:latin typeface="Calibri"/>
+                        </a:rPr>
+                        <a:t>Product</a:t>
+                      </a:r>
+                    </a:p>
+                  </a:txBody>
+                  <a:tcPr marT="36576" marB="36576" marL="73152" marR="73152">
+                    <a:solidFill>
+                      <a:srgbClr val="141A2E"/>
+                    </a:solidFill>
+                  </a:tcPr>
+                </a:tc>
+                <a:tc>
+                  <a:txBody>
+                    <a:bodyPr wrap="square"/>
+                    <a:lstStyle/>
+                    <a:p>
+                      <a:r>
+                        <a:rPr sz="1150">
+                          <a:solidFill>
+                            <a:srgbClr val="E6EDF8"/>
+                          </a:solidFill>
+                          <a:latin typeface="Calibri"/>
+                        </a:rPr>
+                        <a:t>Scope · Requirements · Akzeptanzkriterien</a:t>
+                      </a:r>
+                    </a:p>
+                  </a:txBody>
+                  <a:tcPr marT="36576" marB="36576" marL="73152" marR="73152">
+                    <a:solidFill>
+                      <a:srgbClr val="141A2E"/>
+                    </a:solidFill>
+                  </a:tcPr>
+                </a:tc>
+              </a:tr>
+              <a:tr h="283464">
+                <a:tc>
+                  <a:txBody>
+                    <a:bodyPr wrap="square"/>
+                    <a:lstStyle/>
+                    <a:p>
+                      <a:r>
+                        <a:rPr sz="1150">
+                          <a:solidFill>
+                            <a:srgbClr val="E6EDF8"/>
+                          </a:solidFill>
+                          <a:latin typeface="Calibri"/>
+                        </a:rPr>
+                        <a:t>UX</a:t>
+                      </a:r>
+                    </a:p>
+                  </a:txBody>
+                  <a:tcPr marT="36576" marB="36576" marL="73152" marR="73152">
+                    <a:solidFill>
+                      <a:srgbClr val="0A0E1A"/>
+                    </a:solidFill>
+                  </a:tcPr>
+                </a:tc>
+                <a:tc>
+                  <a:txBody>
+                    <a:bodyPr wrap="square"/>
+                    <a:lstStyle/>
+                    <a:p>
+                      <a:r>
+                        <a:rPr sz="1150">
+                          <a:solidFill>
+                            <a:srgbClr val="E6EDF8"/>
+                          </a:solidFill>
+                          <a:latin typeface="Calibri"/>
+                        </a:rPr>
+                        <a:t>Flows · States · Accessibility</a:t>
+                      </a:r>
+                    </a:p>
+                  </a:txBody>
+                  <a:tcPr marT="36576" marB="36576" marL="73152" marR="73152">
+                    <a:solidFill>
+                      <a:srgbClr val="0A0E1A"/>
+                    </a:solidFill>
+                  </a:tcPr>
+                </a:tc>
+              </a:tr>
+            </a:tbl>
+          </a:graphicData>
+        </a:graphic>
+      </p:graphicFrame>
+      <p:sp>
+        <p:nvSpPr>
+          <p:cNvPr id="12" name="TextBox 11"/>
           <p:cNvSpPr txBox="1"/>
           <p:nvPr/>
         </p:nvSpPr>
         <p:spPr>
           <a:xfrm>
-            <a:off x="640080" y="3383280"/>
-            <a:ext cx="10972800" cy="3108960"/>
+            <a:off x="640080" y="5943600"/>
+            <a:ext cx="10972800" cy="640080"/>
           </a:xfrm>
           <a:prstGeom prst="rect">
             <a:avLst/>
@@ -9725,85 +10074,13 @@
           <a:p>
             <a:pPr algn="l"/>
             <a:r>
-              <a:rPr sz="1600" b="1">
-                <a:solidFill>
-                  <a:srgbClr val="22D3EE"/>
-                </a:solidFill>
-                <a:latin typeface="Calibri"/>
-              </a:rPr>
-              <a:t>TL;DR — wie der Erfinder:</a:t>
-            </a:r>
-          </a:p>
-          <a:p>
-            <a:pPr algn="l"/>
-            <a:r>
-              <a:rPr sz="1300" b="0">
-                <a:solidFill>
-                  <a:srgbClr val="E6EDF8"/>
-                </a:solidFill>
-                <a:latin typeface="Calibri"/>
-              </a:rPr>
-              <a:t>1. In Phasen: Research → /plan → /feature-dev+TDD → /code-review → Verify.</a:t>
-            </a:r>
-          </a:p>
-          <a:p>
-            <a:pPr algn="l"/>
-            <a:r>
-              <a:rPr sz="1300" b="0">
-                <a:solidFill>
-                  <a:srgbClr val="E6EDF8"/>
-                </a:solidFill>
-                <a:latin typeface="Calibri"/>
-              </a:rPr>
-              <a:t>2. Kontext sauber: &lt;10 MCPs, billigstes Modell, modulare Dateien, strategisch compacten.</a:t>
-            </a:r>
-          </a:p>
-          <a:p>
-            <a:pPr algn="l"/>
-            <a:r>
-              <a:rPr sz="1300" b="0">
-                <a:solidFill>
-                  <a:srgbClr val="E6EDF8"/>
-                </a:solidFill>
-                <a:latin typeface="Calibri"/>
-              </a:rPr>
-              <a:t>3. Persistieren: /save-session · /resume-session.</a:t>
-            </a:r>
-          </a:p>
-          <a:p>
-            <a:pPr algn="l"/>
-            <a:r>
-              <a:rPr sz="1300" b="0">
-                <a:solidFill>
-                  <a:srgbClr val="E6EDF8"/>
-                </a:solidFill>
-                <a:latin typeface="Calibri"/>
-              </a:rPr>
-              <a:t>4. Lernen: /learn-eval → /evolve → /promote.</a:t>
-            </a:r>
-          </a:p>
-          <a:p>
-            <a:pPr algn="l"/>
-            <a:r>
-              <a:rPr sz="1300" b="0">
-                <a:solidFill>
-                  <a:srgbClr val="E6EDF8"/>
-                </a:solidFill>
-                <a:latin typeface="Calibri"/>
-              </a:rPr>
-              <a:t>5. Security zuerst: RTK aktiv, Hooks/AgentShield bewusst, nie blind ausführen.</a:t>
-            </a:r>
-          </a:p>
-          <a:p>
-            <a:pPr algn="l"/>
-            <a:r>
-              <a:rPr sz="1300" b="0">
-                <a:solidFill>
-                  <a:srgbClr val="E6EDF8"/>
-                </a:solidFill>
-                <a:latin typeface="Calibri"/>
-              </a:rPr>
-              <a:t>6. Unsicher? /ecc-guide · ecc doctor · die drei Original-Guides.</a:t>
+              <a:rPr sz="1250" b="0">
+                <a:solidFill>
+                  <a:srgbClr val="8B98B0"/>
+                </a:solidFill>
+                <a:latin typeface="Calibri"/>
+              </a:rPr>
+              <a:t>Additiv — ECC-Core (ecc/) unberührt · Garantien: Marker · atomar · idempotent · selftest (7 Checks).</a:t>
             </a:r>
           </a:p>
         </p:txBody>
@@ -9943,7 +10220,7 @@
                 </a:solidFill>
                 <a:latin typeface="Calibri"/>
               </a:rPr>
-              <a:t>1 / 18</a:t>
+              <a:t>1 / 19</a:t>
             </a:r>
           </a:p>
         </p:txBody>
@@ -10260,6 +10537,403 @@
                 <a:latin typeface="Calibri"/>
               </a:rPr>
               <a:t>5 Prinzipien:  Agent-First · Test-Driven · Security-First · Immutability · Plan-Before-Execute.</a:t>
+            </a:r>
+          </a:p>
+        </p:txBody>
+      </p:sp>
+    </p:spTree>
+  </p:cSld>
+  <p:clrMapOvr>
+    <a:masterClrMapping/>
+  </p:clrMapOvr>
+</p:sld>
+</file>
+
+<file path=ppt/slides/slide20.xml><?xml version="1.0" encoding="utf-8"?>
+<p:sld xmlns:a="http://schemas.openxmlformats.org/drawingml/2006/main" xmlns:p="http://schemas.openxmlformats.org/presentationml/2006/main" xmlns:r="http://schemas.openxmlformats.org/officeDocument/2006/relationships">
+  <p:cSld>
+    <p:bg>
+      <p:bgPr>
+        <a:solidFill>
+          <a:srgbClr val="0A0E1A"/>
+        </a:solidFill>
+        <a:effectLst/>
+      </p:bgPr>
+    </p:bg>
+    <p:spTree>
+      <p:nvGrpSpPr>
+        <p:cNvPr id="1" name=""/>
+        <p:cNvGrpSpPr/>
+        <p:nvPr/>
+      </p:nvGrpSpPr>
+      <p:grpSpPr/>
+      <p:sp>
+        <p:nvSpPr>
+          <p:cNvPr id="2" name="Oval 1"/>
+          <p:cNvSpPr/>
+          <p:nvPr/>
+        </p:nvSpPr>
+        <p:spPr>
+          <a:xfrm>
+            <a:off x="548640" y="384048"/>
+            <a:ext cx="146304" cy="146304"/>
+          </a:xfrm>
+          <a:prstGeom prst="ellipse">
+            <a:avLst/>
+          </a:prstGeom>
+          <a:solidFill>
+            <a:srgbClr val="22D3EE"/>
+          </a:solidFill>
+          <a:ln>
+            <a:noFill/>
+          </a:ln>
+          <a:effectLst/>
+        </p:spPr>
+        <p:style>
+          <a:lnRef idx="1">
+            <a:schemeClr val="accent1"/>
+          </a:lnRef>
+          <a:fillRef idx="3">
+            <a:schemeClr val="accent1"/>
+          </a:fillRef>
+          <a:effectRef idx="2">
+            <a:schemeClr val="accent1"/>
+          </a:effectRef>
+          <a:fontRef idx="minor">
+            <a:schemeClr val="lt1"/>
+          </a:fontRef>
+        </p:style>
+        <p:txBody>
+          <a:bodyPr rtlCol="0" anchor="ctr"/>
+          <a:lstStyle/>
+          <a:p>
+            <a:pPr algn="ctr"/>
+          </a:p>
+        </p:txBody>
+      </p:sp>
+      <p:sp>
+        <p:nvSpPr>
+          <p:cNvPr id="3" name="TextBox 2"/>
+          <p:cNvSpPr txBox="1"/>
+          <p:nvPr/>
+        </p:nvSpPr>
+        <p:spPr>
+          <a:xfrm>
+            <a:off x="777240" y="301752"/>
+            <a:ext cx="7315200" cy="457200"/>
+          </a:xfrm>
+          <a:prstGeom prst="rect">
+            <a:avLst/>
+          </a:prstGeom>
+          <a:noFill/>
+        </p:spPr>
+        <p:txBody>
+          <a:bodyPr wrap="square">
+            <a:spAutoFit/>
+          </a:bodyPr>
+          <a:lstStyle/>
+          <a:p>
+            <a:pPr algn="l"/>
+            <a:r>
+              <a:rPr sz="1200" b="1">
+                <a:solidFill>
+                  <a:srgbClr val="22D3EE"/>
+                </a:solidFill>
+                <a:latin typeface="Calibri"/>
+              </a:rPr>
+              <a:t>QUELLEN</a:t>
+            </a:r>
+          </a:p>
+        </p:txBody>
+      </p:sp>
+      <p:sp>
+        <p:nvSpPr>
+          <p:cNvPr id="4" name="TextBox 3"/>
+          <p:cNvSpPr txBox="1"/>
+          <p:nvPr/>
+        </p:nvSpPr>
+        <p:spPr>
+          <a:xfrm>
+            <a:off x="9601200" y="301752"/>
+            <a:ext cx="2011680" cy="457200"/>
+          </a:xfrm>
+          <a:prstGeom prst="rect">
+            <a:avLst/>
+          </a:prstGeom>
+          <a:noFill/>
+        </p:spPr>
+        <p:txBody>
+          <a:bodyPr wrap="square">
+            <a:spAutoFit/>
+          </a:bodyPr>
+          <a:lstStyle/>
+          <a:p>
+            <a:pPr algn="r"/>
+            <a:r>
+              <a:rPr sz="1200" b="0">
+                <a:solidFill>
+                  <a:srgbClr val="8B98B0"/>
+                </a:solidFill>
+                <a:latin typeface="Calibri"/>
+              </a:rPr>
+              <a:t>19 / 19</a:t>
+            </a:r>
+          </a:p>
+        </p:txBody>
+      </p:sp>
+      <p:sp>
+        <p:nvSpPr>
+          <p:cNvPr id="5" name="TextBox 4"/>
+          <p:cNvSpPr txBox="1"/>
+          <p:nvPr/>
+        </p:nvSpPr>
+        <p:spPr>
+          <a:xfrm>
+            <a:off x="548640" y="777240"/>
+            <a:ext cx="11064240" cy="777240"/>
+          </a:xfrm>
+          <a:prstGeom prst="rect">
+            <a:avLst/>
+          </a:prstGeom>
+          <a:noFill/>
+        </p:spPr>
+        <p:txBody>
+          <a:bodyPr wrap="square">
+            <a:spAutoFit/>
+          </a:bodyPr>
+          <a:lstStyle/>
+          <a:p>
+            <a:pPr algn="l"/>
+            <a:r>
+              <a:rPr sz="2700" b="1">
+                <a:solidFill>
+                  <a:srgbClr val="E6EDF8"/>
+                </a:solidFill>
+                <a:latin typeface="Calibri"/>
+              </a:rPr>
+              <a:t>Quellen &amp; TL;DR</a:t>
+            </a:r>
+          </a:p>
+        </p:txBody>
+      </p:sp>
+      <p:sp>
+        <p:nvSpPr>
+          <p:cNvPr id="6" name="Rectangle 5"/>
+          <p:cNvSpPr/>
+          <p:nvPr/>
+        </p:nvSpPr>
+        <p:spPr>
+          <a:xfrm>
+            <a:off x="594360" y="1481328"/>
+            <a:ext cx="2011680" cy="41148"/>
+          </a:xfrm>
+          <a:prstGeom prst="rect">
+            <a:avLst/>
+          </a:prstGeom>
+          <a:solidFill>
+            <a:srgbClr val="22D3EE"/>
+          </a:solidFill>
+          <a:ln>
+            <a:noFill/>
+          </a:ln>
+          <a:effectLst/>
+        </p:spPr>
+        <p:style>
+          <a:lnRef idx="1">
+            <a:schemeClr val="accent1"/>
+          </a:lnRef>
+          <a:fillRef idx="3">
+            <a:schemeClr val="accent1"/>
+          </a:fillRef>
+          <a:effectRef idx="2">
+            <a:schemeClr val="accent1"/>
+          </a:effectRef>
+          <a:fontRef idx="minor">
+            <a:schemeClr val="lt1"/>
+          </a:fontRef>
+        </p:style>
+        <p:txBody>
+          <a:bodyPr rtlCol="0" anchor="ctr"/>
+          <a:lstStyle/>
+          <a:p>
+            <a:pPr algn="ctr"/>
+          </a:p>
+        </p:txBody>
+      </p:sp>
+      <p:sp>
+        <p:nvSpPr>
+          <p:cNvPr id="7" name="TextBox 6"/>
+          <p:cNvSpPr txBox="1"/>
+          <p:nvPr/>
+        </p:nvSpPr>
+        <p:spPr>
+          <a:xfrm>
+            <a:off x="640080" y="1737360"/>
+            <a:ext cx="10972800" cy="1554480"/>
+          </a:xfrm>
+          <a:prstGeom prst="rect">
+            <a:avLst/>
+          </a:prstGeom>
+          <a:noFill/>
+        </p:spPr>
+        <p:txBody>
+          <a:bodyPr wrap="none">
+            <a:spAutoFit/>
+          </a:bodyPr>
+          <a:lstStyle/>
+          <a:p>
+            <a:pPr algn="l"/>
+            <a:r>
+              <a:rPr sz="1400" b="1">
+                <a:solidFill>
+                  <a:srgbClr val="22D3EE"/>
+                </a:solidFill>
+                <a:latin typeface="Calibri"/>
+              </a:rPr>
+              <a:t>Guides von @affaanmustafa (X-Threads; lokal unter ecc/):</a:t>
+            </a:r>
+          </a:p>
+          <a:p>
+            <a:pPr algn="l"/>
+            <a:r>
+              <a:rPr sz="1150" b="0">
+                <a:solidFill>
+                  <a:srgbClr val="E6EDF8"/>
+                </a:solidFill>
+                <a:latin typeface="Calibri"/>
+              </a:rPr>
+              <a:t>Shortform: https://x.com/affaanmustafa/status/2012378465664745795</a:t>
+            </a:r>
+          </a:p>
+          <a:p>
+            <a:pPr algn="l"/>
+            <a:r>
+              <a:rPr sz="1150" b="0">
+                <a:solidFill>
+                  <a:srgbClr val="E6EDF8"/>
+                </a:solidFill>
+                <a:latin typeface="Calibri"/>
+              </a:rPr>
+              <a:t>Longform:  https://x.com/affaanmustafa/status/2014040193557471352</a:t>
+            </a:r>
+          </a:p>
+          <a:p>
+            <a:pPr algn="l"/>
+            <a:r>
+              <a:rPr sz="1150" b="0">
+                <a:solidFill>
+                  <a:srgbClr val="E6EDF8"/>
+                </a:solidFill>
+                <a:latin typeface="Calibri"/>
+              </a:rPr>
+              <a:t>Security:  https://x.com/affaanmustafa/status/2033263813387223421</a:t>
+            </a:r>
+          </a:p>
+        </p:txBody>
+      </p:sp>
+      <p:sp>
+        <p:nvSpPr>
+          <p:cNvPr id="8" name="TextBox 7"/>
+          <p:cNvSpPr txBox="1"/>
+          <p:nvPr/>
+        </p:nvSpPr>
+        <p:spPr>
+          <a:xfrm>
+            <a:off x="640080" y="3383280"/>
+            <a:ext cx="10972800" cy="3108960"/>
+          </a:xfrm>
+          <a:prstGeom prst="rect">
+            <a:avLst/>
+          </a:prstGeom>
+          <a:noFill/>
+        </p:spPr>
+        <p:txBody>
+          <a:bodyPr wrap="none">
+            <a:spAutoFit/>
+          </a:bodyPr>
+          <a:lstStyle/>
+          <a:p>
+            <a:pPr algn="l"/>
+            <a:r>
+              <a:rPr sz="1600" b="1">
+                <a:solidFill>
+                  <a:srgbClr val="22D3EE"/>
+                </a:solidFill>
+                <a:latin typeface="Calibri"/>
+              </a:rPr>
+              <a:t>TL;DR — wie der Erfinder:</a:t>
+            </a:r>
+          </a:p>
+          <a:p>
+            <a:pPr algn="l"/>
+            <a:r>
+              <a:rPr sz="1300" b="0">
+                <a:solidFill>
+                  <a:srgbClr val="E6EDF8"/>
+                </a:solidFill>
+                <a:latin typeface="Calibri"/>
+              </a:rPr>
+              <a:t>1. In Phasen: Research → /plan → /feature-dev+TDD → /code-review → Verify.</a:t>
+            </a:r>
+          </a:p>
+          <a:p>
+            <a:pPr algn="l"/>
+            <a:r>
+              <a:rPr sz="1300" b="0">
+                <a:solidFill>
+                  <a:srgbClr val="E6EDF8"/>
+                </a:solidFill>
+                <a:latin typeface="Calibri"/>
+              </a:rPr>
+              <a:t>2. Kontext sauber: &lt;10 MCPs, billigstes Modell, modulare Dateien, strategisch compacten.</a:t>
+            </a:r>
+          </a:p>
+          <a:p>
+            <a:pPr algn="l"/>
+            <a:r>
+              <a:rPr sz="1300" b="0">
+                <a:solidFill>
+                  <a:srgbClr val="E6EDF8"/>
+                </a:solidFill>
+                <a:latin typeface="Calibri"/>
+              </a:rPr>
+              <a:t>3. Persistieren: /save-session · /resume-session.</a:t>
+            </a:r>
+          </a:p>
+          <a:p>
+            <a:pPr algn="l"/>
+            <a:r>
+              <a:rPr sz="1300" b="0">
+                <a:solidFill>
+                  <a:srgbClr val="E6EDF8"/>
+                </a:solidFill>
+                <a:latin typeface="Calibri"/>
+              </a:rPr>
+              <a:t>4. Lernen: /learn-eval → /evolve → /promote.</a:t>
+            </a:r>
+          </a:p>
+          <a:p>
+            <a:pPr algn="l"/>
+            <a:r>
+              <a:rPr sz="1300" b="0">
+                <a:solidFill>
+                  <a:srgbClr val="E6EDF8"/>
+                </a:solidFill>
+                <a:latin typeface="Calibri"/>
+              </a:rPr>
+              <a:t>5. Security zuerst: RTK aktiv, Hooks/AgentShield bewusst, nie blind ausführen.</a:t>
+            </a:r>
+          </a:p>
+          <a:p>
+            <a:pPr algn="l"/>
+            <a:r>
+              <a:rPr sz="1300" b="0">
+                <a:solidFill>
+                  <a:srgbClr val="E6EDF8"/>
+                </a:solidFill>
+                <a:latin typeface="Calibri"/>
+              </a:rPr>
+              <a:t>6. Unsicher? /ecc-guide · ecc doctor · die drei Original-Guides.</a:t>
             </a:r>
           </a:p>
         </p:txBody>
@@ -10399,7 +11073,7 @@
                 </a:solidFill>
                 <a:latin typeface="Calibri"/>
               </a:rPr>
-              <a:t>2 / 18</a:t>
+              <a:t>2 / 19</a:t>
             </a:r>
           </a:p>
         </p:txBody>
@@ -11044,7 +11718,7 @@
                 </a:solidFill>
                 <a:latin typeface="Calibri"/>
               </a:rPr>
-              <a:t>3 / 18</a:t>
+              <a:t>3 / 19</a:t>
             </a:r>
           </a:p>
         </p:txBody>
@@ -12033,7 +12707,7 @@
                 </a:solidFill>
                 <a:latin typeface="Calibri"/>
               </a:rPr>
-              <a:t>4 / 18</a:t>
+              <a:t>4 / 19</a:t>
             </a:r>
           </a:p>
         </p:txBody>
@@ -12659,7 +13333,7 @@
                 </a:solidFill>
                 <a:latin typeface="Calibri"/>
               </a:rPr>
-              <a:t>5 / 18</a:t>
+              <a:t>5 / 19</a:t>
             </a:r>
           </a:p>
         </p:txBody>
@@ -13708,7 +14382,7 @@
                 </a:solidFill>
                 <a:latin typeface="Calibri"/>
               </a:rPr>
-              <a:t>6 / 18</a:t>
+              <a:t>6 / 19</a:t>
             </a:r>
           </a:p>
         </p:txBody>
@@ -14569,7 +15243,7 @@
                 </a:solidFill>
                 <a:latin typeface="Calibri"/>
               </a:rPr>
-              <a:t>7 / 18</a:t>
+              <a:t>7 / 19</a:t>
             </a:r>
           </a:p>
         </p:txBody>
@@ -15172,7 +15846,7 @@
                 </a:solidFill>
                 <a:latin typeface="Calibri"/>
               </a:rPr>
-              <a:t>8 / 18</a:t>
+              <a:t>8 / 19</a:t>
             </a:r>
           </a:p>
         </p:txBody>

--- a/docs/ECC-Harness-Guide.de.pptx
+++ b/docs/ECC-Harness-Guide.de.pptx
@@ -25,6 +25,7 @@
     <p:sldId id="273" r:id="rId24"/>
     <p:sldId id="274" r:id="rId25"/>
     <p:sldId id="275" r:id="rId26"/>
+    <p:sldId id="276" r:id="rId27"/>
   </p:sldIdLst>
   <p:sldSz cx="12191695" cy="6858000" type="screen4x3"/>
   <p:notesSz cx="6858000" cy="9144000"/>
@@ -10946,6 +10947,81 @@
 </p:sld>
 </file>
 
+<file path=ppt/slides/slide21.xml><?xml version="1.0" encoding="utf-8"?>
+<p:sld xmlns:a="http://schemas.openxmlformats.org/drawingml/2006/main" xmlns:p="http://schemas.openxmlformats.org/presentationml/2006/main" xmlns:r="http://schemas.openxmlformats.org/officeDocument/2006/relationships">
+  <p:cSld>
+    <p:spTree>
+      <p:nvGrpSpPr>
+        <p:cNvPr id="1" name=""/>
+        <p:cNvGrpSpPr/>
+        <p:nvPr/>
+      </p:nvGrpSpPr>
+      <p:grpSpPr/>
+      <p:sp>
+        <p:nvSpPr>
+          <p:cNvPr id="2" name="Title 1"/>
+          <p:cNvSpPr>
+            <a:spLocks noGrp="1"/>
+          </p:cNvSpPr>
+          <p:nvPr>
+            <p:ph type="title"/>
+          </p:nvPr>
+        </p:nvSpPr>
+        <p:spPr/>
+        <p:txBody>
+          <a:bodyPr/>
+          <a:lstStyle/>
+          <a:p>
+            <a:r>
+              <a:t>15. Aktivierungs-Status (Stand 2026-06-05)</a:t>
+            </a:r>
+          </a:p>
+        </p:txBody>
+      </p:sp>
+      <p:sp>
+        <p:nvSpPr>
+          <p:cNvPr id="3" name="Content Placeholder 2"/>
+          <p:cNvSpPr>
+            <a:spLocks noGrp="1"/>
+          </p:cNvSpPr>
+          <p:nvPr>
+            <p:ph idx="1"/>
+          </p:nvPr>
+        </p:nvSpPr>
+        <p:spPr/>
+        <p:txBody>
+          <a:bodyPr wrap="square"/>
+          <a:lstStyle/>
+          <a:p>
+            <a:r>
+              <a:t>State-Sync aktiv (Variante A, projekt-lokal): SessionStart-&gt;pre, Stop/PreCompact-&gt;post; WORKING-CONTEXT.md wird aus state/ gespiegelt; ecc/-Guard unberuehrt.</a:t>
+            </a:r>
+          </a:p>
+          <a:p>
+            <a:r>
+              <a:t>Globale ecc-onboard.md-Drift behoben (6,3K -&gt; 13K, mit State-Sync-Verdrahtung + consumer-scaffold).</a:t>
+            </a:r>
+          </a:p>
+          <a:p>
+            <a:r>
+              <a:t>Extras global gelayert: rpi-Advisors, attribution-policy.md, contexts/dev+review; install-vps.sh deployt das kuenftig automatisch.</a:t>
+            </a:r>
+          </a:p>
+          <a:p>
+            <a:r>
+              <a:t>Unberuehrt: ECC-Core (git status -- ecc/ leer), RTK-Hook (PreToolUse:Bash), globale ECC-Lifecycle-Hooks.</a:t>
+            </a:r>
+          </a:p>
+        </p:txBody>
+      </p:sp>
+    </p:spTree>
+  </p:cSld>
+  <p:clrMapOvr>
+    <a:masterClrMapping/>
+  </p:clrMapOvr>
+</p:sld>
+</file>
+
 <file path=ppt/slides/slide3.xml><?xml version="1.0" encoding="utf-8"?>
 <p:sld xmlns:a="http://schemas.openxmlformats.org/drawingml/2006/main" xmlns:p="http://schemas.openxmlformats.org/presentationml/2006/main" xmlns:r="http://schemas.openxmlformats.org/officeDocument/2006/relationships">
   <p:cSld>

--- a/docs/ECC-Harness-Guide.de.pptx
+++ b/docs/ECC-Harness-Guide.de.pptx
@@ -3285,7 +3285,7 @@
               </a:defRPr>
             </a:pPr>
             <a:r>
-              <a:t>Global aktiv in ~/.claude · ECC 2.0.0-rc.1 (core, führend) · RTK-sicher.</a:t>
+              <a:t>ECC 2.0.0-rc.1 als globales Plugin ecc@ecc (führend) · Schicht-2-Extras im Repo · RTK-sicher.</a:t>
             </a:r>
           </a:p>
           <a:p>
@@ -3300,7 +3300,7 @@
               </a:defRPr>
             </a:pPr>
             <a:r>
-              <a:t>Quelle/Re-Install: /root/projekte/Claude Code BestPractice → ./install-vps.sh</a:t>
+              <a:t>Seit der Plugin-only-Migration (2026-06-10): keine vendored ecc/-Kopie mehr, claude-mem/superpowers deaktiviert.</a:t>
             </a:r>
           </a:p>
           <a:p>
@@ -3330,7 +3330,7 @@
               </a:defRPr>
             </a:pPr>
             <a:r>
-              <a:t>Single Source ist diese Markdown-Datei (docs/ECC-Harness-Guide.de.md). Die Word-/PowerPoint-Snapshots werden daraus gebaut: bestpractice-extras/scripts/build-docs/. Stand: 2026-06-05.</a:t>
+              <a:t>Single Source ist diese Markdown-Datei (docs/ECC-Harness-Guide.de.md). Die Word-/PowerPoint-Snapshots werden daraus gebaut: bestpractice-extras/scripts/build-docs/. Stand: 2026-06-10.</a:t>
             </a:r>
           </a:p>
         </p:txBody>
@@ -3503,7 +3503,7 @@
             </a:pPr>
             <a:r>
               <a:rPr sz="1100" b="0"/>
-              <a:t>1 · RESEARCH — Explore-Agent: Routing/Handler/Tests kartieren (+ claude-mem) — Haiku — research.md</a:t>
+              <a:t>1 · RESEARCH — Explore-Agent: Routing/Handler/Tests kartieren (+ memory-MCP) — Haiku — research.md</a:t>
             </a:r>
           </a:p>
           <a:p>
@@ -4007,7 +4007,7 @@
             </a:pPr>
             <a:r>
               <a:rPr sz="1500" b="0"/>
-              <a:t>Session-Start — /start · claude-mem injiziert Kontext (ab 2. Session) · rtk gain — nahtlos weiter, wo du warst</a:t>
+              <a:t>Session-Start — /start (State-Sync PRE + rtk-Budget + Agenda) — nahtlos weiter, wo du warst</a:t>
             </a:r>
           </a:p>
           <a:p>
@@ -4018,7 +4018,7 @@
             </a:pPr>
             <a:r>
               <a:rPr sz="1500" b="0"/>
-              <a:t>Vor großer Aufgabe — /resume-session · /mem-search „schon gelöst?" — Alt-Wissen nutzen statt neu lösen</a:t>
+              <a:t>Vor großer Aufgabe — /resume-session · memory-MCP search_nodes „schon gelöst?" · /instinct-status — Alt-Wissen nutzen statt neu lösen</a:t>
             </a:r>
           </a:p>
           <a:p>
@@ -4246,7 +4246,7 @@
             </a:pPr>
             <a:r>
               <a:rPr sz="1100" b="0"/>
-              <a:t>Bug — /systematic-debugging — Root-Cause vor Fix</a:t>
+              <a:t>Bug — reproduzieren + failing Test (ecc:tdd-workflow) — Root-Cause vor Fix, nie blind fixen</a:t>
             </a:r>
           </a:p>
           <a:p>
@@ -4257,7 +4257,7 @@
             </a:pPr>
             <a:r>
               <a:rPr sz="1100" b="0"/>
-              <a:t>Projekt ECC-ready machen — /ecc-onboard — Stack erkennen → 1× OK → Rules/Skills + PROJECT_RULES.md + state/</a:t>
+              <a:t>Projekt ECC-ready machen — /ecc-onboard — Dry-Run → 1× OK → De-Cruft + Slim-Scaffold (env + state/ + PROJECT_RULES.md) + Abnahme</a:t>
             </a:r>
           </a:p>
           <a:p>
@@ -4636,7 +4636,7 @@
             </a:pPr>
             <a:r>
               <a:rPr sz="1200" b="0"/>
-              <a:t>Faustregel: 20–30 MCPs konfiguriert, aber &lt; 10 aktiv / &lt; 80 Tools. Ungenutztes pro Projekt mit /mcp deaktivieren — das Kontextfenster ist kostbar.</a:t>
+              <a:t>Faustregel: &lt; 10 MCPs aktiv / &lt; 80 Tools. Ungenutztes pro Projekt mit /mcp deaktivieren — das Kontextfenster ist kostbar.</a:t>
             </a:r>
           </a:p>
           <a:p>
@@ -4647,7 +4647,95 @@
             </a:pPr>
             <a:r>
               <a:rPr sz="1200" b="0"/>
-              <a:t>Bei dir aktiv (global):</a:t>
+              <a:t>Das ECC-Plugin bringt 6 MCP-Server mit (automatisch verfügbar, nichts zu konfigurieren):</a:t>
+            </a:r>
+          </a:p>
+          <a:p>
+            <a:pPr>
+              <a:spcAft>
+                <a:spcPts val="300"/>
+              </a:spcAft>
+            </a:pPr>
+            <a:r>
+              <a:rPr sz="1200" b="1"/>
+              <a:t>Aufgabe · MCP (via ECC) · Hinweis</a:t>
+            </a:r>
+          </a:p>
+          <a:p>
+            <a:pPr lvl="1">
+              <a:spcAft>
+                <a:spcPts val="300"/>
+              </a:spcAft>
+            </a:pPr>
+            <a:r>
+              <a:rPr sz="1100" b="0"/>
+              <a:t>Frühere Arbeit / Wissensgraph — memory — search_nodes / open_nodes / create_entities — deine primäre Memory-Quelle (§11)</a:t>
+            </a:r>
+          </a:p>
+          <a:p>
+            <a:pPr lvl="1">
+              <a:spcAft>
+                <a:spcPts val="300"/>
+              </a:spcAft>
+            </a:pPr>
+            <a:r>
+              <a:rPr sz="1100" b="0"/>
+              <a:t>Aktuelle Library-/API-Doku — context7 — React, Prisma, Next.js … statt veraltetem Wissen. Läuft über ECC (`mcp__plugin_ecc_context7__*`) — das offizielle context7-Plugin bleibt bewusst aus (keine Dubletten)</a:t>
+            </a:r>
+          </a:p>
+          <a:p>
+            <a:pPr lvl="1">
+              <a:spcAft>
+                <a:spcPts val="300"/>
+              </a:spcAft>
+            </a:pPr>
+            <a:r>
+              <a:rPr sz="1100" b="0"/>
+              <a:t>GitHub (PRs, Issues, Code-Suche) — github — ergänzt die gh-CLI</a:t>
+            </a:r>
+          </a:p>
+          <a:p>
+            <a:pPr lvl="1">
+              <a:spcAft>
+                <a:spcPts val="300"/>
+              </a:spcAft>
+            </a:pPr>
+            <a:r>
+              <a:rPr sz="1100" b="0"/>
+              <a:t>Web-Recherche / Discovery — exa — breite Suche, wenn GitHub+Docs nicht reichen</a:t>
+            </a:r>
+          </a:p>
+          <a:p>
+            <a:pPr lvl="1">
+              <a:spcAft>
+                <a:spcPts val="300"/>
+              </a:spcAft>
+            </a:pPr>
+            <a:r>
+              <a:rPr sz="1100" b="0"/>
+              <a:t>Browser / E2E / Screenshots — playwright — headless Automation, visuelle Tests</a:t>
+            </a:r>
+          </a:p>
+          <a:p>
+            <a:pPr lvl="1">
+              <a:spcAft>
+                <a:spcPts val="300"/>
+              </a:spcAft>
+            </a:pPr>
+            <a:r>
+              <a:rPr sz="1100" b="0"/>
+              <a:t>Schrittweises Reasoning — sequential-thinking — komplexe Mehrschritt-Probleme (s. §15)</a:t>
+            </a:r>
+          </a:p>
+          <a:p>
+            <a:pPr>
+              <a:spcAft>
+                <a:spcPts val="300"/>
+              </a:spcAft>
+            </a:pPr>
+            <a:r>
+              <a:rPr sz="1200" b="0"/>
+              <a:t>Dazu unabhängig von ECC:</a:t>
             </a:r>
           </a:p>
           <a:p>
@@ -4669,7 +4757,7 @@
             </a:pPr>
             <a:r>
               <a:rPr sz="1100" b="0"/>
-              <a:t>PDF/Word/Excel/PPTX lesen — markitdown — Dokumente → Markdown (lokal, global aktiv)</a:t>
+              <a:t>PDF/Word/Excel/PPTX lesen — markitdown — Dokumente → Markdown (lokal)</a:t>
             </a:r>
           </a:p>
           <a:p>
@@ -4680,95 +4768,7 @@
             </a:pPr>
             <a:r>
               <a:rPr sz="1100" b="0"/>
-              <a:t>Aktuelle Library-/API-Doku — context7 — React, Prisma, Next.js … statt veraltetem Wissen (Plugin)</a:t>
-            </a:r>
-          </a:p>
-          <a:p>
-            <a:pPr lvl="1">
-              <a:spcAft>
-                <a:spcPts val="300"/>
-              </a:spcAft>
-            </a:pPr>
-            <a:r>
-              <a:rPr sz="1100" b="0"/>
-              <a:t>Frühere Arbeit / „schon gelöst?" — claude-mem — deine Memory-Quelle: /mem-search, Auto-Injektion ab 2. Session</a:t>
-            </a:r>
-          </a:p>
-          <a:p>
-            <a:pPr lvl="1">
-              <a:spcAft>
-                <a:spcPts val="300"/>
-              </a:spcAft>
-            </a:pPr>
-            <a:r>
-              <a:rPr sz="1100" b="0"/>
-              <a:t>Dienste anbinden — claude.ai-Connectoren — n8n · Notion · Gamma · Google Drive · Microsoft Learn · Kiwi</a:t>
-            </a:r>
-          </a:p>
-          <a:p>
-            <a:pPr lvl="1">
-              <a:spcAft>
-                <a:spcPts val="300"/>
-              </a:spcAft>
-            </a:pPr>
-            <a:r>
-              <a:rPr sz="1100" b="0"/>
-              <a:t>Bash-Token sparen — RTK (Hook, kein MCP) — 60–90 % Ersparnis, läuft transparent global</a:t>
-            </a:r>
-          </a:p>
-          <a:p>
-            <a:pPr lvl="1">
-              <a:spcAft>
-                <a:spcPts val="300"/>
-              </a:spcAft>
-            </a:pPr>
-            <a:r>
-              <a:rPr sz="1100" b="0"/>
-              <a:t>Semantische Code-/Doku-Suche — mgrep (CLI/Skill, kein MCP) — ~50 % weniger Token als grep — Details in §15</a:t>
-            </a:r>
-          </a:p>
-          <a:p>
-            <a:pPr>
-              <a:spcAft>
-                <a:spcPts val="300"/>
-              </a:spcAft>
-            </a:pPr>
-            <a:r>
-              <a:rPr sz="1200" b="0"/>
-              <a:t>Optional / empfohlen — NICHT installiert, bei Bedarf nachrüsten:</a:t>
-            </a:r>
-          </a:p>
-          <a:p>
-            <a:pPr>
-              <a:spcAft>
-                <a:spcPts val="300"/>
-              </a:spcAft>
-            </a:pPr>
-            <a:r>
-              <a:rPr sz="1200" b="1"/>
-              <a:t>Aufgabe · MCP / Tool · Hinweis</a:t>
-            </a:r>
-          </a:p>
-          <a:p>
-            <a:pPr lvl="1">
-              <a:spcAft>
-                <a:spcPts val="300"/>
-              </a:spcAft>
-            </a:pPr>
-            <a:r>
-              <a:rPr sz="1100" b="0"/>
-              <a:t>Web-Recherche / Discovery — exa — breite Suche, wenn GitHub+Docs nicht reichen</a:t>
-            </a:r>
-          </a:p>
-          <a:p>
-            <a:pPr lvl="1">
-              <a:spcAft>
-                <a:spcPts val="300"/>
-              </a:spcAft>
-            </a:pPr>
-            <a:r>
-              <a:rPr sz="1100" b="0"/>
-              <a:t>GitHub (PRs, Issues, Code-Suche) — github — du nutzt die gh-CLI statt MCP</a:t>
+              <a:t>Dienste anbinden — claude.ai-Connectoren — n8n · Notion · Gamma · Google Drive · Microsoft Learn …</a:t>
             </a:r>
           </a:p>
         </p:txBody>
@@ -4897,7 +4897,7 @@
             </a:pPr>
             <a:r>
               <a:rPr sz="1500" b="0"/>
-              <a:t>Browser / E2E / Screenshots — playwright — headless Automation, visuelle Tests</a:t>
+              <a:t>Bash-Token sparen — RTK (Hook, kein MCP) — 60–90 % Ersparnis, läuft transparent global</a:t>
             </a:r>
           </a:p>
           <a:p>
@@ -4908,18 +4908,7 @@
             </a:pPr>
             <a:r>
               <a:rPr sz="1500" b="0"/>
-              <a:t>Strukturierter Wissensgraph — memory — NICHT nötig, claude-mem deckt das ab</a:t>
-            </a:r>
-          </a:p>
-          <a:p>
-            <a:pPr lvl="1">
-              <a:spcAft>
-                <a:spcPts val="300"/>
-              </a:spcAft>
-            </a:pPr>
-            <a:r>
-              <a:rPr sz="1500" b="0"/>
-              <a:t>Schrittweises Reasoning — sequential-thinking — komplexe Mehrschritt-Probleme (s. §15)</a:t>
+              <a:t>Semantische Code-/Doku-Suche — mgrep (CLI/Skill, kein MCP) — ~50 % weniger Token als grep — Details in §15</a:t>
             </a:r>
           </a:p>
           <a:p>
@@ -4930,7 +4919,7 @@
             </a:pPr>
             <a:r>
               <a:rPr sz="1600" b="0"/>
-              <a:t>Memory-Klarstellung: Der „memory"-MCP (Wissensgraph) ist NICHT installiert und nicht nötig — claude-mem ist deine primäre Memory-Quelle (§11). EINE Quelle pro Projekt, sonst doppelte Wahrheit.</a:t>
+              <a:t>Memory-Klarstellung (seit 2026-06-10 umgedreht): Der memory-MCP (Wissensgraph) IST installiert (via ECC) und ist deine primäre Memory-Quelle; claude-mem ist deaktiviert. EINE Quelle pro Projekt, sonst doppelte Wahrheit. ⚠️ Die Graph-Datei liegt im npx-Cache (~/.npm/_npx/&lt;hash&gt;/…/memory.jsonl, kein MEMORY_FILE_PATH gesetzt) — kompakte Schlüssel-Fakten dort, langlebige Wahrheit zusätzlich in state//Doku (Git).</a:t>
             </a:r>
           </a:p>
         </p:txBody>
@@ -5147,7 +5136,7 @@
             </a:pPr>
             <a:r>
               <a:rPr sz="1200" b="0"/>
-              <a:t>Agenten-Zuweisungen (Default): security-reviewer → Opus (darf nichts übersehen) · architect, planner → Opus · code-reviewer, tdd-guide, build-error-resolver → Sonnet · doc-updater, code-tour → Haiku.</a:t>
+              <a:t>Agenten-Zuweisungen (automatisch!): Jeder ECC-Agent trägt sein Modell als model:-Frontmatter in seiner Definition — du wählst nichts: planner, architect → Opus · Reviewer, Build-Resolver, tdd-guide, security-reviewer u. a. → Sonnet · doc-updater → Haiku. Das gilt unabhängig vom Modell deiner Haupt-Session; manuell überschreiben nur bewusst (Agent-Tool-Parameter model).</a:t>
             </a:r>
           </a:p>
           <a:p>
@@ -5320,7 +5309,7 @@
             </a:pPr>
             <a:r>
               <a:rPr sz="1200" b="0"/>
-              <a:t>claude-mem ist deine primäre, persistente Memory-Quelle:</a:t>
+              <a:t>Drei Gedächtnisse, drei Aufgaben (claude-mem ist deaktiviert):</a:t>
             </a:r>
           </a:p>
           <a:p>
@@ -5331,7 +5320,7 @@
             </a:pPr>
             <a:r>
               <a:rPr sz="1200" b="0"/>
-              <a:t>• Automatisch: injiziert relevanten Kontext aus früheren Sessions ab der 2. Session je Projekt — ohne Zutun.</a:t>
+              <a:t>• memory-MCP (Wissensgraph, via ECC): Fakten als Entities/Relations/Observations. Aktiv nutzen: search_nodes („schon gelöst?"), open_nodes, create_entities/add_observations („Merke dir: …") — Claude speichert nicht alles von selbst, wichtige Entscheidungen explizit merken lassen.</a:t>
             </a:r>
           </a:p>
           <a:p>
@@ -5342,7 +5331,7 @@
             </a:pPr>
             <a:r>
               <a:rPr sz="1200" b="0"/>
-              <a:t>• /mem-search „…": gezielt frühere Arbeit finden („schon gelöst?", „wie haben wir X gemacht?").</a:t>
+              <a:t>• Instincts (Continuous Learning): ECC sammelt Arbeitsmuster automatisch (observe-Hooks, Profil standard); einsehen mit /instinct-status, befördern mit /promote.</a:t>
             </a:r>
           </a:p>
           <a:p>
@@ -5353,7 +5342,7 @@
             </a:pPr>
             <a:r>
               <a:rPr sz="1200" b="0"/>
-              <a:t>• Erfasst von selbst: Beobachtungen/Entscheidungen werden automatisch gespeichert — kein manuelles Speichern.</a:t>
+              <a:t>• state/ + WORKING-CONTEXT.md (State-Sync, Schicht 2): Projekt-Zustand, automatisch via SessionStart/Stop-Hooks in onboardeten Projekten; von Hand pflegst du state/.md.</a:t>
             </a:r>
           </a:p>
           <a:p>
@@ -5441,7 +5430,7 @@
             </a:pPr>
             <a:r>
               <a:rPr sz="1200" b="0"/>
-              <a:t>Gute Session-Datei: Was funktioniert hat (mit Evidenz) · Was nicht ging · Was offen ist. EINE Memory-Quelle: claude-mem ist gesetzt — den generischen „memory"-MCP NICHT zusätzlich aktivieren. Keine Secrets in Memory.</a:t>
+              <a:t>Gute Session-Datei: Was funktioniert hat (mit Evidenz) · Was nicht ging · Was offen ist. EINE Memory-Quelle je Zweck: memory-MCP für Fakten, Instincts für Muster, state/ für Projekt-Zustand — claude-mem bleibt aus. Keine Secrets in Memory.</a:t>
             </a:r>
           </a:p>
         </p:txBody>
@@ -5798,7 +5787,7 @@
             </a:pPr>
             <a:r>
               <a:rPr sz="1600" b="0"/>
-              <a:t>• ECC (Everything Claude Code) von Affaan Mustafa — die dominante Engine: 63 Agents, 249 Skills, ~80 Commands, manifest-basierter Installer, Continuous Learning, Security-Scanning. Global installiert (core-Profil): 80 Commands, 63 Agents, 21 ECC-Skills, rules/ecc = common + 19 Sprach-/Domain-Packs; mehr Skills via --profile full (249).</a:t>
+              <a:t>• ECC (Everything Claude Code) von Affaan Mustafa — die dominante Engine: 63 Agents, 249 Skills, ~80 Commands, Continuous Learning, Security-Scanning, 6 mitgebrachte MCP-Server. Läuft als globales Plugin ecc@ecc, gepinnt auf Upstream-Tag v2.0.0-rc.1 (Cache: ~/.claude/plugins/cache/ecc/ecc/2.0.0-rc.1/) — damit in JEDEM Projekt verfügbar, ohne Kopien im Home oder Repo.</a:t>
             </a:r>
           </a:p>
           <a:p>
@@ -6148,7 +6137,51 @@
             </a:pPr>
             <a:r>
               <a:rPr sz="1200" b="0"/>
-              <a:t>Hooks sind kleine Programme, die von selbst an Lifecycle-Events feuern (vorher prüfen/blockieren, nachher aufräumen/formatieren/protokollieren). Wichtig zu wissen: Die ECC-hooks.json enthält 20+ Hooks, aber das ECC-plugin.json registriert keine Hooks automatisch — sie wurden gezielt in ~/.claude/settings.json aktiviert.</a:t>
+              <a:t>Hooks sind kleine Programme, die von selbst an Lifecycle-Events feuern (vorher prüfen/blockieren, nachher aufräumen/formatieren/protokollieren). Seit der Plugin-Migration registriert das Plugin selbst seine Hooks (hooks/hooks.json, 20+ Stück); welche tatsächlich feuern, steuert das Profil ECC_HOOK_PROFILE pro Scope:</a:t>
+            </a:r>
+          </a:p>
+          <a:p>
+            <a:pPr>
+              <a:spcAft>
+                <a:spcPts val="300"/>
+              </a:spcAft>
+            </a:pPr>
+            <a:r>
+              <a:rPr sz="1200" b="1"/>
+              <a:t>Scope · Profil · Effekt</a:t>
+            </a:r>
+          </a:p>
+          <a:p>
+            <a:pPr lvl="1">
+              <a:spcAft>
+                <a:spcPts val="300"/>
+              </a:spcAft>
+            </a:pPr>
+            <a:r>
+              <a:rPr sz="1100" b="0"/>
+              <a:t>Global (`~/.claude/settings.json`) — minimal — nur Essenzielles: Metriken-Bridge, Session-Speicherung, Session-Auswertung, Kosten-Tracking, Marker</a:t>
+            </a:r>
+          </a:p>
+          <a:p>
+            <a:pPr lvl="1">
+              <a:spcAft>
+                <a:spcPts val="300"/>
+              </a:spcAft>
+            </a:pPr>
+            <a:r>
+              <a:rPr sz="1100" b="0"/>
+              <a:t>Onboarded Projekt (`.claude/settings.json`) — standard — volle Pipeline: quality-gate, console-warn, observe/continuous-learning, governance, context-monitor …</a:t>
+            </a:r>
+          </a:p>
+          <a:p>
+            <a:pPr lvl="1">
+              <a:spcAft>
+                <a:spcPts val="300"/>
+              </a:spcAft>
+            </a:pPr>
+            <a:r>
+              <a:rPr sz="1100" b="0"/>
+              <a:t>(nirgends aktiv) — strict — wie standard + 3 Nag-Erinnerungen (tmux, git-push, commit-quality)</a:t>
             </a:r>
           </a:p>
           <a:p>
@@ -6159,62 +6192,7 @@
             </a:pPr>
             <a:r>
               <a:rPr sz="1200" b="0"/>
-              <a:t>Global aktiv (~/.claude/settings.json):</a:t>
-            </a:r>
-          </a:p>
-          <a:p>
-            <a:pPr>
-              <a:spcAft>
-                <a:spcPts val="300"/>
-              </a:spcAft>
-            </a:pPr>
-            <a:r>
-              <a:rPr sz="1200" b="1"/>
-              <a:t>Hook-Typ · IDs · Zweck</a:t>
-            </a:r>
-          </a:p>
-          <a:p>
-            <a:pPr lvl="1">
-              <a:spcAft>
-                <a:spcPts val="300"/>
-              </a:spcAft>
-            </a:pPr>
-            <a:r>
-              <a:rPr sz="1100" b="0"/>
-              <a:t>PostToolUse — post:quality-gate · post:edit:accumulator · post:edit:console-warn — Quality-Gate nach Edit/Write · Sammel-Formatierung merken · console.log warnen</a:t>
-            </a:r>
-          </a:p>
-          <a:p>
-            <a:pPr lvl="1">
-              <a:spcAft>
-                <a:spcPts val="300"/>
-              </a:spcAft>
-            </a:pPr>
-            <a:r>
-              <a:rPr sz="1100" b="0"/>
-              <a:t>Stop — stop:format-typecheck · stop:check-console-log · stop:session-end — Format+Typecheck · console.log prüfen · Session sichern</a:t>
-            </a:r>
-          </a:p>
-          <a:p>
-            <a:pPr lvl="1">
-              <a:spcAft>
-                <a:spcPts val="300"/>
-              </a:spcAft>
-            </a:pPr>
-            <a:r>
-              <a:rPr sz="1100" b="0"/>
-              <a:t>SessionStart — session:start (Bootstrap) — vorigen Kontext laden, Paketmanager erkennen</a:t>
-            </a:r>
-          </a:p>
-          <a:p>
-            <a:pPr lvl="1">
-              <a:spcAft>
-                <a:spcPts val="300"/>
-              </a:spcAft>
-            </a:pPr>
-            <a:r>
-              <a:rPr sz="1100" b="0"/>
-              <a:t>PreCompact — pre:compact — State sichern vor Kontext-Kompaktierung</a:t>
+              <a:t>Dazu laufen wenige DIRECT-Hooks (Stop: format-typecheck · check-console-log · session-end) überall, no-oppen sich aber ohne relevante Arbeit selbst.</a:t>
             </a:r>
           </a:p>
           <a:p>
@@ -6269,7 +6247,7 @@
             </a:pPr>
             <a:r>
               <a:rPr sz="1200" b="0"/>
-              <a:t>Bewusst abgeschaltet: pre:bash:gateguard-fact-force und pre:edit-write:gateguard-fact-force (GateGuard) via ECC_DISABLED_HOOKS — würden die erste Änderung pro Datei blockieren und Recherche erzwingen (beim normalen Arbeiten störend). Hook-Profil bleibt standard: alle nützlichen Hooks laufen weiter; strict brächte nur drei zusätzliche Nag-Erinnerungen (tmux, git-push, commit-quality).</a:t>
+              <a:t>Bewusst abgeschaltet: GateGuard via ECC_GATEGUARD=off (global) — würde die erste Änderung pro Datei blockieren und Recherche erzwingen (beim normalen Arbeiten störend).</a:t>
             </a:r>
           </a:p>
           <a:p>
@@ -6280,7 +6258,7 @@
             </a:pPr>
             <a:r>
               <a:rPr sz="1200" b="0"/>
-              <a:t>Profil-Steuerung (env in settings.json): ECC_HOOK_PROFILE (minimal/standard/strict) · ECC_DISABLED_HOOKS (gezielt abschalten) · ECC_GOVERNANCE_CAPTURE=1 (Governance-Hooks scharf).</a:t>
+              <a:t>Profil-Steuerung (env in settings.json): ECC_HOOK_PROFILE (minimal/standard/strict) · ECC_GATEGUARD=off (GateGuard aus) · ECC_GOVERNANCE_CAPTURE=1 (Governance-Hooks scharf) · ECC_DISABLED_HOOKS (gezielte ID-Liste, bei dir nicht mehr genutzt). Wirkung erst in frischer Session.</a:t>
             </a:r>
           </a:p>
         </p:txBody>
@@ -6681,7 +6659,7 @@
             </a:pPr>
             <a:r>
               <a:rPr sz="1400" b="0"/>
-              <a:t>• ECC namespace-sicher (rules/ecc/, skills/ecc/) — keine Kollision mit Eigenem.</a:t>
+              <a:t>• ECC namespace-sicher — Core isoliert im Plugin-Cache (ecc@ecc), global verfügbar; kein Projekt-Vendoring (slim/plugin-only) — keine Kollision mit Eigenem.</a:t>
             </a:r>
           </a:p>
           <a:p>
@@ -7084,7 +7062,7 @@
               <a:rPr sz="1400" b="0">
                 <a:latin typeface="Consolas"/>
               </a:rPr>
-              <a:t>cd "/root/projekte/Claude Code BestPractice/ecc"</a:t>
+              <a:t># Plugin-Pfad (Single Source, read-only behandeln):</a:t>
             </a:r>
           </a:p>
           <a:p>
@@ -7097,7 +7075,7 @@
               <a:rPr sz="1400" b="0">
                 <a:latin typeface="Consolas"/>
               </a:rPr>
-              <a:t>node scripts/ecc.js doctor          # Health-Check (claude-home: OK)</a:t>
+              <a:t>ECC=~/.claude/plugins/cache/ecc/ecc/2.0.0-rc.1</a:t>
             </a:r>
           </a:p>
           <a:p>
@@ -7110,7 +7088,7 @@
               <a:rPr sz="1400" b="0">
                 <a:latin typeface="Consolas"/>
               </a:rPr>
-              <a:t>node scripts/ecc.js list-installed  # was ist installiert</a:t>
+              <a:t>node "$ECC/scripts/harness-audit.js"   # Repo-Integritäts-Audit</a:t>
             </a:r>
           </a:p>
           <a:p>
@@ -7123,7 +7101,7 @@
               <a:rPr sz="1400" b="0">
                 <a:latin typeface="Consolas"/>
               </a:rPr>
-              <a:t>node scripts/ecc.js repair          # ECC-Dateien wiederherstellen</a:t>
+              <a:t>node "$ECC/scripts/ecc.js" doctor      # Health-Check</a:t>
             </a:r>
           </a:p>
           <a:p>
@@ -7136,7 +7114,7 @@
               <a:rPr sz="1400" b="0">
                 <a:latin typeface="Consolas"/>
               </a:rPr>
-              <a:t>npx ecc consult "security reviews"  # Advisor: welche Komponenten?</a:t>
+              <a:t># ECC-Update: in ~/.claude/settings.json den Tag anheben …</a:t>
             </a:r>
           </a:p>
           <a:p>
@@ -7149,7 +7127,7 @@
               <a:rPr sz="1400" b="0">
                 <a:latin typeface="Consolas"/>
               </a:rPr>
-              <a:t># Re-Install / Update VPS-weit:</a:t>
+              <a:t>#   extraKnownMarketplaces.ecc.source.ref = "v&lt;neue-version&gt;"</a:t>
             </a:r>
           </a:p>
           <a:p>
@@ -7162,7 +7140,7 @@
               <a:rPr sz="1400" b="0">
                 <a:latin typeface="Consolas"/>
               </a:rPr>
-              <a:t>cd "/root/projekte/Claude Code BestPractice" &amp;&amp; ./install-vps.sh</a:t>
+              <a:t># … dann Claude Code neu starten (Plugin wird neu gecacht).</a:t>
             </a:r>
           </a:p>
           <a:p>
@@ -7173,7 +7151,7 @@
             </a:pPr>
             <a:r>
               <a:rPr sz="1600" b="0"/>
-              <a:t>Slash-Einstieg: /ecc-guide (Onboarding), /harness-audit (Config-Scorecard), /cost-report, /skill-health, /projects.</a:t>
+              <a:t>Slash-Einstieg: /ecc-guide (Onboarding), /harness-audit (Config-Scorecard), /cost-report, /skill-health, /projects. ⚠️ Plugin-/Settings-Änderungen greifen erst nach Neustart von Claude Code (/clear reicht nicht).</a:t>
             </a:r>
           </a:p>
         </p:txBody>
@@ -7302,7 +7280,7 @@
             </a:pPr>
             <a:r>
               <a:rPr sz="1200" b="0"/>
-              <a:t>Der BestPractice-Wrapper koppelt persistenten Projekt-State an ECCs Loop und stellt /mega-plan als Planungs-Vorstufe bereit — rein additiv. Der ECC-Core (ecc/) bleibt unverändert.</a:t>
+              <a:t>Der BestPractice-Wrapper koppelt persistenten Projekt-State an ECCs Loop und stellt /mega-plan als Planungs-Vorstufe bereit — rein additiv. Der ECC-Core (das globale Plugin) bleibt unverändert.</a:t>
             </a:r>
           </a:p>
           <a:p>
@@ -7694,7 +7672,7 @@
             </a:pPr>
             <a:r>
               <a:rPr sz="1200" b="0"/>
-              <a:t>ECC-Core unberührt: Alles liegt in bestpractice-extras/. git diff zeigt keine Änderung unter ecc/. Tiefe Doku: docs/MEGA-WORKFLOW.de.md.</a:t>
+              <a:t>ECC-Core unberührt: Alles liegt in bestpractice-extras/; am Plugin unter ~/.claude/plugins/cache/ecc/ wird nie gepatcht. Tiefe Doku: docs/MEGA-WORKFLOW.de.md.</a:t>
             </a:r>
           </a:p>
         </p:txBody>
@@ -7789,7 +7767,7 @@
                   <a:srgbClr val="FFFFFF"/>
                 </a:solidFill>
               </a:rPr>
-              <a:t>20 · Aktivierungs-Status &amp; behobene Bugs (Stand 2026-06-05)</a:t>
+              <a:t>20 · Aktivierungs-Status (Stand 2026-06-10 — Plugin-only-Migration)</a:t>
             </a:r>
           </a:p>
         </p:txBody>
@@ -7822,96 +7800,85 @@
               </a:spcAft>
             </a:pPr>
             <a:r>
-              <a:rPr sz="1400" b="0"/>
-              <a:t>Das BestPractice-Repo selbst ist onboardet und die Schicht-2-Mechanik ist scharf:</a:t>
-            </a:r>
-          </a:p>
-          <a:p>
-            <a:pPr>
-              <a:spcAft>
-                <a:spcPts val="300"/>
-              </a:spcAft>
-            </a:pPr>
-            <a:r>
-              <a:rPr sz="1400" b="0"/>
-              <a:t>• State-Sync aktiv (Variante A, projekt-lokal): .claude/settings.json enthält additiv SessionStart→pre, Stop→post, PreCompact→post (Aufruf bestpractice-extras/scripts/state-sync/state-sync.js). Der ecc/-Schreibguard bleibt unberührt. state/{context,decisions,progress,tasks}.md ist befüllt, WORKING-CONTEXT.md wird beim Session-Start aus state/ gespiegelt.</a:t>
-            </a:r>
-          </a:p>
-          <a:p>
-            <a:pPr>
-              <a:spcAft>
-                <a:spcPts val="300"/>
-              </a:spcAft>
-            </a:pPr>
-            <a:r>
-              <a:rPr sz="1400" b="0"/>
-              <a:t>• Globale ecc-onboard.md-Drift behoben: war veraltet (6,3 K ohne Schritt 4b/4c); jetzt = Repo-Version (13 K mit State-Sync-Verdrahtung + consumer-scaffold).</a:t>
-            </a:r>
-          </a:p>
-          <a:p>
-            <a:pPr>
-              <a:spcAft>
-                <a:spcPts val="300"/>
-              </a:spcAft>
-            </a:pPr>
-            <a:r>
-              <a:rPr sz="1400" b="0"/>
-              <a:t>• Global gelayerte Extras erweitert: rpi-Advisors (~/.claude/agents/), attribution-policy.md (~/.claude/rules/ecc-extras/), Dynamic-Context-Profile contexts/{dev,review}.md (~/.claude/contexts/). install-vps.sh deployt das künftig automatisch.</a:t>
-            </a:r>
-          </a:p>
-          <a:p>
-            <a:pPr>
-              <a:spcAft>
-                <a:spcPts val="300"/>
-              </a:spcAft>
-            </a:pPr>
-            <a:r>
-              <a:rPr sz="1400" b="0"/>
-              <a:t>• mgrep + LSP verankert: mgrep als Schicht-2-Tool (MXBAI_API_KEY, index.sh); LSP-Plugins typescript-lsp + pyright-lsp user-scoped installiert.</a:t>
-            </a:r>
-          </a:p>
-          <a:p>
-            <a:pPr>
-              <a:spcAft>
-                <a:spcPts val="300"/>
-              </a:spcAft>
-            </a:pPr>
-            <a:r>
-              <a:rPr sz="1400" b="0"/>
-              <a:t>• Unberührt: ECC-Core (git status -- ecc/ leer), RTK-Hook (PreToolUse:Bash global), globale ECC-Lifecycle-Hooks.</a:t>
-            </a:r>
-          </a:p>
-          <a:p>
-            <a:pPr>
-              <a:spcAft>
-                <a:spcPts val="300"/>
-              </a:spcAft>
-            </a:pPr>
-            <a:r>
-              <a:rPr sz="1400" b="0"/>
-              <a:t>Behobene Bugs:</a:t>
-            </a:r>
-          </a:p>
-          <a:p>
-            <a:pPr>
-              <a:spcAft>
-                <a:spcPts val="300"/>
-              </a:spcAft>
-            </a:pPr>
-            <a:r>
-              <a:rPr sz="1400" b="0"/>
-              <a:t>• /ecc-onboard install-plan.js vs install-apply.js (behoben 2026-06-03): install-plan.js übergab kein projectRoot → Install landete im ECC-Repo statt im Zielprojekt. Fix: für Dry-Run immer node "$ECC_REPO/scripts/install-apply.js" --target claude-project --profile &lt;profil&gt; --dry-run aus dem Zielprojekt-Root.</a:t>
-            </a:r>
-          </a:p>
-          <a:p>
-            <a:pPr>
-              <a:spcAft>
-                <a:spcPts val="300"/>
-              </a:spcAft>
-            </a:pPr>
-            <a:r>
-              <a:rPr sz="1400" b="0"/>
-              <a:t>• Attribution-Policy (Schicht-2-Override): Co-Authorship ist für dieses Setup AKTIV (Commits enden mit Co-Authored-By:); der Upstream-Hinweis „Attribution disabled globally" im vendored Core gilt hier bewusst nicht.</a:t>
+              <a:rPr sz="1600" b="0"/>
+              <a:t>Die Migration auf Plugin-only ist abgeschlossen (Commits d99f3d0 + 8293011):</a:t>
+            </a:r>
+          </a:p>
+          <a:p>
+            <a:pPr>
+              <a:spcAft>
+                <a:spcPts val="300"/>
+              </a:spcAft>
+            </a:pPr>
+            <a:r>
+              <a:rPr sz="1600" b="0"/>
+              <a:t>• ECC-Core = globales Plugin ecc@ecc 2.0.0-rc.1, gepinnt auf GitHub affaan-m/ECC Tag v2.0.0-rc.1 (extraKnownMarketplaces in ~/.claude/settings.json). Vendored ecc/ im Repo und der 213-MB-Klon /root/projekte/ECC sind gelöscht.</a:t>
+            </a:r>
+          </a:p>
+          <a:p>
+            <a:pPr>
+              <a:spcAft>
+                <a:spcPts val="300"/>
+              </a:spcAft>
+            </a:pPr>
+            <a:r>
+              <a:rPr sz="1600" b="0"/>
+              <a:t>• ECC-Duplikate im Home entfernt: globale Rules- (117 Dateien, verursachten Auto-Compact), Hooks- und Skills-Kopien sind weg — das Plugin liefert alles. Geblieben: 3 Schicht-2-Command-Symlinks (start, mega-plan, ecc-onboard), skills/learned, skills/system-architektur, rules/ecc-extras/.</a:t>
+            </a:r>
+          </a:p>
+          <a:p>
+            <a:pPr>
+              <a:spcAft>
+                <a:spcPts val="300"/>
+              </a:spcAft>
+            </a:pPr>
+            <a:r>
+              <a:rPr sz="1600" b="0"/>
+              <a:t>• Abgelöst (Plugins auf false): claude-mem → memory-MCP + Instincts + /save-session · superpowers → ECC-Workflows · context7@official + feature-dev → ECC-Pendants. ⚠️ Greift erst nach Neustart von Claude Code.</a:t>
+            </a:r>
+          </a:p>
+          <a:p>
+            <a:pPr>
+              <a:spcAft>
+                <a:spcPts val="300"/>
+              </a:spcAft>
+            </a:pPr>
+            <a:r>
+              <a:rPr sz="1600" b="0"/>
+              <a:t>• Hook-Scope: global minimal + ECC_GATEGUARD=off; onboarded Projekte lokal standard (BestPractice, Werkstattauftraege_codex, Grow3_Automatisierung, Test-ECC, Verladelisten_Hafen). Eigenbau-hooks.py aus Werkstatt/WMS_Test entfernt.</a:t>
+            </a:r>
+          </a:p>
+          <a:p>
+            <a:pPr>
+              <a:spcAft>
+                <a:spcPts val="300"/>
+              </a:spcAft>
+            </a:pPr>
+            <a:r>
+              <a:rPr sz="1600" b="0"/>
+              <a:t>• State-Sync aktiv (GLOBAL): ~/.claude/settings.json → SessionStart→pre, Stop/PreCompact→post über ~/.claude/state-sync/ (Symlink→Repo-Engine), guard-gated. Onboarded Projekte brauchen keine eigenen state-sync-Hooks.</a:t>
+            </a:r>
+          </a:p>
+          <a:p>
+            <a:pPr>
+              <a:spcAft>
+                <a:spcPts val="300"/>
+              </a:spcAft>
+            </a:pPr>
+            <a:r>
+              <a:rPr sz="1600" b="0"/>
+              <a:t>• Backup: kompletter Vor-Migrations-Stand unter /root/harness-backup-20260610/ (inkl. geretteter Eigenarbeit ecc-clone-eigenes/).</a:t>
+            </a:r>
+          </a:p>
+          <a:p>
+            <a:pPr>
+              <a:spcAft>
+                <a:spcPts val="300"/>
+              </a:spcAft>
+            </a:pPr>
+            <a:r>
+              <a:rPr sz="1600" b="0"/>
+              <a:t>• Unberührt: RTK-Hook (PreToolUse:Bash global) · Attribution-Policy (Schicht-2-Override): Co-Authorship AKTIV, der Upstream-Hinweis „Attribution disabled globally" gilt hier bewusst nicht.</a:t>
             </a:r>
           </a:p>
         </p:txBody>
@@ -8040,7 +8007,7 @@
             </a:pPr>
             <a:r>
               <a:rPr sz="1200" b="0"/>
-              <a:t>Original-Guides von @affaanmustafa (als X-Threads veröffentlicht; lokal im Repo unter ecc/):</a:t>
+              <a:t>Original-Guides von @affaanmustafa (als X-Threads veröffentlicht; lokal im Plugin-Cache ~/.claude/plugins/cache/ecc/ecc/2.0.0-rc.1/):</a:t>
             </a:r>
           </a:p>
           <a:p>
@@ -8051,7 +8018,7 @@
             </a:pPr>
             <a:r>
               <a:rPr sz="1200" b="0"/>
-              <a:t>• Shortform-Guide: https://x.com/affaanmustafa/status/2012378465664745795 (ecc/the-shortform-guide.md) — Setup &amp; Philosophie</a:t>
+              <a:t>• Shortform-Guide: https://x.com/affaanmustafa/status/2012378465664745795 (the-shortform-guide.md) — Setup &amp; Philosophie</a:t>
             </a:r>
           </a:p>
           <a:p>
@@ -8062,7 +8029,7 @@
             </a:pPr>
             <a:r>
               <a:rPr sz="1200" b="0"/>
-              <a:t>• Longform-Guide: https://x.com/affaanmustafa/status/2014040193557471352 (ecc/the-longform-guide.md) — Token, Memory, Evals, Parallelisierung</a:t>
+              <a:t>• Longform-Guide: https://x.com/affaanmustafa/status/2014040193557471352 (the-longform-guide.md) — Token, Memory, Evals, Parallelisierung</a:t>
             </a:r>
           </a:p>
           <a:p>
@@ -8073,7 +8040,7 @@
             </a:pPr>
             <a:r>
               <a:rPr sz="1200" b="0"/>
-              <a:t>• Security-Guide: https://x.com/affaanmustafa/status/2033263813387223421 (ecc/the-security-guide.md) — Agent-Security, Pflichtlektüre</a:t>
+              <a:t>• Security-Guide: https://x.com/affaanmustafa/status/2033263813387223421 (the-security-guide.md) — Agent-Security, Pflichtlektüre</a:t>
             </a:r>
           </a:p>
           <a:p>
@@ -8290,7 +8257,7 @@
             </a:pPr>
             <a:r>
               <a:rPr sz="1200" b="0"/>
-              <a:t>ECC ist GLOBAL nach ~/.claude installiert und damit in JEDEM Projekt auf der VPS aktiv (WMS, Jarvis, n8n, Werkstatt …). Die Installation ist bewusst additiv und namespace-sicher:</a:t>
+              <a:t>ECC läuft als globales Plugin und ist damit in JEDEM Projekt auf der VPS verfügbar (WMS, Jarvis, n8n, Werkstatt …). Das Setup ist bewusst schlank und reproduzierbar:</a:t>
             </a:r>
           </a:p>
           <a:p>
@@ -8301,7 +8268,7 @@
             </a:pPr>
             <a:r>
               <a:rPr sz="1200" b="0"/>
-              <a:t>• Namespace-sicher: ECC liegt unter rules/ecc/ und skills/ecc/ — keine Kollision mit Eigenem.</a:t>
+              <a:t>• Plugin-only: Single Source ist ~/.claude/plugins/cache/ecc/ecc/2.0.0-rc.1/ — keine Kopien mehr unter ~/.claude/{rules,hooks,skills,commands} und keine vendored ecc/ im Repo. Update = extraKnownMarketplaces.ecc.source.ref in ~/.claude/settings.json auf neuen Tag setzen.</a:t>
             </a:r>
           </a:p>
           <a:p>
@@ -8323,7 +8290,7 @@
             </a:pPr>
             <a:r>
               <a:rPr sz="1200" b="0"/>
-              <a:t>• Startup-Config additiv: Der Installer lässt settings.json/CLAUDE.md unberührt. Bewusste Aufräum-Schritte (feature-dev-Plugin deaktiviert, context-mode entfernt) wurden separat mit Backup vorgenommen.</a:t>
+              <a:t>• Hook-Zähmung per Profil: global ECC_HOOK_PROFILE=minimal (Nicht-ECC-Projekte ruhig), projekt-lokal standard in onboardeten Projekten (volle Pipeline). Details §14.</a:t>
             </a:r>
           </a:p>
           <a:p>
@@ -8334,7 +8301,7 @@
             </a:pPr>
             <a:r>
               <a:rPr sz="1200" b="0"/>
-              <a:t>• Reproduzierbar: Quelle ist das Repo; Re-Install via ./install-vps.sh (idempotent, mit Backup).</a:t>
+              <a:t>• Backup: kompletter Vor-Migrations-Stand unter /root/harness-backup-20260610/.</a:t>
             </a:r>
           </a:p>
           <a:p>
@@ -8345,7 +8312,7 @@
             </a:pPr>
             <a:r>
               <a:rPr sz="1200" b="0"/>
-              <a:t>Koexistenz mit deinem bestehenden Setup:</a:t>
+              <a:t>Abgelöste Plugins (in enabledPlugins auf false — Änderung greift erst nach Claude-Code-Neustart):</a:t>
             </a:r>
           </a:p>
           <a:p>
@@ -8356,7 +8323,7 @@
             </a:pPr>
             <a:r>
               <a:rPr sz="1200" b="1"/>
-              <a:t>Dein Tool · ECC-Pendant · Empfehlung</a:t>
+              <a:t>Plugin (aus) · ECC-Pendant (führend)</a:t>
             </a:r>
           </a:p>
           <a:p>
@@ -8367,7 +8334,7 @@
             </a:pPr>
             <a:r>
               <a:rPr sz="1100" b="0"/>
-              <a:t>superpowers — tdd-workflow, verification-loop … — Beides nutzbar; bei Doppelung ECC bevorzugen</a:t>
+              <a:t>superpowers — tdd-workflow, verification-loop, dispatching über ECC-Agents</a:t>
             </a:r>
           </a:p>
           <a:p>
@@ -8378,7 +8345,7 @@
             </a:pPr>
             <a:r>
               <a:rPr sz="1100" b="0"/>
-              <a:t>claude-mem — /save-session, continuous-learning-v2 — primäre Memory-Quelle; injiziert Kontext automatisch</a:t>
+              <a:t>claude-mem — memory-MCP (Wissensgraph) + Instincts + /save-session</a:t>
             </a:r>
           </a:p>
           <a:p>
@@ -8389,7 +8356,7 @@
             </a:pPr>
             <a:r>
               <a:rPr sz="1100" b="0"/>
-              <a:t>RTK — Token-Ökonomie (§10) — Ergänzen sich: RTK auf Bash-, ECC auf Workflow-Ebene</a:t>
+              <a:t>context7@official — ECC bringt eigenes context7-MCP mit</a:t>
             </a:r>
           </a:p>
           <a:p>
@@ -8400,7 +8367,7 @@
             </a:pPr>
             <a:r>
               <a:rPr sz="1100" b="0"/>
-              <a:t>codex / superpowers — diverse Skills/Agents — eigenständiger Mehrwert; bleiben aktiv</a:t>
+              <a:t>feature-dev — /feature-dev (ECC-Command)</a:t>
             </a:r>
           </a:p>
           <a:p>
@@ -8411,7 +8378,7 @@
             </a:pPr>
             <a:r>
               <a:rPr sz="1200" b="0"/>
-              <a:t>Aufgeräumt: feature-dev existierte 3-fach — die ECC-Version ist kanonisch, das gleichnamige Plugin wurde deaktiviert. RPI als Plugin wurde entfernt (durch die schlanken Schicht-2-RPI-Berater ersetzt). Bei Namens-Zweifeln eindeutige ECC-Commands nutzen (/harness-audit, /ecc-guide, /ecc-onboard, /instinct-status).</a:t>
+              <a:t>Weiter aktiv neben ECC: codex, mgrep, LSP-Plugins, frontend-design, skill-creator u. a. — eigenständiger Mehrwert ohne Doppelung. Bei Namens-Zweifeln eindeutige ECC-Commands nutzen (/harness-audit, /ecc-guide, /ecc-onboard, /instinct-status).</a:t>
             </a:r>
           </a:p>
         </p:txBody>
@@ -8540,7 +8507,7 @@
             </a:pPr>
             <a:r>
               <a:rPr sz="1400" b="1"/>
-              <a:t>Baustein · Was es ist · Wo (global) · Lebensdauer</a:t>
+              <a:t>Baustein · Was es ist · Wo · Lebensdauer</a:t>
             </a:r>
           </a:p>
           <a:p>
@@ -8551,7 +8518,7 @@
             </a:pPr>
             <a:r>
               <a:rPr sz="1300" b="0"/>
-              <a:t>Skills — Durable Kern: wiederverwendbare Workflow-Bündel, laden on-demand — ~/.claude/skills/ecc/ — langlebig</a:t>
+              <a:t>Skills — Durable Kern: wiederverwendbare Workflow-Bündel, laden on-demand — Plugin `skills/` (alle 249) — langlebig</a:t>
             </a:r>
           </a:p>
           <a:p>
@@ -8562,7 +8529,7 @@
             </a:pPr>
             <a:r>
               <a:rPr sz="1300" b="0"/>
-              <a:t>Commands — Slash-Einstiegspunkte (/plan, /code-review …) — ~/.claude/commands/ — Komfort-Schicht</a:t>
+              <a:t>Commands — Slash-Einstiegspunkte (/plan, /code-review …) — Plugin `commands/` (+ 3 Schicht-2: /start, /mega-plan, /ecc-onboard) — Komfort-Schicht</a:t>
             </a:r>
           </a:p>
           <a:p>
@@ -8573,7 +8540,7 @@
             </a:pPr>
             <a:r>
               <a:rPr sz="1300" b="0"/>
-              <a:t>Subagents — Delegierbare Spezialisten mit eigenem Tool-Scope — ~/.claude/agents/ — pro Aufgabe</a:t>
+              <a:t>Subagents — Delegierbare Spezialisten mit eigenem Tool-Scope + festem Modell — Plugin `agents/` (+ RPI-Berater in bestpractice-extras/) — pro Aufgabe</a:t>
             </a:r>
           </a:p>
           <a:p>
@@ -8584,7 +8551,7 @@
             </a:pPr>
             <a:r>
               <a:rPr sz="1300" b="0"/>
-              <a:t>Hooks — Trigger-Automatik an Lifecycle-Events (s. §14) — ~/.claude/hooks/ — event-gebunden</a:t>
+              <a:t>Hooks — Trigger-Automatik an Lifecycle-Events (s. §14) — Plugin `hooks/hooks.json`, gesteuert per ECC_HOOK_PROFILE — event-gebunden</a:t>
             </a:r>
           </a:p>
           <a:p>
@@ -8595,7 +8562,7 @@
             </a:pPr>
             <a:r>
               <a:rPr sz="1300" b="0"/>
-              <a:t>Rules — „Immer befolgen"-Leitlinien je Sprache — ~/.claude/rules/ecc/ — dauerhaft</a:t>
+              <a:t>Rules — „Immer befolgen"-Leitlinien je Sprache — **global** im Plugin (`ecc@ecc`) — kein Projekt-Vendoring mehr — dauerhaft</a:t>
             </a:r>
           </a:p>
           <a:p>
@@ -8606,7 +8573,7 @@
             </a:pPr>
             <a:r>
               <a:rPr sz="1300" b="0"/>
-              <a:t>MCP — Prompt-getriebene Wrapper um externe Dienste — .mcp.json / global — pro Session</a:t>
+              <a:t>MCP — Externe Dienste als Tools (memory, context7, github, exa, playwright, sequential-thinking) — Plugin `.mcp.json` — pro Session</a:t>
             </a:r>
           </a:p>
           <a:p>
@@ -8617,7 +8584,18 @@
             </a:pPr>
             <a:r>
               <a:rPr sz="1300" b="0"/>
-              <a:t>Instincts — Gelernte Muster aus deinen Sessions — homunculus/instincts/ — wächst mit dir</a:t>
+              <a:t>Instincts — Gelernte Muster aus deinen Sessions — ~/.claude (continuous-learning), /instinct-status — wächst mit dir</a:t>
+            </a:r>
+          </a:p>
+          <a:p>
+            <a:pPr>
+              <a:spcAft>
+                <a:spcPts val="300"/>
+              </a:spcAft>
+            </a:pPr>
+            <a:r>
+              <a:rPr sz="1400" b="0"/>
+              <a:t>(Plugin-Pfad jeweils: ~/.claude/plugins/cache/ecc/ecc/2.0.0-rc.1/.)</a:t>
             </a:r>
           </a:p>
           <a:p>
@@ -8889,7 +8867,7 @@
             </a:pPr>
             <a:r>
               <a:rPr sz="1200" b="0"/>
-              <a:t>Mehr verfügbar: Mehr (249 Skills) via ./install-vps.sh --profile full. claude-mem (mem-search, smart-explore) + superpowers koexistieren.</a:t>
+              <a:t>Alle 249 Skills liefert das Plugin direkt — kein Install-Profil mehr nötig. claude-mem und superpowers sind deaktiviert; ihre Aufgaben übernehmen memory-MCP/Instincts bzw. die ECC-Workflows (tdd-workflow, verification-loop).</a:t>
             </a:r>
           </a:p>
         </p:txBody>
@@ -9040,7 +9018,7 @@
             </a:pPr>
             <a:r>
               <a:rPr sz="1300" b="0"/>
-              <a:t>1 · RESEARCH — Explore-Agent / claude-mem — research.md</a:t>
+              <a:t>1 · RESEARCH — Explore-Agent / memory-MCP (search_nodes) — research.md</a:t>
             </a:r>
           </a:p>
           <a:p>
@@ -9279,7 +9257,7 @@
             </a:pPr>
             <a:r>
               <a:rPr sz="1200" b="0"/>
-              <a:t>Ein Command, ein OK: erkennt den Stack, installiert ECC project-level und legt persistente Projekt-Dateien an, die Claude künftig zuerst liest.</a:t>
+              <a:t>Ein Command, ein OK: schlank (plugin-only). ECC-Core ist global — ins Projekt kommt nur der minimale projektlokale Kern. Ein deterministisches Script (onboard.js) erledigt die Mechanik, eine maschinelle Abnahme (onboard-verify.js) belegt „fertig". Kein Vendoring (.claude/rules/ecc etc.), funktioniert auch in Fremd-Repos.</a:t>
             </a:r>
           </a:p>
           <a:p>
@@ -9301,7 +9279,7 @@
             </a:pPr>
             <a:r>
               <a:rPr sz="1100" b="0"/>
-              <a:t>1 · Detect — Stack aus package.json / go.mod / pyproject.toml … erkennen — Profil + Sprach-Packs</a:t>
+              <a:t>1 · Dry-Run — `onboard.js --project &lt;dir&gt;` — Preflight + De-Cruft-Plan + Slim-Scaffold-Plan, schreibt nichts</a:t>
             </a:r>
           </a:p>
           <a:p>
@@ -9312,7 +9290,7 @@
             </a:pPr>
             <a:r>
               <a:rPr sz="1100" b="0"/>
-              <a:t>2 · Dry-Run — install-apply --target claude-project --dry-run — Plan ohne Schreiben</a:t>
+              <a:t>2 · Bestätigung — 1× OK des Users — Freigabe</a:t>
             </a:r>
           </a:p>
           <a:p>
@@ -9323,7 +9301,7 @@
             </a:pPr>
             <a:r>
               <a:rPr sz="1100" b="0"/>
-              <a:t>3 · Bestätigung — 1× OK des Users — Freigabe</a:t>
+              <a:t>3 · Apply — `onboard.js --apply` — De-Cruft (Altlasten → `.harness-backup/`) + Slim-Scaffold</a:t>
             </a:r>
           </a:p>
           <a:p>
@@ -9334,7 +9312,7 @@
             </a:pPr>
             <a:r>
               <a:rPr sz="1100" b="0"/>
-              <a:t>4 · Install — install-apply --target claude-project — .claude/rules/ecc/ + skills/ecc/</a:t>
+              <a:t>4 · Slim-Kern — env-Block + `state/` + Sentinel + `.gitignore` + consumer-Artefakte + initialer PRE — `.claude/settings.json`, `state/*`, `WORKING-CONTEXT.md`</a:t>
             </a:r>
           </a:p>
           <a:p>
@@ -9345,7 +9323,7 @@
             </a:pPr>
             <a:r>
               <a:rPr sz="1100" b="0"/>
-              <a:t>5 · Kontext — Templates mit echten Werten füllen — PROJECT_RULES.md + state/*</a:t>
+              <a:t>5 · Verfeinern — Templates mit echten Werten füllen + `onboard-verify` — PROJECT_RULES.md + CLAUDE.md, alle Pflicht-Checks grün</a:t>
             </a:r>
           </a:p>
           <a:p>
@@ -9573,7 +9551,7 @@
             </a:pPr>
             <a:r>
               <a:rPr sz="1400" b="0"/>
-              <a:t>Wann neu bauen? Codemaps sind ein Snapshot — sie aktualisieren sich nicht von selbst. Nach größeren Architektur-Änderungen /update-codemaps erneut laufen lassen. Erstes Mal in einem fremden Repo: code-tour-Skill bzw. claude-mem smart-explore/learn-codebase erzeugen Touren/Struktur.</a:t>
+              <a:t>Wann neu bauen? Codemaps sind ein Snapshot — sie aktualisieren sich nicht von selbst. Nach größeren Architektur-Änderungen /update-codemaps erneut laufen lassen. Erstes Mal in einem fremden Repo: code-tour- bzw. codebase-onboarding-Skill erzeugen Touren/Struktur.</a:t>
             </a:r>
           </a:p>
           <a:p>
@@ -9617,7 +9595,7 @@
             </a:pPr>
             <a:r>
               <a:rPr sz="1400" b="0"/>
-              <a:t>• claude-mem ergänzt: Injiziert relevanten Kontext aus früheren Sessions ab der 2. Session automatisch. /mem-search für gezielte Treffer („schon mal gelöst?").</a:t>
+              <a:t>• Memory ergänzt: Der ECC-SessionStart-Hook lädt Session-Kontext; in onboardeten Projekten spiegelt State-Sync state/ nach WORKING-CONTEXT.md. Gezielt nachschlagen („schon mal gelöst?"): memory-MCP search_nodes + /instinct-status.</a:t>
             </a:r>
           </a:p>
           <a:p>
@@ -9818,7 +9796,7 @@
               <a:rPr sz="1000" b="0">
                 <a:latin typeface="Consolas"/>
               </a:rPr>
-              <a:t>/ecc-onboard           # Stack-Frage → 1x OK → .claude/rules+skills, PROJECT_RULES.md, state/</a:t>
+              <a:t>/ecc-onboard           # Dry-Run → 1x OK → De-Cruft + slim Scaffold (env, state/, PROJECT_RULES.md) → Abnahme</a:t>
             </a:r>
           </a:p>
           <a:p>

--- a/docs/ECC-Harness-Guide.de.pptx
+++ b/docs/ECC-Harness-Guide.de.pptx
@@ -34,6 +34,8 @@
     <p:sldId id="282" r:id="rId33"/>
     <p:sldId id="283" r:id="rId34"/>
     <p:sldId id="284" r:id="rId35"/>
+    <p:sldId id="285" r:id="rId36"/>
+    <p:sldId id="286" r:id="rId37"/>
   </p:sldIdLst>
   <p:sldSz cx="12191695" cy="6858000" type="screen4x3"/>
   <p:notesSz cx="6858000" cy="9144000"/>
@@ -3285,7 +3287,7 @@
               </a:defRPr>
             </a:pPr>
             <a:r>
-              <a:t>ECC 2.0.0-rc.1 als globales Plugin ecc@ecc (führend) · Schicht-2-Extras im Repo · RTK-sicher.</a:t>
+              <a:t>ECC 2.0.0 als globales Plugin ecc@ecc (führend) · Schicht-2-Extras im Repo · RTK-sicher.</a:t>
             </a:r>
           </a:p>
           <a:p>
@@ -4912,6 +4914,17 @@
             </a:r>
           </a:p>
           <a:p>
+            <a:pPr lvl="1">
+              <a:spcAft>
+                <a:spcPts val="300"/>
+              </a:spcAft>
+            </a:pPr>
+            <a:r>
+              <a:rPr sz="1500" b="0"/>
+              <a:t>Struktur des Codes (Symbole, Aufrufketten, Blast Radius) — codebase-memory — **opt-in pro Projekt** via `/cbm enable`. Binary global, Server projektlokal — kostet dort 1 Server + 8 Tools. Details in §15</a:t>
+            </a:r>
+          </a:p>
+          <a:p>
             <a:pPr>
               <a:spcAft>
                 <a:spcPts val="300"/>
@@ -5787,7 +5800,7 @@
             </a:pPr>
             <a:r>
               <a:rPr sz="1600" b="0"/>
-              <a:t>• ECC (Everything Claude Code) von Affaan Mustafa — die dominante Engine: 63 Agents, 249 Skills, ~80 Commands, Continuous Learning, Security-Scanning, 6 mitgebrachte MCP-Server. Läuft als globales Plugin ecc@ecc, gepinnt auf Upstream-Tag v2.0.0-rc.1 (Cache: ~/.claude/plugins/cache/ecc/ecc/2.0.0-rc.1/) — damit in JEDEM Projekt verfügbar, ohne Kopien im Home oder Repo.</a:t>
+              <a:t>• ECC (Everything Claude Code) von Affaan Mustafa — die dominante Engine: 63 Agents, 249 Skills, ~80 Commands, Continuous Learning, Security-Scanning, 6 mitgebrachte MCP-Server. Läuft als globales Plugin ecc@ecc, gepinnt auf Upstream-Tag v2.0.0 (Cache: ~/.claude/plugins/cache/ecc/ecc/2.0.0/) — damit in JEDEM Projekt verfügbar, ohne Kopien im Home oder Repo.</a:t>
             </a:r>
           </a:p>
           <a:p>
@@ -6353,7 +6366,7 @@
                   <a:srgbClr val="FFFFFF"/>
                 </a:solidFill>
               </a:rPr>
-              <a:t>15 · Power-Tools — mgrep, LSP, Sequential Thinking</a:t>
+              <a:t>15 · Power-Tools — Codebase Memory, mgrep, LSP, Sequential Thinking</a:t>
             </a:r>
           </a:p>
         </p:txBody>
@@ -6386,7 +6399,7 @@
               </a:spcAft>
             </a:pPr>
             <a:r>
-              <a:rPr sz="1400" b="0"/>
+              <a:rPr sz="1200" b="0"/>
               <a:t>Schicht-2-Werkzeuge, die den Alltag beschleunigen. Kein ECC-Core.</a:t>
             </a:r>
           </a:p>
@@ -6397,107 +6410,129 @@
               </a:spcAft>
             </a:pPr>
             <a:r>
-              <a:rPr sz="1400" b="1"/>
-              <a:t>mgrep — semantische Suche (~50 % weniger Token)</a:t>
-            </a:r>
-          </a:p>
-          <a:p>
-            <a:pPr>
-              <a:spcAft>
-                <a:spcPts val="300"/>
-              </a:spcAft>
-            </a:pPr>
-            <a:r>
-              <a:rPr sz="1400" b="0"/>
-              <a:t>@mixedbread/mgrep ersetzt grep/ripgrep durch semantische Suche: findet Code/Doku nach Konzept („wie werden Agent-Modelle zugewiesen?") statt nach exaktem Muster. Status: verankert (Schicht-2).</a:t>
-            </a:r>
-          </a:p>
-          <a:p>
-            <a:pPr>
-              <a:spcAft>
-                <a:spcPts val="300"/>
-              </a:spcAft>
-            </a:pPr>
-            <a:r>
-              <a:rPr sz="1400" b="0"/>
-              <a:t>• Einrichtung (einmalig): CLI npm install -g @mixedbread/mgrep; API-Key (mxb_…) auf platform.mixedbread.com erzeugen; im env-Block von ~/.claude/settings.json als MXBAI_API_KEY hinterlegen (user-scoped, nicht im Repo — headless-Weg, umgeht den interaktiven Browser-Login).</a:t>
-            </a:r>
-          </a:p>
-          <a:p>
-            <a:pPr>
-              <a:spcAft>
-                <a:spcPts val="300"/>
-              </a:spcAft>
-            </a:pPr>
-            <a:r>
-              <a:rPr sz="1400" b="0"/>
-              <a:t>• Index bauen/aktualisieren: bash bestpractice-extras/scripts/mgrep/index.sh — liest den Key, setzt das Datei-Limit, startet mgrep watch; nach dem initialen Sync mit Ctrl+C beenden (Store bleibt durchsuchbar).</a:t>
-            </a:r>
-          </a:p>
-          <a:p>
-            <a:pPr>
-              <a:spcAft>
-                <a:spcPts val="300"/>
-              </a:spcAft>
-            </a:pPr>
-            <a:r>
-              <a:rPr sz="1400" b="0"/>
-              <a:t>• Suchen: mgrep search "consumer scaffold onboarding" — konzeptuell, auch in .docx.</a:t>
-            </a:r>
-          </a:p>
-          <a:p>
-            <a:pPr>
-              <a:spcAft>
-                <a:spcPts val="300"/>
-              </a:spcAft>
-            </a:pPr>
-            <a:r>
-              <a:rPr sz="1400" b="0"/>
-              <a:t>• ⚠️ Outbound: index.sh lädt den Quellbaum in die Mixedbread-Cloud. Pro Repo eine bewusste Entscheidung; .gitignore wird respektiert. Der Auto-Mode blockt den Bulk-Upload absichtlich (Exfiltrations-Schutz) — deshalb manuell über das Script, nie automatisch durch Claude. Details: bestpractice-extras/scripts/mgrep/README.md.</a:t>
-            </a:r>
-          </a:p>
-          <a:p>
-            <a:pPr>
-              <a:spcAft>
-                <a:spcPts val="300"/>
-              </a:spcAft>
-            </a:pPr>
-            <a:r>
-              <a:rPr sz="1400" b="1"/>
-              <a:t>LSP-Plugins — Echtzeit-Typecheck im Terminal</a:t>
-            </a:r>
-          </a:p>
-          <a:p>
-            <a:pPr>
-              <a:spcAft>
-                <a:spcPts val="300"/>
-              </a:spcAft>
-            </a:pPr>
-            <a:r>
-              <a:rPr sz="1400" b="0"/>
-              <a:t>typescript-lsp + pyright-lsp (user-scoped installiert) bringen Echtzeit-Typecheck und go-to-definition ins Terminal — ohne IDE.</a:t>
-            </a:r>
-          </a:p>
-          <a:p>
-            <a:pPr>
-              <a:spcAft>
-                <a:spcPts val="300"/>
-              </a:spcAft>
-            </a:pPr>
-            <a:r>
-              <a:rPr sz="1400" b="1"/>
-              <a:t>Sequential Thinking (MCP)</a:t>
-            </a:r>
-          </a:p>
-          <a:p>
-            <a:pPr>
-              <a:spcAft>
-                <a:spcPts val="300"/>
-              </a:spcAft>
-            </a:pPr>
-            <a:r>
-              <a:rPr sz="1400" b="0"/>
-              <a:t>Registriert als deferred Tool (mcp__plugin_ecc_sequential-thinking__sequentialthinking). Einsatz: komplexe Mehrschritt-Probleme, Architektur-Entscheidungen mit vielen Abhängigkeiten, Debugging verschachtelter Systeme. Tool via ToolSearch laden, dann aufrufen.</a:t>
+              <a:rPr sz="1200" b="1"/>
+              <a:t>Codebase Memory — der Code-Intelligence-Graph (opt-in je Projekt)</a:t>
+            </a:r>
+          </a:p>
+          <a:p>
+            <a:pPr>
+              <a:spcAft>
+                <a:spcPts val="300"/>
+              </a:spcAft>
+            </a:pPr>
+            <a:r>
+              <a:rPr sz="1200" b="0"/>
+              <a:t>Indexiert den tatsächlichen Quellcode in einen Graphen (Dateien, Klassen, Funktionen, Routen, Aufrufkanten) und beantwortet in Millisekunden, wofür man sonst blind Dateien durchsucht: „wer ruft das auf?", „was hängt an dieser Änderung?", „welche Routen gibt es?". Gepinnt auf v0.9.0, headless.</a:t>
+            </a:r>
+          </a:p>
+          <a:p>
+            <a:pPr>
+              <a:spcAft>
+                <a:spcPts val="300"/>
+              </a:spcAft>
+            </a:pPr>
+            <a:r>
+              <a:rPr sz="1200" b="0"/>
+              <a:t>Binary global, MCP projektlokal — und das ist die zentrale Entscheidung. Die Binary wird einmal VPS-weit installiert (./install-vps.sh --with-cbm). Der MCP-Server wird aber nie global registriert: jeder aktive Server kostet in jeder Session Budget (hier 1 Server + 8 Tools), auch dort, wo es nichts zu indexieren gibt. Aktiviert wird darum bewusst pro Projekt mit /cbm enable (oder /ecc-onboard --with-cbm) — danach Session neu starten.</a:t>
+            </a:r>
+          </a:p>
+          <a:p>
+            <a:pPr>
+              <a:spcAft>
+                <a:spcPts val="300"/>
+              </a:spcAft>
+            </a:pPr>
+            <a:r>
+              <a:rPr sz="1200" b="0"/>
+              <a:t>Warum nicht der Upstream-Installer. codebase-memory-mcp install erkennt alle installierten Agents und schreibt ungefragt MCP-Einträge, Skills und einen PreToolUse-Hook auf Grep/Glob. Genau diese Fernwirkung schließt das Harness aus. Stattdessen: release.json pinnt Version + SHA-256, der Installer prüft die Checksumme fail-closed, testet die Binary und schaltet erst dann atomar um. Kein curl | bash, kein latest, keine UI (Port 9749), kein Auto-Index, kein Hintergrund-Watcher, kein Auto-Update.</a:t>
+            </a:r>
+          </a:p>
+          <a:p>
+            <a:pPr>
+              <a:spcAft>
+                <a:spcPts val="300"/>
+              </a:spcAft>
+            </a:pPr>
+            <a:r>
+              <a:rPr sz="1200" b="0"/>
+              <a:t>Sicherheitsgrenzen setzt der Wrapper codebase-memory-mcp-harness — die einzige Binary, die je in eine .mcp.json wandert: CBM_ALLOWED_ROOT=/root/projekte (alles ausserhalb wird abgelehnt), Cache mit 0700, umask 077, CBM_MEM_BUDGET_MB=512 (ohne Deckel bemisst CBM den Graphen am Gesamt-RAM — davon sind ~5 von 7,9 GB durch die Container belegt).</a:t>
+            </a:r>
+          </a:p>
+          <a:p>
+            <a:pPr>
+              <a:spcAft>
+                <a:spcPts val="300"/>
+              </a:spcAft>
+            </a:pPr>
+            <a:r>
+              <a:rPr sz="1200" b="1"/>
+              <a:t>Command · Wirkung</a:t>
+            </a:r>
+          </a:p>
+          <a:p>
+            <a:pPr lvl="1">
+              <a:spcAft>
+                <a:spcPts val="300"/>
+              </a:spcAft>
+            </a:pPr>
+            <a:r>
+              <a:rPr sz="1100" b="0"/>
+              <a:t>`/cbm status` — Version, Wrapper, MCP-Eintrag, `.cbmignore`, Index, Grenzen, Warnungen</a:t>
+            </a:r>
+          </a:p>
+          <a:p>
+            <a:pPr lvl="1">
+              <a:spcAft>
+                <a:spcPts val="300"/>
+              </a:spcAft>
+            </a:pPr>
+            <a:r>
+              <a:rPr sz="1100" b="0"/>
+              <a:t>`/cbm enable` — `.mcp.json` additiv + `.cbmignore` + indexieren + Smoke-Test (Dry-Run → OK)</a:t>
+            </a:r>
+          </a:p>
+          <a:p>
+            <a:pPr lvl="1">
+              <a:spcAft>
+                <a:spcPts val="300"/>
+              </a:spcAft>
+            </a:pPr>
+            <a:r>
+              <a:rPr sz="1100" b="0"/>
+              <a:t>`/cbm reindex` — Index neu aufbauen — **nötig nach größeren Änderungen** (kein Auto-Watch)</a:t>
+            </a:r>
+          </a:p>
+          <a:p>
+            <a:pPr lvl="1">
+              <a:spcAft>
+                <a:spcPts val="300"/>
+              </a:spcAft>
+            </a:pPr>
+            <a:r>
+              <a:rPr sz="1100" b="0"/>
+              <a:t>`/cbm doctor` — volle Diagnose inkl. Secret-Ausschluss und Budget</a:t>
+            </a:r>
+          </a:p>
+          <a:p>
+            <a:pPr lvl="1">
+              <a:spcAft>
+                <a:spcPts val="300"/>
+              </a:spcAft>
+            </a:pPr>
+            <a:r>
+              <a:rPr sz="1100" b="0"/>
+              <a:t>`/cbm disable` — entfernt **nur** den eigenen Eintrag; der Index bleibt erhalten</a:t>
+            </a:r>
+          </a:p>
+          <a:p>
+            <a:pPr>
+              <a:spcAft>
+                <a:spcPts val="300"/>
+              </a:spcAft>
+            </a:pPr>
+            <a:r>
+              <a:rPr sz="1200" b="0"/>
+              <a:t>Im Workflow: in RESEARCH vor der breiten Dateisuche — get_architecture → search_graph → trace_path, dann gezielt Dateien lesen. Der Graph sagt dir, welche Dateien relevant sind; er ersetzt das Lesen nicht und ist kein Korrektheitsbeweis (das bleiben Tests und Build).</a:t>
             </a:r>
           </a:p>
         </p:txBody>
@@ -6592,7 +6627,7 @@
                   <a:srgbClr val="FFFFFF"/>
                 </a:solidFill>
               </a:rPr>
-              <a:t>16 · Security im Alltag + VPS-Hinweise</a:t>
+              <a:t>15 · Power-Tools — Codebase Memory, mgrep, LSP, Sequential Thinking (Forts.)</a:t>
             </a:r>
           </a:p>
         </p:txBody>
@@ -6625,107 +6660,140 @@
               </a:spcAft>
             </a:pPr>
             <a:r>
-              <a:rPr sz="1400" b="0"/>
-              <a:t>Kernhaltung: Baue so, als würde das Modell irgendwann etwas Feindliches lesen, während es etwas Wertvolles hält (lethal trifecta: private Daten + untrusted Content + externe Kommunikation).</a:t>
-            </a:r>
-          </a:p>
-          <a:p>
-            <a:pPr>
-              <a:spcAft>
-                <a:spcPts val="300"/>
-              </a:spcAft>
-            </a:pPr>
-            <a:r>
-              <a:rPr sz="1400" b="0"/>
-              <a:t>Bereits aktiv / sicher:</a:t>
-            </a:r>
-          </a:p>
-          <a:p>
-            <a:pPr>
-              <a:spcAft>
-                <a:spcPts val="300"/>
-              </a:spcAft>
-            </a:pPr>
-            <a:r>
-              <a:rPr sz="1400" b="0"/>
-              <a:t>• RTK-Hook (PreToolUse:Bash) bleibt unangetastet — Token-Ersparnis global.</a:t>
-            </a:r>
-          </a:p>
-          <a:p>
-            <a:pPr>
-              <a:spcAft>
-                <a:spcPts val="300"/>
-              </a:spcAft>
-            </a:pPr>
-            <a:r>
-              <a:rPr sz="1400" b="0"/>
-              <a:t>• ECC namespace-sicher — Core isoliert im Plugin-Cache (ecc@ecc), global verfügbar; kein Projekt-Vendoring (slim/plugin-only) — keine Kollision mit Eigenem.</a:t>
-            </a:r>
-          </a:p>
-          <a:p>
-            <a:pPr>
-              <a:spcAft>
-                <a:spcPts val="300"/>
-              </a:spcAft>
-            </a:pPr>
-            <a:r>
-              <a:rPr sz="1400" b="0"/>
-              <a:t>• settings.json unberührt — kein Auto-Edit der Startup-Config; Härtung nur additiv via ./install-vps.sh --harden.</a:t>
-            </a:r>
-          </a:p>
-          <a:p>
-            <a:pPr>
-              <a:spcAft>
-                <a:spcPts val="300"/>
-              </a:spcAft>
-            </a:pPr>
-            <a:r>
-              <a:rPr sz="1400" b="0"/>
-              <a:t>Bewusst NICHT automatisch (Least-Agency, opt-in):</a:t>
-            </a:r>
-          </a:p>
-          <a:p>
-            <a:pPr>
-              <a:spcAft>
-                <a:spcPts val="300"/>
-              </a:spcAft>
-            </a:pPr>
-            <a:r>
-              <a:rPr sz="1400" b="0"/>
-              <a:t>• deny-Baseline opt-in — ./install-vps.sh --harden ergänzt rm -rf / force-push / Secret-Reads (mit Backup).</a:t>
-            </a:r>
-          </a:p>
-          <a:p>
-            <a:pPr>
-              <a:spcAft>
-                <a:spcPts val="300"/>
-              </a:spcAft>
-            </a:pPr>
-            <a:r>
-              <a:rPr sz="1400" b="0"/>
-              <a:t>• AgentShield — npx ecc-agentshield scan lädt externes Paket — selbst vetten, dann ausführen.</a:t>
-            </a:r>
-          </a:p>
-          <a:p>
-            <a:pPr>
-              <a:spcAft>
-                <a:spcPts val="300"/>
-              </a:spcAft>
-            </a:pPr>
-            <a:r>
-              <a:rPr sz="1400" b="0"/>
-              <a:t>• mgrep-Upload — manuell, nie automatisch (s. §15).</a:t>
-            </a:r>
-          </a:p>
-          <a:p>
-            <a:pPr>
-              <a:spcAft>
-                <a:spcPts val="300"/>
-              </a:spcAft>
-            </a:pPr>
-            <a:r>
-              <a:rPr sz="1400" b="0"/>
-              <a:t>VPS-weit denken: Da ECC global ist, wirkt es in allen Produktionsprojekten. Härtung gezielt via ./install-vps.sh --harden (legt vorher ein settings.json-Backup an).</a:t>
+              <a:rPr sz="1200" b="0"/>
+              <a:t>Zwei Fallstricke, die still danebengehen:</a:t>
+            </a:r>
+          </a:p>
+          <a:p>
+            <a:pPr>
+              <a:spcAft>
+                <a:spcPts val="300"/>
+              </a:spcAft>
+            </a:pPr>
+            <a:r>
+              <a:rPr sz="1200" b="0"/>
+              <a:t>• search_graph.file_pattern ist ein Literal-Substring, name_pattern dagegen eine Regex. Eine Regex im file_pattern (.\.tsx$) liefert kommentarlos total=0 — was leicht als „gibt es nicht" fehlgedeutet wird. Richtig: .tsx.</a:t>
+            </a:r>
+          </a:p>
+          <a:p>
+            <a:pPr>
+              <a:spcAft>
+                <a:spcPts val="300"/>
+              </a:spcAft>
+            </a:pPr>
+            <a:r>
+              <a:rPr sz="1200" b="0"/>
+              <a:t>• Nur 8 der 14 Tools aus dem README sind über MCP erreichbar. detect_changes, list_projects, delete_project, manage_adr, ingest_traces, index_status gibt es nur über die CLI.</a:t>
+            </a:r>
+          </a:p>
+          <a:p>
+            <a:pPr>
+              <a:spcAft>
+                <a:spcPts val="300"/>
+              </a:spcAft>
+            </a:pPr>
+            <a:r>
+              <a:rPr sz="1200" b="0"/>
+              <a:t>Ein leerer Call-Graph ist normal (dynamische Aufrufe, DI, Callbacks, Reflection) → Fallback: LSP → Grep → mgrep → Datei lesen, und die Unsicherheit benennen. Details: bestpractice-extras/scripts/cbm/README.md.</a:t>
+            </a:r>
+          </a:p>
+          <a:p>
+            <a:pPr>
+              <a:spcAft>
+                <a:spcPts val="300"/>
+              </a:spcAft>
+            </a:pPr>
+            <a:r>
+              <a:rPr sz="1200" b="1"/>
+              <a:t>mgrep — semantische Suche (~50 % weniger Token)</a:t>
+            </a:r>
+          </a:p>
+          <a:p>
+            <a:pPr>
+              <a:spcAft>
+                <a:spcPts val="300"/>
+              </a:spcAft>
+            </a:pPr>
+            <a:r>
+              <a:rPr sz="1200" b="0"/>
+              <a:t>@mixedbread/mgrep ersetzt grep/ripgrep durch semantische Suche: findet Code/Doku nach Konzept („wie werden Agent-Modelle zugewiesen?") statt nach exaktem Muster. Status: verankert (Schicht-2).</a:t>
+            </a:r>
+          </a:p>
+          <a:p>
+            <a:pPr>
+              <a:spcAft>
+                <a:spcPts val="300"/>
+              </a:spcAft>
+            </a:pPr>
+            <a:r>
+              <a:rPr sz="1200" b="0"/>
+              <a:t>• Einrichtung (einmalig): CLI npm install -g @mixedbread/mgrep; API-Key (mxb_…) auf platform.mixedbread.com erzeugen; im env-Block von ~/.claude/settings.json als MXBAI_API_KEY hinterlegen (user-scoped, nicht im Repo — headless-Weg, umgeht den interaktiven Browser-Login).</a:t>
+            </a:r>
+          </a:p>
+          <a:p>
+            <a:pPr>
+              <a:spcAft>
+                <a:spcPts val="300"/>
+              </a:spcAft>
+            </a:pPr>
+            <a:r>
+              <a:rPr sz="1200" b="0"/>
+              <a:t>• Index bauen/aktualisieren: bash bestpractice-extras/scripts/mgrep/index.sh — liest den Key, setzt das Datei-Limit, startet mgrep watch; nach dem initialen Sync mit Ctrl+C beenden (Store bleibt durchsuchbar).</a:t>
+            </a:r>
+          </a:p>
+          <a:p>
+            <a:pPr>
+              <a:spcAft>
+                <a:spcPts val="300"/>
+              </a:spcAft>
+            </a:pPr>
+            <a:r>
+              <a:rPr sz="1200" b="0"/>
+              <a:t>• Suchen: mgrep search "consumer scaffold onboarding" — konzeptuell, auch in .docx.</a:t>
+            </a:r>
+          </a:p>
+          <a:p>
+            <a:pPr>
+              <a:spcAft>
+                <a:spcPts val="300"/>
+              </a:spcAft>
+            </a:pPr>
+            <a:r>
+              <a:rPr sz="1200" b="0"/>
+              <a:t>• ⚠️ Outbound: index.sh lädt den Quellbaum in die Mixedbread-Cloud. Pro Repo eine bewusste Entscheidung; .gitignore wird respektiert. Der Auto-Mode blockt den Bulk-Upload absichtlich (Exfiltrations-Schutz) — deshalb manuell über das Script, nie automatisch durch Claude. Details: bestpractice-extras/scripts/mgrep/README.md.</a:t>
+            </a:r>
+          </a:p>
+          <a:p>
+            <a:pPr>
+              <a:spcAft>
+                <a:spcPts val="300"/>
+              </a:spcAft>
+            </a:pPr>
+            <a:r>
+              <a:rPr sz="1200" b="1"/>
+              <a:t>LSP-Plugins — Echtzeit-Typecheck im Terminal</a:t>
+            </a:r>
+          </a:p>
+          <a:p>
+            <a:pPr>
+              <a:spcAft>
+                <a:spcPts val="300"/>
+              </a:spcAft>
+            </a:pPr>
+            <a:r>
+              <a:rPr sz="1200" b="0"/>
+              <a:t>typescript-lsp + pyright-lsp (user-scoped installiert) bringen Echtzeit-Typecheck und go-to-definition ins Terminal — ohne IDE.</a:t>
+            </a:r>
+          </a:p>
+          <a:p>
+            <a:pPr>
+              <a:spcAft>
+                <a:spcPts val="300"/>
+              </a:spcAft>
+            </a:pPr>
+            <a:r>
+              <a:rPr sz="1200" b="1"/>
+              <a:t>Sequential Thinking (MCP)</a:t>
             </a:r>
           </a:p>
         </p:txBody>
@@ -6820,7 +6888,7 @@
                   <a:srgbClr val="FFFFFF"/>
                 </a:solidFill>
               </a:rPr>
-              <a:t>17 · CLAUDE.md — Arbeitsvertrag statt Beschreibung</a:t>
+              <a:t>15 · Power-Tools — Codebase Memory, mgrep, LSP, Sequential Thinking (Forts.)</a:t>
             </a:r>
           </a:p>
         </p:txBody>
@@ -6854,84 +6922,7 @@
             </a:pPr>
             <a:r>
               <a:rPr sz="1600" b="0"/>
-              <a:t>Erkenntnis aus dem Test-ECC-Onboarding: CLAUDE.md ist KEIN Projektbeschrieb. Es ist der Arbeitsvertrag für Claude: Workflow, Verbote, Commands, Checklisten.</a:t>
-            </a:r>
-          </a:p>
-          <a:p>
-            <a:pPr>
-              <a:spcAft>
-                <a:spcPts val="300"/>
-              </a:spcAft>
-            </a:pPr>
-            <a:r>
-              <a:rPr sz="1600" b="1"/>
-              <a:t>Was rein muss · Was NICHT rein soll</a:t>
-            </a:r>
-          </a:p>
-          <a:p>
-            <a:pPr lvl="1">
-              <a:spcAft>
-                <a:spcPts val="300"/>
-              </a:spcAft>
-            </a:pPr>
-            <a:r>
-              <a:rPr sz="1500" b="0"/>
-              <a:t>Pflicht-Workflow (ECC 5-Phasen) — Projektbeschreibung (→ README / PROJECT_RULES.md)</a:t>
-            </a:r>
-          </a:p>
-          <a:p>
-            <a:pPr lvl="1">
-              <a:spcAft>
-                <a:spcPts val="300"/>
-              </a:spcAft>
-            </a:pPr>
-            <a:r>
-              <a:rPr sz="1500" b="0"/>
-              <a:t>Explizite Verbote (was Claude nicht tun darf) — Architektur-Details (→ docs/CODEMAPS/)</a:t>
-            </a:r>
-          </a:p>
-          <a:p>
-            <a:pPr lvl="1">
-              <a:spcAft>
-                <a:spcPts val="300"/>
-              </a:spcAft>
-            </a:pPr>
-            <a:r>
-              <a:rPr sz="1500" b="0"/>
-              <a:t>Modell-Matrix (welches Modell wofür) — Generische Platzhalter wie [Stack noch nicht konfiguriert]</a:t>
-            </a:r>
-          </a:p>
-          <a:p>
-            <a:pPr lvl="1">
-              <a:spcAft>
-                <a:spcPts val="300"/>
-              </a:spcAft>
-            </a:pPr>
-            <a:r>
-              <a:rPr sz="1500" b="0"/>
-              <a:t>Build/Test/Lint-Commands (copy-paste-tauglich)</a:t>
-            </a:r>
-          </a:p>
-          <a:p>
-            <a:pPr lvl="1">
-              <a:spcAft>
-                <a:spcPts val="300"/>
-              </a:spcAft>
-            </a:pPr>
-            <a:r>
-              <a:rPr sz="1500" b="0"/>
-              <a:t>Pflicht-Commands pro Situation, Token-Budget-Regeln</a:t>
-            </a:r>
-          </a:p>
-          <a:p>
-            <a:pPr lvl="1">
-              <a:spcAft>
-                <a:spcPts val="300"/>
-              </a:spcAft>
-            </a:pPr>
-            <a:r>
-              <a:rPr sz="1500" b="0"/>
-              <a:t>Sicherheits-Checkliste, Hook-Status (welche aktiv)</a:t>
+              <a:t>Registriert als deferred Tool (mcp__plugin_ecc_sequential-thinking__sequentialthinking). Einsatz: komplexe Mehrschritt-Probleme, Architektur-Entscheidungen mit vielen Abhängigkeiten, Debugging verschachtelter Systeme. Tool via ToolSearch laden, dann aufrufen.</a:t>
             </a:r>
           </a:p>
         </p:txBody>
@@ -7026,7 +7017,7 @@
                   <a:srgbClr val="FFFFFF"/>
                 </a:solidFill>
               </a:rPr>
-              <a:t>18 · ECC-CLIs &amp; Wartung</a:t>
+              <a:t>16 · Security im Alltag + VPS-Hinweise</a:t>
             </a:r>
           </a:p>
         </p:txBody>
@@ -7053,105 +7044,113 @@
           </a:bodyPr>
           <a:lstStyle/>
           <a:p>
-            <a:pPr lvl="1">
-              <a:spcAft>
-                <a:spcPts val="300"/>
-              </a:spcAft>
-            </a:pPr>
-            <a:r>
-              <a:rPr sz="1400" b="0">
-                <a:latin typeface="Consolas"/>
-              </a:rPr>
-              <a:t># Plugin-Pfad (Single Source, read-only behandeln):</a:t>
-            </a:r>
-          </a:p>
-          <a:p>
-            <a:pPr lvl="1">
-              <a:spcAft>
-                <a:spcPts val="300"/>
-              </a:spcAft>
-            </a:pPr>
-            <a:r>
-              <a:rPr sz="1400" b="0">
-                <a:latin typeface="Consolas"/>
-              </a:rPr>
-              <a:t>ECC=~/.claude/plugins/cache/ecc/ecc/2.0.0-rc.1</a:t>
-            </a:r>
-          </a:p>
-          <a:p>
-            <a:pPr lvl="1">
-              <a:spcAft>
-                <a:spcPts val="300"/>
-              </a:spcAft>
-            </a:pPr>
-            <a:r>
-              <a:rPr sz="1400" b="0">
-                <a:latin typeface="Consolas"/>
-              </a:rPr>
-              <a:t>node "$ECC/scripts/harness-audit.js"   # Repo-Integritäts-Audit</a:t>
-            </a:r>
-          </a:p>
-          <a:p>
-            <a:pPr lvl="1">
-              <a:spcAft>
-                <a:spcPts val="300"/>
-              </a:spcAft>
-            </a:pPr>
-            <a:r>
-              <a:rPr sz="1400" b="0">
-                <a:latin typeface="Consolas"/>
-              </a:rPr>
-              <a:t>node "$ECC/scripts/ecc.js" doctor      # Health-Check</a:t>
-            </a:r>
-          </a:p>
-          <a:p>
-            <a:pPr lvl="1">
-              <a:spcAft>
-                <a:spcPts val="300"/>
-              </a:spcAft>
-            </a:pPr>
-            <a:r>
-              <a:rPr sz="1400" b="0">
-                <a:latin typeface="Consolas"/>
-              </a:rPr>
-              <a:t># ECC-Update: in ~/.claude/settings.json den Tag anheben …</a:t>
-            </a:r>
-          </a:p>
-          <a:p>
-            <a:pPr lvl="1">
-              <a:spcAft>
-                <a:spcPts val="300"/>
-              </a:spcAft>
-            </a:pPr>
-            <a:r>
-              <a:rPr sz="1400" b="0">
-                <a:latin typeface="Consolas"/>
-              </a:rPr>
-              <a:t>#   extraKnownMarketplaces.ecc.source.ref = "v&lt;neue-version&gt;"</a:t>
-            </a:r>
-          </a:p>
-          <a:p>
-            <a:pPr lvl="1">
-              <a:spcAft>
-                <a:spcPts val="300"/>
-              </a:spcAft>
-            </a:pPr>
-            <a:r>
-              <a:rPr sz="1400" b="0">
-                <a:latin typeface="Consolas"/>
-              </a:rPr>
-              <a:t># … dann Claude Code neu starten (Plugin wird neu gecacht).</a:t>
-            </a:r>
-          </a:p>
-          <a:p>
-            <a:pPr>
-              <a:spcAft>
-                <a:spcPts val="300"/>
-              </a:spcAft>
-            </a:pPr>
-            <a:r>
-              <a:rPr sz="1600" b="0"/>
-              <a:t>Slash-Einstieg: /ecc-guide (Onboarding), /harness-audit (Config-Scorecard), /cost-report, /skill-health, /projects. ⚠️ Plugin-/Settings-Änderungen greifen erst nach Neustart von Claude Code (/clear reicht nicht).</a:t>
+            <a:pPr>
+              <a:spcAft>
+                <a:spcPts val="300"/>
+              </a:spcAft>
+            </a:pPr>
+            <a:r>
+              <a:rPr sz="1400" b="0"/>
+              <a:t>Kernhaltung: Baue so, als würde das Modell irgendwann etwas Feindliches lesen, während es etwas Wertvolles hält (lethal trifecta: private Daten + untrusted Content + externe Kommunikation).</a:t>
+            </a:r>
+          </a:p>
+          <a:p>
+            <a:pPr>
+              <a:spcAft>
+                <a:spcPts val="300"/>
+              </a:spcAft>
+            </a:pPr>
+            <a:r>
+              <a:rPr sz="1400" b="0"/>
+              <a:t>Bereits aktiv / sicher:</a:t>
+            </a:r>
+          </a:p>
+          <a:p>
+            <a:pPr>
+              <a:spcAft>
+                <a:spcPts val="300"/>
+              </a:spcAft>
+            </a:pPr>
+            <a:r>
+              <a:rPr sz="1400" b="0"/>
+              <a:t>• RTK-Hook (PreToolUse:Bash) bleibt unangetastet — Token-Ersparnis global.</a:t>
+            </a:r>
+          </a:p>
+          <a:p>
+            <a:pPr>
+              <a:spcAft>
+                <a:spcPts val="300"/>
+              </a:spcAft>
+            </a:pPr>
+            <a:r>
+              <a:rPr sz="1400" b="0"/>
+              <a:t>• ECC namespace-sicher — Core isoliert im Plugin-Cache (ecc@ecc), global verfügbar; kein Projekt-Vendoring (slim/plugin-only) — keine Kollision mit Eigenem.</a:t>
+            </a:r>
+          </a:p>
+          <a:p>
+            <a:pPr>
+              <a:spcAft>
+                <a:spcPts val="300"/>
+              </a:spcAft>
+            </a:pPr>
+            <a:r>
+              <a:rPr sz="1400" b="0"/>
+              <a:t>• settings.json unberührt — kein Auto-Edit der Startup-Config; Härtung nur additiv via ./install-vps.sh --harden.</a:t>
+            </a:r>
+          </a:p>
+          <a:p>
+            <a:pPr>
+              <a:spcAft>
+                <a:spcPts val="300"/>
+              </a:spcAft>
+            </a:pPr>
+            <a:r>
+              <a:rPr sz="1400" b="0"/>
+              <a:t>Bewusst NICHT automatisch (Least-Agency, opt-in):</a:t>
+            </a:r>
+          </a:p>
+          <a:p>
+            <a:pPr>
+              <a:spcAft>
+                <a:spcPts val="300"/>
+              </a:spcAft>
+            </a:pPr>
+            <a:r>
+              <a:rPr sz="1400" b="0"/>
+              <a:t>• deny-Baseline opt-in — ./install-vps.sh --harden ergänzt rm -rf / force-push / Secret-Reads (mit Backup).</a:t>
+            </a:r>
+          </a:p>
+          <a:p>
+            <a:pPr>
+              <a:spcAft>
+                <a:spcPts val="300"/>
+              </a:spcAft>
+            </a:pPr>
+            <a:r>
+              <a:rPr sz="1400" b="0"/>
+              <a:t>• AgentShield — npx ecc-agentshield scan lädt externes Paket — selbst vetten, dann ausführen.</a:t>
+            </a:r>
+          </a:p>
+          <a:p>
+            <a:pPr>
+              <a:spcAft>
+                <a:spcPts val="300"/>
+              </a:spcAft>
+            </a:pPr>
+            <a:r>
+              <a:rPr sz="1400" b="0"/>
+              <a:t>• mgrep-Upload — manuell, nie automatisch (s. §15).</a:t>
+            </a:r>
+          </a:p>
+          <a:p>
+            <a:pPr>
+              <a:spcAft>
+                <a:spcPts val="300"/>
+              </a:spcAft>
+            </a:pPr>
+            <a:r>
+              <a:rPr sz="1400" b="0"/>
+              <a:t>VPS-weit denken: Da ECC global ist, wirkt es in allen Produktionsprojekten. Härtung gezielt via ./install-vps.sh --harden (legt vorher ein settings.json-Backup an).</a:t>
             </a:r>
           </a:p>
         </p:txBody>
@@ -7246,7 +7245,7 @@
                   <a:srgbClr val="FFFFFF"/>
                 </a:solidFill>
               </a:rPr>
-              <a:t>19 · Hybrid-Mega-Workflow — State-Sync + RPI-Berater</a:t>
+              <a:t>17 · CLAUDE.md — Arbeitsvertrag statt Beschreibung</a:t>
             </a:r>
           </a:p>
         </p:txBody>
@@ -7279,144 +7278,85 @@
               </a:spcAft>
             </a:pPr>
             <a:r>
-              <a:rPr sz="1200" b="0"/>
-              <a:t>Der BestPractice-Wrapper koppelt persistenten Projekt-State an ECCs Loop und stellt /mega-plan als Planungs-Vorstufe bereit — rein additiv. Der ECC-Core (das globale Plugin) bleibt unverändert.</a:t>
-            </a:r>
-          </a:p>
-          <a:p>
-            <a:pPr>
-              <a:spcAft>
-                <a:spcPts val="300"/>
-              </a:spcAft>
-            </a:pPr>
-            <a:r>
-              <a:rPr sz="1200" b="1"/>
-              <a:t>a) Wo wird was gespeichert</a:t>
-            </a:r>
-          </a:p>
-          <a:p>
-            <a:pPr>
-              <a:spcAft>
-                <a:spcPts val="300"/>
-              </a:spcAft>
-            </a:pPr>
-            <a:r>
-              <a:rPr sz="1200" b="1"/>
-              <a:t>Artefakt · Ort · Wahrheit?</a:t>
-            </a:r>
-          </a:p>
-          <a:p>
-            <a:pPr lvl="1">
-              <a:spcAft>
-                <a:spcPts val="300"/>
-              </a:spcAft>
-            </a:pPr>
-            <a:r>
-              <a:rPr sz="1100" b="0"/>
-              <a:t>State (4 Dateien) — state/{context,decisions,tasks,progress}.md — JA — vom Menschen</a:t>
-            </a:r>
-          </a:p>
-          <a:p>
-            <a:pPr lvl="1">
-              <a:spcAft>
-                <a:spcPts val="300"/>
-              </a:spcAft>
-            </a:pPr>
-            <a:r>
-              <a:rPr sz="1100" b="0"/>
-              <a:t>Loop-Futter — &lt;root&gt;/WORKING-CONTEXT.md (generiert) — Nein — aus state/</a:t>
-            </a:r>
-          </a:p>
-          <a:p>
-            <a:pPr lvl="1">
-              <a:spcAft>
-                <a:spcPts val="300"/>
-              </a:spcAft>
-            </a:pPr>
-            <a:r>
-              <a:rPr sz="1100" b="0"/>
-              <a:t>Sync-Snapshot — state/.sync/last-working-context.md — Nein — gitignored</a:t>
-            </a:r>
-          </a:p>
-          <a:p>
-            <a:pPr lvl="1">
-              <a:spcAft>
-                <a:spcPts val="300"/>
-              </a:spcAft>
-            </a:pPr>
-            <a:r>
-              <a:rPr sz="1100" b="0"/>
-              <a:t>Karpathy (global) — ~/.claude/rules/ecc-extras/ + @-Import — JA — einmalig</a:t>
-            </a:r>
-          </a:p>
-          <a:p>
-            <a:pPr>
-              <a:spcAft>
-                <a:spcPts val="300"/>
-              </a:spcAft>
-            </a:pPr>
-            <a:r>
-              <a:rPr sz="1200" b="0"/>
-              <a:t>Merksatz: state/ ist die Wahrheit. WORKING-CONTEXT.md ist nur ihr generiertes Spiegelbild für den Loop — nie von Hand pflegen, immer state/ editieren.</a:t>
-            </a:r>
-          </a:p>
-          <a:p>
-            <a:pPr>
-              <a:spcAft>
-                <a:spcPts val="300"/>
-              </a:spcAft>
-            </a:pPr>
-            <a:r>
-              <a:rPr sz="1200" b="1"/>
-              <a:t>b) Der Sync-Loop (PRE/POST, via Lifecycle-Hooks)</a:t>
-            </a:r>
-          </a:p>
-          <a:p>
-            <a:pPr lvl="1">
-              <a:spcAft>
-                <a:spcPts val="300"/>
-              </a:spcAft>
-            </a:pPr>
-            <a:r>
-              <a:rPr sz="1000" b="0">
-                <a:latin typeface="Consolas"/>
-              </a:rPr>
-              <a:t>state/*.md  --PRE (SessionStart)--&gt;  WORKING-CONTEXT.md   (Loop liest STATE:*, füllt SYNC:*)</a:t>
-            </a:r>
-          </a:p>
-          <a:p>
-            <a:pPr lvl="1">
-              <a:spcAft>
-                <a:spcPts val="300"/>
-              </a:spcAft>
-            </a:pPr>
-            <a:r>
-              <a:rPr sz="1000" b="0">
-                <a:latin typeface="Consolas"/>
-              </a:rPr>
-              <a:t>WORKING-CONTEXT.md  --POST (Stop/PreCompact)--&gt;  state/progress.md + tasks.md  (nur Delta)</a:t>
-            </a:r>
-          </a:p>
-          <a:p>
-            <a:pPr>
-              <a:spcAft>
-                <a:spcPts val="300"/>
-              </a:spcAft>
-            </a:pPr>
-            <a:r>
-              <a:rPr sz="1200" b="0"/>
-              <a:t>• PRE: generiert WORKING-CONTEXT.md aus state/; STATE:-Blöcke gespiegelt, SYNC:-Eingabezonen bleiben erhalten.</a:t>
-            </a:r>
-          </a:p>
-          <a:p>
-            <a:pPr>
-              <a:spcAft>
-                <a:spcPts val="300"/>
-              </a:spcAft>
-            </a:pPr>
-            <a:r>
-              <a:rPr sz="1200" b="0"/>
-              <a:t>• POST: liest nur die SYNC:-Zonen, bildet das Delta gegen den Snapshot, hängt neue Zeilen verlustfrei an state/ an.</a:t>
+              <a:rPr sz="1600" b="0"/>
+              <a:t>Erkenntnis aus dem Test-ECC-Onboarding: CLAUDE.md ist KEIN Projektbeschrieb. Es ist der Arbeitsvertrag für Claude: Workflow, Verbote, Commands, Checklisten.</a:t>
+            </a:r>
+          </a:p>
+          <a:p>
+            <a:pPr>
+              <a:spcAft>
+                <a:spcPts val="300"/>
+              </a:spcAft>
+            </a:pPr>
+            <a:r>
+              <a:rPr sz="1600" b="1"/>
+              <a:t>Was rein muss · Was NICHT rein soll</a:t>
+            </a:r>
+          </a:p>
+          <a:p>
+            <a:pPr lvl="1">
+              <a:spcAft>
+                <a:spcPts val="300"/>
+              </a:spcAft>
+            </a:pPr>
+            <a:r>
+              <a:rPr sz="1500" b="0"/>
+              <a:t>Pflicht-Workflow (ECC 5-Phasen) — Projektbeschreibung (→ README / PROJECT_RULES.md)</a:t>
+            </a:r>
+          </a:p>
+          <a:p>
+            <a:pPr lvl="1">
+              <a:spcAft>
+                <a:spcPts val="300"/>
+              </a:spcAft>
+            </a:pPr>
+            <a:r>
+              <a:rPr sz="1500" b="0"/>
+              <a:t>Explizite Verbote (was Claude nicht tun darf) — Architektur-Details (→ docs/CODEMAPS/)</a:t>
+            </a:r>
+          </a:p>
+          <a:p>
+            <a:pPr lvl="1">
+              <a:spcAft>
+                <a:spcPts val="300"/>
+              </a:spcAft>
+            </a:pPr>
+            <a:r>
+              <a:rPr sz="1500" b="0"/>
+              <a:t>Modell-Matrix (welches Modell wofür) — Generische Platzhalter wie [Stack noch nicht konfiguriert]</a:t>
+            </a:r>
+          </a:p>
+          <a:p>
+            <a:pPr lvl="1">
+              <a:spcAft>
+                <a:spcPts val="300"/>
+              </a:spcAft>
+            </a:pPr>
+            <a:r>
+              <a:rPr sz="1500" b="0"/>
+              <a:t>Build/Test/Lint-Commands (copy-paste-tauglich)</a:t>
+            </a:r>
+          </a:p>
+          <a:p>
+            <a:pPr lvl="1">
+              <a:spcAft>
+                <a:spcPts val="300"/>
+              </a:spcAft>
+            </a:pPr>
+            <a:r>
+              <a:rPr sz="1500" b="0"/>
+              <a:t>Pflicht-Commands pro Situation, Token-Budget-Regeln</a:t>
+            </a:r>
+          </a:p>
+          <a:p>
+            <a:pPr lvl="1">
+              <a:spcAft>
+                <a:spcPts val="300"/>
+              </a:spcAft>
+            </a:pPr>
+            <a:r>
+              <a:rPr sz="1500" b="0"/>
+              <a:t>Sicherheits-Checkliste, Hook-Status (welche aktiv)</a:t>
             </a:r>
           </a:p>
         </p:txBody>
@@ -7511,7 +7451,7 @@
                   <a:srgbClr val="FFFFFF"/>
                 </a:solidFill>
               </a:rPr>
-              <a:t>19 · Hybrid-Mega-Workflow — State-Sync + RPI-Berater (Forts.)</a:t>
+              <a:t>18 · ECC-CLIs &amp; Wartung</a:t>
             </a:r>
           </a:p>
         </p:txBody>
@@ -7538,141 +7478,105 @@
           </a:bodyPr>
           <a:lstStyle/>
           <a:p>
-            <a:pPr>
-              <a:spcAft>
-                <a:spcPts val="300"/>
-              </a:spcAft>
-            </a:pPr>
-            <a:r>
-              <a:rPr sz="1200" b="0"/>
-              <a:t>• Garantien: Marker (kein Clobbering) · atomar · idempotent · No-op- &amp; ECC-Guard · Exit 0. Test: selftest.js (7 Checks).</a:t>
-            </a:r>
-          </a:p>
-          <a:p>
-            <a:pPr>
-              <a:spcAft>
-                <a:spcPts val="300"/>
-              </a:spcAft>
-            </a:pPr>
-            <a:r>
-              <a:rPr sz="1200" b="1"/>
-              <a:t>c) /mega-plan — RPI-Berater parallel vor /plan</a:t>
-            </a:r>
-          </a:p>
-          <a:p>
-            <a:pPr>
-              <a:spcAft>
-                <a:spcPts val="300"/>
-              </a:spcAft>
-            </a:pPr>
-            <a:r>
-              <a:rPr sz="1200" b="0"/>
-              <a:t>Für vage/vielschichtige Ziele: holt mehrere read-only Experten-Perspektiven parallel ein, verdichtet sie zu einem Briefing und übergibt an ECCs /plan (führend).</a:t>
-            </a:r>
-          </a:p>
-          <a:p>
-            <a:pPr>
-              <a:spcAft>
-                <a:spcPts val="300"/>
-              </a:spcAft>
-            </a:pPr>
-            <a:r>
-              <a:rPr sz="1200" b="1"/>
-              <a:t>Berater · Perspektive</a:t>
-            </a:r>
-          </a:p>
-          <a:p>
-            <a:pPr lvl="1">
-              <a:spcAft>
-                <a:spcPts val="300"/>
-              </a:spcAft>
-            </a:pPr>
-            <a:r>
-              <a:rPr sz="1100" b="0"/>
-              <a:t>Intake (requirement-parser) — Anforderungen, Constraints, offene Fragen</a:t>
-            </a:r>
-          </a:p>
-          <a:p>
-            <a:pPr lvl="1">
-              <a:spcAft>
-                <a:spcPts val="300"/>
-              </a:spcAft>
-            </a:pPr>
-            <a:r>
-              <a:rPr sz="1100" b="0"/>
-              <a:t>CTO — Technik-Strategie, Architektur-Fit, Risiko</a:t>
-            </a:r>
-          </a:p>
-          <a:p>
-            <a:pPr lvl="1">
-              <a:spcAft>
-                <a:spcPts val="300"/>
-              </a:spcAft>
-            </a:pPr>
-            <a:r>
-              <a:rPr sz="1100" b="0"/>
-              <a:t>Product — Scope, Requirements, Akzeptanzkriterien</a:t>
-            </a:r>
-          </a:p>
-          <a:p>
-            <a:pPr lvl="1">
-              <a:spcAft>
-                <a:spcPts val="300"/>
-              </a:spcAft>
-            </a:pPr>
-            <a:r>
-              <a:rPr sz="1100" b="0"/>
-              <a:t>UX — Flows, States, Accessibility</a:t>
-            </a:r>
-          </a:p>
-          <a:p>
-            <a:pPr lvl="1">
-              <a:spcAft>
-                <a:spcPts val="300"/>
-              </a:spcAft>
-            </a:pPr>
-            <a:r>
-              <a:rPr sz="1000" b="0">
+            <a:pPr lvl="1">
+              <a:spcAft>
+                <a:spcPts val="300"/>
+              </a:spcAft>
+            </a:pPr>
+            <a:r>
+              <a:rPr sz="1400" b="0">
                 <a:latin typeface="Consolas"/>
               </a:rPr>
-              <a:t>/mega-plan &lt;Ziel in einem Satz&gt;     # Berater parallel → Briefing → /plan</a:t>
-            </a:r>
-          </a:p>
-          <a:p>
-            <a:pPr lvl="1">
-              <a:spcAft>
-                <a:spcPts val="300"/>
-              </a:spcAft>
-            </a:pPr>
-            <a:r>
-              <a:rPr sz="1000" b="0">
+              <a:t># Plugin-Pfad (Single Source, read-only behandeln):</a:t>
+            </a:r>
+          </a:p>
+          <a:p>
+            <a:pPr lvl="1">
+              <a:spcAft>
+                <a:spcPts val="300"/>
+              </a:spcAft>
+            </a:pPr>
+            <a:r>
+              <a:rPr sz="1400" b="0">
                 <a:latin typeface="Consolas"/>
               </a:rPr>
-              <a:t>/plan                               # ECC, wartet auf dein OK</a:t>
-            </a:r>
-          </a:p>
-          <a:p>
-            <a:pPr lvl="1">
-              <a:spcAft>
-                <a:spcPts val="300"/>
-              </a:spcAft>
-            </a:pPr>
-            <a:r>
-              <a:rPr sz="1000" b="0">
+              <a:t>ECC=~/.claude/plugins/cache/ecc/ecc/2.0.0</a:t>
+            </a:r>
+          </a:p>
+          <a:p>
+            <a:pPr lvl="1">
+              <a:spcAft>
+                <a:spcPts val="300"/>
+              </a:spcAft>
+            </a:pPr>
+            <a:r>
+              <a:rPr sz="1400" b="0">
                 <a:latin typeface="Consolas"/>
               </a:rPr>
-              <a:t>/feature-dev → /code-review → Verify # normaler ECC-5-Phasen-Flow</a:t>
-            </a:r>
-          </a:p>
-          <a:p>
-            <a:pPr>
-              <a:spcAft>
-                <a:spcPts val="300"/>
-              </a:spcAft>
-            </a:pPr>
-            <a:r>
-              <a:rPr sz="1200" b="0"/>
-              <a:t>ECC-Core unberührt: Alles liegt in bestpractice-extras/; am Plugin unter ~/.claude/plugins/cache/ecc/ wird nie gepatcht. Tiefe Doku: docs/MEGA-WORKFLOW.de.md.</a:t>
+              <a:t>node "$ECC/scripts/harness-audit.js"   # Repo-Integritäts-Audit</a:t>
+            </a:r>
+          </a:p>
+          <a:p>
+            <a:pPr lvl="1">
+              <a:spcAft>
+                <a:spcPts val="300"/>
+              </a:spcAft>
+            </a:pPr>
+            <a:r>
+              <a:rPr sz="1400" b="0">
+                <a:latin typeface="Consolas"/>
+              </a:rPr>
+              <a:t>node "$ECC/scripts/ecc.js" doctor      # Health-Check</a:t>
+            </a:r>
+          </a:p>
+          <a:p>
+            <a:pPr lvl="1">
+              <a:spcAft>
+                <a:spcPts val="300"/>
+              </a:spcAft>
+            </a:pPr>
+            <a:r>
+              <a:rPr sz="1400" b="0">
+                <a:latin typeface="Consolas"/>
+              </a:rPr>
+              <a:t># ECC-Update: in ~/.claude/settings.json den Tag anheben …</a:t>
+            </a:r>
+          </a:p>
+          <a:p>
+            <a:pPr lvl="1">
+              <a:spcAft>
+                <a:spcPts val="300"/>
+              </a:spcAft>
+            </a:pPr>
+            <a:r>
+              <a:rPr sz="1400" b="0">
+                <a:latin typeface="Consolas"/>
+              </a:rPr>
+              <a:t>#   extraKnownMarketplaces.ecc.source.ref = "v&lt;neue-version&gt;"</a:t>
+            </a:r>
+          </a:p>
+          <a:p>
+            <a:pPr lvl="1">
+              <a:spcAft>
+                <a:spcPts val="300"/>
+              </a:spcAft>
+            </a:pPr>
+            <a:r>
+              <a:rPr sz="1400" b="0">
+                <a:latin typeface="Consolas"/>
+              </a:rPr>
+              <a:t># … dann Claude Code neu starten (Plugin wird neu gecacht).</a:t>
+            </a:r>
+          </a:p>
+          <a:p>
+            <a:pPr>
+              <a:spcAft>
+                <a:spcPts val="300"/>
+              </a:spcAft>
+            </a:pPr>
+            <a:r>
+              <a:rPr sz="1600" b="0"/>
+              <a:t>Slash-Einstieg: /ecc-guide (Onboarding), /harness-audit (Config-Scorecard), /cost-report, /skill-health, /projects. ⚠️ Plugin-/Settings-Änderungen greifen erst nach Neustart von Claude Code (/clear reicht nicht).</a:t>
             </a:r>
           </a:p>
         </p:txBody>
@@ -7767,7 +7671,7 @@
                   <a:srgbClr val="FFFFFF"/>
                 </a:solidFill>
               </a:rPr>
-              <a:t>20 · Aktivierungs-Status (Stand 2026-06-10 — Plugin-only-Migration)</a:t>
+              <a:t>19 · Hybrid-Mega-Workflow — State-Sync + RPI-Berater</a:t>
             </a:r>
           </a:p>
         </p:txBody>
@@ -7800,85 +7704,144 @@
               </a:spcAft>
             </a:pPr>
             <a:r>
-              <a:rPr sz="1600" b="0"/>
-              <a:t>Die Migration auf Plugin-only ist abgeschlossen (Commits d99f3d0 + 8293011):</a:t>
-            </a:r>
-          </a:p>
-          <a:p>
-            <a:pPr>
-              <a:spcAft>
-                <a:spcPts val="300"/>
-              </a:spcAft>
-            </a:pPr>
-            <a:r>
-              <a:rPr sz="1600" b="0"/>
-              <a:t>• ECC-Core = globales Plugin ecc@ecc 2.0.0-rc.1, gepinnt auf GitHub affaan-m/ECC Tag v2.0.0-rc.1 (extraKnownMarketplaces in ~/.claude/settings.json). Vendored ecc/ im Repo und der 213-MB-Klon /root/projekte/ECC sind gelöscht.</a:t>
-            </a:r>
-          </a:p>
-          <a:p>
-            <a:pPr>
-              <a:spcAft>
-                <a:spcPts val="300"/>
-              </a:spcAft>
-            </a:pPr>
-            <a:r>
-              <a:rPr sz="1600" b="0"/>
-              <a:t>• ECC-Duplikate im Home entfernt: globale Rules- (117 Dateien, verursachten Auto-Compact), Hooks- und Skills-Kopien sind weg — das Plugin liefert alles. Geblieben: 3 Schicht-2-Command-Symlinks (start, mega-plan, ecc-onboard), skills/learned, skills/system-architektur, rules/ecc-extras/.</a:t>
-            </a:r>
-          </a:p>
-          <a:p>
-            <a:pPr>
-              <a:spcAft>
-                <a:spcPts val="300"/>
-              </a:spcAft>
-            </a:pPr>
-            <a:r>
-              <a:rPr sz="1600" b="0"/>
-              <a:t>• Abgelöst (Plugins auf false): claude-mem → memory-MCP + Instincts + /save-session · superpowers → ECC-Workflows · context7@official + feature-dev → ECC-Pendants. ⚠️ Greift erst nach Neustart von Claude Code.</a:t>
-            </a:r>
-          </a:p>
-          <a:p>
-            <a:pPr>
-              <a:spcAft>
-                <a:spcPts val="300"/>
-              </a:spcAft>
-            </a:pPr>
-            <a:r>
-              <a:rPr sz="1600" b="0"/>
-              <a:t>• Hook-Scope: global minimal + ECC_GATEGUARD=off; onboarded Projekte lokal standard (BestPractice, Werkstattauftraege_codex, Grow3_Automatisierung, Test-ECC, Verladelisten_Hafen). Eigenbau-hooks.py aus Werkstatt/WMS_Test entfernt.</a:t>
-            </a:r>
-          </a:p>
-          <a:p>
-            <a:pPr>
-              <a:spcAft>
-                <a:spcPts val="300"/>
-              </a:spcAft>
-            </a:pPr>
-            <a:r>
-              <a:rPr sz="1600" b="0"/>
-              <a:t>• State-Sync aktiv (GLOBAL): ~/.claude/settings.json → SessionStart→pre, Stop/PreCompact→post über ~/.claude/state-sync/ (Symlink→Repo-Engine), guard-gated. Onboarded Projekte brauchen keine eigenen state-sync-Hooks.</a:t>
-            </a:r>
-          </a:p>
-          <a:p>
-            <a:pPr>
-              <a:spcAft>
-                <a:spcPts val="300"/>
-              </a:spcAft>
-            </a:pPr>
-            <a:r>
-              <a:rPr sz="1600" b="0"/>
-              <a:t>• Backup: kompletter Vor-Migrations-Stand unter /root/harness-backup-20260610/ (inkl. geretteter Eigenarbeit ecc-clone-eigenes/).</a:t>
-            </a:r>
-          </a:p>
-          <a:p>
-            <a:pPr>
-              <a:spcAft>
-                <a:spcPts val="300"/>
-              </a:spcAft>
-            </a:pPr>
-            <a:r>
-              <a:rPr sz="1600" b="0"/>
-              <a:t>• Unberührt: RTK-Hook (PreToolUse:Bash global) · Attribution-Policy (Schicht-2-Override): Co-Authorship AKTIV, der Upstream-Hinweis „Attribution disabled globally" gilt hier bewusst nicht.</a:t>
+              <a:rPr sz="1200" b="0"/>
+              <a:t>Der BestPractice-Wrapper koppelt persistenten Projekt-State an ECCs Loop und stellt /mega-plan als Planungs-Vorstufe bereit — rein additiv. Der ECC-Core (das globale Plugin) bleibt unverändert.</a:t>
+            </a:r>
+          </a:p>
+          <a:p>
+            <a:pPr>
+              <a:spcAft>
+                <a:spcPts val="300"/>
+              </a:spcAft>
+            </a:pPr>
+            <a:r>
+              <a:rPr sz="1200" b="1"/>
+              <a:t>a) Wo wird was gespeichert</a:t>
+            </a:r>
+          </a:p>
+          <a:p>
+            <a:pPr>
+              <a:spcAft>
+                <a:spcPts val="300"/>
+              </a:spcAft>
+            </a:pPr>
+            <a:r>
+              <a:rPr sz="1200" b="1"/>
+              <a:t>Artefakt · Ort · Wahrheit?</a:t>
+            </a:r>
+          </a:p>
+          <a:p>
+            <a:pPr lvl="1">
+              <a:spcAft>
+                <a:spcPts val="300"/>
+              </a:spcAft>
+            </a:pPr>
+            <a:r>
+              <a:rPr sz="1100" b="0"/>
+              <a:t>State (4 Dateien) — state/{context,decisions,tasks,progress}.md — JA — vom Menschen</a:t>
+            </a:r>
+          </a:p>
+          <a:p>
+            <a:pPr lvl="1">
+              <a:spcAft>
+                <a:spcPts val="300"/>
+              </a:spcAft>
+            </a:pPr>
+            <a:r>
+              <a:rPr sz="1100" b="0"/>
+              <a:t>Loop-Futter — &lt;root&gt;/WORKING-CONTEXT.md (generiert) — Nein — aus state/</a:t>
+            </a:r>
+          </a:p>
+          <a:p>
+            <a:pPr lvl="1">
+              <a:spcAft>
+                <a:spcPts val="300"/>
+              </a:spcAft>
+            </a:pPr>
+            <a:r>
+              <a:rPr sz="1100" b="0"/>
+              <a:t>Sync-Snapshot — state/.sync/last-working-context.md — Nein — gitignored</a:t>
+            </a:r>
+          </a:p>
+          <a:p>
+            <a:pPr lvl="1">
+              <a:spcAft>
+                <a:spcPts val="300"/>
+              </a:spcAft>
+            </a:pPr>
+            <a:r>
+              <a:rPr sz="1100" b="0"/>
+              <a:t>Karpathy (global) — ~/.claude/rules/ecc-extras/ + @-Import — JA — einmalig</a:t>
+            </a:r>
+          </a:p>
+          <a:p>
+            <a:pPr>
+              <a:spcAft>
+                <a:spcPts val="300"/>
+              </a:spcAft>
+            </a:pPr>
+            <a:r>
+              <a:rPr sz="1200" b="0"/>
+              <a:t>Merksatz: state/ ist die Wahrheit. WORKING-CONTEXT.md ist nur ihr generiertes Spiegelbild für den Loop — nie von Hand pflegen, immer state/ editieren.</a:t>
+            </a:r>
+          </a:p>
+          <a:p>
+            <a:pPr>
+              <a:spcAft>
+                <a:spcPts val="300"/>
+              </a:spcAft>
+            </a:pPr>
+            <a:r>
+              <a:rPr sz="1200" b="1"/>
+              <a:t>b) Der Sync-Loop (PRE/POST, via Lifecycle-Hooks)</a:t>
+            </a:r>
+          </a:p>
+          <a:p>
+            <a:pPr lvl="1">
+              <a:spcAft>
+                <a:spcPts val="300"/>
+              </a:spcAft>
+            </a:pPr>
+            <a:r>
+              <a:rPr sz="1000" b="0">
+                <a:latin typeface="Consolas"/>
+              </a:rPr>
+              <a:t>state/*.md  --PRE (SessionStart)--&gt;  WORKING-CONTEXT.md   (Loop liest STATE:*, füllt SYNC:*)</a:t>
+            </a:r>
+          </a:p>
+          <a:p>
+            <a:pPr lvl="1">
+              <a:spcAft>
+                <a:spcPts val="300"/>
+              </a:spcAft>
+            </a:pPr>
+            <a:r>
+              <a:rPr sz="1000" b="0">
+                <a:latin typeface="Consolas"/>
+              </a:rPr>
+              <a:t>WORKING-CONTEXT.md  --POST (Stop/PreCompact)--&gt;  state/progress.md + tasks.md  (nur Delta)</a:t>
+            </a:r>
+          </a:p>
+          <a:p>
+            <a:pPr>
+              <a:spcAft>
+                <a:spcPts val="300"/>
+              </a:spcAft>
+            </a:pPr>
+            <a:r>
+              <a:rPr sz="1200" b="0"/>
+              <a:t>• PRE: generiert WORKING-CONTEXT.md aus state/; STATE:-Blöcke gespiegelt, SYNC:-Eingabezonen bleiben erhalten.</a:t>
+            </a:r>
+          </a:p>
+          <a:p>
+            <a:pPr>
+              <a:spcAft>
+                <a:spcPts val="300"/>
+              </a:spcAft>
+            </a:pPr>
+            <a:r>
+              <a:rPr sz="1200" b="0"/>
+              <a:t>• POST: liest nur die SYNC:-Zonen, bildet das Delta gegen den Snapshot, hängt neue Zeilen verlustfrei an state/ an.</a:t>
             </a:r>
           </a:p>
         </p:txBody>
@@ -7973,7 +7936,7 @@
                   <a:srgbClr val="FFFFFF"/>
                 </a:solidFill>
               </a:rPr>
-              <a:t>21 · Quellen &amp; TL;DR</a:t>
+              <a:t>19 · Hybrid-Mega-Workflow — State-Sync + RPI-Berater (Forts.)</a:t>
             </a:r>
           </a:p>
         </p:txBody>
@@ -8007,7 +7970,18 @@
             </a:pPr>
             <a:r>
               <a:rPr sz="1200" b="0"/>
-              <a:t>Original-Guides von @affaanmustafa (als X-Threads veröffentlicht; lokal im Plugin-Cache ~/.claude/plugins/cache/ecc/ecc/2.0.0-rc.1/):</a:t>
+              <a:t>• Garantien: Marker (kein Clobbering) · atomar · idempotent · No-op- &amp; ECC-Guard · Exit 0. Test: selftest.js (7 Checks).</a:t>
+            </a:r>
+          </a:p>
+          <a:p>
+            <a:pPr>
+              <a:spcAft>
+                <a:spcPts val="300"/>
+              </a:spcAft>
+            </a:pPr>
+            <a:r>
+              <a:rPr sz="1200" b="1"/>
+              <a:t>c) /mega-plan — RPI-Berater parallel vor /plan</a:t>
             </a:r>
           </a:p>
           <a:p>
@@ -8018,7 +7992,101 @@
             </a:pPr>
             <a:r>
               <a:rPr sz="1200" b="0"/>
-              <a:t>• Shortform-Guide: https://x.com/affaanmustafa/status/2012378465664745795 (the-shortform-guide.md) — Setup &amp; Philosophie</a:t>
+              <a:t>Für vage/vielschichtige Ziele: holt mehrere read-only Experten-Perspektiven parallel ein, verdichtet sie zu einem Briefing und übergibt an ECCs /plan (führend).</a:t>
+            </a:r>
+          </a:p>
+          <a:p>
+            <a:pPr>
+              <a:spcAft>
+                <a:spcPts val="300"/>
+              </a:spcAft>
+            </a:pPr>
+            <a:r>
+              <a:rPr sz="1200" b="1"/>
+              <a:t>Berater · Perspektive</a:t>
+            </a:r>
+          </a:p>
+          <a:p>
+            <a:pPr lvl="1">
+              <a:spcAft>
+                <a:spcPts val="300"/>
+              </a:spcAft>
+            </a:pPr>
+            <a:r>
+              <a:rPr sz="1100" b="0"/>
+              <a:t>Intake (requirement-parser) — Anforderungen, Constraints, offene Fragen</a:t>
+            </a:r>
+          </a:p>
+          <a:p>
+            <a:pPr lvl="1">
+              <a:spcAft>
+                <a:spcPts val="300"/>
+              </a:spcAft>
+            </a:pPr>
+            <a:r>
+              <a:rPr sz="1100" b="0"/>
+              <a:t>CTO — Technik-Strategie, Architektur-Fit, Risiko</a:t>
+            </a:r>
+          </a:p>
+          <a:p>
+            <a:pPr lvl="1">
+              <a:spcAft>
+                <a:spcPts val="300"/>
+              </a:spcAft>
+            </a:pPr>
+            <a:r>
+              <a:rPr sz="1100" b="0"/>
+              <a:t>Product — Scope, Requirements, Akzeptanzkriterien</a:t>
+            </a:r>
+          </a:p>
+          <a:p>
+            <a:pPr lvl="1">
+              <a:spcAft>
+                <a:spcPts val="300"/>
+              </a:spcAft>
+            </a:pPr>
+            <a:r>
+              <a:rPr sz="1100" b="0"/>
+              <a:t>UX — Flows, States, Accessibility</a:t>
+            </a:r>
+          </a:p>
+          <a:p>
+            <a:pPr lvl="1">
+              <a:spcAft>
+                <a:spcPts val="300"/>
+              </a:spcAft>
+            </a:pPr>
+            <a:r>
+              <a:rPr sz="1000" b="0">
+                <a:latin typeface="Consolas"/>
+              </a:rPr>
+              <a:t>/mega-plan &lt;Ziel in einem Satz&gt;     # Berater parallel → Briefing → /plan</a:t>
+            </a:r>
+          </a:p>
+          <a:p>
+            <a:pPr lvl="1">
+              <a:spcAft>
+                <a:spcPts val="300"/>
+              </a:spcAft>
+            </a:pPr>
+            <a:r>
+              <a:rPr sz="1000" b="0">
+                <a:latin typeface="Consolas"/>
+              </a:rPr>
+              <a:t>/plan                               # ECC, wartet auf dein OK</a:t>
+            </a:r>
+          </a:p>
+          <a:p>
+            <a:pPr lvl="1">
+              <a:spcAft>
+                <a:spcPts val="300"/>
+              </a:spcAft>
+            </a:pPr>
+            <a:r>
+              <a:rPr sz="1000" b="0">
+                <a:latin typeface="Consolas"/>
+              </a:rPr>
+              <a:t>/feature-dev → /code-review → Verify # normaler ECC-5-Phasen-Flow</a:t>
             </a:r>
           </a:p>
           <a:p>
@@ -8029,106 +8097,7 @@
             </a:pPr>
             <a:r>
               <a:rPr sz="1200" b="0"/>
-              <a:t>• Longform-Guide: https://x.com/affaanmustafa/status/2014040193557471352 (the-longform-guide.md) — Token, Memory, Evals, Parallelisierung</a:t>
-            </a:r>
-          </a:p>
-          <a:p>
-            <a:pPr>
-              <a:spcAft>
-                <a:spcPts val="300"/>
-              </a:spcAft>
-            </a:pPr>
-            <a:r>
-              <a:rPr sz="1200" b="0"/>
-              <a:t>• Security-Guide: https://x.com/affaanmustafa/status/2033263813387223421 (the-security-guide.md) — Agent-Security, Pflichtlektüre</a:t>
-            </a:r>
-          </a:p>
-          <a:p>
-            <a:pPr>
-              <a:spcAft>
-                <a:spcPts val="300"/>
-              </a:spcAft>
-            </a:pPr>
-            <a:r>
-              <a:rPr sz="1200" b="0"/>
-              <a:t>• Erfinder: https://x.com/affaanmustafa (@affaanmustafa)</a:t>
-            </a:r>
-          </a:p>
-          <a:p>
-            <a:pPr>
-              <a:spcAft>
-                <a:spcPts val="300"/>
-              </a:spcAft>
-            </a:pPr>
-            <a:r>
-              <a:rPr sz="1200" b="0"/>
-              <a:t>TL;DR — so arbeitest du „wie der Erfinder":</a:t>
-            </a:r>
-          </a:p>
-          <a:p>
-            <a:pPr>
-              <a:spcAft>
-                <a:spcPts val="300"/>
-              </a:spcAft>
-            </a:pPr>
-            <a:r>
-              <a:rPr sz="1200" b="0"/>
-              <a:t>• In Phasen denken: Research → /plan → /feature-dev+TDD → /code-review → Verify, /clear dazwischen.</a:t>
-            </a:r>
-          </a:p>
-          <a:p>
-            <a:pPr>
-              <a:spcAft>
-                <a:spcPts val="300"/>
-              </a:spcAft>
-            </a:pPr>
-            <a:r>
-              <a:rPr sz="1200" b="0"/>
-              <a:t>• Kontext sauber: &lt; 10 MCPs aktiv, billigstes ausreichendes Modell, modulare Dateien, strategisch compacten.</a:t>
-            </a:r>
-          </a:p>
-          <a:p>
-            <a:pPr>
-              <a:spcAft>
-                <a:spcPts val="300"/>
-              </a:spcAft>
-            </a:pPr>
-            <a:r>
-              <a:rPr sz="1200" b="0"/>
-              <a:t>• Persistieren: /save-session am Ende, /start bzw. /resume-session am Anfang.</a:t>
-            </a:r>
-          </a:p>
-          <a:p>
-            <a:pPr>
-              <a:spcAft>
-                <a:spcPts val="300"/>
-              </a:spcAft>
-            </a:pPr>
-            <a:r>
-              <a:rPr sz="1200" b="0"/>
-              <a:t>• Lernen lassen: /learn-eval → /evolve → /promote.</a:t>
-            </a:r>
-          </a:p>
-          <a:p>
-            <a:pPr>
-              <a:spcAft>
-                <a:spcPts val="300"/>
-              </a:spcAft>
-            </a:pPr>
-            <a:r>
-              <a:rPr sz="1200" b="0"/>
-              <a:t>• Security zuerst: RTK aktiv, ECC-Hooks/AgentShield bewusst aktivieren, nie blind ausführen.</a:t>
-            </a:r>
-          </a:p>
-          <a:p>
-            <a:pPr>
-              <a:spcAft>
-                <a:spcPts val="300"/>
-              </a:spcAft>
-            </a:pPr>
-            <a:r>
-              <a:rPr sz="1200" b="0"/>
-              <a:t>• Bei Unsicherheit: /ecc-guide, ecc doctor, die drei Original-Guides.</a:t>
+              <a:t>ECC-Core unberührt: Alles liegt in bestpractice-extras/; am Plugin unter ~/.claude/plugins/cache/ecc/ wird nie gepatcht. Tiefe Doku: docs/MEGA-WORKFLOW.de.md.</a:t>
             </a:r>
           </a:p>
         </p:txBody>
@@ -8268,7 +8237,7 @@
             </a:pPr>
             <a:r>
               <a:rPr sz="1200" b="0"/>
-              <a:t>• Plugin-only: Single Source ist ~/.claude/plugins/cache/ecc/ecc/2.0.0-rc.1/ — keine Kopien mehr unter ~/.claude/{rules,hooks,skills,commands} und keine vendored ecc/ im Repo. Update = extraKnownMarketplaces.ecc.source.ref in ~/.claude/settings.json auf neuen Tag setzen.</a:t>
+              <a:t>• Plugin-only: Single Source ist ~/.claude/plugins/cache/ecc/ecc/2.0.0/ — keine Kopien mehr unter ~/.claude/{rules,hooks,skills,commands} und keine vendored ecc/ im Repo. Update = extraKnownMarketplaces.ecc.source.ref in ~/.claude/settings.json auf neuen Tag setzen.</a:t>
             </a:r>
           </a:p>
           <a:p>
@@ -8379,6 +8348,462 @@
             <a:r>
               <a:rPr sz="1200" b="0"/>
               <a:t>Weiter aktiv neben ECC: codex, mgrep, LSP-Plugins, frontend-design, skill-creator u. a. — eigenständiger Mehrwert ohne Doppelung. Bei Namens-Zweifeln eindeutige ECC-Commands nutzen (/harness-audit, /ecc-guide, /ecc-onboard, /instinct-status).</a:t>
+            </a:r>
+          </a:p>
+        </p:txBody>
+      </p:sp>
+    </p:spTree>
+  </p:cSld>
+  <p:clrMapOvr>
+    <a:masterClrMapping/>
+  </p:clrMapOvr>
+</p:sld>
+</file>
+
+<file path=ppt/slides/slide30.xml><?xml version="1.0" encoding="utf-8"?>
+<p:sld xmlns:a="http://schemas.openxmlformats.org/drawingml/2006/main" xmlns:p="http://schemas.openxmlformats.org/presentationml/2006/main" xmlns:r="http://schemas.openxmlformats.org/officeDocument/2006/relationships">
+  <p:cSld>
+    <p:spTree>
+      <p:nvGrpSpPr>
+        <p:cNvPr id="1" name=""/>
+        <p:cNvGrpSpPr/>
+        <p:nvPr/>
+      </p:nvGrpSpPr>
+      <p:grpSpPr/>
+      <p:sp>
+        <p:nvSpPr>
+          <p:cNvPr id="2" name="Rectangle 1"/>
+          <p:cNvSpPr/>
+          <p:nvPr/>
+        </p:nvSpPr>
+        <p:spPr>
+          <a:xfrm>
+            <a:off x="0" y="0"/>
+            <a:ext cx="12191695" cy="868680"/>
+          </a:xfrm>
+          <a:prstGeom prst="rect">
+            <a:avLst/>
+          </a:prstGeom>
+          <a:solidFill>
+            <a:srgbClr val="1F6F8B"/>
+          </a:solidFill>
+          <a:ln>
+            <a:noFill/>
+          </a:ln>
+          <a:effectLst/>
+        </p:spPr>
+        <p:style>
+          <a:lnRef idx="1">
+            <a:schemeClr val="accent1"/>
+          </a:lnRef>
+          <a:fillRef idx="3">
+            <a:schemeClr val="accent1"/>
+          </a:fillRef>
+          <a:effectRef idx="2">
+            <a:schemeClr val="accent1"/>
+          </a:effectRef>
+          <a:fontRef idx="minor">
+            <a:schemeClr val="lt1"/>
+          </a:fontRef>
+        </p:style>
+        <p:txBody>
+          <a:bodyPr rtlCol="0" anchor="ctr"/>
+          <a:lstStyle/>
+          <a:p>
+            <a:pPr algn="ctr"/>
+          </a:p>
+        </p:txBody>
+      </p:sp>
+      <p:sp>
+        <p:nvSpPr>
+          <p:cNvPr id="3" name="TextBox 2"/>
+          <p:cNvSpPr txBox="1"/>
+          <p:nvPr/>
+        </p:nvSpPr>
+        <p:spPr>
+          <a:xfrm>
+            <a:off x="457200" y="109728"/>
+            <a:ext cx="11247120" cy="640080"/>
+          </a:xfrm>
+          <a:prstGeom prst="rect">
+            <a:avLst/>
+          </a:prstGeom>
+          <a:noFill/>
+        </p:spPr>
+        <p:txBody>
+          <a:bodyPr wrap="square">
+            <a:spAutoFit/>
+          </a:bodyPr>
+          <a:lstStyle/>
+          <a:p>
+            <a:r>
+              <a:rPr sz="2400" b="1">
+                <a:solidFill>
+                  <a:srgbClr val="FFFFFF"/>
+                </a:solidFill>
+              </a:rPr>
+              <a:t>20 · Aktivierungs-Status (Stand 2026-06-10 — Plugin-only-Migration)</a:t>
+            </a:r>
+          </a:p>
+        </p:txBody>
+      </p:sp>
+      <p:sp>
+        <p:nvSpPr>
+          <p:cNvPr id="4" name="TextBox 3"/>
+          <p:cNvSpPr txBox="1"/>
+          <p:nvPr/>
+        </p:nvSpPr>
+        <p:spPr>
+          <a:xfrm>
+            <a:off x="548640" y="1051560"/>
+            <a:ext cx="11064240" cy="5486400"/>
+          </a:xfrm>
+          <a:prstGeom prst="rect">
+            <a:avLst/>
+          </a:prstGeom>
+          <a:noFill/>
+        </p:spPr>
+        <p:txBody>
+          <a:bodyPr wrap="square">
+            <a:spAutoFit/>
+          </a:bodyPr>
+          <a:lstStyle/>
+          <a:p>
+            <a:pPr>
+              <a:spcAft>
+                <a:spcPts val="300"/>
+              </a:spcAft>
+            </a:pPr>
+            <a:r>
+              <a:rPr sz="1600" b="0"/>
+              <a:t>Die Migration auf Plugin-only ist abgeschlossen (Commits d99f3d0 + 8293011):</a:t>
+            </a:r>
+          </a:p>
+          <a:p>
+            <a:pPr>
+              <a:spcAft>
+                <a:spcPts val="300"/>
+              </a:spcAft>
+            </a:pPr>
+            <a:r>
+              <a:rPr sz="1600" b="0"/>
+              <a:t>• ECC-Core = globales Plugin ecc@ecc 2.0.0, gepinnt auf GitHub affaan-m/ECC Tag v2.0.0 (extraKnownMarketplaces in ~/.claude/settings.json). Vendored ecc/ im Repo und der 213-MB-Klon /root/projekte/ECC sind gelöscht.</a:t>
+            </a:r>
+          </a:p>
+          <a:p>
+            <a:pPr>
+              <a:spcAft>
+                <a:spcPts val="300"/>
+              </a:spcAft>
+            </a:pPr>
+            <a:r>
+              <a:rPr sz="1600" b="0"/>
+              <a:t>• ECC-Duplikate im Home entfernt: globale Rules- (117 Dateien, verursachten Auto-Compact), Hooks- und Skills-Kopien sind weg — das Plugin liefert alles. Geblieben: 3 Schicht-2-Command-Symlinks (start, mega-plan, ecc-onboard), skills/learned, skills/system-architektur, rules/ecc-extras/.</a:t>
+            </a:r>
+          </a:p>
+          <a:p>
+            <a:pPr>
+              <a:spcAft>
+                <a:spcPts val="300"/>
+              </a:spcAft>
+            </a:pPr>
+            <a:r>
+              <a:rPr sz="1600" b="0"/>
+              <a:t>• Abgelöst (Plugins auf false): claude-mem → memory-MCP + Instincts + /save-session · superpowers → ECC-Workflows · context7@official + feature-dev → ECC-Pendants. ⚠️ Greift erst nach Neustart von Claude Code.</a:t>
+            </a:r>
+          </a:p>
+          <a:p>
+            <a:pPr>
+              <a:spcAft>
+                <a:spcPts val="300"/>
+              </a:spcAft>
+            </a:pPr>
+            <a:r>
+              <a:rPr sz="1600" b="0"/>
+              <a:t>• Hook-Scope: global minimal + ECC_GATEGUARD=off; onboarded Projekte lokal standard (BestPractice, Werkstattauftraege_codex, Grow3_Automatisierung, Test-ECC, Verladelisten_Hafen). Eigenbau-hooks.py aus Werkstatt/WMS_Test entfernt.</a:t>
+            </a:r>
+          </a:p>
+          <a:p>
+            <a:pPr>
+              <a:spcAft>
+                <a:spcPts val="300"/>
+              </a:spcAft>
+            </a:pPr>
+            <a:r>
+              <a:rPr sz="1600" b="0"/>
+              <a:t>• State-Sync aktiv (GLOBAL): ~/.claude/settings.json → SessionStart→pre, Stop/PreCompact→post über ~/.claude/state-sync/ (Symlink→Repo-Engine), guard-gated. Onboarded Projekte brauchen keine eigenen state-sync-Hooks.</a:t>
+            </a:r>
+          </a:p>
+          <a:p>
+            <a:pPr>
+              <a:spcAft>
+                <a:spcPts val="300"/>
+              </a:spcAft>
+            </a:pPr>
+            <a:r>
+              <a:rPr sz="1600" b="0"/>
+              <a:t>• Backup: kompletter Vor-Migrations-Stand unter /root/harness-backup-20260610/ (inkl. geretteter Eigenarbeit ecc-clone-eigenes/).</a:t>
+            </a:r>
+          </a:p>
+          <a:p>
+            <a:pPr>
+              <a:spcAft>
+                <a:spcPts val="300"/>
+              </a:spcAft>
+            </a:pPr>
+            <a:r>
+              <a:rPr sz="1600" b="0"/>
+              <a:t>• Unberührt: RTK-Hook (PreToolUse:Bash global) · Attribution-Policy (Schicht-2-Override): Co-Authorship AKTIV, der Upstream-Hinweis „Attribution disabled globally" gilt hier bewusst nicht.</a:t>
+            </a:r>
+          </a:p>
+        </p:txBody>
+      </p:sp>
+    </p:spTree>
+  </p:cSld>
+  <p:clrMapOvr>
+    <a:masterClrMapping/>
+  </p:clrMapOvr>
+</p:sld>
+</file>
+
+<file path=ppt/slides/slide31.xml><?xml version="1.0" encoding="utf-8"?>
+<p:sld xmlns:a="http://schemas.openxmlformats.org/drawingml/2006/main" xmlns:p="http://schemas.openxmlformats.org/presentationml/2006/main" xmlns:r="http://schemas.openxmlformats.org/officeDocument/2006/relationships">
+  <p:cSld>
+    <p:spTree>
+      <p:nvGrpSpPr>
+        <p:cNvPr id="1" name=""/>
+        <p:cNvGrpSpPr/>
+        <p:nvPr/>
+      </p:nvGrpSpPr>
+      <p:grpSpPr/>
+      <p:sp>
+        <p:nvSpPr>
+          <p:cNvPr id="2" name="Rectangle 1"/>
+          <p:cNvSpPr/>
+          <p:nvPr/>
+        </p:nvSpPr>
+        <p:spPr>
+          <a:xfrm>
+            <a:off x="0" y="0"/>
+            <a:ext cx="12191695" cy="868680"/>
+          </a:xfrm>
+          <a:prstGeom prst="rect">
+            <a:avLst/>
+          </a:prstGeom>
+          <a:solidFill>
+            <a:srgbClr val="1F6F8B"/>
+          </a:solidFill>
+          <a:ln>
+            <a:noFill/>
+          </a:ln>
+          <a:effectLst/>
+        </p:spPr>
+        <p:style>
+          <a:lnRef idx="1">
+            <a:schemeClr val="accent1"/>
+          </a:lnRef>
+          <a:fillRef idx="3">
+            <a:schemeClr val="accent1"/>
+          </a:fillRef>
+          <a:effectRef idx="2">
+            <a:schemeClr val="accent1"/>
+          </a:effectRef>
+          <a:fontRef idx="minor">
+            <a:schemeClr val="lt1"/>
+          </a:fontRef>
+        </p:style>
+        <p:txBody>
+          <a:bodyPr rtlCol="0" anchor="ctr"/>
+          <a:lstStyle/>
+          <a:p>
+            <a:pPr algn="ctr"/>
+          </a:p>
+        </p:txBody>
+      </p:sp>
+      <p:sp>
+        <p:nvSpPr>
+          <p:cNvPr id="3" name="TextBox 2"/>
+          <p:cNvSpPr txBox="1"/>
+          <p:nvPr/>
+        </p:nvSpPr>
+        <p:spPr>
+          <a:xfrm>
+            <a:off x="457200" y="109728"/>
+            <a:ext cx="11247120" cy="640080"/>
+          </a:xfrm>
+          <a:prstGeom prst="rect">
+            <a:avLst/>
+          </a:prstGeom>
+          <a:noFill/>
+        </p:spPr>
+        <p:txBody>
+          <a:bodyPr wrap="square">
+            <a:spAutoFit/>
+          </a:bodyPr>
+          <a:lstStyle/>
+          <a:p>
+            <a:r>
+              <a:rPr sz="2400" b="1">
+                <a:solidFill>
+                  <a:srgbClr val="FFFFFF"/>
+                </a:solidFill>
+              </a:rPr>
+              <a:t>21 · Quellen &amp; TL;DR</a:t>
+            </a:r>
+          </a:p>
+        </p:txBody>
+      </p:sp>
+      <p:sp>
+        <p:nvSpPr>
+          <p:cNvPr id="4" name="TextBox 3"/>
+          <p:cNvSpPr txBox="1"/>
+          <p:nvPr/>
+        </p:nvSpPr>
+        <p:spPr>
+          <a:xfrm>
+            <a:off x="548640" y="1051560"/>
+            <a:ext cx="11064240" cy="5486400"/>
+          </a:xfrm>
+          <a:prstGeom prst="rect">
+            <a:avLst/>
+          </a:prstGeom>
+          <a:noFill/>
+        </p:spPr>
+        <p:txBody>
+          <a:bodyPr wrap="square">
+            <a:spAutoFit/>
+          </a:bodyPr>
+          <a:lstStyle/>
+          <a:p>
+            <a:pPr>
+              <a:spcAft>
+                <a:spcPts val="300"/>
+              </a:spcAft>
+            </a:pPr>
+            <a:r>
+              <a:rPr sz="1200" b="0"/>
+              <a:t>Original-Guides von @affaanmustafa (als X-Threads veröffentlicht; lokal im Plugin-Cache ~/.claude/plugins/cache/ecc/ecc/2.0.0/):</a:t>
+            </a:r>
+          </a:p>
+          <a:p>
+            <a:pPr>
+              <a:spcAft>
+                <a:spcPts val="300"/>
+              </a:spcAft>
+            </a:pPr>
+            <a:r>
+              <a:rPr sz="1200" b="0"/>
+              <a:t>• Shortform-Guide: https://x.com/affaanmustafa/status/2012378465664745795 (the-shortform-guide.md) — Setup &amp; Philosophie</a:t>
+            </a:r>
+          </a:p>
+          <a:p>
+            <a:pPr>
+              <a:spcAft>
+                <a:spcPts val="300"/>
+              </a:spcAft>
+            </a:pPr>
+            <a:r>
+              <a:rPr sz="1200" b="0"/>
+              <a:t>• Longform-Guide: https://x.com/affaanmustafa/status/2014040193557471352 (the-longform-guide.md) — Token, Memory, Evals, Parallelisierung</a:t>
+            </a:r>
+          </a:p>
+          <a:p>
+            <a:pPr>
+              <a:spcAft>
+                <a:spcPts val="300"/>
+              </a:spcAft>
+            </a:pPr>
+            <a:r>
+              <a:rPr sz="1200" b="0"/>
+              <a:t>• Security-Guide: https://x.com/affaanmustafa/status/2033263813387223421 (the-security-guide.md) — Agent-Security, Pflichtlektüre</a:t>
+            </a:r>
+          </a:p>
+          <a:p>
+            <a:pPr>
+              <a:spcAft>
+                <a:spcPts val="300"/>
+              </a:spcAft>
+            </a:pPr>
+            <a:r>
+              <a:rPr sz="1200" b="0"/>
+              <a:t>• Erfinder: https://x.com/affaanmustafa (@affaanmustafa)</a:t>
+            </a:r>
+          </a:p>
+          <a:p>
+            <a:pPr>
+              <a:spcAft>
+                <a:spcPts val="300"/>
+              </a:spcAft>
+            </a:pPr>
+            <a:r>
+              <a:rPr sz="1200" b="0"/>
+              <a:t>TL;DR — so arbeitest du „wie der Erfinder":</a:t>
+            </a:r>
+          </a:p>
+          <a:p>
+            <a:pPr>
+              <a:spcAft>
+                <a:spcPts val="300"/>
+              </a:spcAft>
+            </a:pPr>
+            <a:r>
+              <a:rPr sz="1200" b="0"/>
+              <a:t>• In Phasen denken: Research → /plan → /feature-dev+TDD → /code-review → Verify, /clear dazwischen.</a:t>
+            </a:r>
+          </a:p>
+          <a:p>
+            <a:pPr>
+              <a:spcAft>
+                <a:spcPts val="300"/>
+              </a:spcAft>
+            </a:pPr>
+            <a:r>
+              <a:rPr sz="1200" b="0"/>
+              <a:t>• Kontext sauber: &lt; 10 MCPs aktiv, billigstes ausreichendes Modell, modulare Dateien, strategisch compacten.</a:t>
+            </a:r>
+          </a:p>
+          <a:p>
+            <a:pPr>
+              <a:spcAft>
+                <a:spcPts val="300"/>
+              </a:spcAft>
+            </a:pPr>
+            <a:r>
+              <a:rPr sz="1200" b="0"/>
+              <a:t>• Persistieren: /save-session am Ende, /start bzw. /resume-session am Anfang.</a:t>
+            </a:r>
+          </a:p>
+          <a:p>
+            <a:pPr>
+              <a:spcAft>
+                <a:spcPts val="300"/>
+              </a:spcAft>
+            </a:pPr>
+            <a:r>
+              <a:rPr sz="1200" b="0"/>
+              <a:t>• Lernen lassen: /learn-eval → /evolve → /promote.</a:t>
+            </a:r>
+          </a:p>
+          <a:p>
+            <a:pPr>
+              <a:spcAft>
+                <a:spcPts val="300"/>
+              </a:spcAft>
+            </a:pPr>
+            <a:r>
+              <a:rPr sz="1200" b="0"/>
+              <a:t>• Security zuerst: RTK aktiv, ECC-Hooks/AgentShield bewusst aktivieren, nie blind ausführen.</a:t>
+            </a:r>
+          </a:p>
+          <a:p>
+            <a:pPr>
+              <a:spcAft>
+                <a:spcPts val="300"/>
+              </a:spcAft>
+            </a:pPr>
+            <a:r>
+              <a:rPr sz="1200" b="0"/>
+              <a:t>• Bei Unsicherheit: /ecc-guide, ecc doctor, die drei Original-Guides.</a:t>
             </a:r>
           </a:p>
         </p:txBody>
@@ -8595,7 +9020,7 @@
             </a:pPr>
             <a:r>
               <a:rPr sz="1400" b="0"/>
-              <a:t>(Plugin-Pfad jeweils: ~/.claude/plugins/cache/ecc/ecc/2.0.0-rc.1/.)</a:t>
+              <a:t>(Plugin-Pfad jeweils: ~/.claude/plugins/cache/ecc/ecc/2.0.0/.)</a:t>
             </a:r>
           </a:p>
           <a:p>
